--- a/Curso Gas B/14 - UNE 60670 - Instalacion y conexion de aparatos/14 - UNE 60670 - Instalacion y conexion de aparatos - Vídeo 2.pptx
+++ b/Curso Gas B/14 - UNE 60670 - Instalacion y conexion de aparatos/14 - UNE 60670 - Instalacion y conexion de aparatos - Vídeo 2.pptx
@@ -20,6 +20,7 @@
     <p:sldId id="268" r:id="rId20"/>
     <p:sldId id="269" r:id="rId21"/>
     <p:sldId id="270" r:id="rId22"/>
+    <p:sldId id="271" r:id="rId23"/>
   </p:sldIdLst>
   <p:sldSz cx="12191695" cy="6858000" type="screen4x3"/>
   <p:notesSz cx="6858000" cy="9144000"/>
@@ -591,12 +592,12 @@
           <a:lstStyle/>
           <a:p>
             <a:r>
-              <a:t>N1: ¿Qué es eso del elastómero con armadura?</a:t>
-            </a:r>
-          </a:p>
-          <a:p>
-            <a:r>
-              <a:t>N2: Elastómero es la palabra fina para la goma. Y con armadura interna o externa quiere decir que esa goma va reforzada con una malla, como un latiguillo trenzado; aguanta más que el tubo de goma pelado. Por ir reforzada, se admite en sitios más exigentes: aparatos móviles no domésticos alimentados con GLP, y también sopletes. Para los sopletes sigue la norma de las mangueras de soldeo y corte, con un matiz importante: en un soplete la longitud máxima no se aplica, porque necesitas la manguera que pida el trabajo. Para el resto, longitud máxima de un metro y medio, y sesenta centímetros si es calefacción móvil no industrial.</a:t>
+              <a:t>N1: Otra prohibición que se repite: lo del horno. ¿Cómo es?</a:t>
+            </a:r>
+          </a:p>
+          <a:p>
+            <a:r>
+              <a:t>N2: Sí, esta aparece en varios flexibles, así que apúntala una vez y vale para todos. El tubo flexible no puede pasar por la parte de atrás de una cocina que tenga horno, sea el horno de gas o eléctrico. ¿Por qué? Porque detrás del horno se acumula muchísimo calor y allí el flexible se cocería. Solo hay una excepción: que el horno lleve aislamiento térmico en su parte trasera y que el fabricante haya demostrado en ensayos que allí no se superan los treinta grados de sobrecalentamiento, y que lo deje por escrito en el manual. Si no tienes ese papel del fabricante, el flexible no va por detrás del horno, y punto.</a:t>
             </a:r>
           </a:p>
         </p:txBody>
@@ -666,12 +667,12 @@
           <a:lstStyle/>
           <a:p>
             <a:r>
-              <a:t>N1: Este es el de toda la vida, ¿no? El de la bombona.</a:t>
-            </a:r>
-          </a:p>
-          <a:p>
-            <a:r>
-              <a:t>N2: Exacto, el clásico tubo de goma naranja del butano. Va solo en aparatos móviles, mecheros y sopletes, y si sigue la norma europea, solo con GLP. El montaje tiene dos detalles que caen seguro. Uno: se une con boquillas, unas piezas según su norma, del mismo diámetro que el tubo; si el tubo es de nueve milímetros, boquilla de nueve, no se improvisa. Dos, y muy importante: se sujeta con abrazaderas metálicas, nunca de plástico. ¿Por qué metálicas? Porque la goma se dilata con el calor, y una brida de plástico cede, el tubo se suelta de la boquilla y tienes una fuga de gas y olor a butano en la cocina. Y recuerda: este tubo de goma caduca; el metálico, no.</a:t>
+              <a:t>N1: ¿Qué es eso del elastómero con armadura?</a:t>
+            </a:r>
+          </a:p>
+          <a:p>
+            <a:r>
+              <a:t>N2: Elastómero es la palabra fina para la goma. Y con armadura interna o externa quiere decir que esa goma va reforzada con una malla, como un latiguillo trenzado; aguanta más que el tubo de goma pelado. Por ir reforzada, se admite en sitios más exigentes: aparatos móviles no domésticos alimentados con GLP, y también sopletes. Para los sopletes sigue la norma de las mangueras de soldeo y corte, con un matiz importante: en un soplete la longitud máxima no se aplica, porque necesitas la manguera que pida el trabajo. Para el resto, longitud máxima de un metro y medio, y sesenta centímetros si es calefacción móvil no industrial.</a:t>
             </a:r>
           </a:p>
         </p:txBody>
@@ -741,12 +742,12 @@
           <a:lstStyle/>
           <a:p>
             <a:r>
-              <a:t>N1: Esta se parece mucho a la del punto 4.4, ¿en qué se distinguen?</a:t>
-            </a:r>
-          </a:p>
-          <a:p>
-            <a:r>
-              <a:t>N2: Muy buena, porque es un lío típico. Las dos usan la misma manguera metálica corrugada. La diferencia es el enchufe: la del punto cuatro punto cuatro lleva enchufe de seguridad y es solo doméstica, con unión roscada; esta, la cuatro punto siete, no lleva enchufe. Al no llevarlo, se une de otra forma: por junta plana o por conexión a tetina, y si un enlace es de junta plana, el otro puede ser roscado. Su longitud máxima es de dos metros. En resumen: misma manguera, montaje distinto. Si en el examen te hablan de enchufe de seguridad es la cuatro cuatro; si no lo mencionan, piensa en la cuatro siete.</a:t>
+              <a:t>N1: Este es el de toda la vida, ¿no? El de la bombona.</a:t>
+            </a:r>
+          </a:p>
+          <a:p>
+            <a:r>
+              <a:t>N2: Exacto, el clásico tubo de goma naranja del butano. Va solo en aparatos móviles, mecheros y sopletes, y si sigue la norma europea, solo con GLP. El montaje tiene dos detalles que caen seguro. Uno: se une con boquillas, unas piezas según su norma, del mismo diámetro que el tubo; si el tubo es de nueve milímetros, boquilla de nueve, no se improvisa. Dos, y muy importante: se sujeta con abrazaderas metálicas, nunca de plástico. ¿Por qué metálicas? Porque la goma se dilata con el calor, y una brida de plástico cede, el tubo se suelta de la boquilla y tienes una fuga de gas y olor a butano en la cocina. Y recuerda: este tubo de goma caduca; el metálico, no.</a:t>
             </a:r>
           </a:p>
         </p:txBody>
@@ -816,12 +817,12 @@
           <a:lstStyle/>
           <a:p>
             <a:r>
-              <a:t>N1: Y el Anexo A, ¿para qué sirve?</a:t>
-            </a:r>
-          </a:p>
-          <a:p>
-            <a:r>
-              <a:t>N2: Es la chuleta más práctica del tema. Es informativo, o sea orientativo, no obligatorio, pero te resuelve la duda de un vistazo con una sola pregunta: ¿el aparato es fijo o se mueve? Si es fijo o va encastrado, una encimera empotrada, una caldera, un calentador, una secadora fija, un horno industrial, lo normal es conexión rígida. Si es móvil, una cocina de gas suelta, una estufa de infrarrojos, un paellero, un frigorífico de gas, un soplete, lo normal es conexión flexible. Fíjate que casa con todo lo que hemos visto: lo fijo con tubo firme, lo móvil con tubo que acompaña el movimiento. Fijo, rígida; móvil, flexible. Esa es la brújula.</a:t>
+              <a:t>N1: Esta se parece mucho a la del punto 4.4, ¿en qué se distinguen?</a:t>
+            </a:r>
+          </a:p>
+          <a:p>
+            <a:r>
+              <a:t>N2: Muy buena, porque es un lío típico. Las dos usan la misma manguera metálica corrugada. La diferencia es el enchufe: la del punto cuatro punto cuatro lleva enchufe de seguridad y es solo doméstica, con unión roscada; esta, la cuatro punto siete, no lleva enchufe. Al no llevarlo, se une de otra forma: por junta plana o por conexión a tetina, y si un enlace es de junta plana, el otro puede ser roscado. Su longitud máxima es de dos metros. En resumen: misma manguera, montaje distinto. Si en el examen te hablan de enchufe de seguridad es la cuatro cuatro; si no lo mencionan, piensa en la cuatro siete.</a:t>
             </a:r>
           </a:p>
         </p:txBody>
@@ -891,12 +892,12 @@
           <a:lstStyle/>
           <a:p>
             <a:r>
-              <a:t>N1: Y todo esto del montaje, ¿también acaba en un papel?</a:t>
-            </a:r>
-          </a:p>
-          <a:p>
-            <a:r>
-              <a:t>N2: También, y es la misma idea que en el vídeo anterior pero llevada al montaje. El tipo de conexión que pones y que esté bien ejecutada es lo que la empresa instaladora certifica y firma, en el certificado de instalación, el boletín, y en la puesta en marcha del aparato; ese documento se entrega al usuario y queda a disposición de la distribuidora y de la comunidad autónoma. Y ojo: sustituir un flexible caducado o mal montado en un aparato que ya está en servicio también es una operación que debe quedar registrada. La conclusión es seria: firmar un montaje con el flexible equivocado, demasiado largo, o con una brida de plástico, es firmar un defecto con tu nombre.</a:t>
+              <a:t>N1: Y el Anexo A, ¿para qué sirve?</a:t>
+            </a:r>
+          </a:p>
+          <a:p>
+            <a:r>
+              <a:t>N2: Es la chuleta más práctica del tema. Es informativo, o sea orientativo, no obligatorio, pero te resuelve la duda de un vistazo con una sola pregunta: ¿el aparato es fijo o se mueve? Si es fijo o va encastrado, una encimera empotrada, una caldera, un calentador, una secadora fija, un horno industrial, lo normal es conexión rígida. Si es móvil, una cocina de gas suelta, una estufa de infrarrojos, un paellero, un frigorífico de gas, un soplete, lo normal es conexión flexible. Fíjate que casa con todo lo que hemos visto: lo fijo con tubo firme, lo móvil con tubo que acompaña el movimiento. Fijo, rígida; móvil, flexible. Esa es la brújula.</a:t>
             </a:r>
           </a:p>
         </p:txBody>
@@ -966,6 +967,81 @@
           <a:lstStyle/>
           <a:p>
             <a:r>
+              <a:t>N1: Y todo esto del montaje, ¿también acaba en un papel?</a:t>
+            </a:r>
+          </a:p>
+          <a:p>
+            <a:r>
+              <a:t>N2: También, y es la misma idea que en el vídeo anterior pero llevada al montaje. El tipo de conexión que pones y que esté bien ejecutada es lo que la empresa instaladora certifica y firma, en el certificado de instalación, el boletín, y en la puesta en marcha del aparato; ese documento se entrega al usuario y queda a disposición de la distribuidora y de la comunidad autónoma. Y ojo: sustituir un flexible caducado o mal montado en un aparato que ya está en servicio también es una operación que debe quedar registrada. La conclusión es seria: firmar un montaje con el flexible equivocado, demasiado largo, o con una brida de plástico, es firmar un defecto con tu nombre.</a:t>
+            </a:r>
+          </a:p>
+        </p:txBody>
+      </p:sp>
+      <p:sp>
+        <p:nvSpPr>
+          <p:cNvPr id="4" name="Slide Number Placeholder 3"/>
+          <p:cNvSpPr>
+            <a:spLocks noGrp="1"/>
+          </p:cNvSpPr>
+          <p:nvPr>
+            <p:ph type="sldNum" idx="5" sz="quarter"/>
+          </p:nvPr>
+        </p:nvSpPr>
+        <p:spPr/>
+      </p:sp>
+    </p:spTree>
+  </p:cSld>
+  <p:clrMapOvr>
+    <a:masterClrMapping/>
+  </p:clrMapOvr>
+</p:notes>
+</file>
+
+<file path=ppt/notesSlides/notesSlide16.xml><?xml version="1.0" encoding="utf-8"?>
+<p:notes xmlns:a="http://schemas.openxmlformats.org/drawingml/2006/main" xmlns:p="http://schemas.openxmlformats.org/presentationml/2006/main" xmlns:r="http://schemas.openxmlformats.org/officeDocument/2006/relationships">
+  <p:cSld>
+    <p:spTree>
+      <p:nvGrpSpPr>
+        <p:cNvPr id="1" name=""/>
+        <p:cNvGrpSpPr/>
+        <p:nvPr/>
+      </p:nvGrpSpPr>
+      <p:grpSpPr>
+        <a:xfrm>
+          <a:off x="0" y="0"/>
+          <a:ext cx="0" cy="0"/>
+          <a:chOff x="0" y="0"/>
+          <a:chExt cx="0" cy="0"/>
+        </a:xfrm>
+      </p:grpSpPr>
+      <p:sp>
+        <p:nvSpPr>
+          <p:cNvPr id="2" name="Slide Image Placeholder 1"/>
+          <p:cNvSpPr>
+            <a:spLocks noGrp="1"/>
+          </p:cNvSpPr>
+          <p:nvPr>
+            <p:ph type="sldImg" idx="2"/>
+          </p:nvPr>
+        </p:nvSpPr>
+        <p:spPr/>
+      </p:sp>
+      <p:sp>
+        <p:nvSpPr>
+          <p:cNvPr id="3" name="Notes Placeholder 2"/>
+          <p:cNvSpPr>
+            <a:spLocks noGrp="1"/>
+          </p:cNvSpPr>
+          <p:nvPr>
+            <p:ph type="body" idx="3" sz="quarter"/>
+          </p:nvPr>
+        </p:nvSpPr>
+        <p:spPr/>
+        <p:txBody>
+          <a:bodyPr/>
+          <a:lstStyle/>
+          <a:p>
+            <a:r>
               <a:t>N1: Profe, hemos visto muchas cifras. ¿Cómo lo amarro todo?</a:t>
             </a:r>
           </a:p>
@@ -1124,16 +1200,7 @@
         <p:txBody>
           <a:bodyPr/>
           <a:lstStyle/>
-          <a:p>
-            <a:r>
-              <a:t>N1: ¿Qué tiene de especial la conexión rígida?</a:t>
-            </a:r>
-          </a:p>
-          <a:p>
-            <a:r>
-              <a:t>N2: Lo curioso es que no es un material aparte. La conexión rígida es seguir con el mismo tubo que has usado en toda la instalación: cobre, acero, acero inoxidable, multicapa o inox corrugado, con las mismas uniones que manda la parte tres de la norma, la de las tuberías. Es decir, no cambias de mundo, prolongas la tubería hasta el aparato. Por eso solo vale para aparatos fijos: si el aparato no se mueve, lo mejor es unirlo con tubo firme, sin flexibles que con los años envejezcan. Y las uniones mecánicas se hacen con enlace de junta plana, una junta que aprieta entre dos caras y sella. Rígida es igual a firmeza y a durar.</a:t>
-            </a:r>
-          </a:p>
+          <a:p/>
         </p:txBody>
       </p:sp>
       <p:sp>
@@ -1201,12 +1268,12 @@
           <a:lstStyle/>
           <a:p>
             <a:r>
-              <a:t>N1: Este flexible metálico, ¿cuándo lo uso?</a:t>
-            </a:r>
-          </a:p>
-          <a:p>
-            <a:r>
-              <a:t>N2: Es el flexible metálico de acero corrugado, muy común. Para uso doméstico va según su norma habitual. Y aquí una idea importante: incluso en comercio o industria la norma te empuja a usar ese mismo flexible, siempre que su diámetro dé caudal suficiente para el aparato. Solo cuando se queda corto de caudal, cuando necesitas más diámetro del que ofrece, saltas a la otra norma, la europea. Por defecto el normal; el europeo solo si falta caudal. Y ojo a las longitudes, que son trampa: con diámetro fino, hasta dos metros; con diámetro gordo, mayor de quince, solo cuarenta y siete centímetros. Cuanto más gordo el tubo, más corta la conexión. Es contraintuitivo y por eso se pregunta.</a:t>
+              <a:t>N1: ¿Qué tiene de especial la conexión rígida?</a:t>
+            </a:r>
+          </a:p>
+          <a:p>
+            <a:r>
+              <a:t>N2: Lo curioso es que no es un material aparte. La conexión rígida es seguir con el mismo tubo que has usado en toda la instalación: cobre, acero, acero inoxidable, multicapa o inox corrugado, con las mismas uniones que manda la parte tres de la norma, la de las tuberías. Es decir, no cambias de mundo, prolongas la tubería hasta el aparato. Por eso solo vale para aparatos fijos: si el aparato no se mueve, lo mejor es unirlo con tubo firme, sin flexibles que con los años envejezcan. Y las uniones mecánicas se hacen con enlace de junta plana, una junta que aprieta entre dos caras y sella. Rígida es igual a firmeza y a durar.</a:t>
             </a:r>
           </a:p>
         </p:txBody>
@@ -1276,12 +1343,12 @@
           <a:lstStyle/>
           <a:p>
             <a:r>
-              <a:t>N1: ¿Por qué insisten tanto con la longitud del flexible?</a:t>
-            </a:r>
-          </a:p>
-          <a:p>
-            <a:r>
-              <a:t>N2: Porque es la clave de seguridad que está por encima de todas las cifras. Un tubo flexible debe medir lo mínimo necesario para llegar al aparato, ni un palmo de más. ¿La razón? Si dejas tubo de sobra, ese tubo cuelga, y puede acabar cayendo justo encima del quemador o tocando una parte caliente. Y un flexible bajo las llamas o pegado al calor se reseca, se cuartea como una goma vieja y termina fugando. De una fuga de gas a un incendio o a una intoxicación por monóxido hay un paso. Por eso la norma repite en cada tipo: el flexible nunca debe quedar bajo la acción de las llamas. Corta a medida y llévalo por donde no le llegue calor.</a:t>
+              <a:t>N1: Este flexible metálico, ¿cuándo lo uso?</a:t>
+            </a:r>
+          </a:p>
+          <a:p>
+            <a:r>
+              <a:t>N2: Es el flexible metálico de acero corrugado, muy común. Para uso doméstico va según su norma habitual. Y aquí una idea importante: incluso en comercio o industria la norma te empuja a usar ese mismo flexible, siempre que su diámetro dé caudal suficiente para el aparato. Solo cuando se queda corto de caudal, cuando necesitas más diámetro del que ofrece, saltas a la otra norma, la europea. Por defecto el normal; el europeo solo si falta caudal. Y ojo a las longitudes, que son trampa: con diámetro fino, hasta dos metros; con diámetro gordo, mayor de quince, solo cuarenta y siete centímetros. Cuanto más gordo el tubo, más corta la conexión. Es contraintuitivo y por eso se pregunta.</a:t>
             </a:r>
           </a:p>
         </p:txBody>
@@ -1351,12 +1418,12 @@
           <a:lstStyle/>
           <a:p>
             <a:r>
-              <a:t>N1: Vamos con las de enchufe de seguridad. ¿La primera?</a:t>
-            </a:r>
-          </a:p>
-          <a:p>
-            <a:r>
-              <a:t>N2: La espirometálica, un flexible metálico en espiral, que siempre lleva enchufe de seguridad, ese enganche que corta el gas al desconectar. Por llevar enchufe de seguridad, ya sabes: solo uso doméstico. ¿Y la longitud? Aquí toca aprender la cifra: como máximo un metro y medio. Pero si conectas un aparato de calefacción móvil, una estufa que arrastras por la casa, se acorta a sesenta centímetros, para que no ande el tubo suelto por el suelo. Reténlo así: espirometálica, metro y medio en general, sesenta centímetros si es calefacción que se mueve.</a:t>
+              <a:t>N1: ¿Por qué insisten tanto con la longitud del flexible?</a:t>
+            </a:r>
+          </a:p>
+          <a:p>
+            <a:r>
+              <a:t>N2: Porque es la clave de seguridad que está por encima de todas las cifras. Un tubo flexible debe medir lo mínimo necesario para llegar al aparato, ni un palmo de más. ¿La razón? Si dejas tubo de sobra, ese tubo cuelga, y puede acabar cayendo justo encima del quemador o tocando una parte caliente. Y un flexible bajo las llamas o pegado al calor se reseca, se cuartea como una goma vieja y termina fugando. De una fuga de gas a un incendio o a una intoxicación por monóxido hay un paso. Por eso la norma repite en cada tipo: el flexible nunca debe quedar bajo la acción de las llamas. Corta a medida y llévalo por donde no le llegue calor.</a:t>
             </a:r>
           </a:p>
         </p:txBody>
@@ -1426,12 +1493,12 @@
           <a:lstStyle/>
           <a:p>
             <a:r>
-              <a:t>N1: Y la otra con enchufe, ¿cambia mucho?</a:t>
-            </a:r>
-          </a:p>
-          <a:p>
-            <a:r>
-              <a:t>N2: Son dos primas hermanas. Esta es de acero inoxidable corrugado y también lleva enchufe de seguridad, así que otra vez solo uso doméstico. Todo igual... menos las cifras, y ahí está la trampa del examen. La espirometálica de antes eran un metro y medio, y sesenta centímetros en calefacción móvil. Esta llega a dos metros en general, y setenta y cinco centímetros si es calefacción móvil. No las mezcles: mismo tipo de aparato, longitudes distintas. Un truco: casi todas las calefacciones móviles se quedan en sesenta centímetros; la única que se estira a setenta y cinco es justo esta, el acero corrugado con enchufe.</a:t>
+              <a:t>N1: Vamos con las de enchufe de seguridad. ¿La primera?</a:t>
+            </a:r>
+          </a:p>
+          <a:p>
+            <a:r>
+              <a:t>N2: La espirometálica, un flexible metálico en espiral, que siempre lleva enchufe de seguridad, ese enganche que corta el gas al desconectar. Por llevar enchufe de seguridad, ya sabes: solo uso doméstico. ¿Y la longitud? Aquí toca aprender la cifra: como máximo un metro y medio. Pero si conectas un aparato de calefacción móvil, una estufa que arrastras por la casa, se acorta a sesenta centímetros, para que no ande el tubo suelto por el suelo. Reténlo así: espirometálica, metro y medio en general, sesenta centímetros si es calefacción que se mueve.</a:t>
             </a:r>
           </a:p>
         </p:txBody>
@@ -1501,12 +1568,12 @@
           <a:lstStyle/>
           <a:p>
             <a:r>
-              <a:t>N1: ¿Por qué prohíben el racor de dos piezas?</a:t>
-            </a:r>
-          </a:p>
-          <a:p>
-            <a:r>
-              <a:t>N2: En las dos conexiones con enchufe de seguridad, la espirometálica y la de acero corrugado, la unión mecánica va roscada, con una rosca cónica que sella al apretar. Y hay una prohibición tajante: nunca con racor de dos piezas. El racor de dos piezas es ese de tuerca loca que aprieta una junta entre dos mitades. ¿El problema? Con la vibración se puede aflojar y empezar a fugar. La rosca cónica, en cambio, sella mucho mejor y no se suelta. Por eso la regla, cortita para que se te grabe: enchufe de seguridad, rosca sí, racor de dos piezas no.</a:t>
+              <a:t>N1: Y la otra con enchufe, ¿cambia mucho?</a:t>
+            </a:r>
+          </a:p>
+          <a:p>
+            <a:r>
+              <a:t>N2: Son dos primas hermanas. Esta es de acero inoxidable corrugado y también lleva enchufe de seguridad, así que otra vez solo uso doméstico. Todo igual... menos las cifras, y ahí está la trampa del examen. La espirometálica de antes eran un metro y medio, y sesenta centímetros en calefacción móvil. Esta llega a dos metros en general, y setenta y cinco centímetros si es calefacción móvil. No las mezcles: mismo tipo de aparato, longitudes distintas. Un truco: casi todas las calefacciones móviles se quedan en sesenta centímetros; la única que se estira a setenta y cinco es justo esta, el acero corrugado con enchufe.</a:t>
             </a:r>
           </a:p>
         </p:txBody>
@@ -1576,12 +1643,12 @@
           <a:lstStyle/>
           <a:p>
             <a:r>
-              <a:t>N1: Otra prohibición que se repite: lo del horno. ¿Cómo es?</a:t>
-            </a:r>
-          </a:p>
-          <a:p>
-            <a:r>
-              <a:t>N2: Sí, esta aparece en varios flexibles, así que apúntala una vez y vale para todos. El tubo flexible no puede pasar por la parte de atrás de una cocina que tenga horno, sea el horno de gas o eléctrico. ¿Por qué? Porque detrás del horno se acumula muchísimo calor y allí el flexible se cocería. Solo hay una excepción: que el horno lleve aislamiento térmico en su parte trasera y que el fabricante haya demostrado en ensayos que allí no se superan los treinta grados de sobrecalentamiento, y que lo deje por escrito en el manual. Si no tienes ese papel del fabricante, el flexible no va por detrás del horno, y punto.</a:t>
+              <a:t>N1: ¿Por qué prohíben el racor de dos piezas?</a:t>
+            </a:r>
+          </a:p>
+          <a:p>
+            <a:r>
+              <a:t>N2: En las dos conexiones con enchufe de seguridad, la espirometálica y la de acero corrugado, la unión mecánica va roscada, con una rosca cónica que sella al apretar. Y hay una prohibición tajante: nunca con racor de dos piezas. El racor de dos piezas es ese de tuerca loca que aprieta una junta entre dos mitades. ¿El problema? Con la vibración se puede aflojar y empezar a fugar. La rosca cónica, en cambio, sella mucho mejor y no se suelta. Por eso la regla, cortita para que se te grabe: enchufe de seguridad, rosca sí, racor de dos piezas no.</a:t>
             </a:r>
           </a:p>
         </p:txBody>
@@ -4656,7 +4723,7 @@
             <a:r>
               <a:rPr sz="1400" b="1" i="0">
                 <a:solidFill>
-                  <a:srgbClr val="CADCFC"/>
+                  <a:srgbClr val="F4A24C"/>
                 </a:solidFill>
                 <a:latin typeface="Montserrat"/>
               </a:rPr>
@@ -4667,13 +4734,57 @@
       </p:sp>
       <p:sp>
         <p:nvSpPr>
-          <p:cNvPr id="4" name="TextBox 3"/>
+          <p:cNvPr id="4" name="Rounded Rectangle 3"/>
+          <p:cNvSpPr/>
+          <p:nvPr/>
+        </p:nvSpPr>
+        <p:spPr>
+          <a:xfrm>
+            <a:off x="868680" y="2057400"/>
+            <a:ext cx="1463040" cy="82296"/>
+          </a:xfrm>
+          <a:prstGeom prst="roundRect">
+            <a:avLst/>
+          </a:prstGeom>
+          <a:solidFill>
+            <a:srgbClr val="E8801A"/>
+          </a:solidFill>
+          <a:ln>
+            <a:noFill/>
+          </a:ln>
+          <a:effectLst/>
+        </p:spPr>
+        <p:style>
+          <a:lnRef idx="1">
+            <a:schemeClr val="accent1"/>
+          </a:lnRef>
+          <a:fillRef idx="3">
+            <a:schemeClr val="accent1"/>
+          </a:fillRef>
+          <a:effectRef idx="2">
+            <a:schemeClr val="accent1"/>
+          </a:effectRef>
+          <a:fontRef idx="minor">
+            <a:schemeClr val="lt1"/>
+          </a:fontRef>
+        </p:style>
+        <p:txBody>
+          <a:bodyPr rtlCol="0" anchor="ctr"/>
+          <a:lstStyle/>
+          <a:p>
+            <a:pPr algn="ctr"/>
+          </a:p>
+        </p:txBody>
+      </p:sp>
+      <p:sp>
+        <p:nvSpPr>
+          <p:cNvPr id="5" name="TextBox 4"/>
           <p:cNvSpPr txBox="1"/>
           <p:nvPr/>
         </p:nvSpPr>
         <p:spPr>
           <a:xfrm>
-            <a:off x="822960" y="2194560"/>
+            <a:off x="822960" y="2286000"/>
             <a:ext cx="10515600" cy="2011680"/>
           </a:xfrm>
           <a:prstGeom prst="rect">
@@ -4712,7 +4823,7 @@
       </p:sp>
       <p:sp>
         <p:nvSpPr>
-          <p:cNvPr id="5" name="TextBox 4"/>
+          <p:cNvPr id="6" name="TextBox 5"/>
           <p:cNvSpPr txBox="1"/>
           <p:nvPr/>
         </p:nvSpPr>
@@ -4836,7 +4947,7 @@
                 </a:solidFill>
                 <a:latin typeface="Montserrat"/>
               </a:rPr>
-              <a:t>010 / 015</a:t>
+              <a:t>010 / 016</a:t>
             </a:r>
           </a:p>
         </p:txBody>
@@ -4884,7 +4995,7 @@
         <p:spPr>
           <a:xfrm>
             <a:off x="822960" y="457200"/>
-            <a:ext cx="8229600" cy="365760"/>
+            <a:ext cx="10058400" cy="365760"/>
           </a:xfrm>
           <a:prstGeom prst="rect">
             <a:avLst/>
@@ -4898,13 +5009,13 @@
           <a:lstStyle/>
           <a:p>
             <a:r>
-              <a:rPr sz="1200" b="1" i="0">
-                <a:solidFill>
-                  <a:srgbClr val="64748B"/>
-                </a:solidFill>
-                <a:latin typeface="Montserrat"/>
-              </a:rPr>
-              <a:t>4.5 · ELASTÓMERO CON ARMADURA</a:t>
+              <a:rPr sz="1300" b="1" i="0">
+                <a:solidFill>
+                  <a:srgbClr val="E8801A"/>
+                </a:solidFill>
+                <a:latin typeface="Montserrat"/>
+              </a:rPr>
+              <a:t>PROHIBICIÓN · CALOR</a:t>
             </a:r>
           </a:p>
         </p:txBody>
@@ -4932,26 +5043,70 @@
           <a:lstStyle/>
           <a:p>
             <a:r>
-              <a:rPr sz="2700" b="1" i="0">
+              <a:rPr sz="2800" b="1" i="0">
                 <a:solidFill>
                   <a:srgbClr val="1E2761"/>
                 </a:solidFill>
                 <a:latin typeface="Montserrat"/>
               </a:rPr>
-              <a:t>Goma reforzada: móvil y GLP</a:t>
-            </a:r>
-          </a:p>
-        </p:txBody>
-      </p:sp>
-      <p:sp>
-        <p:nvSpPr>
-          <p:cNvPr id="7" name="TextBox 6"/>
+              <a:t>No cruzar tras el horno</a:t>
+            </a:r>
+          </a:p>
+        </p:txBody>
+      </p:sp>
+      <p:sp>
+        <p:nvSpPr>
+          <p:cNvPr id="7" name="Rounded Rectangle 6"/>
+          <p:cNvSpPr/>
+          <p:nvPr/>
+        </p:nvSpPr>
+        <p:spPr>
+          <a:xfrm>
+            <a:off x="868680" y="1627632"/>
+            <a:ext cx="2011680" cy="73152"/>
+          </a:xfrm>
+          <a:prstGeom prst="roundRect">
+            <a:avLst/>
+          </a:prstGeom>
+          <a:solidFill>
+            <a:srgbClr val="E8801A"/>
+          </a:solidFill>
+          <a:ln>
+            <a:noFill/>
+          </a:ln>
+          <a:effectLst/>
+        </p:spPr>
+        <p:style>
+          <a:lnRef idx="1">
+            <a:schemeClr val="accent1"/>
+          </a:lnRef>
+          <a:fillRef idx="3">
+            <a:schemeClr val="accent1"/>
+          </a:fillRef>
+          <a:effectRef idx="2">
+            <a:schemeClr val="accent1"/>
+          </a:effectRef>
+          <a:fontRef idx="minor">
+            <a:schemeClr val="lt1"/>
+          </a:fontRef>
+        </p:style>
+        <p:txBody>
+          <a:bodyPr rtlCol="0" anchor="ctr"/>
+          <a:lstStyle/>
+          <a:p>
+            <a:pPr algn="ctr"/>
+          </a:p>
+        </p:txBody>
+      </p:sp>
+      <p:sp>
+        <p:nvSpPr>
+          <p:cNvPr id="8" name="TextBox 7"/>
           <p:cNvSpPr txBox="1"/>
           <p:nvPr/>
         </p:nvSpPr>
         <p:spPr>
           <a:xfrm>
-            <a:off x="822960" y="1920240"/>
+            <a:off x="822960" y="1965960"/>
             <a:ext cx="4983480" cy="4206240"/>
           </a:xfrm>
           <a:prstGeom prst="rect">
@@ -4967,17 +5122,17 @@
           <a:p>
             <a:pPr>
               <a:spcAft>
-                <a:spcPts val="1000"/>
+                <a:spcPts val="1100"/>
               </a:spcAft>
             </a:pPr>
             <a:r>
               <a:rPr sz="1600" b="1" i="0">
                 <a:solidFill>
-                  <a:srgbClr val="2E3A80"/>
-                </a:solidFill>
-                <a:latin typeface="Montserrat"/>
-              </a:rPr>
-              <a:t>•  </a:t>
+                  <a:srgbClr val="E8801A"/>
+                </a:solidFill>
+                <a:latin typeface="Montserrat"/>
+              </a:rPr>
+              <a:t>▸  </a:t>
             </a:r>
             <a:r>
               <a:rPr sz="1600" b="0" i="0">
@@ -4986,23 +5141,23 @@
                 </a:solidFill>
                 <a:latin typeface="Montserrat"/>
               </a:rPr>
-              <a:t>Goma con malla de refuerzo</a:t>
+              <a:t>Nada por detrás de una cocina con horno</a:t>
             </a:r>
           </a:p>
           <a:p>
             <a:pPr>
               <a:spcAft>
-                <a:spcPts val="1000"/>
+                <a:spcPts val="1100"/>
               </a:spcAft>
             </a:pPr>
             <a:r>
               <a:rPr sz="1600" b="1" i="0">
                 <a:solidFill>
-                  <a:srgbClr val="2E3A80"/>
-                </a:solidFill>
-                <a:latin typeface="Montserrat"/>
-              </a:rPr>
-              <a:t>•  </a:t>
+                  <a:srgbClr val="E8801A"/>
+                </a:solidFill>
+                <a:latin typeface="Montserrat"/>
+              </a:rPr>
+              <a:t>▸  </a:t>
             </a:r>
             <a:r>
               <a:rPr sz="1600" b="0" i="0">
@@ -5011,23 +5166,23 @@
                 </a:solidFill>
                 <a:latin typeface="Montserrat"/>
               </a:rPr>
-              <a:t>Móviles no domésticos con GLP</a:t>
+              <a:t>Salvo aislamiento térmico certificado</a:t>
             </a:r>
           </a:p>
           <a:p>
             <a:pPr>
               <a:spcAft>
-                <a:spcPts val="1000"/>
+                <a:spcPts val="1100"/>
               </a:spcAft>
             </a:pPr>
             <a:r>
               <a:rPr sz="1600" b="1" i="0">
                 <a:solidFill>
-                  <a:srgbClr val="2E3A80"/>
-                </a:solidFill>
-                <a:latin typeface="Montserrat"/>
-              </a:rPr>
-              <a:t>•  </a:t>
+                  <a:srgbClr val="E8801A"/>
+                </a:solidFill>
+                <a:latin typeface="Montserrat"/>
+              </a:rPr>
+              <a:t>▸  </a:t>
             </a:r>
             <a:r>
               <a:rPr sz="1600" b="0" i="0">
@@ -5036,39 +5191,14 @@
                 </a:solidFill>
                 <a:latin typeface="Montserrat"/>
               </a:rPr>
-              <a:t>Sopletes: norma de soldeo</a:t>
-            </a:r>
-          </a:p>
-          <a:p>
-            <a:pPr>
-              <a:spcAft>
-                <a:spcPts val="1000"/>
-              </a:spcAft>
-            </a:pPr>
-            <a:r>
-              <a:rPr sz="1600" b="1" i="0">
-                <a:solidFill>
-                  <a:srgbClr val="2E3A80"/>
-                </a:solidFill>
-                <a:latin typeface="Montserrat"/>
-              </a:rPr>
-              <a:t>•  </a:t>
-            </a:r>
-            <a:r>
-              <a:rPr sz="1600" b="0" i="0">
-                <a:solidFill>
-                  <a:srgbClr val="1B2330"/>
-                </a:solidFill>
-                <a:latin typeface="Montserrat"/>
-              </a:rPr>
-              <a:t>Longitud máxima 1,5 m</a:t>
-            </a:r>
-          </a:p>
-        </p:txBody>
-      </p:sp>
-      <p:sp>
-        <p:nvSpPr>
-          <p:cNvPr id="8" name="imgph" descr="IMGQ:reinforced braided rubber gas hose"/>
+              <a:t>Y ≤ 30 °C de sobrecalentamiento</a:t>
+            </a:r>
+          </a:p>
+        </p:txBody>
+      </p:sp>
+      <p:sp>
+        <p:nvSpPr>
+          <p:cNvPr id="9" name="imgph" descr="IMGQ:kitchen oven back panel installation"/>
           <p:cNvSpPr/>
           <p:nvPr/>
         </p:nvSpPr>
@@ -5114,7 +5244,7 @@
       </p:sp>
       <p:sp>
         <p:nvSpPr>
-          <p:cNvPr id="9" name="TextBox 8"/>
+          <p:cNvPr id="10" name="TextBox 9"/>
           <p:cNvSpPr txBox="1"/>
           <p:nvPr/>
         </p:nvSpPr>
@@ -5154,7 +5284,7 @@
                 </a:solidFill>
                 <a:latin typeface="Montserrat"/>
               </a:rPr>
-              <a:t>reinforced braided rubber gas hose</a:t>
+              <a:t>kitchen oven back panel installation</a:t>
             </a:r>
           </a:p>
         </p:txBody>
@@ -5251,7 +5381,7 @@
                 </a:solidFill>
                 <a:latin typeface="Montserrat"/>
               </a:rPr>
-              <a:t>011 / 015</a:t>
+              <a:t>011 / 016</a:t>
             </a:r>
           </a:p>
         </p:txBody>
@@ -5299,7 +5429,7 @@
         <p:spPr>
           <a:xfrm>
             <a:off x="822960" y="457200"/>
-            <a:ext cx="8229600" cy="365760"/>
+            <a:ext cx="10058400" cy="365760"/>
           </a:xfrm>
           <a:prstGeom prst="rect">
             <a:avLst/>
@@ -5313,13 +5443,13 @@
           <a:lstStyle/>
           <a:p>
             <a:r>
-              <a:rPr sz="1200" b="1" i="0">
-                <a:solidFill>
-                  <a:srgbClr val="64748B"/>
-                </a:solidFill>
-                <a:latin typeface="Montserrat"/>
-              </a:rPr>
-              <a:t>4.6 · ELASTÓMERO</a:t>
+              <a:rPr sz="1300" b="1" i="0">
+                <a:solidFill>
+                  <a:srgbClr val="E8801A"/>
+                </a:solidFill>
+                <a:latin typeface="Montserrat"/>
+              </a:rPr>
+              <a:t>4.5 · ELASTÓMERO CON ARMADURA</a:t>
             </a:r>
           </a:p>
         </p:txBody>
@@ -5347,26 +5477,70 @@
           <a:lstStyle/>
           <a:p>
             <a:r>
-              <a:rPr sz="2700" b="1" i="0">
+              <a:rPr sz="2800" b="1" i="0">
                 <a:solidFill>
                   <a:srgbClr val="1E2761"/>
                 </a:solidFill>
                 <a:latin typeface="Montserrat"/>
               </a:rPr>
-              <a:t>El tubo naranja de la bombona</a:t>
-            </a:r>
-          </a:p>
-        </p:txBody>
-      </p:sp>
-      <p:sp>
-        <p:nvSpPr>
-          <p:cNvPr id="7" name="TextBox 6"/>
+              <a:t>Goma reforzada: móvil y GLP</a:t>
+            </a:r>
+          </a:p>
+        </p:txBody>
+      </p:sp>
+      <p:sp>
+        <p:nvSpPr>
+          <p:cNvPr id="7" name="Rounded Rectangle 6"/>
+          <p:cNvSpPr/>
+          <p:nvPr/>
+        </p:nvSpPr>
+        <p:spPr>
+          <a:xfrm>
+            <a:off x="868680" y="1627632"/>
+            <a:ext cx="2011680" cy="73152"/>
+          </a:xfrm>
+          <a:prstGeom prst="roundRect">
+            <a:avLst/>
+          </a:prstGeom>
+          <a:solidFill>
+            <a:srgbClr val="E8801A"/>
+          </a:solidFill>
+          <a:ln>
+            <a:noFill/>
+          </a:ln>
+          <a:effectLst/>
+        </p:spPr>
+        <p:style>
+          <a:lnRef idx="1">
+            <a:schemeClr val="accent1"/>
+          </a:lnRef>
+          <a:fillRef idx="3">
+            <a:schemeClr val="accent1"/>
+          </a:fillRef>
+          <a:effectRef idx="2">
+            <a:schemeClr val="accent1"/>
+          </a:effectRef>
+          <a:fontRef idx="minor">
+            <a:schemeClr val="lt1"/>
+          </a:fontRef>
+        </p:style>
+        <p:txBody>
+          <a:bodyPr rtlCol="0" anchor="ctr"/>
+          <a:lstStyle/>
+          <a:p>
+            <a:pPr algn="ctr"/>
+          </a:p>
+        </p:txBody>
+      </p:sp>
+      <p:sp>
+        <p:nvSpPr>
+          <p:cNvPr id="8" name="TextBox 7"/>
           <p:cNvSpPr txBox="1"/>
           <p:nvPr/>
         </p:nvSpPr>
         <p:spPr>
           <a:xfrm>
-            <a:off x="822960" y="1920240"/>
+            <a:off x="822960" y="1965960"/>
             <a:ext cx="4983480" cy="4206240"/>
           </a:xfrm>
           <a:prstGeom prst="rect">
@@ -5382,17 +5556,17 @@
           <a:p>
             <a:pPr>
               <a:spcAft>
-                <a:spcPts val="1000"/>
+                <a:spcPts val="1100"/>
               </a:spcAft>
             </a:pPr>
             <a:r>
               <a:rPr sz="1600" b="1" i="0">
                 <a:solidFill>
-                  <a:srgbClr val="2E3A80"/>
-                </a:solidFill>
-                <a:latin typeface="Montserrat"/>
-              </a:rPr>
-              <a:t>•  </a:t>
+                  <a:srgbClr val="E8801A"/>
+                </a:solidFill>
+                <a:latin typeface="Montserrat"/>
+              </a:rPr>
+              <a:t>▸  </a:t>
             </a:r>
             <a:r>
               <a:rPr sz="1600" b="0" i="0">
@@ -5401,23 +5575,23 @@
                 </a:solidFill>
                 <a:latin typeface="Montserrat"/>
               </a:rPr>
-              <a:t>El clásico de butano (goma)</a:t>
+              <a:t>Goma con malla de refuerzo</a:t>
             </a:r>
           </a:p>
           <a:p>
             <a:pPr>
               <a:spcAft>
-                <a:spcPts val="1000"/>
+                <a:spcPts val="1100"/>
               </a:spcAft>
             </a:pPr>
             <a:r>
               <a:rPr sz="1600" b="1" i="0">
                 <a:solidFill>
-                  <a:srgbClr val="2E3A80"/>
-                </a:solidFill>
-                <a:latin typeface="Montserrat"/>
-              </a:rPr>
-              <a:t>•  </a:t>
+                  <a:srgbClr val="E8801A"/>
+                </a:solidFill>
+                <a:latin typeface="Montserrat"/>
+              </a:rPr>
+              <a:t>▸  </a:t>
             </a:r>
             <a:r>
               <a:rPr sz="1600" b="0" i="0">
@@ -5426,23 +5600,23 @@
                 </a:solidFill>
                 <a:latin typeface="Montserrat"/>
               </a:rPr>
-              <a:t>Boquillas UNE 60714, mismo DN</a:t>
+              <a:t>Móviles no domésticos con GLP</a:t>
             </a:r>
           </a:p>
           <a:p>
             <a:pPr>
               <a:spcAft>
-                <a:spcPts val="1000"/>
+                <a:spcPts val="1100"/>
               </a:spcAft>
             </a:pPr>
             <a:r>
               <a:rPr sz="1600" b="1" i="0">
                 <a:solidFill>
-                  <a:srgbClr val="2E3A80"/>
-                </a:solidFill>
-                <a:latin typeface="Montserrat"/>
-              </a:rPr>
-              <a:t>•  </a:t>
+                  <a:srgbClr val="E8801A"/>
+                </a:solidFill>
+                <a:latin typeface="Montserrat"/>
+              </a:rPr>
+              <a:t>▸  </a:t>
             </a:r>
             <a:r>
               <a:rPr sz="1600" b="0" i="0">
@@ -5451,23 +5625,23 @@
                 </a:solidFill>
                 <a:latin typeface="Montserrat"/>
               </a:rPr>
-              <a:t>Abrazaderas metálicas, nunca de plástico</a:t>
+              <a:t>Sopletes: norma de soldeo</a:t>
             </a:r>
           </a:p>
           <a:p>
             <a:pPr>
               <a:spcAft>
-                <a:spcPts val="1000"/>
+                <a:spcPts val="1100"/>
               </a:spcAft>
             </a:pPr>
             <a:r>
               <a:rPr sz="1600" b="1" i="0">
                 <a:solidFill>
-                  <a:srgbClr val="2E3A80"/>
-                </a:solidFill>
-                <a:latin typeface="Montserrat"/>
-              </a:rPr>
-              <a:t>•  </a:t>
+                  <a:srgbClr val="E8801A"/>
+                </a:solidFill>
+                <a:latin typeface="Montserrat"/>
+              </a:rPr>
+              <a:t>▸  </a:t>
             </a:r>
             <a:r>
               <a:rPr sz="1600" b="0" i="0">
@@ -5476,14 +5650,14 @@
                 </a:solidFill>
                 <a:latin typeface="Montserrat"/>
               </a:rPr>
-              <a:t>Solo móviles, mecheros y sopletes</a:t>
-            </a:r>
-          </a:p>
-        </p:txBody>
-      </p:sp>
-      <p:sp>
-        <p:nvSpPr>
-          <p:cNvPr id="8" name="imgph" descr="IMGQ:orange butane rubber hose metal clamp"/>
+              <a:t>Longitud máxima 1,5 m</a:t>
+            </a:r>
+          </a:p>
+        </p:txBody>
+      </p:sp>
+      <p:sp>
+        <p:nvSpPr>
+          <p:cNvPr id="9" name="imgph" descr="IMGQ:reinforced braided rubber gas hose"/>
           <p:cNvSpPr/>
           <p:nvPr/>
         </p:nvSpPr>
@@ -5529,7 +5703,7 @@
       </p:sp>
       <p:sp>
         <p:nvSpPr>
-          <p:cNvPr id="9" name="TextBox 8"/>
+          <p:cNvPr id="10" name="TextBox 9"/>
           <p:cNvSpPr txBox="1"/>
           <p:nvPr/>
         </p:nvSpPr>
@@ -5569,7 +5743,7 @@
                 </a:solidFill>
                 <a:latin typeface="Montserrat"/>
               </a:rPr>
-              <a:t>orange butane rubber hose metal clamp</a:t>
+              <a:t>reinforced braided rubber gas hose</a:t>
             </a:r>
           </a:p>
         </p:txBody>
@@ -5666,7 +5840,7 @@
                 </a:solidFill>
                 <a:latin typeface="Montserrat"/>
               </a:rPr>
-              <a:t>012 / 015</a:t>
+              <a:t>012 / 016</a:t>
             </a:r>
           </a:p>
         </p:txBody>
@@ -5714,7 +5888,7 @@
         <p:spPr>
           <a:xfrm>
             <a:off x="822960" y="457200"/>
-            <a:ext cx="8229600" cy="365760"/>
+            <a:ext cx="10058400" cy="365760"/>
           </a:xfrm>
           <a:prstGeom prst="rect">
             <a:avLst/>
@@ -5728,13 +5902,13 @@
           <a:lstStyle/>
           <a:p>
             <a:r>
-              <a:rPr sz="1200" b="1" i="0">
-                <a:solidFill>
-                  <a:srgbClr val="64748B"/>
-                </a:solidFill>
-                <a:latin typeface="Montserrat"/>
-              </a:rPr>
-              <a:t>4.7 · METÁLICA CORRUGADA</a:t>
+              <a:rPr sz="1300" b="1" i="0">
+                <a:solidFill>
+                  <a:srgbClr val="E8801A"/>
+                </a:solidFill>
+                <a:latin typeface="Montserrat"/>
+              </a:rPr>
+              <a:t>4.6 · ELASTÓMERO</a:t>
             </a:r>
           </a:p>
         </p:txBody>
@@ -5762,26 +5936,70 @@
           <a:lstStyle/>
           <a:p>
             <a:r>
-              <a:rPr sz="2700" b="1" i="0">
+              <a:rPr sz="2800" b="1" i="0">
                 <a:solidFill>
                   <a:srgbClr val="1E2761"/>
                 </a:solidFill>
                 <a:latin typeface="Montserrat"/>
               </a:rPr>
-              <a:t>Metálica corrugada, sin enchufe</a:t>
-            </a:r>
-          </a:p>
-        </p:txBody>
-      </p:sp>
-      <p:sp>
-        <p:nvSpPr>
-          <p:cNvPr id="7" name="TextBox 6"/>
+              <a:t>El tubo naranja de la bombona</a:t>
+            </a:r>
+          </a:p>
+        </p:txBody>
+      </p:sp>
+      <p:sp>
+        <p:nvSpPr>
+          <p:cNvPr id="7" name="Rounded Rectangle 6"/>
+          <p:cNvSpPr/>
+          <p:nvPr/>
+        </p:nvSpPr>
+        <p:spPr>
+          <a:xfrm>
+            <a:off x="868680" y="1627632"/>
+            <a:ext cx="2011680" cy="73152"/>
+          </a:xfrm>
+          <a:prstGeom prst="roundRect">
+            <a:avLst/>
+          </a:prstGeom>
+          <a:solidFill>
+            <a:srgbClr val="E8801A"/>
+          </a:solidFill>
+          <a:ln>
+            <a:noFill/>
+          </a:ln>
+          <a:effectLst/>
+        </p:spPr>
+        <p:style>
+          <a:lnRef idx="1">
+            <a:schemeClr val="accent1"/>
+          </a:lnRef>
+          <a:fillRef idx="3">
+            <a:schemeClr val="accent1"/>
+          </a:fillRef>
+          <a:effectRef idx="2">
+            <a:schemeClr val="accent1"/>
+          </a:effectRef>
+          <a:fontRef idx="minor">
+            <a:schemeClr val="lt1"/>
+          </a:fontRef>
+        </p:style>
+        <p:txBody>
+          <a:bodyPr rtlCol="0" anchor="ctr"/>
+          <a:lstStyle/>
+          <a:p>
+            <a:pPr algn="ctr"/>
+          </a:p>
+        </p:txBody>
+      </p:sp>
+      <p:sp>
+        <p:nvSpPr>
+          <p:cNvPr id="8" name="TextBox 7"/>
           <p:cNvSpPr txBox="1"/>
           <p:nvPr/>
         </p:nvSpPr>
         <p:spPr>
           <a:xfrm>
-            <a:off x="822960" y="1920240"/>
+            <a:off x="822960" y="1965960"/>
             <a:ext cx="4983480" cy="4206240"/>
           </a:xfrm>
           <a:prstGeom prst="rect">
@@ -5797,17 +6015,17 @@
           <a:p>
             <a:pPr>
               <a:spcAft>
-                <a:spcPts val="1000"/>
+                <a:spcPts val="1100"/>
               </a:spcAft>
             </a:pPr>
             <a:r>
               <a:rPr sz="1600" b="1" i="0">
                 <a:solidFill>
-                  <a:srgbClr val="2E3A80"/>
-                </a:solidFill>
-                <a:latin typeface="Montserrat"/>
-              </a:rPr>
-              <a:t>•  </a:t>
+                  <a:srgbClr val="E8801A"/>
+                </a:solidFill>
+                <a:latin typeface="Montserrat"/>
+              </a:rPr>
+              <a:t>▸  </a:t>
             </a:r>
             <a:r>
               <a:rPr sz="1600" b="0" i="0">
@@ -5816,23 +6034,23 @@
                 </a:solidFill>
                 <a:latin typeface="Montserrat"/>
               </a:rPr>
-              <a:t>Misma manguera que la 4.4</a:t>
+              <a:t>El clásico de butano (goma)</a:t>
             </a:r>
           </a:p>
           <a:p>
             <a:pPr>
               <a:spcAft>
-                <a:spcPts val="1000"/>
+                <a:spcPts val="1100"/>
               </a:spcAft>
             </a:pPr>
             <a:r>
               <a:rPr sz="1600" b="1" i="0">
                 <a:solidFill>
-                  <a:srgbClr val="2E3A80"/>
-                </a:solidFill>
-                <a:latin typeface="Montserrat"/>
-              </a:rPr>
-              <a:t>•  </a:t>
+                  <a:srgbClr val="E8801A"/>
+                </a:solidFill>
+                <a:latin typeface="Montserrat"/>
+              </a:rPr>
+              <a:t>▸  </a:t>
             </a:r>
             <a:r>
               <a:rPr sz="1600" b="0" i="0">
@@ -5841,23 +6059,23 @@
                 </a:solidFill>
                 <a:latin typeface="Montserrat"/>
               </a:rPr>
-              <a:t>Pero SIN enchufe de seguridad</a:t>
+              <a:t>Boquillas UNE 60714, mismo DN</a:t>
             </a:r>
           </a:p>
           <a:p>
             <a:pPr>
               <a:spcAft>
-                <a:spcPts val="1000"/>
+                <a:spcPts val="1100"/>
               </a:spcAft>
             </a:pPr>
             <a:r>
               <a:rPr sz="1600" b="1" i="0">
                 <a:solidFill>
-                  <a:srgbClr val="2E3A80"/>
-                </a:solidFill>
-                <a:latin typeface="Montserrat"/>
-              </a:rPr>
-              <a:t>•  </a:t>
+                  <a:srgbClr val="E8801A"/>
+                </a:solidFill>
+                <a:latin typeface="Montserrat"/>
+              </a:rPr>
+              <a:t>▸  </a:t>
             </a:r>
             <a:r>
               <a:rPr sz="1600" b="0" i="0">
@@ -5866,23 +6084,23 @@
                 </a:solidFill>
                 <a:latin typeface="Montserrat"/>
               </a:rPr>
-              <a:t>Longitud máxima 2 m</a:t>
+              <a:t>Abrazaderas metálicas, nunca de plástico</a:t>
             </a:r>
           </a:p>
           <a:p>
             <a:pPr>
               <a:spcAft>
-                <a:spcPts val="1000"/>
+                <a:spcPts val="1100"/>
               </a:spcAft>
             </a:pPr>
             <a:r>
               <a:rPr sz="1600" b="1" i="0">
                 <a:solidFill>
-                  <a:srgbClr val="2E3A80"/>
-                </a:solidFill>
-                <a:latin typeface="Montserrat"/>
-              </a:rPr>
-              <a:t>•  </a:t>
+                  <a:srgbClr val="E8801A"/>
+                </a:solidFill>
+                <a:latin typeface="Montserrat"/>
+              </a:rPr>
+              <a:t>▸  </a:t>
             </a:r>
             <a:r>
               <a:rPr sz="1600" b="0" i="0">
@@ -5891,14 +6109,14 @@
                 </a:solidFill>
                 <a:latin typeface="Montserrat"/>
               </a:rPr>
-              <a:t>Unión: junta plana o a tetina</a:t>
-            </a:r>
-          </a:p>
-        </p:txBody>
-      </p:sp>
-      <p:sp>
-        <p:nvSpPr>
-          <p:cNvPr id="8" name="imgph" descr="IMGQ:flexible metal gas connector fitting"/>
+              <a:t>Solo móviles, mecheros y sopletes</a:t>
+            </a:r>
+          </a:p>
+        </p:txBody>
+      </p:sp>
+      <p:sp>
+        <p:nvSpPr>
+          <p:cNvPr id="9" name="imgph" descr="IMGQ:orange butane rubber hose metal clamp"/>
           <p:cNvSpPr/>
           <p:nvPr/>
         </p:nvSpPr>
@@ -5944,7 +6162,7 @@
       </p:sp>
       <p:sp>
         <p:nvSpPr>
-          <p:cNvPr id="9" name="TextBox 8"/>
+          <p:cNvPr id="10" name="TextBox 9"/>
           <p:cNvSpPr txBox="1"/>
           <p:nvPr/>
         </p:nvSpPr>
@@ -5984,7 +6202,7 @@
                 </a:solidFill>
                 <a:latin typeface="Montserrat"/>
               </a:rPr>
-              <a:t>flexible metal gas connector fitting</a:t>
+              <a:t>orange butane rubber hose metal clamp</a:t>
             </a:r>
           </a:p>
         </p:txBody>
@@ -6081,7 +6299,7 @@
                 </a:solidFill>
                 <a:latin typeface="Montserrat"/>
               </a:rPr>
-              <a:t>013 / 015</a:t>
+              <a:t>013 / 016</a:t>
             </a:r>
           </a:p>
         </p:txBody>
@@ -6129,7 +6347,7 @@
         <p:spPr>
           <a:xfrm>
             <a:off x="822960" y="457200"/>
-            <a:ext cx="8229600" cy="365760"/>
+            <a:ext cx="10058400" cy="365760"/>
           </a:xfrm>
           <a:prstGeom prst="rect">
             <a:avLst/>
@@ -6143,13 +6361,13 @@
           <a:lstStyle/>
           <a:p>
             <a:r>
-              <a:rPr sz="1200" b="1" i="0">
-                <a:solidFill>
-                  <a:srgbClr val="64748B"/>
-                </a:solidFill>
-                <a:latin typeface="Montserrat"/>
-              </a:rPr>
-              <a:t>ANEXO A · INFORMATIVO</a:t>
+              <a:rPr sz="1300" b="1" i="0">
+                <a:solidFill>
+                  <a:srgbClr val="E8801A"/>
+                </a:solidFill>
+                <a:latin typeface="Montserrat"/>
+              </a:rPr>
+              <a:t>4.7 · METÁLICA CORRUGADA</a:t>
             </a:r>
           </a:p>
         </p:txBody>
@@ -6177,26 +6395,70 @@
           <a:lstStyle/>
           <a:p>
             <a:r>
-              <a:rPr sz="2700" b="1" i="0">
+              <a:rPr sz="2800" b="1" i="0">
                 <a:solidFill>
                   <a:srgbClr val="1E2761"/>
                 </a:solidFill>
                 <a:latin typeface="Montserrat"/>
               </a:rPr>
-              <a:t>¿Se mueve o no se mueve?</a:t>
-            </a:r>
-          </a:p>
-        </p:txBody>
-      </p:sp>
-      <p:sp>
-        <p:nvSpPr>
-          <p:cNvPr id="7" name="TextBox 6"/>
+              <a:t>Metálica corrugada, sin enchufe</a:t>
+            </a:r>
+          </a:p>
+        </p:txBody>
+      </p:sp>
+      <p:sp>
+        <p:nvSpPr>
+          <p:cNvPr id="7" name="Rounded Rectangle 6"/>
+          <p:cNvSpPr/>
+          <p:nvPr/>
+        </p:nvSpPr>
+        <p:spPr>
+          <a:xfrm>
+            <a:off x="868680" y="1627632"/>
+            <a:ext cx="2011680" cy="73152"/>
+          </a:xfrm>
+          <a:prstGeom prst="roundRect">
+            <a:avLst/>
+          </a:prstGeom>
+          <a:solidFill>
+            <a:srgbClr val="E8801A"/>
+          </a:solidFill>
+          <a:ln>
+            <a:noFill/>
+          </a:ln>
+          <a:effectLst/>
+        </p:spPr>
+        <p:style>
+          <a:lnRef idx="1">
+            <a:schemeClr val="accent1"/>
+          </a:lnRef>
+          <a:fillRef idx="3">
+            <a:schemeClr val="accent1"/>
+          </a:fillRef>
+          <a:effectRef idx="2">
+            <a:schemeClr val="accent1"/>
+          </a:effectRef>
+          <a:fontRef idx="minor">
+            <a:schemeClr val="lt1"/>
+          </a:fontRef>
+        </p:style>
+        <p:txBody>
+          <a:bodyPr rtlCol="0" anchor="ctr"/>
+          <a:lstStyle/>
+          <a:p>
+            <a:pPr algn="ctr"/>
+          </a:p>
+        </p:txBody>
+      </p:sp>
+      <p:sp>
+        <p:nvSpPr>
+          <p:cNvPr id="8" name="TextBox 7"/>
           <p:cNvSpPr txBox="1"/>
           <p:nvPr/>
         </p:nvSpPr>
         <p:spPr>
           <a:xfrm>
-            <a:off x="822960" y="1920240"/>
+            <a:off x="822960" y="1965960"/>
             <a:ext cx="4983480" cy="4206240"/>
           </a:xfrm>
           <a:prstGeom prst="rect">
@@ -6212,17 +6474,17 @@
           <a:p>
             <a:pPr>
               <a:spcAft>
-                <a:spcPts val="1000"/>
+                <a:spcPts val="1100"/>
               </a:spcAft>
             </a:pPr>
             <a:r>
               <a:rPr sz="1600" b="1" i="0">
                 <a:solidFill>
-                  <a:srgbClr val="2E3A80"/>
-                </a:solidFill>
-                <a:latin typeface="Montserrat"/>
-              </a:rPr>
-              <a:t>•  </a:t>
+                  <a:srgbClr val="E8801A"/>
+                </a:solidFill>
+                <a:latin typeface="Montserrat"/>
+              </a:rPr>
+              <a:t>▸  </a:t>
             </a:r>
             <a:r>
               <a:rPr sz="1600" b="0" i="0">
@@ -6231,23 +6493,23 @@
                 </a:solidFill>
                 <a:latin typeface="Montserrat"/>
               </a:rPr>
-              <a:t>Fijo o encastrado → conexión rígida</a:t>
+              <a:t>Misma manguera que la 4.4</a:t>
             </a:r>
           </a:p>
           <a:p>
             <a:pPr>
               <a:spcAft>
-                <a:spcPts val="1000"/>
+                <a:spcPts val="1100"/>
               </a:spcAft>
             </a:pPr>
             <a:r>
               <a:rPr sz="1600" b="1" i="0">
                 <a:solidFill>
-                  <a:srgbClr val="2E3A80"/>
-                </a:solidFill>
-                <a:latin typeface="Montserrat"/>
-              </a:rPr>
-              <a:t>•  </a:t>
+                  <a:srgbClr val="E8801A"/>
+                </a:solidFill>
+                <a:latin typeface="Montserrat"/>
+              </a:rPr>
+              <a:t>▸  </a:t>
             </a:r>
             <a:r>
               <a:rPr sz="1600" b="0" i="0">
@@ -6256,23 +6518,23 @@
                 </a:solidFill>
                 <a:latin typeface="Montserrat"/>
               </a:rPr>
-              <a:t>Móvil → conexión flexible</a:t>
+              <a:t>Pero SIN enchufe de seguridad</a:t>
             </a:r>
           </a:p>
           <a:p>
             <a:pPr>
               <a:spcAft>
-                <a:spcPts val="1000"/>
+                <a:spcPts val="1100"/>
               </a:spcAft>
             </a:pPr>
             <a:r>
               <a:rPr sz="1600" b="1" i="0">
                 <a:solidFill>
-                  <a:srgbClr val="2E3A80"/>
-                </a:solidFill>
-                <a:latin typeface="Montserrat"/>
-              </a:rPr>
-              <a:t>•  </a:t>
+                  <a:srgbClr val="E8801A"/>
+                </a:solidFill>
+                <a:latin typeface="Montserrat"/>
+              </a:rPr>
+              <a:t>▸  </a:t>
             </a:r>
             <a:r>
               <a:rPr sz="1600" b="0" i="0">
@@ -6281,14 +6543,39 @@
                 </a:solidFill>
                 <a:latin typeface="Montserrat"/>
               </a:rPr>
-              <a:t>Es una guía orientativa</a:t>
-            </a:r>
-          </a:p>
-        </p:txBody>
-      </p:sp>
-      <p:sp>
-        <p:nvSpPr>
-          <p:cNvPr id="8" name="imgph" descr="IMGQ:built in gas hob kitchen counter"/>
+              <a:t>Longitud máxima 2 m</a:t>
+            </a:r>
+          </a:p>
+          <a:p>
+            <a:pPr>
+              <a:spcAft>
+                <a:spcPts val="1100"/>
+              </a:spcAft>
+            </a:pPr>
+            <a:r>
+              <a:rPr sz="1600" b="1" i="0">
+                <a:solidFill>
+                  <a:srgbClr val="E8801A"/>
+                </a:solidFill>
+                <a:latin typeface="Montserrat"/>
+              </a:rPr>
+              <a:t>▸  </a:t>
+            </a:r>
+            <a:r>
+              <a:rPr sz="1600" b="0" i="0">
+                <a:solidFill>
+                  <a:srgbClr val="1B2330"/>
+                </a:solidFill>
+                <a:latin typeface="Montserrat"/>
+              </a:rPr>
+              <a:t>Unión: junta plana o a tetina</a:t>
+            </a:r>
+          </a:p>
+        </p:txBody>
+      </p:sp>
+      <p:sp>
+        <p:nvSpPr>
+          <p:cNvPr id="9" name="imgph" descr="IMGQ:flexible metal gas connector fitting"/>
           <p:cNvSpPr/>
           <p:nvPr/>
         </p:nvSpPr>
@@ -6334,7 +6621,7 @@
       </p:sp>
       <p:sp>
         <p:nvSpPr>
-          <p:cNvPr id="9" name="TextBox 8"/>
+          <p:cNvPr id="10" name="TextBox 9"/>
           <p:cNvSpPr txBox="1"/>
           <p:nvPr/>
         </p:nvSpPr>
@@ -6374,7 +6661,7 @@
                 </a:solidFill>
                 <a:latin typeface="Montserrat"/>
               </a:rPr>
-              <a:t>built in gas hob kitchen counter</a:t>
+              <a:t>flexible metal gas connector fitting</a:t>
             </a:r>
           </a:p>
         </p:txBody>
@@ -6471,7 +6758,7 @@
                 </a:solidFill>
                 <a:latin typeface="Montserrat"/>
               </a:rPr>
-              <a:t>014 / 015</a:t>
+              <a:t>014 / 016</a:t>
             </a:r>
           </a:p>
         </p:txBody>
@@ -6519,7 +6806,7 @@
         <p:spPr>
           <a:xfrm>
             <a:off x="822960" y="457200"/>
-            <a:ext cx="8229600" cy="365760"/>
+            <a:ext cx="10058400" cy="365760"/>
           </a:xfrm>
           <a:prstGeom prst="rect">
             <a:avLst/>
@@ -6533,13 +6820,13 @@
           <a:lstStyle/>
           <a:p>
             <a:r>
-              <a:rPr sz="1200" b="1" i="0">
-                <a:solidFill>
-                  <a:srgbClr val="64748B"/>
-                </a:solidFill>
-                <a:latin typeface="Montserrat"/>
-              </a:rPr>
-              <a:t>EL PAPELEO</a:t>
+              <a:rPr sz="1300" b="1" i="0">
+                <a:solidFill>
+                  <a:srgbClr val="E8801A"/>
+                </a:solidFill>
+                <a:latin typeface="Montserrat"/>
+              </a:rPr>
+              <a:t>ANEXO A · INFORMATIVO</a:t>
             </a:r>
           </a:p>
         </p:txBody>
@@ -6567,26 +6854,70 @@
           <a:lstStyle/>
           <a:p>
             <a:r>
-              <a:rPr sz="2700" b="1" i="0">
+              <a:rPr sz="2800" b="1" i="0">
                 <a:solidFill>
                   <a:srgbClr val="1E2761"/>
                 </a:solidFill>
                 <a:latin typeface="Montserrat"/>
               </a:rPr>
-              <a:t>Un montaje mal hecho, se firma</a:t>
-            </a:r>
-          </a:p>
-        </p:txBody>
-      </p:sp>
-      <p:sp>
-        <p:nvSpPr>
-          <p:cNvPr id="7" name="TextBox 6"/>
+              <a:t>¿Se mueve o no se mueve?</a:t>
+            </a:r>
+          </a:p>
+        </p:txBody>
+      </p:sp>
+      <p:sp>
+        <p:nvSpPr>
+          <p:cNvPr id="7" name="Rounded Rectangle 6"/>
+          <p:cNvSpPr/>
+          <p:nvPr/>
+        </p:nvSpPr>
+        <p:spPr>
+          <a:xfrm>
+            <a:off x="868680" y="1627632"/>
+            <a:ext cx="2011680" cy="73152"/>
+          </a:xfrm>
+          <a:prstGeom prst="roundRect">
+            <a:avLst/>
+          </a:prstGeom>
+          <a:solidFill>
+            <a:srgbClr val="E8801A"/>
+          </a:solidFill>
+          <a:ln>
+            <a:noFill/>
+          </a:ln>
+          <a:effectLst/>
+        </p:spPr>
+        <p:style>
+          <a:lnRef idx="1">
+            <a:schemeClr val="accent1"/>
+          </a:lnRef>
+          <a:fillRef idx="3">
+            <a:schemeClr val="accent1"/>
+          </a:fillRef>
+          <a:effectRef idx="2">
+            <a:schemeClr val="accent1"/>
+          </a:effectRef>
+          <a:fontRef idx="minor">
+            <a:schemeClr val="lt1"/>
+          </a:fontRef>
+        </p:style>
+        <p:txBody>
+          <a:bodyPr rtlCol="0" anchor="ctr"/>
+          <a:lstStyle/>
+          <a:p>
+            <a:pPr algn="ctr"/>
+          </a:p>
+        </p:txBody>
+      </p:sp>
+      <p:sp>
+        <p:nvSpPr>
+          <p:cNvPr id="8" name="TextBox 7"/>
           <p:cNvSpPr txBox="1"/>
           <p:nvPr/>
         </p:nvSpPr>
         <p:spPr>
           <a:xfrm>
-            <a:off x="822960" y="1920240"/>
+            <a:off x="822960" y="1965960"/>
             <a:ext cx="4983480" cy="4206240"/>
           </a:xfrm>
           <a:prstGeom prst="rect">
@@ -6602,17 +6933,17 @@
           <a:p>
             <a:pPr>
               <a:spcAft>
-                <a:spcPts val="1000"/>
+                <a:spcPts val="1100"/>
               </a:spcAft>
             </a:pPr>
             <a:r>
               <a:rPr sz="1600" b="1" i="0">
                 <a:solidFill>
-                  <a:srgbClr val="2E3A80"/>
-                </a:solidFill>
-                <a:latin typeface="Montserrat"/>
-              </a:rPr>
-              <a:t>•  </a:t>
+                  <a:srgbClr val="E8801A"/>
+                </a:solidFill>
+                <a:latin typeface="Montserrat"/>
+              </a:rPr>
+              <a:t>▸  </a:t>
             </a:r>
             <a:r>
               <a:rPr sz="1600" b="0" i="0">
@@ -6621,23 +6952,23 @@
                 </a:solidFill>
                 <a:latin typeface="Montserrat"/>
               </a:rPr>
-              <a:t>Certificado de instalación y puesta en marcha</a:t>
+              <a:t>Fijo o encastrado → conexión rígida</a:t>
             </a:r>
           </a:p>
           <a:p>
             <a:pPr>
               <a:spcAft>
-                <a:spcPts val="1000"/>
+                <a:spcPts val="1100"/>
               </a:spcAft>
             </a:pPr>
             <a:r>
               <a:rPr sz="1600" b="1" i="0">
                 <a:solidFill>
-                  <a:srgbClr val="2E3A80"/>
-                </a:solidFill>
-                <a:latin typeface="Montserrat"/>
-              </a:rPr>
-              <a:t>•  </a:t>
+                  <a:srgbClr val="E8801A"/>
+                </a:solidFill>
+                <a:latin typeface="Montserrat"/>
+              </a:rPr>
+              <a:t>▸  </a:t>
             </a:r>
             <a:r>
               <a:rPr sz="1600" b="0" i="0">
@@ -6646,23 +6977,23 @@
                 </a:solidFill>
                 <a:latin typeface="Montserrat"/>
               </a:rPr>
-              <a:t>Se entrega al usuario</a:t>
+              <a:t>Móvil → conexión flexible</a:t>
             </a:r>
           </a:p>
           <a:p>
             <a:pPr>
               <a:spcAft>
-                <a:spcPts val="1000"/>
+                <a:spcPts val="1100"/>
               </a:spcAft>
             </a:pPr>
             <a:r>
               <a:rPr sz="1600" b="1" i="0">
                 <a:solidFill>
-                  <a:srgbClr val="2E3A80"/>
-                </a:solidFill>
-                <a:latin typeface="Montserrat"/>
-              </a:rPr>
-              <a:t>•  </a:t>
+                  <a:srgbClr val="E8801A"/>
+                </a:solidFill>
+                <a:latin typeface="Montserrat"/>
+              </a:rPr>
+              <a:t>▸  </a:t>
             </a:r>
             <a:r>
               <a:rPr sz="1600" b="0" i="0">
@@ -6671,14 +7002,14 @@
                 </a:solidFill>
                 <a:latin typeface="Montserrat"/>
               </a:rPr>
-              <a:t>Cambiar un flexible caducado se registra</a:t>
-            </a:r>
-          </a:p>
-        </p:txBody>
-      </p:sp>
-      <p:sp>
-        <p:nvSpPr>
-          <p:cNvPr id="8" name="imgph" descr="IMGQ:gas installer signing certificate document"/>
+              <a:t>Es una guía orientativa</a:t>
+            </a:r>
+          </a:p>
+        </p:txBody>
+      </p:sp>
+      <p:sp>
+        <p:nvSpPr>
+          <p:cNvPr id="9" name="imgph" descr="IMGQ:built in gas hob kitchen counter"/>
           <p:cNvSpPr/>
           <p:nvPr/>
         </p:nvSpPr>
@@ -6724,7 +7055,7 @@
       </p:sp>
       <p:sp>
         <p:nvSpPr>
-          <p:cNvPr id="9" name="TextBox 8"/>
+          <p:cNvPr id="10" name="TextBox 9"/>
           <p:cNvSpPr txBox="1"/>
           <p:nvPr/>
         </p:nvSpPr>
@@ -6764,7 +7095,7 @@
                 </a:solidFill>
                 <a:latin typeface="Montserrat"/>
               </a:rPr>
-              <a:t>gas installer signing certificate document</a:t>
+              <a:t>built in gas hob kitchen counter</a:t>
             </a:r>
           </a:p>
         </p:txBody>
@@ -6802,6 +7133,440 @@
             <a:avLst/>
           </a:prstGeom>
           <a:solidFill>
+            <a:srgbClr val="FFFFFF"/>
+          </a:solidFill>
+          <a:ln>
+            <a:noFill/>
+          </a:ln>
+          <a:effectLst/>
+        </p:spPr>
+        <p:style>
+          <a:lnRef idx="1">
+            <a:schemeClr val="accent1"/>
+          </a:lnRef>
+          <a:fillRef idx="3">
+            <a:schemeClr val="accent1"/>
+          </a:fillRef>
+          <a:effectRef idx="2">
+            <a:schemeClr val="accent1"/>
+          </a:effectRef>
+          <a:fontRef idx="minor">
+            <a:schemeClr val="lt1"/>
+          </a:fontRef>
+        </p:style>
+        <p:txBody>
+          <a:bodyPr rtlCol="0" anchor="ctr"/>
+          <a:lstStyle/>
+          <a:p>
+            <a:pPr algn="ctr"/>
+          </a:p>
+        </p:txBody>
+      </p:sp>
+      <p:sp>
+        <p:nvSpPr>
+          <p:cNvPr id="3" name="TextBox 2"/>
+          <p:cNvSpPr txBox="1"/>
+          <p:nvPr/>
+        </p:nvSpPr>
+        <p:spPr>
+          <a:xfrm>
+            <a:off x="10607040" y="320040"/>
+            <a:ext cx="1371600" cy="365760"/>
+          </a:xfrm>
+          <a:prstGeom prst="rect">
+            <a:avLst/>
+          </a:prstGeom>
+          <a:noFill/>
+        </p:spPr>
+        <p:txBody>
+          <a:bodyPr wrap="square">
+            <a:spAutoFit/>
+          </a:bodyPr>
+          <a:lstStyle/>
+          <a:p>
+            <a:pPr algn="r"/>
+            <a:r>
+              <a:rPr sz="1000" b="1" i="0">
+                <a:solidFill>
+                  <a:srgbClr val="64748B"/>
+                </a:solidFill>
+                <a:latin typeface="Montserrat"/>
+              </a:rPr>
+              <a:t>015 / 016</a:t>
+            </a:r>
+          </a:p>
+        </p:txBody>
+      </p:sp>
+      <p:sp>
+        <p:nvSpPr>
+          <p:cNvPr id="4" name="TextBox 3"/>
+          <p:cNvSpPr txBox="1"/>
+          <p:nvPr/>
+        </p:nvSpPr>
+        <p:spPr>
+          <a:xfrm>
+            <a:off x="457200" y="6419088"/>
+            <a:ext cx="8229600" cy="365760"/>
+          </a:xfrm>
+          <a:prstGeom prst="rect">
+            <a:avLst/>
+          </a:prstGeom>
+          <a:noFill/>
+        </p:spPr>
+        <p:txBody>
+          <a:bodyPr wrap="square">
+            <a:spAutoFit/>
+          </a:bodyPr>
+          <a:lstStyle/>
+          <a:p>
+            <a:r>
+              <a:rPr sz="900" b="0" i="0">
+                <a:solidFill>
+                  <a:srgbClr val="64748B"/>
+                </a:solidFill>
+                <a:latin typeface="Montserrat"/>
+              </a:rPr>
+              <a:t>Curso Gas B · Tema 14 · UNE 60670-7</a:t>
+            </a:r>
+          </a:p>
+        </p:txBody>
+      </p:sp>
+      <p:sp>
+        <p:nvSpPr>
+          <p:cNvPr id="5" name="TextBox 4"/>
+          <p:cNvSpPr txBox="1"/>
+          <p:nvPr/>
+        </p:nvSpPr>
+        <p:spPr>
+          <a:xfrm>
+            <a:off x="822960" y="457200"/>
+            <a:ext cx="10058400" cy="365760"/>
+          </a:xfrm>
+          <a:prstGeom prst="rect">
+            <a:avLst/>
+          </a:prstGeom>
+          <a:noFill/>
+        </p:spPr>
+        <p:txBody>
+          <a:bodyPr wrap="square">
+            <a:spAutoFit/>
+          </a:bodyPr>
+          <a:lstStyle/>
+          <a:p>
+            <a:r>
+              <a:rPr sz="1300" b="1" i="0">
+                <a:solidFill>
+                  <a:srgbClr val="E8801A"/>
+                </a:solidFill>
+                <a:latin typeface="Montserrat"/>
+              </a:rPr>
+              <a:t>EL PAPELEO</a:t>
+            </a:r>
+          </a:p>
+        </p:txBody>
+      </p:sp>
+      <p:sp>
+        <p:nvSpPr>
+          <p:cNvPr id="6" name="TextBox 5"/>
+          <p:cNvSpPr txBox="1"/>
+          <p:nvPr/>
+        </p:nvSpPr>
+        <p:spPr>
+          <a:xfrm>
+            <a:off x="822960" y="868680"/>
+            <a:ext cx="10515600" cy="914400"/>
+          </a:xfrm>
+          <a:prstGeom prst="rect">
+            <a:avLst/>
+          </a:prstGeom>
+          <a:noFill/>
+        </p:spPr>
+        <p:txBody>
+          <a:bodyPr wrap="square">
+            <a:spAutoFit/>
+          </a:bodyPr>
+          <a:lstStyle/>
+          <a:p>
+            <a:r>
+              <a:rPr sz="2800" b="1" i="0">
+                <a:solidFill>
+                  <a:srgbClr val="1E2761"/>
+                </a:solidFill>
+                <a:latin typeface="Montserrat"/>
+              </a:rPr>
+              <a:t>Un montaje mal hecho, se firma</a:t>
+            </a:r>
+          </a:p>
+        </p:txBody>
+      </p:sp>
+      <p:sp>
+        <p:nvSpPr>
+          <p:cNvPr id="7" name="Rounded Rectangle 6"/>
+          <p:cNvSpPr/>
+          <p:nvPr/>
+        </p:nvSpPr>
+        <p:spPr>
+          <a:xfrm>
+            <a:off x="868680" y="1627632"/>
+            <a:ext cx="2011680" cy="73152"/>
+          </a:xfrm>
+          <a:prstGeom prst="roundRect">
+            <a:avLst/>
+          </a:prstGeom>
+          <a:solidFill>
+            <a:srgbClr val="E8801A"/>
+          </a:solidFill>
+          <a:ln>
+            <a:noFill/>
+          </a:ln>
+          <a:effectLst/>
+        </p:spPr>
+        <p:style>
+          <a:lnRef idx="1">
+            <a:schemeClr val="accent1"/>
+          </a:lnRef>
+          <a:fillRef idx="3">
+            <a:schemeClr val="accent1"/>
+          </a:fillRef>
+          <a:effectRef idx="2">
+            <a:schemeClr val="accent1"/>
+          </a:effectRef>
+          <a:fontRef idx="minor">
+            <a:schemeClr val="lt1"/>
+          </a:fontRef>
+        </p:style>
+        <p:txBody>
+          <a:bodyPr rtlCol="0" anchor="ctr"/>
+          <a:lstStyle/>
+          <a:p>
+            <a:pPr algn="ctr"/>
+          </a:p>
+        </p:txBody>
+      </p:sp>
+      <p:sp>
+        <p:nvSpPr>
+          <p:cNvPr id="8" name="TextBox 7"/>
+          <p:cNvSpPr txBox="1"/>
+          <p:nvPr/>
+        </p:nvSpPr>
+        <p:spPr>
+          <a:xfrm>
+            <a:off x="822960" y="1965960"/>
+            <a:ext cx="4983480" cy="4206240"/>
+          </a:xfrm>
+          <a:prstGeom prst="rect">
+            <a:avLst/>
+          </a:prstGeom>
+          <a:noFill/>
+        </p:spPr>
+        <p:txBody>
+          <a:bodyPr wrap="square">
+            <a:spAutoFit/>
+          </a:bodyPr>
+          <a:lstStyle/>
+          <a:p>
+            <a:pPr>
+              <a:spcAft>
+                <a:spcPts val="1100"/>
+              </a:spcAft>
+            </a:pPr>
+            <a:r>
+              <a:rPr sz="1600" b="1" i="0">
+                <a:solidFill>
+                  <a:srgbClr val="E8801A"/>
+                </a:solidFill>
+                <a:latin typeface="Montserrat"/>
+              </a:rPr>
+              <a:t>▸  </a:t>
+            </a:r>
+            <a:r>
+              <a:rPr sz="1600" b="0" i="0">
+                <a:solidFill>
+                  <a:srgbClr val="1B2330"/>
+                </a:solidFill>
+                <a:latin typeface="Montserrat"/>
+              </a:rPr>
+              <a:t>Certificado de instalación y puesta en marcha</a:t>
+            </a:r>
+          </a:p>
+          <a:p>
+            <a:pPr>
+              <a:spcAft>
+                <a:spcPts val="1100"/>
+              </a:spcAft>
+            </a:pPr>
+            <a:r>
+              <a:rPr sz="1600" b="1" i="0">
+                <a:solidFill>
+                  <a:srgbClr val="E8801A"/>
+                </a:solidFill>
+                <a:latin typeface="Montserrat"/>
+              </a:rPr>
+              <a:t>▸  </a:t>
+            </a:r>
+            <a:r>
+              <a:rPr sz="1600" b="0" i="0">
+                <a:solidFill>
+                  <a:srgbClr val="1B2330"/>
+                </a:solidFill>
+                <a:latin typeface="Montserrat"/>
+              </a:rPr>
+              <a:t>Se entrega al usuario</a:t>
+            </a:r>
+          </a:p>
+          <a:p>
+            <a:pPr>
+              <a:spcAft>
+                <a:spcPts val="1100"/>
+              </a:spcAft>
+            </a:pPr>
+            <a:r>
+              <a:rPr sz="1600" b="1" i="0">
+                <a:solidFill>
+                  <a:srgbClr val="E8801A"/>
+                </a:solidFill>
+                <a:latin typeface="Montserrat"/>
+              </a:rPr>
+              <a:t>▸  </a:t>
+            </a:r>
+            <a:r>
+              <a:rPr sz="1600" b="0" i="0">
+                <a:solidFill>
+                  <a:srgbClr val="1B2330"/>
+                </a:solidFill>
+                <a:latin typeface="Montserrat"/>
+              </a:rPr>
+              <a:t>Cambiar un flexible caducado se registra</a:t>
+            </a:r>
+          </a:p>
+        </p:txBody>
+      </p:sp>
+      <p:sp>
+        <p:nvSpPr>
+          <p:cNvPr id="9" name="imgph" descr="IMGQ:gas installer signing certificate document"/>
+          <p:cNvSpPr/>
+          <p:nvPr/>
+        </p:nvSpPr>
+        <p:spPr>
+          <a:xfrm>
+            <a:off x="5806440" y="1051560"/>
+            <a:ext cx="5298947" cy="4629150"/>
+          </a:xfrm>
+          <a:prstGeom prst="roundRect">
+            <a:avLst/>
+          </a:prstGeom>
+          <a:solidFill>
+            <a:srgbClr val="F3F6FB"/>
+          </a:solidFill>
+          <a:ln w="12700">
+            <a:solidFill>
+              <a:srgbClr val="C7D2E6"/>
+            </a:solidFill>
+          </a:ln>
+          <a:effectLst/>
+        </p:spPr>
+        <p:style>
+          <a:lnRef idx="1">
+            <a:schemeClr val="accent1"/>
+          </a:lnRef>
+          <a:fillRef idx="3">
+            <a:schemeClr val="accent1"/>
+          </a:fillRef>
+          <a:effectRef idx="2">
+            <a:schemeClr val="accent1"/>
+          </a:effectRef>
+          <a:fontRef idx="minor">
+            <a:schemeClr val="lt1"/>
+          </a:fontRef>
+        </p:style>
+        <p:txBody>
+          <a:bodyPr rtlCol="0" anchor="ctr"/>
+          <a:lstStyle/>
+          <a:p>
+            <a:pPr algn="ctr"/>
+          </a:p>
+        </p:txBody>
+      </p:sp>
+      <p:sp>
+        <p:nvSpPr>
+          <p:cNvPr id="10" name="TextBox 9"/>
+          <p:cNvSpPr txBox="1"/>
+          <p:nvPr/>
+        </p:nvSpPr>
+        <p:spPr>
+          <a:xfrm>
+            <a:off x="6080760" y="2726055"/>
+            <a:ext cx="4750307" cy="1280160"/>
+          </a:xfrm>
+          <a:prstGeom prst="rect">
+            <a:avLst/>
+          </a:prstGeom>
+          <a:noFill/>
+        </p:spPr>
+        <p:txBody>
+          <a:bodyPr wrap="square">
+            <a:spAutoFit/>
+          </a:bodyPr>
+          <a:lstStyle/>
+          <a:p>
+            <a:pPr algn="ctr"/>
+            <a:r>
+              <a:rPr sz="1400" b="1" i="0">
+                <a:solidFill>
+                  <a:srgbClr val="64748B"/>
+                </a:solidFill>
+                <a:latin typeface="Montserrat"/>
+              </a:rPr>
+              <a:t>IMAGEN REALISTA</a:t>
+            </a:r>
+          </a:p>
+          <a:p>
+            <a:pPr algn="ctr"/>
+            <a:r>
+              <a:rPr sz="1100" b="0" i="1">
+                <a:solidFill>
+                  <a:srgbClr val="64748B"/>
+                </a:solidFill>
+                <a:latin typeface="Montserrat"/>
+              </a:rPr>
+              <a:t>gas installer signing certificate document</a:t>
+            </a:r>
+          </a:p>
+        </p:txBody>
+      </p:sp>
+    </p:spTree>
+  </p:cSld>
+  <p:clrMapOvr>
+    <a:masterClrMapping/>
+  </p:clrMapOvr>
+</p:sld>
+</file>
+
+<file path=ppt/slides/slide16.xml><?xml version="1.0" encoding="utf-8"?>
+<p:sld xmlns:a="http://schemas.openxmlformats.org/drawingml/2006/main" xmlns:p="http://schemas.openxmlformats.org/presentationml/2006/main" xmlns:r="http://schemas.openxmlformats.org/officeDocument/2006/relationships">
+  <p:cSld>
+    <p:spTree>
+      <p:nvGrpSpPr>
+        <p:cNvPr id="1" name=""/>
+        <p:cNvGrpSpPr/>
+        <p:nvPr/>
+      </p:nvGrpSpPr>
+      <p:grpSpPr/>
+      <p:sp>
+        <p:nvSpPr>
+          <p:cNvPr id="2" name="Rectangle 1"/>
+          <p:cNvSpPr/>
+          <p:nvPr/>
+        </p:nvSpPr>
+        <p:spPr>
+          <a:xfrm>
+            <a:off x="0" y="0"/>
+            <a:ext cx="12191695" cy="6858000"/>
+          </a:xfrm>
+          <a:prstGeom prst="rect">
+            <a:avLst/>
+          </a:prstGeom>
+          <a:solidFill>
             <a:srgbClr val="1E2761"/>
           </a:solidFill>
           <a:ln>
@@ -6856,7 +7621,7 @@
             <a:r>
               <a:rPr sz="1400" b="1" i="0">
                 <a:solidFill>
-                  <a:srgbClr val="CADCFC"/>
+                  <a:srgbClr val="F4A24C"/>
                 </a:solidFill>
                 <a:latin typeface="Montserrat"/>
               </a:rPr>
@@ -6867,13 +7632,57 @@
       </p:sp>
       <p:sp>
         <p:nvSpPr>
-          <p:cNvPr id="4" name="TextBox 3"/>
+          <p:cNvPr id="4" name="Rounded Rectangle 3"/>
+          <p:cNvSpPr/>
+          <p:nvPr/>
+        </p:nvSpPr>
+        <p:spPr>
+          <a:xfrm>
+            <a:off x="868680" y="1051560"/>
+            <a:ext cx="1463040" cy="82296"/>
+          </a:xfrm>
+          <a:prstGeom prst="roundRect">
+            <a:avLst/>
+          </a:prstGeom>
+          <a:solidFill>
+            <a:srgbClr val="E8801A"/>
+          </a:solidFill>
+          <a:ln>
+            <a:noFill/>
+          </a:ln>
+          <a:effectLst/>
+        </p:spPr>
+        <p:style>
+          <a:lnRef idx="1">
+            <a:schemeClr val="accent1"/>
+          </a:lnRef>
+          <a:fillRef idx="3">
+            <a:schemeClr val="accent1"/>
+          </a:fillRef>
+          <a:effectRef idx="2">
+            <a:schemeClr val="accent1"/>
+          </a:effectRef>
+          <a:fontRef idx="minor">
+            <a:schemeClr val="lt1"/>
+          </a:fontRef>
+        </p:style>
+        <p:txBody>
+          <a:bodyPr rtlCol="0" anchor="ctr"/>
+          <a:lstStyle/>
+          <a:p>
+            <a:pPr algn="ctr"/>
+          </a:p>
+        </p:txBody>
+      </p:sp>
+      <p:sp>
+        <p:nvSpPr>
+          <p:cNvPr id="5" name="TextBox 4"/>
           <p:cNvSpPr txBox="1"/>
           <p:nvPr/>
         </p:nvSpPr>
         <p:spPr>
           <a:xfrm>
-            <a:off x="822960" y="1143000"/>
+            <a:off x="822960" y="1234440"/>
             <a:ext cx="10515600" cy="1097280"/>
           </a:xfrm>
           <a:prstGeom prst="rect">
@@ -6901,14 +7710,14 @@
       </p:sp>
       <p:sp>
         <p:nvSpPr>
-          <p:cNvPr id="5" name="TextBox 4"/>
+          <p:cNvPr id="6" name="TextBox 5"/>
           <p:cNvSpPr txBox="1"/>
           <p:nvPr/>
         </p:nvSpPr>
         <p:spPr>
           <a:xfrm>
-            <a:off x="822960" y="2514600"/>
-            <a:ext cx="10515600" cy="2834640"/>
+            <a:off x="822960" y="2606040"/>
+            <a:ext cx="10515600" cy="2743200"/>
           </a:xfrm>
           <a:prstGeom prst="rect">
             <a:avLst/>
@@ -6929,7 +7738,7 @@
             <a:r>
               <a:rPr sz="2000" b="1" i="0">
                 <a:solidFill>
-                  <a:srgbClr val="CADCFC"/>
+                  <a:srgbClr val="F4A24C"/>
                 </a:solidFill>
                 <a:latin typeface="Montserrat"/>
               </a:rPr>
@@ -6954,7 +7763,7 @@
             <a:r>
               <a:rPr sz="2000" b="1" i="0">
                 <a:solidFill>
-                  <a:srgbClr val="CADCFC"/>
+                  <a:srgbClr val="F4A24C"/>
                 </a:solidFill>
                 <a:latin typeface="Montserrat"/>
               </a:rPr>
@@ -6979,7 +7788,7 @@
             <a:r>
               <a:rPr sz="2000" b="1" i="0">
                 <a:solidFill>
-                  <a:srgbClr val="CADCFC"/>
+                  <a:srgbClr val="F4A24C"/>
                 </a:solidFill>
                 <a:latin typeface="Montserrat"/>
               </a:rPr>
@@ -7004,7 +7813,7 @@
             <a:r>
               <a:rPr sz="2000" b="1" i="0">
                 <a:solidFill>
-                  <a:srgbClr val="CADCFC"/>
+                  <a:srgbClr val="F4A24C"/>
                 </a:solidFill>
                 <a:latin typeface="Montserrat"/>
               </a:rPr>
@@ -7024,20 +7833,20 @@
       </p:sp>
       <p:sp>
         <p:nvSpPr>
-          <p:cNvPr id="6" name="Rounded Rectangle 5"/>
+          <p:cNvPr id="7" name="Rounded Rectangle 6"/>
           <p:cNvSpPr/>
           <p:nvPr/>
         </p:nvSpPr>
         <p:spPr>
           <a:xfrm>
             <a:off x="822960" y="5532120"/>
-            <a:ext cx="10515600" cy="777240"/>
+            <a:ext cx="10515600" cy="822960"/>
           </a:xfrm>
           <a:prstGeom prst="roundRect">
             <a:avLst/>
           </a:prstGeom>
           <a:solidFill>
-            <a:srgbClr val="2E3A80"/>
+            <a:srgbClr val="E8801A"/>
           </a:solidFill>
           <a:ln>
             <a:noFill/>
@@ -7068,13 +7877,13 @@
       </p:sp>
       <p:sp>
         <p:nvSpPr>
-          <p:cNvPr id="7" name="TextBox 6"/>
+          <p:cNvPr id="8" name="TextBox 7"/>
           <p:cNvSpPr txBox="1"/>
           <p:nvPr/>
         </p:nvSpPr>
         <p:spPr>
           <a:xfrm>
-            <a:off x="1051560" y="5605272"/>
+            <a:off x="1051560" y="5623560"/>
             <a:ext cx="10058400" cy="640080"/>
           </a:xfrm>
           <a:prstGeom prst="rect">
@@ -7091,7 +7900,7 @@
             <a:r>
               <a:rPr sz="1500" b="1" i="1">
                 <a:solidFill>
-                  <a:srgbClr val="CADCFC"/>
+                  <a:srgbClr val="1E2761"/>
                 </a:solidFill>
                 <a:latin typeface="Montserrat"/>
               </a:rPr>
@@ -7192,7 +8001,7 @@
                 </a:solidFill>
                 <a:latin typeface="Montserrat"/>
               </a:rPr>
-              <a:t>002 / 015</a:t>
+              <a:t>002 / 016</a:t>
             </a:r>
           </a:p>
         </p:txBody>
@@ -7256,7 +8065,7 @@
             <a:r>
               <a:rPr sz="2700" b="1" i="0">
                 <a:solidFill>
-                  <a:srgbClr val="1E2761"/>
+                  <a:srgbClr val="E8801A"/>
                 </a:solidFill>
                 <a:latin typeface="Montserrat"/>
               </a:rPr>
@@ -7268,6 +8077,50 @@
       <p:sp>
         <p:nvSpPr>
           <p:cNvPr id="6" name="Rounded Rectangle 5"/>
+          <p:cNvSpPr/>
+          <p:nvPr/>
+        </p:nvSpPr>
+        <p:spPr>
+          <a:xfrm>
+            <a:off x="868680" y="1234440"/>
+            <a:ext cx="1463040" cy="73152"/>
+          </a:xfrm>
+          <a:prstGeom prst="roundRect">
+            <a:avLst/>
+          </a:prstGeom>
+          <a:solidFill>
+            <a:srgbClr val="1E2761"/>
+          </a:solidFill>
+          <a:ln>
+            <a:noFill/>
+          </a:ln>
+          <a:effectLst/>
+        </p:spPr>
+        <p:style>
+          <a:lnRef idx="1">
+            <a:schemeClr val="accent1"/>
+          </a:lnRef>
+          <a:fillRef idx="3">
+            <a:schemeClr val="accent1"/>
+          </a:fillRef>
+          <a:effectRef idx="2">
+            <a:schemeClr val="accent1"/>
+          </a:effectRef>
+          <a:fontRef idx="minor">
+            <a:schemeClr val="lt1"/>
+          </a:fontRef>
+        </p:style>
+        <p:txBody>
+          <a:bodyPr rtlCol="0" anchor="ctr"/>
+          <a:lstStyle/>
+          <a:p>
+            <a:pPr algn="ctr"/>
+          </a:p>
+        </p:txBody>
+      </p:sp>
+      <p:sp>
+        <p:nvSpPr>
+          <p:cNvPr id="7" name="Rounded Rectangle 6"/>
           <p:cNvSpPr/>
           <p:nvPr/>
         </p:nvSpPr>
@@ -7313,7 +8166,7 @@
       </p:sp>
       <p:sp>
         <p:nvSpPr>
-          <p:cNvPr id="7" name="TextBox 6"/>
+          <p:cNvPr id="8" name="TextBox 7"/>
           <p:cNvSpPr txBox="1"/>
           <p:nvPr/>
         </p:nvSpPr>
@@ -7348,7 +8201,7 @@
       </p:sp>
       <p:sp>
         <p:nvSpPr>
-          <p:cNvPr id="8" name="TextBox 7"/>
+          <p:cNvPr id="9" name="TextBox 8"/>
           <p:cNvSpPr txBox="1"/>
           <p:nvPr/>
         </p:nvSpPr>
@@ -7383,7 +8236,7 @@
       </p:sp>
       <p:sp>
         <p:nvSpPr>
-          <p:cNvPr id="9" name="Rounded Rectangle 8"/>
+          <p:cNvPr id="10" name="Rounded Rectangle 9"/>
           <p:cNvSpPr/>
           <p:nvPr/>
         </p:nvSpPr>
@@ -7429,7 +8282,7 @@
       </p:sp>
       <p:sp>
         <p:nvSpPr>
-          <p:cNvPr id="10" name="TextBox 9"/>
+          <p:cNvPr id="11" name="TextBox 10"/>
           <p:cNvSpPr txBox="1"/>
           <p:nvPr/>
         </p:nvSpPr>
@@ -7464,7 +8317,7 @@
       </p:sp>
       <p:sp>
         <p:nvSpPr>
-          <p:cNvPr id="11" name="TextBox 10"/>
+          <p:cNvPr id="12" name="TextBox 11"/>
           <p:cNvSpPr txBox="1"/>
           <p:nvPr/>
         </p:nvSpPr>
@@ -7499,7 +8352,7 @@
       </p:sp>
       <p:sp>
         <p:nvSpPr>
-          <p:cNvPr id="12" name="Rounded Rectangle 11"/>
+          <p:cNvPr id="13" name="Rounded Rectangle 12"/>
           <p:cNvSpPr/>
           <p:nvPr/>
         </p:nvSpPr>
@@ -7545,7 +8398,7 @@
       </p:sp>
       <p:sp>
         <p:nvSpPr>
-          <p:cNvPr id="13" name="TextBox 12"/>
+          <p:cNvPr id="14" name="TextBox 13"/>
           <p:cNvSpPr txBox="1"/>
           <p:nvPr/>
         </p:nvSpPr>
@@ -7580,7 +8433,7 @@
       </p:sp>
       <p:sp>
         <p:nvSpPr>
-          <p:cNvPr id="14" name="TextBox 13"/>
+          <p:cNvPr id="15" name="TextBox 14"/>
           <p:cNvSpPr txBox="1"/>
           <p:nvPr/>
         </p:nvSpPr>
@@ -7705,7 +8558,7 @@
                 </a:solidFill>
                 <a:latin typeface="Montserrat"/>
               </a:rPr>
-              <a:t>003 / 015</a:t>
+              <a:t>003 / 016</a:t>
             </a:r>
           </a:p>
         </p:txBody>
@@ -7752,7 +8605,7 @@
         </p:nvSpPr>
         <p:spPr>
           <a:xfrm>
-            <a:off x="822960" y="457200"/>
+            <a:off x="822960" y="502920"/>
             <a:ext cx="8229600" cy="365760"/>
           </a:xfrm>
           <a:prstGeom prst="rect">
@@ -7767,13 +8620,13 @@
           <a:lstStyle/>
           <a:p>
             <a:r>
-              <a:rPr sz="1200" b="1" i="0">
-                <a:solidFill>
-                  <a:srgbClr val="64748B"/>
-                </a:solidFill>
-                <a:latin typeface="Montserrat"/>
-              </a:rPr>
-              <a:t>4.1 · CONEXIÓN RÍGIDA</a:t>
+              <a:rPr sz="1300" b="1" i="0">
+                <a:solidFill>
+                  <a:srgbClr val="E8801A"/>
+                </a:solidFill>
+                <a:latin typeface="Montserrat"/>
+              </a:rPr>
+              <a:t>PARTES DE ESTE VÍDEO</a:t>
             </a:r>
           </a:p>
         </p:txBody>
@@ -7786,7 +8639,7 @@
         </p:nvSpPr>
         <p:spPr>
           <a:xfrm>
-            <a:off x="822960" y="868680"/>
+            <a:off x="822960" y="914400"/>
             <a:ext cx="10515600" cy="914400"/>
           </a:xfrm>
           <a:prstGeom prst="rect">
@@ -7807,155 +8660,30 @@
                 </a:solidFill>
                 <a:latin typeface="Montserrat"/>
               </a:rPr>
-              <a:t>Rígida: el mismo tubo</a:t>
-            </a:r>
-          </a:p>
-        </p:txBody>
-      </p:sp>
-      <p:sp>
-        <p:nvSpPr>
-          <p:cNvPr id="7" name="TextBox 6"/>
-          <p:cNvSpPr txBox="1"/>
-          <p:nvPr/>
-        </p:nvSpPr>
-        <p:spPr>
-          <a:xfrm>
-            <a:off x="822960" y="1920240"/>
-            <a:ext cx="4983480" cy="4206240"/>
-          </a:xfrm>
-          <a:prstGeom prst="rect">
-            <a:avLst/>
-          </a:prstGeom>
-          <a:noFill/>
-        </p:spPr>
-        <p:txBody>
-          <a:bodyPr wrap="square">
-            <a:spAutoFit/>
-          </a:bodyPr>
-          <a:lstStyle/>
-          <a:p>
-            <a:pPr>
-              <a:spcAft>
-                <a:spcPts val="1000"/>
-              </a:spcAft>
-            </a:pPr>
-            <a:r>
-              <a:rPr sz="1600" b="1" i="0">
-                <a:solidFill>
-                  <a:srgbClr val="2E3A80"/>
-                </a:solidFill>
-                <a:latin typeface="Montserrat"/>
-              </a:rPr>
-              <a:t>•  </a:t>
-            </a:r>
-            <a:r>
-              <a:rPr sz="1600" b="0" i="0">
-                <a:solidFill>
-                  <a:srgbClr val="1B2330"/>
-                </a:solidFill>
-                <a:latin typeface="Montserrat"/>
-              </a:rPr>
-              <a:t>Cobre, acero, inox, multicapa</a:t>
-            </a:r>
-          </a:p>
-          <a:p>
-            <a:pPr>
-              <a:spcAft>
-                <a:spcPts val="1000"/>
-              </a:spcAft>
-            </a:pPr>
-            <a:r>
-              <a:rPr sz="1600" b="1" i="0">
-                <a:solidFill>
-                  <a:srgbClr val="2E3A80"/>
-                </a:solidFill>
-                <a:latin typeface="Montserrat"/>
-              </a:rPr>
-              <a:t>•  </a:t>
-            </a:r>
-            <a:r>
-              <a:rPr sz="1600" b="0" i="0">
-                <a:solidFill>
-                  <a:srgbClr val="1B2330"/>
-                </a:solidFill>
-                <a:latin typeface="Montserrat"/>
-              </a:rPr>
-              <a:t>Uniones según UNE 60670-3</a:t>
-            </a:r>
-          </a:p>
-          <a:p>
-            <a:pPr>
-              <a:spcAft>
-                <a:spcPts val="1000"/>
-              </a:spcAft>
-            </a:pPr>
-            <a:r>
-              <a:rPr sz="1600" b="1" i="0">
-                <a:solidFill>
-                  <a:srgbClr val="2E3A80"/>
-                </a:solidFill>
-                <a:latin typeface="Montserrat"/>
-              </a:rPr>
-              <a:t>•  </a:t>
-            </a:r>
-            <a:r>
-              <a:rPr sz="1600" b="0" i="0">
-                <a:solidFill>
-                  <a:srgbClr val="1B2330"/>
-                </a:solidFill>
-                <a:latin typeface="Montserrat"/>
-              </a:rPr>
-              <a:t>Exclusiva para aparatos fijos</a:t>
-            </a:r>
-          </a:p>
-          <a:p>
-            <a:pPr>
-              <a:spcAft>
-                <a:spcPts val="1000"/>
-              </a:spcAft>
-            </a:pPr>
-            <a:r>
-              <a:rPr sz="1600" b="1" i="0">
-                <a:solidFill>
-                  <a:srgbClr val="2E3A80"/>
-                </a:solidFill>
-                <a:latin typeface="Montserrat"/>
-              </a:rPr>
-              <a:t>•  </a:t>
-            </a:r>
-            <a:r>
-              <a:rPr sz="1600" b="0" i="0">
-                <a:solidFill>
-                  <a:srgbClr val="1B2330"/>
-                </a:solidFill>
-                <a:latin typeface="Montserrat"/>
-              </a:rPr>
-              <a:t>Uniones mecánicas por junta plana</a:t>
-            </a:r>
-          </a:p>
-        </p:txBody>
-      </p:sp>
-      <p:sp>
-        <p:nvSpPr>
-          <p:cNvPr id="8" name="imgph" descr="IMGQ:copper gas pipe fittings on wall"/>
+              <a:t>En este vídeo</a:t>
+            </a:r>
+          </a:p>
+        </p:txBody>
+      </p:sp>
+      <p:sp>
+        <p:nvSpPr>
+          <p:cNvPr id="7" name="Rounded Rectangle 6"/>
           <p:cNvSpPr/>
           <p:nvPr/>
         </p:nvSpPr>
         <p:spPr>
           <a:xfrm>
-            <a:off x="5806440" y="1051560"/>
-            <a:ext cx="5298947" cy="4629150"/>
+            <a:off x="868680" y="1673352"/>
+            <a:ext cx="2011680" cy="73152"/>
           </a:xfrm>
           <a:prstGeom prst="roundRect">
             <a:avLst/>
           </a:prstGeom>
           <a:solidFill>
-            <a:srgbClr val="F3F6FB"/>
+            <a:srgbClr val="E8801A"/>
           </a:solidFill>
-          <a:ln w="12700">
-            <a:solidFill>
-              <a:srgbClr val="C7D2E6"/>
-            </a:solidFill>
+          <a:ln>
+            <a:noFill/>
           </a:ln>
           <a:effectLst/>
         </p:spPr>
@@ -7983,14 +8711,14 @@
       </p:sp>
       <p:sp>
         <p:nvSpPr>
-          <p:cNvPr id="9" name="TextBox 8"/>
+          <p:cNvPr id="8" name="TextBox 7"/>
           <p:cNvSpPr txBox="1"/>
           <p:nvPr/>
         </p:nvSpPr>
         <p:spPr>
           <a:xfrm>
-            <a:off x="6080760" y="2726055"/>
-            <a:ext cx="4750307" cy="1280160"/>
+            <a:off x="822960" y="2103120"/>
+            <a:ext cx="10515600" cy="4023360"/>
           </a:xfrm>
           <a:prstGeom prst="rect">
             <a:avLst/>
@@ -8003,27 +8731,228 @@
           </a:bodyPr>
           <a:lstStyle/>
           <a:p>
-            <a:pPr algn="ctr"/>
-            <a:r>
-              <a:rPr sz="1400" b="1" i="0">
-                <a:solidFill>
-                  <a:srgbClr val="64748B"/>
-                </a:solidFill>
-                <a:latin typeface="Montserrat"/>
-              </a:rPr>
-              <a:t>IMAGEN REALISTA</a:t>
-            </a:r>
-          </a:p>
-          <a:p>
-            <a:pPr algn="ctr"/>
-            <a:r>
-              <a:rPr sz="1100" b="0" i="1">
-                <a:solidFill>
-                  <a:srgbClr val="64748B"/>
-                </a:solidFill>
-                <a:latin typeface="Montserrat"/>
-              </a:rPr>
-              <a:t>copper gas pipe fittings on wall</a:t>
+            <a:pPr>
+              <a:spcAft>
+                <a:spcPts val="900"/>
+              </a:spcAft>
+            </a:pPr>
+            <a:r>
+              <a:rPr sz="1800" b="1" i="0">
+                <a:solidFill>
+                  <a:srgbClr val="E8801A"/>
+                </a:solidFill>
+                <a:latin typeface="Montserrat"/>
+              </a:rPr>
+              <a:t>01   </a:t>
+            </a:r>
+            <a:r>
+              <a:rPr sz="1700" b="0" i="0">
+                <a:solidFill>
+                  <a:srgbClr val="1B2330"/>
+                </a:solidFill>
+                <a:latin typeface="Montserrat"/>
+              </a:rPr>
+              <a:t>4.1</a:t>
+            </a:r>
+          </a:p>
+          <a:p>
+            <a:pPr>
+              <a:spcAft>
+                <a:spcPts val="900"/>
+              </a:spcAft>
+            </a:pPr>
+            <a:r>
+              <a:rPr sz="1800" b="1" i="0">
+                <a:solidFill>
+                  <a:srgbClr val="E8801A"/>
+                </a:solidFill>
+                <a:latin typeface="Montserrat"/>
+              </a:rPr>
+              <a:t>02   </a:t>
+            </a:r>
+            <a:r>
+              <a:rPr sz="1700" b="0" i="0">
+                <a:solidFill>
+                  <a:srgbClr val="1B2330"/>
+                </a:solidFill>
+                <a:latin typeface="Montserrat"/>
+              </a:rPr>
+              <a:t>4.2</a:t>
+            </a:r>
+          </a:p>
+          <a:p>
+            <a:pPr>
+              <a:spcAft>
+                <a:spcPts val="900"/>
+              </a:spcAft>
+            </a:pPr>
+            <a:r>
+              <a:rPr sz="1800" b="1" i="0">
+                <a:solidFill>
+                  <a:srgbClr val="E8801A"/>
+                </a:solidFill>
+                <a:latin typeface="Montserrat"/>
+              </a:rPr>
+              <a:t>03   </a:t>
+            </a:r>
+            <a:r>
+              <a:rPr sz="1700" b="0" i="0">
+                <a:solidFill>
+                  <a:srgbClr val="1B2330"/>
+                </a:solidFill>
+                <a:latin typeface="Montserrat"/>
+              </a:rPr>
+              <a:t>Regla de oro</a:t>
+            </a:r>
+          </a:p>
+          <a:p>
+            <a:pPr>
+              <a:spcAft>
+                <a:spcPts val="900"/>
+              </a:spcAft>
+            </a:pPr>
+            <a:r>
+              <a:rPr sz="1800" b="1" i="0">
+                <a:solidFill>
+                  <a:srgbClr val="E8801A"/>
+                </a:solidFill>
+                <a:latin typeface="Montserrat"/>
+              </a:rPr>
+              <a:t>04   </a:t>
+            </a:r>
+            <a:r>
+              <a:rPr sz="1700" b="0" i="0">
+                <a:solidFill>
+                  <a:srgbClr val="1B2330"/>
+                </a:solidFill>
+                <a:latin typeface="Montserrat"/>
+              </a:rPr>
+              <a:t>4.3</a:t>
+            </a:r>
+          </a:p>
+          <a:p>
+            <a:pPr>
+              <a:spcAft>
+                <a:spcPts val="900"/>
+              </a:spcAft>
+            </a:pPr>
+            <a:r>
+              <a:rPr sz="1800" b="1" i="0">
+                <a:solidFill>
+                  <a:srgbClr val="E8801A"/>
+                </a:solidFill>
+                <a:latin typeface="Montserrat"/>
+              </a:rPr>
+              <a:t>05   </a:t>
+            </a:r>
+            <a:r>
+              <a:rPr sz="1700" b="0" i="0">
+                <a:solidFill>
+                  <a:srgbClr val="1B2330"/>
+                </a:solidFill>
+                <a:latin typeface="Montserrat"/>
+              </a:rPr>
+              <a:t>4.4</a:t>
+            </a:r>
+          </a:p>
+          <a:p>
+            <a:pPr>
+              <a:spcAft>
+                <a:spcPts val="900"/>
+              </a:spcAft>
+            </a:pPr>
+            <a:r>
+              <a:rPr sz="1800" b="1" i="0">
+                <a:solidFill>
+                  <a:srgbClr val="E8801A"/>
+                </a:solidFill>
+                <a:latin typeface="Montserrat"/>
+              </a:rPr>
+              <a:t>06   </a:t>
+            </a:r>
+            <a:r>
+              <a:rPr sz="1700" b="0" i="0">
+                <a:solidFill>
+                  <a:srgbClr val="1B2330"/>
+                </a:solidFill>
+                <a:latin typeface="Montserrat"/>
+              </a:rPr>
+              <a:t>Montaje</a:t>
+            </a:r>
+          </a:p>
+          <a:p>
+            <a:pPr>
+              <a:spcAft>
+                <a:spcPts val="900"/>
+              </a:spcAft>
+            </a:pPr>
+            <a:r>
+              <a:rPr sz="1800" b="1" i="0">
+                <a:solidFill>
+                  <a:srgbClr val="E8801A"/>
+                </a:solidFill>
+                <a:latin typeface="Montserrat"/>
+              </a:rPr>
+              <a:t>07   </a:t>
+            </a:r>
+            <a:r>
+              <a:rPr sz="1700" b="0" i="0">
+                <a:solidFill>
+                  <a:srgbClr val="1B2330"/>
+                </a:solidFill>
+                <a:latin typeface="Montserrat"/>
+              </a:rPr>
+              <a:t>Prohibición</a:t>
+            </a:r>
+          </a:p>
+          <a:p>
+            <a:pPr>
+              <a:spcAft>
+                <a:spcPts val="900"/>
+              </a:spcAft>
+            </a:pPr>
+            <a:r>
+              <a:rPr sz="1800" b="1" i="0">
+                <a:solidFill>
+                  <a:srgbClr val="E8801A"/>
+                </a:solidFill>
+                <a:latin typeface="Montserrat"/>
+              </a:rPr>
+              <a:t>08   </a:t>
+            </a:r>
+            <a:r>
+              <a:rPr sz="1700" b="0" i="0">
+                <a:solidFill>
+                  <a:srgbClr val="1B2330"/>
+                </a:solidFill>
+                <a:latin typeface="Montserrat"/>
+              </a:rPr>
+              <a:t>4.5</a:t>
+            </a:r>
+          </a:p>
+          <a:p>
+            <a:pPr>
+              <a:spcAft>
+                <a:spcPts val="900"/>
+              </a:spcAft>
+            </a:pPr>
+            <a:r>
+              <a:rPr sz="1800" b="1" i="0">
+                <a:solidFill>
+                  <a:srgbClr val="E8801A"/>
+                </a:solidFill>
+                <a:latin typeface="Montserrat"/>
+              </a:rPr>
+              <a:t>09   </a:t>
+            </a:r>
+            <a:r>
+              <a:rPr sz="1700" b="0" i="0">
+                <a:solidFill>
+                  <a:srgbClr val="1B2330"/>
+                </a:solidFill>
+                <a:latin typeface="Montserrat"/>
+              </a:rPr>
+              <a:t>4.6</a:t>
             </a:r>
           </a:p>
         </p:txBody>
@@ -8120,7 +9049,7 @@
                 </a:solidFill>
                 <a:latin typeface="Montserrat"/>
               </a:rPr>
-              <a:t>004 / 015</a:t>
+              <a:t>004 / 016</a:t>
             </a:r>
           </a:p>
         </p:txBody>
@@ -8168,7 +9097,7 @@
         <p:spPr>
           <a:xfrm>
             <a:off x="822960" y="457200"/>
-            <a:ext cx="8229600" cy="365760"/>
+            <a:ext cx="10058400" cy="365760"/>
           </a:xfrm>
           <a:prstGeom prst="rect">
             <a:avLst/>
@@ -8182,13 +9111,13 @@
           <a:lstStyle/>
           <a:p>
             <a:r>
-              <a:rPr sz="1200" b="1" i="0">
-                <a:solidFill>
-                  <a:srgbClr val="64748B"/>
-                </a:solidFill>
-                <a:latin typeface="Montserrat"/>
-              </a:rPr>
-              <a:t>4.2 · ACERO INOX CORRUGADO</a:t>
+              <a:rPr sz="1300" b="1" i="0">
+                <a:solidFill>
+                  <a:srgbClr val="E8801A"/>
+                </a:solidFill>
+                <a:latin typeface="Montserrat"/>
+              </a:rPr>
+              <a:t>4.1 · CONEXIÓN RÍGIDA</a:t>
             </a:r>
           </a:p>
         </p:txBody>
@@ -8216,26 +9145,70 @@
           <a:lstStyle/>
           <a:p>
             <a:r>
-              <a:rPr sz="2700" b="1" i="0">
+              <a:rPr sz="2800" b="1" i="0">
                 <a:solidFill>
                   <a:srgbClr val="1E2761"/>
                 </a:solidFill>
                 <a:latin typeface="Montserrat"/>
               </a:rPr>
-              <a:t>Flexible de acero corrugado</a:t>
-            </a:r>
-          </a:p>
-        </p:txBody>
-      </p:sp>
-      <p:sp>
-        <p:nvSpPr>
-          <p:cNvPr id="7" name="TextBox 6"/>
+              <a:t>Rígida: el mismo tubo</a:t>
+            </a:r>
+          </a:p>
+        </p:txBody>
+      </p:sp>
+      <p:sp>
+        <p:nvSpPr>
+          <p:cNvPr id="7" name="Rounded Rectangle 6"/>
+          <p:cNvSpPr/>
+          <p:nvPr/>
+        </p:nvSpPr>
+        <p:spPr>
+          <a:xfrm>
+            <a:off x="868680" y="1627632"/>
+            <a:ext cx="2011680" cy="73152"/>
+          </a:xfrm>
+          <a:prstGeom prst="roundRect">
+            <a:avLst/>
+          </a:prstGeom>
+          <a:solidFill>
+            <a:srgbClr val="E8801A"/>
+          </a:solidFill>
+          <a:ln>
+            <a:noFill/>
+          </a:ln>
+          <a:effectLst/>
+        </p:spPr>
+        <p:style>
+          <a:lnRef idx="1">
+            <a:schemeClr val="accent1"/>
+          </a:lnRef>
+          <a:fillRef idx="3">
+            <a:schemeClr val="accent1"/>
+          </a:fillRef>
+          <a:effectRef idx="2">
+            <a:schemeClr val="accent1"/>
+          </a:effectRef>
+          <a:fontRef idx="minor">
+            <a:schemeClr val="lt1"/>
+          </a:fontRef>
+        </p:style>
+        <p:txBody>
+          <a:bodyPr rtlCol="0" anchor="ctr"/>
+          <a:lstStyle/>
+          <a:p>
+            <a:pPr algn="ctr"/>
+          </a:p>
+        </p:txBody>
+      </p:sp>
+      <p:sp>
+        <p:nvSpPr>
+          <p:cNvPr id="8" name="TextBox 7"/>
           <p:cNvSpPr txBox="1"/>
           <p:nvPr/>
         </p:nvSpPr>
         <p:spPr>
           <a:xfrm>
-            <a:off x="822960" y="1920240"/>
+            <a:off x="822960" y="1965960"/>
             <a:ext cx="4983480" cy="4206240"/>
           </a:xfrm>
           <a:prstGeom prst="rect">
@@ -8251,17 +9224,17 @@
           <a:p>
             <a:pPr>
               <a:spcAft>
-                <a:spcPts val="1000"/>
+                <a:spcPts val="1100"/>
               </a:spcAft>
             </a:pPr>
             <a:r>
               <a:rPr sz="1600" b="1" i="0">
                 <a:solidFill>
-                  <a:srgbClr val="2E3A80"/>
-                </a:solidFill>
-                <a:latin typeface="Montserrat"/>
-              </a:rPr>
-              <a:t>•  </a:t>
+                  <a:srgbClr val="E8801A"/>
+                </a:solidFill>
+                <a:latin typeface="Montserrat"/>
+              </a:rPr>
+              <a:t>▸  </a:t>
             </a:r>
             <a:r>
               <a:rPr sz="1600" b="0" i="0">
@@ -8270,23 +9243,23 @@
                 </a:solidFill>
                 <a:latin typeface="Montserrat"/>
               </a:rPr>
-              <a:t>Doméstico: UNE 60713</a:t>
+              <a:t>Cobre, acero, inox, multicapa</a:t>
             </a:r>
           </a:p>
           <a:p>
             <a:pPr>
               <a:spcAft>
-                <a:spcPts val="1000"/>
+                <a:spcPts val="1100"/>
               </a:spcAft>
             </a:pPr>
             <a:r>
               <a:rPr sz="1600" b="1" i="0">
                 <a:solidFill>
-                  <a:srgbClr val="2E3A80"/>
-                </a:solidFill>
-                <a:latin typeface="Montserrat"/>
-              </a:rPr>
-              <a:t>•  </a:t>
+                  <a:srgbClr val="E8801A"/>
+                </a:solidFill>
+                <a:latin typeface="Montserrat"/>
+              </a:rPr>
+              <a:t>▸  </a:t>
             </a:r>
             <a:r>
               <a:rPr sz="1600" b="0" i="0">
@@ -8295,23 +9268,23 @@
                 </a:solidFill>
                 <a:latin typeface="Montserrat"/>
               </a:rPr>
-              <a:t>No doméstico: si falta caudal, ISO 10380</a:t>
+              <a:t>Uniones según UNE 60670-3</a:t>
             </a:r>
           </a:p>
           <a:p>
             <a:pPr>
               <a:spcAft>
-                <a:spcPts val="1000"/>
+                <a:spcPts val="1100"/>
               </a:spcAft>
             </a:pPr>
             <a:r>
               <a:rPr sz="1600" b="1" i="0">
                 <a:solidFill>
-                  <a:srgbClr val="2E3A80"/>
-                </a:solidFill>
-                <a:latin typeface="Montserrat"/>
-              </a:rPr>
-              <a:t>•  </a:t>
+                  <a:srgbClr val="E8801A"/>
+                </a:solidFill>
+                <a:latin typeface="Montserrat"/>
+              </a:rPr>
+              <a:t>▸  </a:t>
             </a:r>
             <a:r>
               <a:rPr sz="1600" b="0" i="0">
@@ -8320,23 +9293,23 @@
                 </a:solidFill>
                 <a:latin typeface="Montserrat"/>
               </a:rPr>
-              <a:t>2 m si DN ≤ 15</a:t>
+              <a:t>Exclusiva para aparatos fijos</a:t>
             </a:r>
           </a:p>
           <a:p>
             <a:pPr>
               <a:spcAft>
-                <a:spcPts val="1000"/>
+                <a:spcPts val="1100"/>
               </a:spcAft>
             </a:pPr>
             <a:r>
               <a:rPr sz="1600" b="1" i="0">
                 <a:solidFill>
-                  <a:srgbClr val="2E3A80"/>
-                </a:solidFill>
-                <a:latin typeface="Montserrat"/>
-              </a:rPr>
-              <a:t>•  </a:t>
+                  <a:srgbClr val="E8801A"/>
+                </a:solidFill>
+                <a:latin typeface="Montserrat"/>
+              </a:rPr>
+              <a:t>▸  </a:t>
             </a:r>
             <a:r>
               <a:rPr sz="1600" b="0" i="0">
@@ -8345,14 +9318,14 @@
                 </a:solidFill>
                 <a:latin typeface="Montserrat"/>
               </a:rPr>
-              <a:t>0,470 m si DN &gt; 15</a:t>
-            </a:r>
-          </a:p>
-        </p:txBody>
-      </p:sp>
-      <p:sp>
-        <p:nvSpPr>
-          <p:cNvPr id="8" name="imgph" descr="IMGQ:corrugated stainless steel gas hose"/>
+              <a:t>Uniones mecánicas por junta plana</a:t>
+            </a:r>
+          </a:p>
+        </p:txBody>
+      </p:sp>
+      <p:sp>
+        <p:nvSpPr>
+          <p:cNvPr id="9" name="imgph" descr="IMGQ:copper gas pipe fittings on wall"/>
           <p:cNvSpPr/>
           <p:nvPr/>
         </p:nvSpPr>
@@ -8398,7 +9371,7 @@
       </p:sp>
       <p:sp>
         <p:nvSpPr>
-          <p:cNvPr id="9" name="TextBox 8"/>
+          <p:cNvPr id="10" name="TextBox 9"/>
           <p:cNvSpPr txBox="1"/>
           <p:nvPr/>
         </p:nvSpPr>
@@ -8438,7 +9411,7 @@
                 </a:solidFill>
                 <a:latin typeface="Montserrat"/>
               </a:rPr>
-              <a:t>corrugated stainless steel gas hose</a:t>
+              <a:t>copper gas pipe fittings on wall</a:t>
             </a:r>
           </a:p>
         </p:txBody>
@@ -8535,7 +9508,7 @@
                 </a:solidFill>
                 <a:latin typeface="Montserrat"/>
               </a:rPr>
-              <a:t>005 / 015</a:t>
+              <a:t>005 / 016</a:t>
             </a:r>
           </a:p>
         </p:txBody>
@@ -8583,7 +9556,7 @@
         <p:spPr>
           <a:xfrm>
             <a:off x="822960" y="457200"/>
-            <a:ext cx="8229600" cy="365760"/>
+            <a:ext cx="10058400" cy="365760"/>
           </a:xfrm>
           <a:prstGeom prst="rect">
             <a:avLst/>
@@ -8597,13 +9570,13 @@
           <a:lstStyle/>
           <a:p>
             <a:r>
-              <a:rPr sz="1200" b="1" i="0">
-                <a:solidFill>
-                  <a:srgbClr val="64748B"/>
-                </a:solidFill>
-                <a:latin typeface="Montserrat"/>
-              </a:rPr>
-              <a:t>REGLA DE ORO</a:t>
+              <a:rPr sz="1300" b="1" i="0">
+                <a:solidFill>
+                  <a:srgbClr val="E8801A"/>
+                </a:solidFill>
+                <a:latin typeface="Montserrat"/>
+              </a:rPr>
+              <a:t>4.2 · ACERO INOX CORRUGADO</a:t>
             </a:r>
           </a:p>
         </p:txBody>
@@ -8631,26 +9604,70 @@
           <a:lstStyle/>
           <a:p>
             <a:r>
-              <a:rPr sz="2700" b="1" i="0">
+              <a:rPr sz="2800" b="1" i="0">
                 <a:solidFill>
                   <a:srgbClr val="1E2761"/>
                 </a:solidFill>
                 <a:latin typeface="Montserrat"/>
               </a:rPr>
-              <a:t>El flexible, nunca bajo las llamas</a:t>
-            </a:r>
-          </a:p>
-        </p:txBody>
-      </p:sp>
-      <p:sp>
-        <p:nvSpPr>
-          <p:cNvPr id="7" name="TextBox 6"/>
+              <a:t>Flexible de acero corrugado</a:t>
+            </a:r>
+          </a:p>
+        </p:txBody>
+      </p:sp>
+      <p:sp>
+        <p:nvSpPr>
+          <p:cNvPr id="7" name="Rounded Rectangle 6"/>
+          <p:cNvSpPr/>
+          <p:nvPr/>
+        </p:nvSpPr>
+        <p:spPr>
+          <a:xfrm>
+            <a:off x="868680" y="1627632"/>
+            <a:ext cx="2011680" cy="73152"/>
+          </a:xfrm>
+          <a:prstGeom prst="roundRect">
+            <a:avLst/>
+          </a:prstGeom>
+          <a:solidFill>
+            <a:srgbClr val="E8801A"/>
+          </a:solidFill>
+          <a:ln>
+            <a:noFill/>
+          </a:ln>
+          <a:effectLst/>
+        </p:spPr>
+        <p:style>
+          <a:lnRef idx="1">
+            <a:schemeClr val="accent1"/>
+          </a:lnRef>
+          <a:fillRef idx="3">
+            <a:schemeClr val="accent1"/>
+          </a:fillRef>
+          <a:effectRef idx="2">
+            <a:schemeClr val="accent1"/>
+          </a:effectRef>
+          <a:fontRef idx="minor">
+            <a:schemeClr val="lt1"/>
+          </a:fontRef>
+        </p:style>
+        <p:txBody>
+          <a:bodyPr rtlCol="0" anchor="ctr"/>
+          <a:lstStyle/>
+          <a:p>
+            <a:pPr algn="ctr"/>
+          </a:p>
+        </p:txBody>
+      </p:sp>
+      <p:sp>
+        <p:nvSpPr>
+          <p:cNvPr id="8" name="TextBox 7"/>
           <p:cNvSpPr txBox="1"/>
           <p:nvPr/>
         </p:nvSpPr>
         <p:spPr>
           <a:xfrm>
-            <a:off x="822960" y="1920240"/>
+            <a:off x="822960" y="1965960"/>
             <a:ext cx="4983480" cy="4206240"/>
           </a:xfrm>
           <a:prstGeom prst="rect">
@@ -8666,17 +9683,17 @@
           <a:p>
             <a:pPr>
               <a:spcAft>
-                <a:spcPts val="1000"/>
+                <a:spcPts val="1100"/>
               </a:spcAft>
             </a:pPr>
             <a:r>
               <a:rPr sz="1600" b="1" i="0">
                 <a:solidFill>
-                  <a:srgbClr val="2E3A80"/>
-                </a:solidFill>
-                <a:latin typeface="Montserrat"/>
-              </a:rPr>
-              <a:t>•  </a:t>
+                  <a:srgbClr val="E8801A"/>
+                </a:solidFill>
+                <a:latin typeface="Montserrat"/>
+              </a:rPr>
+              <a:t>▸  </a:t>
             </a:r>
             <a:r>
               <a:rPr sz="1600" b="0" i="0">
@@ -8685,23 +9702,23 @@
                 </a:solidFill>
                 <a:latin typeface="Montserrat"/>
               </a:rPr>
-              <a:t>Longitud: la mínima necesaria</a:t>
+              <a:t>Doméstico: UNE 60713</a:t>
             </a:r>
           </a:p>
           <a:p>
             <a:pPr>
               <a:spcAft>
-                <a:spcPts val="1000"/>
+                <a:spcPts val="1100"/>
               </a:spcAft>
             </a:pPr>
             <a:r>
               <a:rPr sz="1600" b="1" i="0">
                 <a:solidFill>
-                  <a:srgbClr val="2E3A80"/>
-                </a:solidFill>
-                <a:latin typeface="Montserrat"/>
-              </a:rPr>
-              <a:t>•  </a:t>
+                  <a:srgbClr val="E8801A"/>
+                </a:solidFill>
+                <a:latin typeface="Montserrat"/>
+              </a:rPr>
+              <a:t>▸  </a:t>
             </a:r>
             <a:r>
               <a:rPr sz="1600" b="0" i="0">
@@ -8710,23 +9727,23 @@
                 </a:solidFill>
                 <a:latin typeface="Montserrat"/>
               </a:rPr>
-              <a:t>Sin contacto con partes calientes</a:t>
+              <a:t>No doméstico: si falta caudal, ISO 10380</a:t>
             </a:r>
           </a:p>
           <a:p>
             <a:pPr>
               <a:spcAft>
-                <a:spcPts val="1000"/>
+                <a:spcPts val="1100"/>
               </a:spcAft>
             </a:pPr>
             <a:r>
               <a:rPr sz="1600" b="1" i="0">
                 <a:solidFill>
-                  <a:srgbClr val="2E3A80"/>
-                </a:solidFill>
-                <a:latin typeface="Montserrat"/>
-              </a:rPr>
-              <a:t>•  </a:t>
+                  <a:srgbClr val="E8801A"/>
+                </a:solidFill>
+                <a:latin typeface="Montserrat"/>
+              </a:rPr>
+              <a:t>▸  </a:t>
             </a:r>
             <a:r>
               <a:rPr sz="1600" b="0" i="0">
@@ -8735,14 +9752,39 @@
                 </a:solidFill>
                 <a:latin typeface="Montserrat"/>
               </a:rPr>
-              <a:t>Un tubo largo se reseca y fuga</a:t>
-            </a:r>
-          </a:p>
-        </p:txBody>
-      </p:sp>
-      <p:sp>
-        <p:nvSpPr>
-          <p:cNvPr id="8" name="imgph" descr="IMGQ:blue gas flame burner fire"/>
+              <a:t>2 m si DN ≤ 15</a:t>
+            </a:r>
+          </a:p>
+          <a:p>
+            <a:pPr>
+              <a:spcAft>
+                <a:spcPts val="1100"/>
+              </a:spcAft>
+            </a:pPr>
+            <a:r>
+              <a:rPr sz="1600" b="1" i="0">
+                <a:solidFill>
+                  <a:srgbClr val="E8801A"/>
+                </a:solidFill>
+                <a:latin typeface="Montserrat"/>
+              </a:rPr>
+              <a:t>▸  </a:t>
+            </a:r>
+            <a:r>
+              <a:rPr sz="1600" b="0" i="0">
+                <a:solidFill>
+                  <a:srgbClr val="1B2330"/>
+                </a:solidFill>
+                <a:latin typeface="Montserrat"/>
+              </a:rPr>
+              <a:t>0,470 m si DN &gt; 15</a:t>
+            </a:r>
+          </a:p>
+        </p:txBody>
+      </p:sp>
+      <p:sp>
+        <p:nvSpPr>
+          <p:cNvPr id="9" name="imgph" descr="IMGQ:corrugated stainless steel gas hose"/>
           <p:cNvSpPr/>
           <p:nvPr/>
         </p:nvSpPr>
@@ -8788,7 +9830,7 @@
       </p:sp>
       <p:sp>
         <p:nvSpPr>
-          <p:cNvPr id="9" name="TextBox 8"/>
+          <p:cNvPr id="10" name="TextBox 9"/>
           <p:cNvSpPr txBox="1"/>
           <p:nvPr/>
         </p:nvSpPr>
@@ -8828,7 +9870,7 @@
                 </a:solidFill>
                 <a:latin typeface="Montserrat"/>
               </a:rPr>
-              <a:t>blue gas flame burner fire</a:t>
+              <a:t>corrugated stainless steel gas hose</a:t>
             </a:r>
           </a:p>
         </p:txBody>
@@ -8925,7 +9967,7 @@
                 </a:solidFill>
                 <a:latin typeface="Montserrat"/>
               </a:rPr>
-              <a:t>006 / 015</a:t>
+              <a:t>006 / 016</a:t>
             </a:r>
           </a:p>
         </p:txBody>
@@ -8973,7 +10015,7 @@
         <p:spPr>
           <a:xfrm>
             <a:off x="822960" y="457200"/>
-            <a:ext cx="8229600" cy="365760"/>
+            <a:ext cx="10058400" cy="365760"/>
           </a:xfrm>
           <a:prstGeom prst="rect">
             <a:avLst/>
@@ -8987,13 +10029,13 @@
           <a:lstStyle/>
           <a:p>
             <a:r>
-              <a:rPr sz="1200" b="1" i="0">
-                <a:solidFill>
-                  <a:srgbClr val="64748B"/>
-                </a:solidFill>
-                <a:latin typeface="Montserrat"/>
-              </a:rPr>
-              <a:t>4.3 · ESPIROMETÁLICA CON ENCHUFE</a:t>
+              <a:rPr sz="1300" b="1" i="0">
+                <a:solidFill>
+                  <a:srgbClr val="E8801A"/>
+                </a:solidFill>
+                <a:latin typeface="Montserrat"/>
+              </a:rPr>
+              <a:t>REGLA DE ORO</a:t>
             </a:r>
           </a:p>
         </p:txBody>
@@ -9021,26 +10063,70 @@
           <a:lstStyle/>
           <a:p>
             <a:r>
-              <a:rPr sz="2700" b="1" i="0">
+              <a:rPr sz="2800" b="1" i="0">
                 <a:solidFill>
                   <a:srgbClr val="1E2761"/>
                 </a:solidFill>
                 <a:latin typeface="Montserrat"/>
               </a:rPr>
-              <a:t>Espirometálica: 1,5 m</a:t>
-            </a:r>
-          </a:p>
-        </p:txBody>
-      </p:sp>
-      <p:sp>
-        <p:nvSpPr>
-          <p:cNvPr id="7" name="TextBox 6"/>
+              <a:t>El flexible, nunca bajo las llamas</a:t>
+            </a:r>
+          </a:p>
+        </p:txBody>
+      </p:sp>
+      <p:sp>
+        <p:nvSpPr>
+          <p:cNvPr id="7" name="Rounded Rectangle 6"/>
+          <p:cNvSpPr/>
+          <p:nvPr/>
+        </p:nvSpPr>
+        <p:spPr>
+          <a:xfrm>
+            <a:off x="868680" y="1627632"/>
+            <a:ext cx="2011680" cy="73152"/>
+          </a:xfrm>
+          <a:prstGeom prst="roundRect">
+            <a:avLst/>
+          </a:prstGeom>
+          <a:solidFill>
+            <a:srgbClr val="E8801A"/>
+          </a:solidFill>
+          <a:ln>
+            <a:noFill/>
+          </a:ln>
+          <a:effectLst/>
+        </p:spPr>
+        <p:style>
+          <a:lnRef idx="1">
+            <a:schemeClr val="accent1"/>
+          </a:lnRef>
+          <a:fillRef idx="3">
+            <a:schemeClr val="accent1"/>
+          </a:fillRef>
+          <a:effectRef idx="2">
+            <a:schemeClr val="accent1"/>
+          </a:effectRef>
+          <a:fontRef idx="minor">
+            <a:schemeClr val="lt1"/>
+          </a:fontRef>
+        </p:style>
+        <p:txBody>
+          <a:bodyPr rtlCol="0" anchor="ctr"/>
+          <a:lstStyle/>
+          <a:p>
+            <a:pPr algn="ctr"/>
+          </a:p>
+        </p:txBody>
+      </p:sp>
+      <p:sp>
+        <p:nvSpPr>
+          <p:cNvPr id="8" name="TextBox 7"/>
           <p:cNvSpPr txBox="1"/>
           <p:nvPr/>
         </p:nvSpPr>
         <p:spPr>
           <a:xfrm>
-            <a:off x="822960" y="1920240"/>
+            <a:off x="822960" y="1965960"/>
             <a:ext cx="4983480" cy="4206240"/>
           </a:xfrm>
           <a:prstGeom prst="rect">
@@ -9056,17 +10142,17 @@
           <a:p>
             <a:pPr>
               <a:spcAft>
-                <a:spcPts val="1000"/>
+                <a:spcPts val="1100"/>
               </a:spcAft>
             </a:pPr>
             <a:r>
               <a:rPr sz="1600" b="1" i="0">
                 <a:solidFill>
-                  <a:srgbClr val="2E3A80"/>
-                </a:solidFill>
-                <a:latin typeface="Montserrat"/>
-              </a:rPr>
-              <a:t>•  </a:t>
+                  <a:srgbClr val="E8801A"/>
+                </a:solidFill>
+                <a:latin typeface="Montserrat"/>
+              </a:rPr>
+              <a:t>▸  </a:t>
             </a:r>
             <a:r>
               <a:rPr sz="1600" b="0" i="0">
@@ -9075,23 +10161,23 @@
                 </a:solidFill>
                 <a:latin typeface="Montserrat"/>
               </a:rPr>
-              <a:t>Lleva enchufe de seguridad</a:t>
+              <a:t>Longitud: la mínima necesaria</a:t>
             </a:r>
           </a:p>
           <a:p>
             <a:pPr>
               <a:spcAft>
-                <a:spcPts val="1000"/>
+                <a:spcPts val="1100"/>
               </a:spcAft>
             </a:pPr>
             <a:r>
               <a:rPr sz="1600" b="1" i="0">
                 <a:solidFill>
-                  <a:srgbClr val="2E3A80"/>
-                </a:solidFill>
-                <a:latin typeface="Montserrat"/>
-              </a:rPr>
-              <a:t>•  </a:t>
+                  <a:srgbClr val="E8801A"/>
+                </a:solidFill>
+                <a:latin typeface="Montserrat"/>
+              </a:rPr>
+              <a:t>▸  </a:t>
             </a:r>
             <a:r>
               <a:rPr sz="1600" b="0" i="0">
@@ -9100,23 +10186,23 @@
                 </a:solidFill>
                 <a:latin typeface="Montserrat"/>
               </a:rPr>
-              <a:t>Exclusiva de uso doméstico</a:t>
+              <a:t>Sin contacto con partes calientes</a:t>
             </a:r>
           </a:p>
           <a:p>
             <a:pPr>
               <a:spcAft>
-                <a:spcPts val="1000"/>
+                <a:spcPts val="1100"/>
               </a:spcAft>
             </a:pPr>
             <a:r>
               <a:rPr sz="1600" b="1" i="0">
                 <a:solidFill>
-                  <a:srgbClr val="2E3A80"/>
-                </a:solidFill>
-                <a:latin typeface="Montserrat"/>
-              </a:rPr>
-              <a:t>•  </a:t>
+                  <a:srgbClr val="E8801A"/>
+                </a:solidFill>
+                <a:latin typeface="Montserrat"/>
+              </a:rPr>
+              <a:t>▸  </a:t>
             </a:r>
             <a:r>
               <a:rPr sz="1600" b="0" i="0">
@@ -9125,39 +10211,14 @@
                 </a:solidFill>
                 <a:latin typeface="Montserrat"/>
               </a:rPr>
-              <a:t>Longitud máxima 1,5 m</a:t>
-            </a:r>
-          </a:p>
-          <a:p>
-            <a:pPr>
-              <a:spcAft>
-                <a:spcPts val="1000"/>
-              </a:spcAft>
-            </a:pPr>
-            <a:r>
-              <a:rPr sz="1600" b="1" i="0">
-                <a:solidFill>
-                  <a:srgbClr val="2E3A80"/>
-                </a:solidFill>
-                <a:latin typeface="Montserrat"/>
-              </a:rPr>
-              <a:t>•  </a:t>
-            </a:r>
-            <a:r>
-              <a:rPr sz="1600" b="0" i="0">
-                <a:solidFill>
-                  <a:srgbClr val="1B2330"/>
-                </a:solidFill>
-                <a:latin typeface="Montserrat"/>
-              </a:rPr>
-              <a:t>Calefacción móvil: 0,6 m</a:t>
-            </a:r>
-          </a:p>
-        </p:txBody>
-      </p:sp>
-      <p:sp>
-        <p:nvSpPr>
-          <p:cNvPr id="8" name="imgph" descr="IMGQ:spiral metal flexible gas hose"/>
+              <a:t>Un tubo largo se reseca y fuga</a:t>
+            </a:r>
+          </a:p>
+        </p:txBody>
+      </p:sp>
+      <p:sp>
+        <p:nvSpPr>
+          <p:cNvPr id="9" name="imgph" descr="IMGQ:blue gas flame burner fire"/>
           <p:cNvSpPr/>
           <p:nvPr/>
         </p:nvSpPr>
@@ -9203,7 +10264,7 @@
       </p:sp>
       <p:sp>
         <p:nvSpPr>
-          <p:cNvPr id="9" name="TextBox 8"/>
+          <p:cNvPr id="10" name="TextBox 9"/>
           <p:cNvSpPr txBox="1"/>
           <p:nvPr/>
         </p:nvSpPr>
@@ -9243,7 +10304,7 @@
                 </a:solidFill>
                 <a:latin typeface="Montserrat"/>
               </a:rPr>
-              <a:t>spiral metal flexible gas hose</a:t>
+              <a:t>blue gas flame burner fire</a:t>
             </a:r>
           </a:p>
         </p:txBody>
@@ -9340,7 +10401,7 @@
                 </a:solidFill>
                 <a:latin typeface="Montserrat"/>
               </a:rPr>
-              <a:t>007 / 015</a:t>
+              <a:t>007 / 016</a:t>
             </a:r>
           </a:p>
         </p:txBody>
@@ -9388,7 +10449,7 @@
         <p:spPr>
           <a:xfrm>
             <a:off x="822960" y="457200"/>
-            <a:ext cx="8229600" cy="365760"/>
+            <a:ext cx="10058400" cy="365760"/>
           </a:xfrm>
           <a:prstGeom prst="rect">
             <a:avLst/>
@@ -9402,13 +10463,13 @@
           <a:lstStyle/>
           <a:p>
             <a:r>
-              <a:rPr sz="1200" b="1" i="0">
-                <a:solidFill>
-                  <a:srgbClr val="64748B"/>
-                </a:solidFill>
-                <a:latin typeface="Montserrat"/>
-              </a:rPr>
-              <a:t>4.4 · ACERO CORRUGADO CON ENCHUFE</a:t>
+              <a:rPr sz="1300" b="1" i="0">
+                <a:solidFill>
+                  <a:srgbClr val="E8801A"/>
+                </a:solidFill>
+                <a:latin typeface="Montserrat"/>
+              </a:rPr>
+              <a:t>4.3 · ESPIROMETÁLICA CON ENCHUFE</a:t>
             </a:r>
           </a:p>
         </p:txBody>
@@ -9436,26 +10497,70 @@
           <a:lstStyle/>
           <a:p>
             <a:r>
-              <a:rPr sz="2700" b="1" i="0">
+              <a:rPr sz="2800" b="1" i="0">
                 <a:solidFill>
                   <a:srgbClr val="1E2761"/>
                 </a:solidFill>
                 <a:latin typeface="Montserrat"/>
               </a:rPr>
-              <a:t>Con enchufe: 2 m</a:t>
-            </a:r>
-          </a:p>
-        </p:txBody>
-      </p:sp>
-      <p:sp>
-        <p:nvSpPr>
-          <p:cNvPr id="7" name="TextBox 6"/>
+              <a:t>Espirometálica: 1,5 m</a:t>
+            </a:r>
+          </a:p>
+        </p:txBody>
+      </p:sp>
+      <p:sp>
+        <p:nvSpPr>
+          <p:cNvPr id="7" name="Rounded Rectangle 6"/>
+          <p:cNvSpPr/>
+          <p:nvPr/>
+        </p:nvSpPr>
+        <p:spPr>
+          <a:xfrm>
+            <a:off x="868680" y="1627632"/>
+            <a:ext cx="2011680" cy="73152"/>
+          </a:xfrm>
+          <a:prstGeom prst="roundRect">
+            <a:avLst/>
+          </a:prstGeom>
+          <a:solidFill>
+            <a:srgbClr val="E8801A"/>
+          </a:solidFill>
+          <a:ln>
+            <a:noFill/>
+          </a:ln>
+          <a:effectLst/>
+        </p:spPr>
+        <p:style>
+          <a:lnRef idx="1">
+            <a:schemeClr val="accent1"/>
+          </a:lnRef>
+          <a:fillRef idx="3">
+            <a:schemeClr val="accent1"/>
+          </a:fillRef>
+          <a:effectRef idx="2">
+            <a:schemeClr val="accent1"/>
+          </a:effectRef>
+          <a:fontRef idx="minor">
+            <a:schemeClr val="lt1"/>
+          </a:fontRef>
+        </p:style>
+        <p:txBody>
+          <a:bodyPr rtlCol="0" anchor="ctr"/>
+          <a:lstStyle/>
+          <a:p>
+            <a:pPr algn="ctr"/>
+          </a:p>
+        </p:txBody>
+      </p:sp>
+      <p:sp>
+        <p:nvSpPr>
+          <p:cNvPr id="8" name="TextBox 7"/>
           <p:cNvSpPr txBox="1"/>
           <p:nvPr/>
         </p:nvSpPr>
         <p:spPr>
           <a:xfrm>
-            <a:off x="822960" y="1920240"/>
+            <a:off x="822960" y="1965960"/>
             <a:ext cx="4983480" cy="4206240"/>
           </a:xfrm>
           <a:prstGeom prst="rect">
@@ -9471,17 +10576,17 @@
           <a:p>
             <a:pPr>
               <a:spcAft>
-                <a:spcPts val="1000"/>
+                <a:spcPts val="1100"/>
               </a:spcAft>
             </a:pPr>
             <a:r>
               <a:rPr sz="1600" b="1" i="0">
                 <a:solidFill>
-                  <a:srgbClr val="2E3A80"/>
-                </a:solidFill>
-                <a:latin typeface="Montserrat"/>
-              </a:rPr>
-              <a:t>•  </a:t>
+                  <a:srgbClr val="E8801A"/>
+                </a:solidFill>
+                <a:latin typeface="Montserrat"/>
+              </a:rPr>
+              <a:t>▸  </a:t>
             </a:r>
             <a:r>
               <a:rPr sz="1600" b="0" i="0">
@@ -9490,23 +10595,23 @@
                 </a:solidFill>
                 <a:latin typeface="Montserrat"/>
               </a:rPr>
-              <a:t>Misma familia, con enchufe de seguridad</a:t>
+              <a:t>Lleva enchufe de seguridad</a:t>
             </a:r>
           </a:p>
           <a:p>
             <a:pPr>
               <a:spcAft>
-                <a:spcPts val="1000"/>
+                <a:spcPts val="1100"/>
               </a:spcAft>
             </a:pPr>
             <a:r>
               <a:rPr sz="1600" b="1" i="0">
                 <a:solidFill>
-                  <a:srgbClr val="2E3A80"/>
-                </a:solidFill>
-                <a:latin typeface="Montserrat"/>
-              </a:rPr>
-              <a:t>•  </a:t>
+                  <a:srgbClr val="E8801A"/>
+                </a:solidFill>
+                <a:latin typeface="Montserrat"/>
+              </a:rPr>
+              <a:t>▸  </a:t>
             </a:r>
             <a:r>
               <a:rPr sz="1600" b="0" i="0">
@@ -9521,17 +10626,17 @@
           <a:p>
             <a:pPr>
               <a:spcAft>
-                <a:spcPts val="1000"/>
+                <a:spcPts val="1100"/>
               </a:spcAft>
             </a:pPr>
             <a:r>
               <a:rPr sz="1600" b="1" i="0">
                 <a:solidFill>
-                  <a:srgbClr val="2E3A80"/>
-                </a:solidFill>
-                <a:latin typeface="Montserrat"/>
-              </a:rPr>
-              <a:t>•  </a:t>
+                  <a:srgbClr val="E8801A"/>
+                </a:solidFill>
+                <a:latin typeface="Montserrat"/>
+              </a:rPr>
+              <a:t>▸  </a:t>
             </a:r>
             <a:r>
               <a:rPr sz="1600" b="0" i="0">
@@ -9540,23 +10645,23 @@
                 </a:solidFill>
                 <a:latin typeface="Montserrat"/>
               </a:rPr>
-              <a:t>Longitud máxima 2 m</a:t>
+              <a:t>Longitud máxima 1,5 m</a:t>
             </a:r>
           </a:p>
           <a:p>
             <a:pPr>
               <a:spcAft>
-                <a:spcPts val="1000"/>
+                <a:spcPts val="1100"/>
               </a:spcAft>
             </a:pPr>
             <a:r>
               <a:rPr sz="1600" b="1" i="0">
                 <a:solidFill>
-                  <a:srgbClr val="2E3A80"/>
-                </a:solidFill>
-                <a:latin typeface="Montserrat"/>
-              </a:rPr>
-              <a:t>•  </a:t>
+                  <a:srgbClr val="E8801A"/>
+                </a:solidFill>
+                <a:latin typeface="Montserrat"/>
+              </a:rPr>
+              <a:t>▸  </a:t>
             </a:r>
             <a:r>
               <a:rPr sz="1600" b="0" i="0">
@@ -9565,14 +10670,14 @@
                 </a:solidFill>
                 <a:latin typeface="Montserrat"/>
               </a:rPr>
-              <a:t>Calefacción móvil: 0,75 m</a:t>
-            </a:r>
-          </a:p>
-        </p:txBody>
-      </p:sp>
-      <p:sp>
-        <p:nvSpPr>
-          <p:cNvPr id="8" name="imgph" descr="IMGQ:stainless steel gas connector kitchen"/>
+              <a:t>Calefacción móvil: 0,6 m</a:t>
+            </a:r>
+          </a:p>
+        </p:txBody>
+      </p:sp>
+      <p:sp>
+        <p:nvSpPr>
+          <p:cNvPr id="9" name="imgph" descr="IMGQ:spiral metal flexible gas hose"/>
           <p:cNvSpPr/>
           <p:nvPr/>
         </p:nvSpPr>
@@ -9618,7 +10723,7 @@
       </p:sp>
       <p:sp>
         <p:nvSpPr>
-          <p:cNvPr id="9" name="TextBox 8"/>
+          <p:cNvPr id="10" name="TextBox 9"/>
           <p:cNvSpPr txBox="1"/>
           <p:nvPr/>
         </p:nvSpPr>
@@ -9658,7 +10763,7 @@
                 </a:solidFill>
                 <a:latin typeface="Montserrat"/>
               </a:rPr>
-              <a:t>stainless steel gas connector kitchen</a:t>
+              <a:t>spiral metal flexible gas hose</a:t>
             </a:r>
           </a:p>
         </p:txBody>
@@ -9755,7 +10860,7 @@
                 </a:solidFill>
                 <a:latin typeface="Montserrat"/>
               </a:rPr>
-              <a:t>008 / 015</a:t>
+              <a:t>008 / 016</a:t>
             </a:r>
           </a:p>
         </p:txBody>
@@ -9803,7 +10908,7 @@
         <p:spPr>
           <a:xfrm>
             <a:off x="822960" y="457200"/>
-            <a:ext cx="8229600" cy="365760"/>
+            <a:ext cx="10058400" cy="365760"/>
           </a:xfrm>
           <a:prstGeom prst="rect">
             <a:avLst/>
@@ -9817,13 +10922,13 @@
           <a:lstStyle/>
           <a:p>
             <a:r>
-              <a:rPr sz="1200" b="1" i="0">
-                <a:solidFill>
-                  <a:srgbClr val="64748B"/>
-                </a:solidFill>
-                <a:latin typeface="Montserrat"/>
-              </a:rPr>
-              <a:t>MONTAJE · ENCHUFE DE SEGURIDAD</a:t>
+              <a:rPr sz="1300" b="1" i="0">
+                <a:solidFill>
+                  <a:srgbClr val="E8801A"/>
+                </a:solidFill>
+                <a:latin typeface="Montserrat"/>
+              </a:rPr>
+              <a:t>4.4 · ACERO CORRUGADO CON ENCHUFE</a:t>
             </a:r>
           </a:p>
         </p:txBody>
@@ -9851,26 +10956,70 @@
           <a:lstStyle/>
           <a:p>
             <a:r>
-              <a:rPr sz="2700" b="1" i="0">
+              <a:rPr sz="2800" b="1" i="0">
                 <a:solidFill>
                   <a:srgbClr val="1E2761"/>
                 </a:solidFill>
                 <a:latin typeface="Montserrat"/>
               </a:rPr>
-              <a:t>Rosca sí, racor de dos piezas no</a:t>
-            </a:r>
-          </a:p>
-        </p:txBody>
-      </p:sp>
-      <p:sp>
-        <p:nvSpPr>
-          <p:cNvPr id="7" name="TextBox 6"/>
+              <a:t>Con enchufe: 2 m</a:t>
+            </a:r>
+          </a:p>
+        </p:txBody>
+      </p:sp>
+      <p:sp>
+        <p:nvSpPr>
+          <p:cNvPr id="7" name="Rounded Rectangle 6"/>
+          <p:cNvSpPr/>
+          <p:nvPr/>
+        </p:nvSpPr>
+        <p:spPr>
+          <a:xfrm>
+            <a:off x="868680" y="1627632"/>
+            <a:ext cx="2011680" cy="73152"/>
+          </a:xfrm>
+          <a:prstGeom prst="roundRect">
+            <a:avLst/>
+          </a:prstGeom>
+          <a:solidFill>
+            <a:srgbClr val="E8801A"/>
+          </a:solidFill>
+          <a:ln>
+            <a:noFill/>
+          </a:ln>
+          <a:effectLst/>
+        </p:spPr>
+        <p:style>
+          <a:lnRef idx="1">
+            <a:schemeClr val="accent1"/>
+          </a:lnRef>
+          <a:fillRef idx="3">
+            <a:schemeClr val="accent1"/>
+          </a:fillRef>
+          <a:effectRef idx="2">
+            <a:schemeClr val="accent1"/>
+          </a:effectRef>
+          <a:fontRef idx="minor">
+            <a:schemeClr val="lt1"/>
+          </a:fontRef>
+        </p:style>
+        <p:txBody>
+          <a:bodyPr rtlCol="0" anchor="ctr"/>
+          <a:lstStyle/>
+          <a:p>
+            <a:pPr algn="ctr"/>
+          </a:p>
+        </p:txBody>
+      </p:sp>
+      <p:sp>
+        <p:nvSpPr>
+          <p:cNvPr id="8" name="TextBox 7"/>
           <p:cNvSpPr txBox="1"/>
           <p:nvPr/>
         </p:nvSpPr>
         <p:spPr>
           <a:xfrm>
-            <a:off x="822960" y="1920240"/>
+            <a:off x="822960" y="1965960"/>
             <a:ext cx="4983480" cy="4206240"/>
           </a:xfrm>
           <a:prstGeom prst="rect">
@@ -9886,17 +11035,17 @@
           <a:p>
             <a:pPr>
               <a:spcAft>
-                <a:spcPts val="1000"/>
+                <a:spcPts val="1100"/>
               </a:spcAft>
             </a:pPr>
             <a:r>
               <a:rPr sz="1600" b="1" i="0">
                 <a:solidFill>
-                  <a:srgbClr val="2E3A80"/>
-                </a:solidFill>
-                <a:latin typeface="Montserrat"/>
-              </a:rPr>
-              <a:t>•  </a:t>
+                  <a:srgbClr val="E8801A"/>
+                </a:solidFill>
+                <a:latin typeface="Montserrat"/>
+              </a:rPr>
+              <a:t>▸  </a:t>
             </a:r>
             <a:r>
               <a:rPr sz="1600" b="0" i="0">
@@ -9905,23 +11054,23 @@
                 </a:solidFill>
                 <a:latin typeface="Montserrat"/>
               </a:rPr>
-              <a:t>Unión roscada UNE-EN 10226-1</a:t>
+              <a:t>Misma familia, con enchufe de seguridad</a:t>
             </a:r>
           </a:p>
           <a:p>
             <a:pPr>
               <a:spcAft>
-                <a:spcPts val="1000"/>
+                <a:spcPts val="1100"/>
               </a:spcAft>
             </a:pPr>
             <a:r>
               <a:rPr sz="1600" b="1" i="0">
                 <a:solidFill>
-                  <a:srgbClr val="2E3A80"/>
-                </a:solidFill>
-                <a:latin typeface="Montserrat"/>
-              </a:rPr>
-              <a:t>•  </a:t>
+                  <a:srgbClr val="E8801A"/>
+                </a:solidFill>
+                <a:latin typeface="Montserrat"/>
+              </a:rPr>
+              <a:t>▸  </a:t>
             </a:r>
             <a:r>
               <a:rPr sz="1600" b="0" i="0">
@@ -9930,23 +11079,23 @@
                 </a:solidFill>
                 <a:latin typeface="Montserrat"/>
               </a:rPr>
-              <a:t>Racor de dos piezas: prohibido</a:t>
+              <a:t>Exclusiva de uso doméstico</a:t>
             </a:r>
           </a:p>
           <a:p>
             <a:pPr>
               <a:spcAft>
-                <a:spcPts val="1000"/>
+                <a:spcPts val="1100"/>
               </a:spcAft>
             </a:pPr>
             <a:r>
               <a:rPr sz="1600" b="1" i="0">
                 <a:solidFill>
-                  <a:srgbClr val="2E3A80"/>
-                </a:solidFill>
-                <a:latin typeface="Montserrat"/>
-              </a:rPr>
-              <a:t>•  </a:t>
+                  <a:srgbClr val="E8801A"/>
+                </a:solidFill>
+                <a:latin typeface="Montserrat"/>
+              </a:rPr>
+              <a:t>▸  </a:t>
             </a:r>
             <a:r>
               <a:rPr sz="1600" b="0" i="0">
@@ -9955,14 +11104,39 @@
                 </a:solidFill>
                 <a:latin typeface="Montserrat"/>
               </a:rPr>
-              <a:t>El racor se afloja y fuga</a:t>
-            </a:r>
-          </a:p>
-        </p:txBody>
-      </p:sp>
-      <p:sp>
-        <p:nvSpPr>
-          <p:cNvPr id="8" name="imgph" descr="IMGQ:threaded gas pipe fitting wrench"/>
+              <a:t>Longitud máxima 2 m</a:t>
+            </a:r>
+          </a:p>
+          <a:p>
+            <a:pPr>
+              <a:spcAft>
+                <a:spcPts val="1100"/>
+              </a:spcAft>
+            </a:pPr>
+            <a:r>
+              <a:rPr sz="1600" b="1" i="0">
+                <a:solidFill>
+                  <a:srgbClr val="E8801A"/>
+                </a:solidFill>
+                <a:latin typeface="Montserrat"/>
+              </a:rPr>
+              <a:t>▸  </a:t>
+            </a:r>
+            <a:r>
+              <a:rPr sz="1600" b="0" i="0">
+                <a:solidFill>
+                  <a:srgbClr val="1B2330"/>
+                </a:solidFill>
+                <a:latin typeface="Montserrat"/>
+              </a:rPr>
+              <a:t>Calefacción móvil: 0,75 m</a:t>
+            </a:r>
+          </a:p>
+        </p:txBody>
+      </p:sp>
+      <p:sp>
+        <p:nvSpPr>
+          <p:cNvPr id="9" name="imgph" descr="IMGQ:stainless steel gas connector kitchen"/>
           <p:cNvSpPr/>
           <p:nvPr/>
         </p:nvSpPr>
@@ -10008,7 +11182,7 @@
       </p:sp>
       <p:sp>
         <p:nvSpPr>
-          <p:cNvPr id="9" name="TextBox 8"/>
+          <p:cNvPr id="10" name="TextBox 9"/>
           <p:cNvSpPr txBox="1"/>
           <p:nvPr/>
         </p:nvSpPr>
@@ -10048,7 +11222,7 @@
                 </a:solidFill>
                 <a:latin typeface="Montserrat"/>
               </a:rPr>
-              <a:t>threaded gas pipe fitting wrench</a:t>
+              <a:t>stainless steel gas connector kitchen</a:t>
             </a:r>
           </a:p>
         </p:txBody>
@@ -10145,7 +11319,7 @@
                 </a:solidFill>
                 <a:latin typeface="Montserrat"/>
               </a:rPr>
-              <a:t>009 / 015</a:t>
+              <a:t>009 / 016</a:t>
             </a:r>
           </a:p>
         </p:txBody>
@@ -10193,7 +11367,7 @@
         <p:spPr>
           <a:xfrm>
             <a:off x="822960" y="457200"/>
-            <a:ext cx="8229600" cy="365760"/>
+            <a:ext cx="10058400" cy="365760"/>
           </a:xfrm>
           <a:prstGeom prst="rect">
             <a:avLst/>
@@ -10207,13 +11381,13 @@
           <a:lstStyle/>
           <a:p>
             <a:r>
-              <a:rPr sz="1200" b="1" i="0">
-                <a:solidFill>
-                  <a:srgbClr val="64748B"/>
-                </a:solidFill>
-                <a:latin typeface="Montserrat"/>
-              </a:rPr>
-              <a:t>PROHIBICIÓN · CALOR</a:t>
+              <a:rPr sz="1300" b="1" i="0">
+                <a:solidFill>
+                  <a:srgbClr val="E8801A"/>
+                </a:solidFill>
+                <a:latin typeface="Montserrat"/>
+              </a:rPr>
+              <a:t>MONTAJE · ENCHUFE DE SEGURIDAD</a:t>
             </a:r>
           </a:p>
         </p:txBody>
@@ -10241,26 +11415,70 @@
           <a:lstStyle/>
           <a:p>
             <a:r>
-              <a:rPr sz="2700" b="1" i="0">
+              <a:rPr sz="2800" b="1" i="0">
                 <a:solidFill>
                   <a:srgbClr val="1E2761"/>
                 </a:solidFill>
                 <a:latin typeface="Montserrat"/>
               </a:rPr>
-              <a:t>No cruzar tras el horno</a:t>
-            </a:r>
-          </a:p>
-        </p:txBody>
-      </p:sp>
-      <p:sp>
-        <p:nvSpPr>
-          <p:cNvPr id="7" name="TextBox 6"/>
+              <a:t>Rosca sí, racor de dos piezas no</a:t>
+            </a:r>
+          </a:p>
+        </p:txBody>
+      </p:sp>
+      <p:sp>
+        <p:nvSpPr>
+          <p:cNvPr id="7" name="Rounded Rectangle 6"/>
+          <p:cNvSpPr/>
+          <p:nvPr/>
+        </p:nvSpPr>
+        <p:spPr>
+          <a:xfrm>
+            <a:off x="868680" y="1627632"/>
+            <a:ext cx="2011680" cy="73152"/>
+          </a:xfrm>
+          <a:prstGeom prst="roundRect">
+            <a:avLst/>
+          </a:prstGeom>
+          <a:solidFill>
+            <a:srgbClr val="E8801A"/>
+          </a:solidFill>
+          <a:ln>
+            <a:noFill/>
+          </a:ln>
+          <a:effectLst/>
+        </p:spPr>
+        <p:style>
+          <a:lnRef idx="1">
+            <a:schemeClr val="accent1"/>
+          </a:lnRef>
+          <a:fillRef idx="3">
+            <a:schemeClr val="accent1"/>
+          </a:fillRef>
+          <a:effectRef idx="2">
+            <a:schemeClr val="accent1"/>
+          </a:effectRef>
+          <a:fontRef idx="minor">
+            <a:schemeClr val="lt1"/>
+          </a:fontRef>
+        </p:style>
+        <p:txBody>
+          <a:bodyPr rtlCol="0" anchor="ctr"/>
+          <a:lstStyle/>
+          <a:p>
+            <a:pPr algn="ctr"/>
+          </a:p>
+        </p:txBody>
+      </p:sp>
+      <p:sp>
+        <p:nvSpPr>
+          <p:cNvPr id="8" name="TextBox 7"/>
           <p:cNvSpPr txBox="1"/>
           <p:nvPr/>
         </p:nvSpPr>
         <p:spPr>
           <a:xfrm>
-            <a:off x="822960" y="1920240"/>
+            <a:off x="822960" y="1965960"/>
             <a:ext cx="4983480" cy="4206240"/>
           </a:xfrm>
           <a:prstGeom prst="rect">
@@ -10276,17 +11494,17 @@
           <a:p>
             <a:pPr>
               <a:spcAft>
-                <a:spcPts val="1000"/>
+                <a:spcPts val="1100"/>
               </a:spcAft>
             </a:pPr>
             <a:r>
               <a:rPr sz="1600" b="1" i="0">
                 <a:solidFill>
-                  <a:srgbClr val="2E3A80"/>
-                </a:solidFill>
-                <a:latin typeface="Montserrat"/>
-              </a:rPr>
-              <a:t>•  </a:t>
+                  <a:srgbClr val="E8801A"/>
+                </a:solidFill>
+                <a:latin typeface="Montserrat"/>
+              </a:rPr>
+              <a:t>▸  </a:t>
             </a:r>
             <a:r>
               <a:rPr sz="1600" b="0" i="0">
@@ -10295,23 +11513,23 @@
                 </a:solidFill>
                 <a:latin typeface="Montserrat"/>
               </a:rPr>
-              <a:t>Nada por detrás de una cocina con horno</a:t>
+              <a:t>Unión roscada UNE-EN 10226-1</a:t>
             </a:r>
           </a:p>
           <a:p>
             <a:pPr>
               <a:spcAft>
-                <a:spcPts val="1000"/>
+                <a:spcPts val="1100"/>
               </a:spcAft>
             </a:pPr>
             <a:r>
               <a:rPr sz="1600" b="1" i="0">
                 <a:solidFill>
-                  <a:srgbClr val="2E3A80"/>
-                </a:solidFill>
-                <a:latin typeface="Montserrat"/>
-              </a:rPr>
-              <a:t>•  </a:t>
+                  <a:srgbClr val="E8801A"/>
+                </a:solidFill>
+                <a:latin typeface="Montserrat"/>
+              </a:rPr>
+              <a:t>▸  </a:t>
             </a:r>
             <a:r>
               <a:rPr sz="1600" b="0" i="0">
@@ -10320,23 +11538,23 @@
                 </a:solidFill>
                 <a:latin typeface="Montserrat"/>
               </a:rPr>
-              <a:t>Salvo aislamiento térmico certificado</a:t>
+              <a:t>Racor de dos piezas: prohibido</a:t>
             </a:r>
           </a:p>
           <a:p>
             <a:pPr>
               <a:spcAft>
-                <a:spcPts val="1000"/>
+                <a:spcPts val="1100"/>
               </a:spcAft>
             </a:pPr>
             <a:r>
               <a:rPr sz="1600" b="1" i="0">
                 <a:solidFill>
-                  <a:srgbClr val="2E3A80"/>
-                </a:solidFill>
-                <a:latin typeface="Montserrat"/>
-              </a:rPr>
-              <a:t>•  </a:t>
+                  <a:srgbClr val="E8801A"/>
+                </a:solidFill>
+                <a:latin typeface="Montserrat"/>
+              </a:rPr>
+              <a:t>▸  </a:t>
             </a:r>
             <a:r>
               <a:rPr sz="1600" b="0" i="0">
@@ -10345,14 +11563,14 @@
                 </a:solidFill>
                 <a:latin typeface="Montserrat"/>
               </a:rPr>
-              <a:t>Y ≤ 30 °C de sobrecalentamiento</a:t>
-            </a:r>
-          </a:p>
-        </p:txBody>
-      </p:sp>
-      <p:sp>
-        <p:nvSpPr>
-          <p:cNvPr id="8" name="imgph" descr="IMGQ:kitchen oven back panel installation"/>
+              <a:t>El racor se afloja y fuga</a:t>
+            </a:r>
+          </a:p>
+        </p:txBody>
+      </p:sp>
+      <p:sp>
+        <p:nvSpPr>
+          <p:cNvPr id="9" name="imgph" descr="IMGQ:threaded gas pipe fitting wrench"/>
           <p:cNvSpPr/>
           <p:nvPr/>
         </p:nvSpPr>
@@ -10398,7 +11616,7 @@
       </p:sp>
       <p:sp>
         <p:nvSpPr>
-          <p:cNvPr id="9" name="TextBox 8"/>
+          <p:cNvPr id="10" name="TextBox 9"/>
           <p:cNvSpPr txBox="1"/>
           <p:nvPr/>
         </p:nvSpPr>
@@ -10438,7 +11656,7 @@
                 </a:solidFill>
                 <a:latin typeface="Montserrat"/>
               </a:rPr>
-              <a:t>kitchen oven back panel installation</a:t>
+              <a:t>threaded gas pipe fitting wrench</a:t>
             </a:r>
           </a:p>
         </p:txBody>

--- a/Curso Gas B/14 - UNE 60670 - Instalacion y conexion de aparatos/14 - UNE 60670 - Instalacion y conexion de aparatos - Vídeo 2.pptx
+++ b/Curso Gas B/14 - UNE 60670 - Instalacion y conexion de aparatos/14 - UNE 60670 - Instalacion y conexion de aparatos - Vídeo 2.pptx
@@ -21,6 +21,12 @@
     <p:sldId id="269" r:id="rId21"/>
     <p:sldId id="270" r:id="rId22"/>
     <p:sldId id="271" r:id="rId23"/>
+    <p:sldId id="272" r:id="rId24"/>
+    <p:sldId id="273" r:id="rId25"/>
+    <p:sldId id="274" r:id="rId26"/>
+    <p:sldId id="275" r:id="rId27"/>
+    <p:sldId id="276" r:id="rId28"/>
+    <p:sldId id="277" r:id="rId29"/>
   </p:sldIdLst>
   <p:sldSz cx="12191695" cy="6858000" type="screen4x3"/>
   <p:notesSz cx="6858000" cy="9144000"/>
@@ -592,12 +598,12 @@
           <a:lstStyle/>
           <a:p>
             <a:r>
-              <a:t>N1: Otra prohibición que se repite: lo del horno. ¿Cómo es?</a:t>
-            </a:r>
-          </a:p>
-          <a:p>
-            <a:r>
-              <a:t>N2: Sí, esta aparece en varios flexibles, así que apúntala una vez y vale para todos. El tubo flexible no puede pasar por la parte de atrás de una cocina que tenga horno, sea el horno de gas o eléctrico. ¿Por qué? Porque detrás del horno se acumula muchísimo calor y allí el flexible se cocería. Solo hay una excepción: que el horno lleve aislamiento térmico en su parte trasera y que el fabricante haya demostrado en ensayos que allí no se superan los treinta grados de sobrecalentamiento, y que lo deje por escrito en el manual. Si no tienes ese papel del fabricante, el flexible no va por detrás del horno, y punto.</a:t>
+              <a:t>N1: Y la otra con enchufe, ¿cambia mucho?</a:t>
+            </a:r>
+          </a:p>
+          <a:p>
+            <a:r>
+              <a:t>N2: Son dos primas hermanas. Esta es de acero inoxidable corrugado y también lleva enchufe de seguridad, así que otra vez solo uso doméstico. Todo igual... menos las cifras, y ahí está la trampa del examen. La espirometálica de antes eran un metro y medio, y sesenta centímetros en calefacción móvil. Esta llega a dos metros en general, y setenta y cinco centímetros si es calefacción móvil. No las mezcles: mismo tipo de aparato, longitudes distintas. Un truco: casi todas las calefacciones móviles se quedan en sesenta centímetros; la única que se estira a setenta y cinco es justo esta, el acero corrugado con enchufe.</a:t>
             </a:r>
           </a:p>
         </p:txBody>
@@ -667,12 +673,12 @@
           <a:lstStyle/>
           <a:p>
             <a:r>
-              <a:t>N1: ¿Qué es eso del elastómero con armadura?</a:t>
-            </a:r>
-          </a:p>
-          <a:p>
-            <a:r>
-              <a:t>N2: Elastómero es la palabra fina para la goma. Y con armadura interna o externa quiere decir que esa goma va reforzada con una malla, como un latiguillo trenzado; aguanta más que el tubo de goma pelado. Por ir reforzada, se admite en sitios más exigentes: aparatos móviles no domésticos alimentados con GLP, y también sopletes. Para los sopletes sigue la norma de las mangueras de soldeo y corte, con un matiz importante: en un soplete la longitud máxima no se aplica, porque necesitas la manguera que pida el trabajo. Para el resto, longitud máxima de un metro y medio, y sesenta centímetros si es calefacción móvil no industrial.</a:t>
+              <a:t>N1: Esta es fina, para nota. Acero corrugado con enchufe de seguridad conectando una calefacción móvil, ¿cuánto puede medir como máximo?</a:t>
+            </a:r>
+          </a:p>
+          <a:p>
+            <a:r>
+              <a:t>N2: Ojo, porque casi todas las calefacciones móviles comparten una misma cifra... menos una.</a:t>
             </a:r>
           </a:p>
         </p:txBody>
@@ -742,12 +748,12 @@
           <a:lstStyle/>
           <a:p>
             <a:r>
-              <a:t>N1: Este es el de toda la vida, ¿no? El de la bombona.</a:t>
-            </a:r>
-          </a:p>
-          <a:p>
-            <a:r>
-              <a:t>N2: Exacto, el clásico tubo de goma naranja del butano. Va solo en aparatos móviles, mecheros y sopletes, y si sigue la norma europea, solo con GLP. El montaje tiene dos detalles que caen seguro. Uno: se une con boquillas, unas piezas según su norma, del mismo diámetro que el tubo; si el tubo es de nueve milímetros, boquilla de nueve, no se improvisa. Dos, y muy importante: se sujeta con abrazaderas metálicas, nunca de plástico. ¿Por qué metálicas? Porque la goma se dilata con el calor, y una brida de plástico cede, el tubo se suelta de la boquilla y tienes una fuga de gas y olor a butano en la cocina. Y recuerda: este tubo de goma caduca; el metálico, no.</a:t>
+              <a:t>N1: ¿Cuál es el truco?</a:t>
+            </a:r>
+          </a:p>
+          <a:p>
+            <a:r>
+              <a:t>N2: Casi todas las calefacciones móviles se quedan en sesenta centímetros: la espirometálica, el elastómero con armadura y el elastómero normal. La única que se estira a setenta y cinco centímetros es justo esta, el acero corrugado con enchufe. Si te la sabes, cazas la pregunta trampa.</a:t>
             </a:r>
           </a:p>
         </p:txBody>
@@ -817,12 +823,12 @@
           <a:lstStyle/>
           <a:p>
             <a:r>
-              <a:t>N1: Esta se parece mucho a la del punto 4.4, ¿en qué se distinguen?</a:t>
-            </a:r>
-          </a:p>
-          <a:p>
-            <a:r>
-              <a:t>N2: Muy buena, porque es un lío típico. Las dos usan la misma manguera metálica corrugada. La diferencia es el enchufe: la del punto cuatro punto cuatro lleva enchufe de seguridad y es solo doméstica, con unión roscada; esta, la cuatro punto siete, no lleva enchufe. Al no llevarlo, se une de otra forma: por junta plana o por conexión a tetina, y si un enlace es de junta plana, el otro puede ser roscado. Su longitud máxima es de dos metros. En resumen: misma manguera, montaje distinto. Si en el examen te hablan de enchufe de seguridad es la cuatro cuatro; si no lo mencionan, piensa en la cuatro siete.</a:t>
+              <a:t>N1: ¿Por qué prohíben el racor de dos piezas?</a:t>
+            </a:r>
+          </a:p>
+          <a:p>
+            <a:r>
+              <a:t>N2: En las dos conexiones con enchufe de seguridad, la espirometálica y la de acero corrugado, la unión mecánica va roscada, con una rosca cónica que sella al apretar. Y hay una prohibición tajante: nunca con racor de dos piezas. El racor de dos piezas es ese de tuerca loca que aprieta una junta entre dos mitades. ¿El problema? Con la vibración se puede aflojar y empezar a fugar. La rosca cónica, en cambio, sella mucho mejor y no se suelta. Por eso la regla, cortita para que se te grabe: enchufe de seguridad, rosca sí, racor de dos piezas no.</a:t>
             </a:r>
           </a:p>
         </p:txBody>
@@ -892,12 +898,12 @@
           <a:lstStyle/>
           <a:p>
             <a:r>
-              <a:t>N1: Y el Anexo A, ¿para qué sirve?</a:t>
-            </a:r>
-          </a:p>
-          <a:p>
-            <a:r>
-              <a:t>N2: Es la chuleta más práctica del tema. Es informativo, o sea orientativo, no obligatorio, pero te resuelve la duda de un vistazo con una sola pregunta: ¿el aparato es fijo o se mueve? Si es fijo o va encastrado, una encimera empotrada, una caldera, un calentador, una secadora fija, un horno industrial, lo normal es conexión rígida. Si es móvil, una cocina de gas suelta, una estufa de infrarrojos, un paellero, un frigorífico de gas, un soplete, lo normal es conexión flexible. Fíjate que casa con todo lo que hemos visto: lo fijo con tubo firme, lo móvil con tubo que acompaña el movimiento. Fijo, rígida; móvil, flexible. Esa es la brújula.</a:t>
+              <a:t>N1: Otra prohibición que se repite: lo del horno. ¿Cómo es?</a:t>
+            </a:r>
+          </a:p>
+          <a:p>
+            <a:r>
+              <a:t>N2: Sí, esta aparece en varios flexibles, así que apúntala una vez y vale para todos. El tubo flexible no puede pasar por la parte de atrás de una cocina que tenga horno, sea el horno de gas o eléctrico. ¿Por qué? Porque detrás del horno se acumula muchísimo calor y allí el flexible se cocería. Solo hay una excepción: que el horno lleve aislamiento térmico en su parte trasera y que el fabricante haya demostrado en ensayos que allí no se superan los treinta grados de sobrecalentamiento, y que lo deje por escrito en el manual. Si no tienes ese papel del fabricante, el flexible no va por detrás del horno, y punto.</a:t>
             </a:r>
           </a:p>
         </p:txBody>
@@ -967,12 +973,12 @@
           <a:lstStyle/>
           <a:p>
             <a:r>
-              <a:t>N1: Y todo esto del montaje, ¿también acaba en un papel?</a:t>
-            </a:r>
-          </a:p>
-          <a:p>
-            <a:r>
-              <a:t>N2: También, y es la misma idea que en el vídeo anterior pero llevada al montaje. El tipo de conexión que pones y que esté bien ejecutada es lo que la empresa instaladora certifica y firma, en el certificado de instalación, el boletín, y en la puesta en marcha del aparato; ese documento se entrega al usuario y queda a disposición de la distribuidora y de la comunidad autónoma. Y ojo: sustituir un flexible caducado o mal montado en un aparato que ya está en servicio también es una operación que debe quedar registrada. La conclusión es seria: firmar un montaje con el flexible equivocado, demasiado largo, o con una brida de plástico, es firmar un defecto con tu nombre.</a:t>
+              <a:t>N1: ¿Qué es eso del elastómero con armadura?</a:t>
+            </a:r>
+          </a:p>
+          <a:p>
+            <a:r>
+              <a:t>N2: Elastómero es la palabra fina para la goma. Y con armadura interna o externa quiere decir que esa goma va reforzada con una malla, como un latiguillo trenzado; aguanta más que el tubo de goma pelado. Por ir reforzada, se admite en sitios más exigentes: aparatos móviles no domésticos alimentados con GLP, y también sopletes. Para los sopletes sigue la norma de las mangueras de soldeo y corte, con un matiz importante: en un soplete la longitud máxima no se aplica, porque necesitas la manguera que pida el trabajo. Para el resto, longitud máxima de un metro y medio, y sesenta centímetros si es calefacción móvil no industrial.</a:t>
             </a:r>
           </a:p>
         </p:txBody>
@@ -1042,22 +1048,237 @@
           <a:lstStyle/>
           <a:p>
             <a:r>
-              <a:t>N1: Profe, hemos visto muchas cifras. ¿Cómo lo amarro todo?</a:t>
-            </a:r>
-          </a:p>
-          <a:p>
-            <a:r>
-              <a:t>N2: Vamos a reconstruirlo con cabeza, no de memorieta. La conexión rígida es prolongar el mismo tubo de la instalación, y solo para fijos. Los flexibles se ordenan por una única idea de seguridad: el tubo nunca debe quedar bajo las llamas, así que va lo más corto posible; de ahí salen todas las longitudes máximas, dos metros el acero corrugado, un metro y medio la espirometálica y los elastómeros, y las versiones de calefacción móvil más cortas, casi todas sesenta centímetros salvo el acero corrugado con enchufe, que llega a setenta y cinco. Los dos flexibles con enchufe de seguridad son de casa y se roscan, nunca racor de dos piezas. El tubo naranja de la bombona lleva boquillas y abrazadera metálica. Y ninguno cruza por detrás del horno salvo aislamiento certificado por debajo de treinta grados.</a:t>
-            </a:r>
-          </a:p>
-          <a:p>
-            <a:r>
-              <a:t>N1: ¿Y a la hora de la verdad, examen y obra?</a:t>
-            </a:r>
-          </a:p>
-          <a:p>
-            <a:r>
-              <a:t>N2: En el examen te cruzan las longitudes a ver si te lías, te preguntan qué unión lleva el enchufe de seguridad, o te dan un aparato y esperan que digas rígida o flexible con el Anexo A. En la obra, cada una de estas reglas es una fuga o un incendio que evitas: el flexible corto, la abrazadera metálica, la rosca bien hecha. Con esto cierras el Tema catorce completo: ya sabes dónde va cada aparato, con qué se conecta y cómo se monta bien. Hoy no es que sepas más, es que ya trabajas como un gasista de verdad. Enhorabuena, has terminado el tema.</a:t>
+              <a:t>N1: Este es el de toda la vida, ¿no? El de la bombona.</a:t>
+            </a:r>
+          </a:p>
+          <a:p>
+            <a:r>
+              <a:t>N2: Exacto, el clásico tubo de goma naranja del butano. Va solo en aparatos móviles, mecheros y sopletes, y si sigue la norma europea, solo con GLP. El montaje tiene dos detalles que caen seguro. Uno: se une con boquillas, unas piezas según su norma, del mismo diámetro que el tubo; si el tubo es de nueve milímetros, boquilla de nueve, no se improvisa. Dos, y muy importante: se sujeta con abrazaderas metálicas, nunca de plástico. ¿Por qué metálicas? Porque la goma se dilata con el calor, y una brida de plástico cede, el tubo se suelta de la boquilla y tienes una fuga de gas y olor a butano en la cocina. Y recuerda: este tubo de goma caduca; el metálico, no.</a:t>
+            </a:r>
+          </a:p>
+        </p:txBody>
+      </p:sp>
+      <p:sp>
+        <p:nvSpPr>
+          <p:cNvPr id="4" name="Slide Number Placeholder 3"/>
+          <p:cNvSpPr>
+            <a:spLocks noGrp="1"/>
+          </p:cNvSpPr>
+          <p:nvPr>
+            <p:ph type="sldNum" idx="5" sz="quarter"/>
+          </p:nvPr>
+        </p:nvSpPr>
+        <p:spPr/>
+      </p:sp>
+    </p:spTree>
+  </p:cSld>
+  <p:clrMapOvr>
+    <a:masterClrMapping/>
+  </p:clrMapOvr>
+</p:notes>
+</file>
+
+<file path=ppt/notesSlides/notesSlide17.xml><?xml version="1.0" encoding="utf-8"?>
+<p:notes xmlns:a="http://schemas.openxmlformats.org/drawingml/2006/main" xmlns:p="http://schemas.openxmlformats.org/presentationml/2006/main" xmlns:r="http://schemas.openxmlformats.org/officeDocument/2006/relationships">
+  <p:cSld>
+    <p:spTree>
+      <p:nvGrpSpPr>
+        <p:cNvPr id="1" name=""/>
+        <p:cNvGrpSpPr/>
+        <p:nvPr/>
+      </p:nvGrpSpPr>
+      <p:grpSpPr>
+        <a:xfrm>
+          <a:off x="0" y="0"/>
+          <a:ext cx="0" cy="0"/>
+          <a:chOff x="0" y="0"/>
+          <a:chExt cx="0" cy="0"/>
+        </a:xfrm>
+      </p:grpSpPr>
+      <p:sp>
+        <p:nvSpPr>
+          <p:cNvPr id="2" name="Slide Image Placeholder 1"/>
+          <p:cNvSpPr>
+            <a:spLocks noGrp="1"/>
+          </p:cNvSpPr>
+          <p:nvPr>
+            <p:ph type="sldImg" idx="2"/>
+          </p:nvPr>
+        </p:nvSpPr>
+        <p:spPr/>
+      </p:sp>
+      <p:sp>
+        <p:nvSpPr>
+          <p:cNvPr id="3" name="Notes Placeholder 2"/>
+          <p:cNvSpPr>
+            <a:spLocks noGrp="1"/>
+          </p:cNvSpPr>
+          <p:nvPr>
+            <p:ph type="body" idx="3" sz="quarter"/>
+          </p:nvPr>
+        </p:nvSpPr>
+        <p:spPr/>
+        <p:txBody>
+          <a:bodyPr/>
+          <a:lstStyle/>
+          <a:p>
+            <a:r>
+              <a:t>N1: El clásico tubo naranja del butano, ¿con qué se sujeta a la boquilla?</a:t>
+            </a:r>
+          </a:p>
+          <a:p>
+            <a:r>
+              <a:t>N2: Piensa en qué le pasa a la goma con el calor y qué sujeción aguanta eso sin ceder.</a:t>
+            </a:r>
+          </a:p>
+        </p:txBody>
+      </p:sp>
+      <p:sp>
+        <p:nvSpPr>
+          <p:cNvPr id="4" name="Slide Number Placeholder 3"/>
+          <p:cNvSpPr>
+            <a:spLocks noGrp="1"/>
+          </p:cNvSpPr>
+          <p:nvPr>
+            <p:ph type="sldNum" idx="5" sz="quarter"/>
+          </p:nvPr>
+        </p:nvSpPr>
+        <p:spPr/>
+      </p:sp>
+    </p:spTree>
+  </p:cSld>
+  <p:clrMapOvr>
+    <a:masterClrMapping/>
+  </p:clrMapOvr>
+</p:notes>
+</file>
+
+<file path=ppt/notesSlides/notesSlide18.xml><?xml version="1.0" encoding="utf-8"?>
+<p:notes xmlns:a="http://schemas.openxmlformats.org/drawingml/2006/main" xmlns:p="http://schemas.openxmlformats.org/presentationml/2006/main" xmlns:r="http://schemas.openxmlformats.org/officeDocument/2006/relationships">
+  <p:cSld>
+    <p:spTree>
+      <p:nvGrpSpPr>
+        <p:cNvPr id="1" name=""/>
+        <p:cNvGrpSpPr/>
+        <p:nvPr/>
+      </p:nvGrpSpPr>
+      <p:grpSpPr>
+        <a:xfrm>
+          <a:off x="0" y="0"/>
+          <a:ext cx="0" cy="0"/>
+          <a:chOff x="0" y="0"/>
+          <a:chExt cx="0" cy="0"/>
+        </a:xfrm>
+      </p:grpSpPr>
+      <p:sp>
+        <p:nvSpPr>
+          <p:cNvPr id="2" name="Slide Image Placeholder 1"/>
+          <p:cNvSpPr>
+            <a:spLocks noGrp="1"/>
+          </p:cNvSpPr>
+          <p:nvPr>
+            <p:ph type="sldImg" idx="2"/>
+          </p:nvPr>
+        </p:nvSpPr>
+        <p:spPr/>
+      </p:sp>
+      <p:sp>
+        <p:nvSpPr>
+          <p:cNvPr id="3" name="Notes Placeholder 2"/>
+          <p:cNvSpPr>
+            <a:spLocks noGrp="1"/>
+          </p:cNvSpPr>
+          <p:nvPr>
+            <p:ph type="body" idx="3" sz="quarter"/>
+          </p:nvPr>
+        </p:nvSpPr>
+        <p:spPr/>
+        <p:txBody>
+          <a:bodyPr/>
+          <a:lstStyle/>
+          <a:p>
+            <a:r>
+              <a:t>N1: ¿Por qué metálicas?</a:t>
+            </a:r>
+          </a:p>
+          <a:p>
+            <a:r>
+              <a:t>N2: Porque la goma se dilata con el calor y una brida de plástico acabaría cediendo, el tubo se soltaría de la boquilla y tendrías fuga de gas y olor a butano. Van boquillas del mismo diámetro que el tubo y abrazaderas metálicas siempre, nunca de plástico.</a:t>
+            </a:r>
+          </a:p>
+        </p:txBody>
+      </p:sp>
+      <p:sp>
+        <p:nvSpPr>
+          <p:cNvPr id="4" name="Slide Number Placeholder 3"/>
+          <p:cNvSpPr>
+            <a:spLocks noGrp="1"/>
+          </p:cNvSpPr>
+          <p:nvPr>
+            <p:ph type="sldNum" idx="5" sz="quarter"/>
+          </p:nvPr>
+        </p:nvSpPr>
+        <p:spPr/>
+      </p:sp>
+    </p:spTree>
+  </p:cSld>
+  <p:clrMapOvr>
+    <a:masterClrMapping/>
+  </p:clrMapOvr>
+</p:notes>
+</file>
+
+<file path=ppt/notesSlides/notesSlide19.xml><?xml version="1.0" encoding="utf-8"?>
+<p:notes xmlns:a="http://schemas.openxmlformats.org/drawingml/2006/main" xmlns:p="http://schemas.openxmlformats.org/presentationml/2006/main" xmlns:r="http://schemas.openxmlformats.org/officeDocument/2006/relationships">
+  <p:cSld>
+    <p:spTree>
+      <p:nvGrpSpPr>
+        <p:cNvPr id="1" name=""/>
+        <p:cNvGrpSpPr/>
+        <p:nvPr/>
+      </p:nvGrpSpPr>
+      <p:grpSpPr>
+        <a:xfrm>
+          <a:off x="0" y="0"/>
+          <a:ext cx="0" cy="0"/>
+          <a:chOff x="0" y="0"/>
+          <a:chExt cx="0" cy="0"/>
+        </a:xfrm>
+      </p:grpSpPr>
+      <p:sp>
+        <p:nvSpPr>
+          <p:cNvPr id="2" name="Slide Image Placeholder 1"/>
+          <p:cNvSpPr>
+            <a:spLocks noGrp="1"/>
+          </p:cNvSpPr>
+          <p:nvPr>
+            <p:ph type="sldImg" idx="2"/>
+          </p:nvPr>
+        </p:nvSpPr>
+        <p:spPr/>
+      </p:sp>
+      <p:sp>
+        <p:nvSpPr>
+          <p:cNvPr id="3" name="Notes Placeholder 2"/>
+          <p:cNvSpPr>
+            <a:spLocks noGrp="1"/>
+          </p:cNvSpPr>
+          <p:nvPr>
+            <p:ph type="body" idx="3" sz="quarter"/>
+          </p:nvPr>
+        </p:nvSpPr>
+        <p:spPr/>
+        <p:txBody>
+          <a:bodyPr/>
+          <a:lstStyle/>
+          <a:p>
+            <a:r>
+              <a:t>N1: Esta se parece mucho a la del punto 4.4, ¿en qué se distinguen?</a:t>
+            </a:r>
+          </a:p>
+          <a:p>
+            <a:r>
+              <a:t>N2: Muy buena, porque es un lío típico. Las dos usan la misma manguera metálica corrugada. La diferencia es el enchufe: la del punto cuatro punto cuatro lleva enchufe de seguridad y es solo doméstica, con unión roscada; esta, la cuatro punto siete, no lleva enchufe. Al no llevarlo, se une de otra forma: por junta plana o por conexión a tetina, y si un enlace es de junta plana, el otro puede ser roscado. Su longitud máxima es de dos metros. En resumen: misma manguera, montaje distinto. Si en el examen te hablan de enchufe de seguridad es la cuatro cuatro; si no lo mencionan, piensa en la cuatro siete.</a:t>
             </a:r>
           </a:p>
         </p:txBody>
@@ -1157,6 +1378,241 @@
 </p:notes>
 </file>
 
+<file path=ppt/notesSlides/notesSlide20.xml><?xml version="1.0" encoding="utf-8"?>
+<p:notes xmlns:a="http://schemas.openxmlformats.org/drawingml/2006/main" xmlns:p="http://schemas.openxmlformats.org/presentationml/2006/main" xmlns:r="http://schemas.openxmlformats.org/officeDocument/2006/relationships">
+  <p:cSld>
+    <p:spTree>
+      <p:nvGrpSpPr>
+        <p:cNvPr id="1" name=""/>
+        <p:cNvGrpSpPr/>
+        <p:nvPr/>
+      </p:nvGrpSpPr>
+      <p:grpSpPr>
+        <a:xfrm>
+          <a:off x="0" y="0"/>
+          <a:ext cx="0" cy="0"/>
+          <a:chOff x="0" y="0"/>
+          <a:chExt cx="0" cy="0"/>
+        </a:xfrm>
+      </p:grpSpPr>
+      <p:sp>
+        <p:nvSpPr>
+          <p:cNvPr id="2" name="Slide Image Placeholder 1"/>
+          <p:cNvSpPr>
+            <a:spLocks noGrp="1"/>
+          </p:cNvSpPr>
+          <p:nvPr>
+            <p:ph type="sldImg" idx="2"/>
+          </p:nvPr>
+        </p:nvSpPr>
+        <p:spPr/>
+      </p:sp>
+      <p:sp>
+        <p:nvSpPr>
+          <p:cNvPr id="3" name="Notes Placeholder 2"/>
+          <p:cNvSpPr>
+            <a:spLocks noGrp="1"/>
+          </p:cNvSpPr>
+          <p:nvPr>
+            <p:ph type="body" idx="3" sz="quarter"/>
+          </p:nvPr>
+        </p:nvSpPr>
+        <p:spPr/>
+        <p:txBody>
+          <a:bodyPr/>
+          <a:lstStyle/>
+          <a:p>
+            <a:r>
+              <a:t>N1: Y el Anexo A, ¿para qué sirve?</a:t>
+            </a:r>
+          </a:p>
+          <a:p>
+            <a:r>
+              <a:t>N2: Es la chuleta más práctica del tema. Es informativo, o sea orientativo, no obligatorio, pero te resuelve la duda de un vistazo con una sola pregunta: ¿el aparato es fijo o se mueve? Si es fijo o va encastrado, una encimera empotrada, una caldera, un calentador, una secadora fija, un horno industrial, lo normal es conexión rígida. Si es móvil, una cocina de gas suelta, una estufa de infrarrojos, un paellero, un frigorífico de gas, un soplete, lo normal es conexión flexible. Fíjate que casa con todo lo que hemos visto: lo fijo con tubo firme, lo móvil con tubo que acompaña el movimiento. Fijo, rígida; móvil, flexible. Esa es la brújula.</a:t>
+            </a:r>
+          </a:p>
+        </p:txBody>
+      </p:sp>
+      <p:sp>
+        <p:nvSpPr>
+          <p:cNvPr id="4" name="Slide Number Placeholder 3"/>
+          <p:cNvSpPr>
+            <a:spLocks noGrp="1"/>
+          </p:cNvSpPr>
+          <p:nvPr>
+            <p:ph type="sldNum" idx="5" sz="quarter"/>
+          </p:nvPr>
+        </p:nvSpPr>
+        <p:spPr/>
+      </p:sp>
+    </p:spTree>
+  </p:cSld>
+  <p:clrMapOvr>
+    <a:masterClrMapping/>
+  </p:clrMapOvr>
+</p:notes>
+</file>
+
+<file path=ppt/notesSlides/notesSlide21.xml><?xml version="1.0" encoding="utf-8"?>
+<p:notes xmlns:a="http://schemas.openxmlformats.org/drawingml/2006/main" xmlns:p="http://schemas.openxmlformats.org/presentationml/2006/main" xmlns:r="http://schemas.openxmlformats.org/officeDocument/2006/relationships">
+  <p:cSld>
+    <p:spTree>
+      <p:nvGrpSpPr>
+        <p:cNvPr id="1" name=""/>
+        <p:cNvGrpSpPr/>
+        <p:nvPr/>
+      </p:nvGrpSpPr>
+      <p:grpSpPr>
+        <a:xfrm>
+          <a:off x="0" y="0"/>
+          <a:ext cx="0" cy="0"/>
+          <a:chOff x="0" y="0"/>
+          <a:chExt cx="0" cy="0"/>
+        </a:xfrm>
+      </p:grpSpPr>
+      <p:sp>
+        <p:nvSpPr>
+          <p:cNvPr id="2" name="Slide Image Placeholder 1"/>
+          <p:cNvSpPr>
+            <a:spLocks noGrp="1"/>
+          </p:cNvSpPr>
+          <p:nvPr>
+            <p:ph type="sldImg" idx="2"/>
+          </p:nvPr>
+        </p:nvSpPr>
+        <p:spPr/>
+      </p:sp>
+      <p:sp>
+        <p:nvSpPr>
+          <p:cNvPr id="3" name="Notes Placeholder 2"/>
+          <p:cNvSpPr>
+            <a:spLocks noGrp="1"/>
+          </p:cNvSpPr>
+          <p:nvPr>
+            <p:ph type="body" idx="3" sz="quarter"/>
+          </p:nvPr>
+        </p:nvSpPr>
+        <p:spPr/>
+        <p:txBody>
+          <a:bodyPr/>
+          <a:lstStyle/>
+          <a:p>
+            <a:r>
+              <a:t>N1: Y todo esto del montaje, ¿también acaba en un papel?</a:t>
+            </a:r>
+          </a:p>
+          <a:p>
+            <a:r>
+              <a:t>N2: También, y es la misma idea que en el vídeo anterior pero llevada al montaje. El tipo de conexión que pones y que esté bien ejecutada es lo que la empresa instaladora certifica y firma, en el certificado de instalación, el boletín, y en la puesta en marcha del aparato; ese documento se entrega al usuario y queda a disposición de la distribuidora y de la comunidad autónoma. Y ojo: sustituir un flexible caducado o mal montado en un aparato que ya está en servicio también es una operación que debe quedar registrada. La conclusión es seria: firmar un montaje con el flexible equivocado, demasiado largo, o con una brida de plástico, es firmar un defecto con tu nombre.</a:t>
+            </a:r>
+          </a:p>
+        </p:txBody>
+      </p:sp>
+      <p:sp>
+        <p:nvSpPr>
+          <p:cNvPr id="4" name="Slide Number Placeholder 3"/>
+          <p:cNvSpPr>
+            <a:spLocks noGrp="1"/>
+          </p:cNvSpPr>
+          <p:nvPr>
+            <p:ph type="sldNum" idx="5" sz="quarter"/>
+          </p:nvPr>
+        </p:nvSpPr>
+        <p:spPr/>
+      </p:sp>
+    </p:spTree>
+  </p:cSld>
+  <p:clrMapOvr>
+    <a:masterClrMapping/>
+  </p:clrMapOvr>
+</p:notes>
+</file>
+
+<file path=ppt/notesSlides/notesSlide22.xml><?xml version="1.0" encoding="utf-8"?>
+<p:notes xmlns:a="http://schemas.openxmlformats.org/drawingml/2006/main" xmlns:p="http://schemas.openxmlformats.org/presentationml/2006/main" xmlns:r="http://schemas.openxmlformats.org/officeDocument/2006/relationships">
+  <p:cSld>
+    <p:spTree>
+      <p:nvGrpSpPr>
+        <p:cNvPr id="1" name=""/>
+        <p:cNvGrpSpPr/>
+        <p:nvPr/>
+      </p:nvGrpSpPr>
+      <p:grpSpPr>
+        <a:xfrm>
+          <a:off x="0" y="0"/>
+          <a:ext cx="0" cy="0"/>
+          <a:chOff x="0" y="0"/>
+          <a:chExt cx="0" cy="0"/>
+        </a:xfrm>
+      </p:grpSpPr>
+      <p:sp>
+        <p:nvSpPr>
+          <p:cNvPr id="2" name="Slide Image Placeholder 1"/>
+          <p:cNvSpPr>
+            <a:spLocks noGrp="1"/>
+          </p:cNvSpPr>
+          <p:nvPr>
+            <p:ph type="sldImg" idx="2"/>
+          </p:nvPr>
+        </p:nvSpPr>
+        <p:spPr/>
+      </p:sp>
+      <p:sp>
+        <p:nvSpPr>
+          <p:cNvPr id="3" name="Notes Placeholder 2"/>
+          <p:cNvSpPr>
+            <a:spLocks noGrp="1"/>
+          </p:cNvSpPr>
+          <p:nvPr>
+            <p:ph type="body" idx="3" sz="quarter"/>
+          </p:nvPr>
+        </p:nvSpPr>
+        <p:spPr/>
+        <p:txBody>
+          <a:bodyPr/>
+          <a:lstStyle/>
+          <a:p>
+            <a:r>
+              <a:t>N1: Profe, hemos visto muchas cifras. ¿Cómo lo amarro todo?</a:t>
+            </a:r>
+          </a:p>
+          <a:p>
+            <a:r>
+              <a:t>N2: Vamos a reconstruirlo con cabeza, no de memorieta. La conexión rígida es prolongar el mismo tubo de la instalación, y solo para fijos. Los flexibles se ordenan por una única idea de seguridad: el tubo nunca debe quedar bajo las llamas, así que va lo más corto posible; de ahí salen todas las longitudes máximas, dos metros el acero corrugado, un metro y medio la espirometálica y los elastómeros, y las versiones de calefacción móvil más cortas, casi todas sesenta centímetros salvo el acero corrugado con enchufe, que llega a setenta y cinco. Los dos flexibles con enchufe de seguridad son de casa y se roscan, nunca racor de dos piezas. El tubo naranja de la bombona lleva boquillas y abrazadera metálica. Y ninguno cruza por detrás del horno salvo aislamiento certificado por debajo de treinta grados.</a:t>
+            </a:r>
+          </a:p>
+          <a:p>
+            <a:r>
+              <a:t>N1: ¿Y a la hora de la verdad, examen y obra?</a:t>
+            </a:r>
+          </a:p>
+          <a:p>
+            <a:r>
+              <a:t>N2: En el examen te cruzan las longitudes a ver si te lías, te preguntan qué unión lleva el enchufe de seguridad, o te dan un aparato y esperan que digas rígida o flexible con el Anexo A. En la obra, cada una de estas reglas es una fuga o un incendio que evitas: el flexible corto, la abrazadera metálica, la rosca bien hecha. Con esto cierras el Tema catorce completo: ya sabes dónde va cada aparato, con qué se conecta y cómo se monta bien. Hoy no es que sepas más, es que ya trabajas como un gasista de verdad. Enhorabuena, has terminado el tema.</a:t>
+            </a:r>
+          </a:p>
+        </p:txBody>
+      </p:sp>
+      <p:sp>
+        <p:nvSpPr>
+          <p:cNvPr id="4" name="Slide Number Placeholder 3"/>
+          <p:cNvSpPr>
+            <a:spLocks noGrp="1"/>
+          </p:cNvSpPr>
+          <p:nvPr>
+            <p:ph type="sldNum" idx="5" sz="quarter"/>
+          </p:nvPr>
+        </p:nvSpPr>
+        <p:spPr/>
+      </p:sp>
+    </p:spTree>
+  </p:cSld>
+  <p:clrMapOvr>
+    <a:masterClrMapping/>
+  </p:clrMapOvr>
+</p:notes>
+</file>
+
 <file path=ppt/notesSlides/notesSlide3.xml><?xml version="1.0" encoding="utf-8"?>
 <p:notes xmlns:a="http://schemas.openxmlformats.org/drawingml/2006/main" xmlns:p="http://schemas.openxmlformats.org/presentationml/2006/main" xmlns:r="http://schemas.openxmlformats.org/officeDocument/2006/relationships">
   <p:cSld>
@@ -1418,12 +1874,12 @@
           <a:lstStyle/>
           <a:p>
             <a:r>
-              <a:t>N1: ¿Por qué insisten tanto con la longitud del flexible?</a:t>
-            </a:r>
-          </a:p>
-          <a:p>
-            <a:r>
-              <a:t>N2: Porque es la clave de seguridad que está por encima de todas las cifras. Un tubo flexible debe medir lo mínimo necesario para llegar al aparato, ni un palmo de más. ¿La razón? Si dejas tubo de sobra, ese tubo cuelga, y puede acabar cayendo justo encima del quemador o tocando una parte caliente. Y un flexible bajo las llamas o pegado al calor se reseca, se cuartea como una goma vieja y termina fugando. De una fuga de gas a un incendio o a una intoxicación por monóxido hay un paso. Por eso la norma repite en cada tipo: el flexible nunca debe quedar bajo la acción de las llamas. Corta a medida y llévalo por donde no le llegue calor.</a:t>
+              <a:t>N1: Cuidado con esta, que es contraintuitiva. Flexible de acero corrugado con el diámetro gordo, mayor de quince, ¿qué longitud máxima le toca?</a:t>
+            </a:r>
+          </a:p>
+          <a:p>
+            <a:r>
+              <a:t>N2: Pista: cuanto más gordo es el tubo, más corta debe ser la conexión.</a:t>
             </a:r>
           </a:p>
         </p:txBody>
@@ -1493,12 +1949,12 @@
           <a:lstStyle/>
           <a:p>
             <a:r>
-              <a:t>N1: Vamos con las de enchufe de seguridad. ¿La primera?</a:t>
-            </a:r>
-          </a:p>
-          <a:p>
-            <a:r>
-              <a:t>N2: La espirometálica, un flexible metálico en espiral, que siempre lleva enchufe de seguridad, ese enganche que corta el gas al desconectar. Por llevar enchufe de seguridad, ya sabes: solo uso doméstico. ¿Y la longitud? Aquí toca aprender la cifra: como máximo un metro y medio. Pero si conectas un aparato de calefacción móvil, una estufa que arrastras por la casa, se acorta a sesenta centímetros, para que no ande el tubo suelto por el suelo. Reténlo así: espirometálica, metro y medio en general, sesenta centímetros si es calefacción que se mueve.</a:t>
+              <a:t>N1: ¿Por qué la más corta?</a:t>
+            </a:r>
+          </a:p>
+          <a:p>
+            <a:r>
+              <a:t>N2: Justo por eso: con diámetro fino, hasta dos metros; con diámetro gordo, mayor de quince, solo cuarenta y siete centímetros. Es al revés de lo que uno pensaría, y por eso se pregunta tanto. Y por encima de la cifra, la regla de oro: el flexible nunca debe quedar bajo las llamas.</a:t>
             </a:r>
           </a:p>
         </p:txBody>
@@ -1568,12 +2024,12 @@
           <a:lstStyle/>
           <a:p>
             <a:r>
-              <a:t>N1: Y la otra con enchufe, ¿cambia mucho?</a:t>
-            </a:r>
-          </a:p>
-          <a:p>
-            <a:r>
-              <a:t>N2: Son dos primas hermanas. Esta es de acero inoxidable corrugado y también lleva enchufe de seguridad, así que otra vez solo uso doméstico. Todo igual... menos las cifras, y ahí está la trampa del examen. La espirometálica de antes eran un metro y medio, y sesenta centímetros en calefacción móvil. Esta llega a dos metros en general, y setenta y cinco centímetros si es calefacción móvil. No las mezcles: mismo tipo de aparato, longitudes distintas. Un truco: casi todas las calefacciones móviles se quedan en sesenta centímetros; la única que se estira a setenta y cinco es justo esta, el acero corrugado con enchufe.</a:t>
+              <a:t>N1: ¿Por qué insisten tanto con la longitud del flexible?</a:t>
+            </a:r>
+          </a:p>
+          <a:p>
+            <a:r>
+              <a:t>N2: Porque es la clave de seguridad que está por encima de todas las cifras. Un tubo flexible debe medir lo mínimo necesario para llegar al aparato, ni un palmo de más. ¿La razón? Si dejas tubo de sobra, ese tubo cuelga, y puede acabar cayendo justo encima del quemador o tocando una parte caliente. Y un flexible bajo las llamas o pegado al calor se reseca, se cuartea como una goma vieja y termina fugando. De una fuga de gas a un incendio o a una intoxicación por monóxido hay un paso. Por eso la norma repite en cada tipo: el flexible nunca debe quedar bajo la acción de las llamas. Corta a medida y llévalo por donde no le llegue calor.</a:t>
             </a:r>
           </a:p>
         </p:txBody>
@@ -1643,12 +2099,12 @@
           <a:lstStyle/>
           <a:p>
             <a:r>
-              <a:t>N1: ¿Por qué prohíben el racor de dos piezas?</a:t>
-            </a:r>
-          </a:p>
-          <a:p>
-            <a:r>
-              <a:t>N2: En las dos conexiones con enchufe de seguridad, la espirometálica y la de acero corrugado, la unión mecánica va roscada, con una rosca cónica que sella al apretar. Y hay una prohibición tajante: nunca con racor de dos piezas. El racor de dos piezas es ese de tuerca loca que aprieta una junta entre dos mitades. ¿El problema? Con la vibración se puede aflojar y empezar a fugar. La rosca cónica, en cambio, sella mucho mejor y no se suelta. Por eso la regla, cortita para que se te grabe: enchufe de seguridad, rosca sí, racor de dos piezas no.</a:t>
+              <a:t>N1: Vamos con las de enchufe de seguridad. ¿La primera?</a:t>
+            </a:r>
+          </a:p>
+          <a:p>
+            <a:r>
+              <a:t>N2: La espirometálica, un flexible metálico en espiral, que siempre lleva enchufe de seguridad, ese enganche que corta el gas al desconectar. Por llevar enchufe de seguridad, ya sabes: solo uso doméstico. ¿Y la longitud? Aquí toca aprender la cifra: como máximo un metro y medio. Pero si conectas un aparato de calefacción móvil, una estufa que arrastras por la casa, se acorta a sesenta centímetros, para que no ande el tubo suelto por el suelo. Reténlo así: espirometálica, metro y medio en general, sesenta centímetros si es calefacción que se mueve.</a:t>
             </a:r>
           </a:p>
         </p:txBody>
@@ -4734,7 +5190,7 @@
       </p:sp>
       <p:sp>
         <p:nvSpPr>
-          <p:cNvPr id="4" name="Rounded Rectangle 3"/>
+          <p:cNvPr id="4" name="Rectangle 3"/>
           <p:cNvSpPr/>
           <p:nvPr/>
         </p:nvSpPr>
@@ -4743,7 +5199,7 @@
             <a:off x="868680" y="2057400"/>
             <a:ext cx="1463040" cy="82296"/>
           </a:xfrm>
-          <a:prstGeom prst="roundRect">
+          <a:prstGeom prst="rect">
             <a:avLst/>
           </a:prstGeom>
           <a:solidFill>
@@ -4860,6 +5316,18 @@
   <p:clrMapOvr>
     <a:masterClrMapping/>
   </p:clrMapOvr>
+  <mc:AlternateContent xmlns:mc="http://schemas.openxmlformats.org/markup-compatibility/2006">
+    <mc:Choice xmlns:p14="http://schemas.microsoft.com/office/powerpoint/2010/main" Requires="p14">
+      <p:transition spd="med" p14:dur="700">
+        <p14:cube dir="l"/>
+      </p:transition>
+    </mc:Choice>
+    <mc:Fallback>
+      <p:transition spd="med">
+        <p:push dir="l"/>
+      </p:transition>
+    </mc:Fallback>
+  </mc:AlternateContent>
 </p:sld>
 </file>
 
@@ -4947,7 +5415,7 @@
                 </a:solidFill>
                 <a:latin typeface="Montserrat"/>
               </a:rPr>
-              <a:t>010 / 016</a:t>
+              <a:t>010 / 022</a:t>
             </a:r>
           </a:p>
         </p:txBody>
@@ -5015,7 +5483,7 @@
                 </a:solidFill>
                 <a:latin typeface="Montserrat"/>
               </a:rPr>
-              <a:t>PROHIBICIÓN · CALOR</a:t>
+              <a:t>4.4 · ACERO CORRUGADO CON ENCHUFE</a:t>
             </a:r>
           </a:p>
         </p:txBody>
@@ -5049,14 +5517,14 @@
                 </a:solidFill>
                 <a:latin typeface="Montserrat"/>
               </a:rPr>
-              <a:t>No cruzar tras el horno</a:t>
-            </a:r>
-          </a:p>
-        </p:txBody>
-      </p:sp>
-      <p:sp>
-        <p:nvSpPr>
-          <p:cNvPr id="7" name="Rounded Rectangle 6"/>
+              <a:t>Con enchufe: 2 m</a:t>
+            </a:r>
+          </a:p>
+        </p:txBody>
+      </p:sp>
+      <p:sp>
+        <p:nvSpPr>
+          <p:cNvPr id="7" name="Rectangle 6"/>
           <p:cNvSpPr/>
           <p:nvPr/>
         </p:nvSpPr>
@@ -5065,7 +5533,7 @@
             <a:off x="868680" y="1627632"/>
             <a:ext cx="2011680" cy="73152"/>
           </a:xfrm>
-          <a:prstGeom prst="roundRect">
+          <a:prstGeom prst="rect">
             <a:avLst/>
           </a:prstGeom>
           <a:solidFill>
@@ -5107,7 +5575,7 @@
         <p:spPr>
           <a:xfrm>
             <a:off x="822960" y="1965960"/>
-            <a:ext cx="4983480" cy="4206240"/>
+            <a:ext cx="5029200" cy="4206240"/>
           </a:xfrm>
           <a:prstGeom prst="rect">
             <a:avLst/>
@@ -5141,7 +5609,7 @@
                 </a:solidFill>
                 <a:latin typeface="Montserrat"/>
               </a:rPr>
-              <a:t>Nada por detrás de una cocina con horno</a:t>
+              <a:t>Misma familia, con enchufe de seguridad</a:t>
             </a:r>
           </a:p>
           <a:p>
@@ -5166,7 +5634,7 @@
                 </a:solidFill>
                 <a:latin typeface="Montserrat"/>
               </a:rPr>
-              <a:t>Salvo aislamiento térmico certificado</a:t>
+              <a:t>Exclusiva de uso doméstico</a:t>
             </a:r>
           </a:p>
           <a:p>
@@ -5191,21 +5659,46 @@
                 </a:solidFill>
                 <a:latin typeface="Montserrat"/>
               </a:rPr>
-              <a:t>Y ≤ 30 °C de sobrecalentamiento</a:t>
-            </a:r>
-          </a:p>
-        </p:txBody>
-      </p:sp>
-      <p:sp>
-        <p:nvSpPr>
-          <p:cNvPr id="9" name="imgph" descr="IMGQ:kitchen oven back panel installation"/>
+              <a:t>Longitud máxima 2 m</a:t>
+            </a:r>
+          </a:p>
+          <a:p>
+            <a:pPr>
+              <a:spcAft>
+                <a:spcPts val="1100"/>
+              </a:spcAft>
+            </a:pPr>
+            <a:r>
+              <a:rPr sz="1600" b="1" i="0">
+                <a:solidFill>
+                  <a:srgbClr val="E8801A"/>
+                </a:solidFill>
+                <a:latin typeface="Montserrat"/>
+              </a:rPr>
+              <a:t>▸  </a:t>
+            </a:r>
+            <a:r>
+              <a:rPr sz="1600" b="0" i="0">
+                <a:solidFill>
+                  <a:srgbClr val="1B2330"/>
+                </a:solidFill>
+                <a:latin typeface="Montserrat"/>
+              </a:rPr>
+              <a:t>Calefacción móvil: 0,75 m</a:t>
+            </a:r>
+          </a:p>
+        </p:txBody>
+      </p:sp>
+      <p:sp>
+        <p:nvSpPr>
+          <p:cNvPr id="9" name="imgph" descr="IMGQ:stainless steel gas connector kitchen"/>
           <p:cNvSpPr/>
           <p:nvPr/>
         </p:nvSpPr>
         <p:spPr>
           <a:xfrm>
-            <a:off x="5806440" y="1051560"/>
-            <a:ext cx="5298947" cy="4629150"/>
+            <a:off x="6080760" y="1965960"/>
+            <a:ext cx="5303520" cy="4572000"/>
           </a:xfrm>
           <a:prstGeom prst="roundRect">
             <a:avLst/>
@@ -5250,8 +5743,8 @@
         </p:nvSpPr>
         <p:spPr>
           <a:xfrm>
-            <a:off x="6080760" y="2726055"/>
-            <a:ext cx="4750307" cy="1280160"/>
+            <a:off x="6355080" y="3611880"/>
+            <a:ext cx="4754880" cy="1280160"/>
           </a:xfrm>
           <a:prstGeom prst="rect">
             <a:avLst/>
@@ -5272,7 +5765,7 @@
                 </a:solidFill>
                 <a:latin typeface="Montserrat"/>
               </a:rPr>
-              <a:t>IMAGEN REALISTA</a:t>
+              <a:t>IMAGEN</a:t>
             </a:r>
           </a:p>
           <a:p>
@@ -5284,7 +5777,7 @@
                 </a:solidFill>
                 <a:latin typeface="Montserrat"/>
               </a:rPr>
-              <a:t>kitchen oven back panel installation</a:t>
+              <a:t>stainless steel gas connector kitchen</a:t>
             </a:r>
           </a:p>
         </p:txBody>
@@ -5294,6 +5787,18 @@
   <p:clrMapOvr>
     <a:masterClrMapping/>
   </p:clrMapOvr>
+  <mc:AlternateContent xmlns:mc="http://schemas.openxmlformats.org/markup-compatibility/2006">
+    <mc:Choice xmlns:p14="http://schemas.microsoft.com/office/powerpoint/2010/main" Requires="p14">
+      <p:transition spd="med" p14:dur="700">
+        <p14:cube dir="r"/>
+      </p:transition>
+    </mc:Choice>
+    <mc:Fallback>
+      <p:transition spd="med">
+        <p:push dir="r"/>
+      </p:transition>
+    </mc:Fallback>
+  </mc:AlternateContent>
 </p:sld>
 </file>
 
@@ -5381,7 +5886,7 @@
                 </a:solidFill>
                 <a:latin typeface="Montserrat"/>
               </a:rPr>
-              <a:t>011 / 016</a:t>
+              <a:t>011 / 022</a:t>
             </a:r>
           </a:p>
         </p:txBody>
@@ -5422,84 +5927,16 @@
       </p:sp>
       <p:sp>
         <p:nvSpPr>
-          <p:cNvPr id="5" name="TextBox 4"/>
-          <p:cNvSpPr txBox="1"/>
-          <p:nvPr/>
-        </p:nvSpPr>
-        <p:spPr>
-          <a:xfrm>
-            <a:off x="822960" y="457200"/>
-            <a:ext cx="10058400" cy="365760"/>
-          </a:xfrm>
-          <a:prstGeom prst="rect">
-            <a:avLst/>
-          </a:prstGeom>
-          <a:noFill/>
-        </p:spPr>
-        <p:txBody>
-          <a:bodyPr wrap="square">
-            <a:spAutoFit/>
-          </a:bodyPr>
-          <a:lstStyle/>
-          <a:p>
-            <a:r>
-              <a:rPr sz="1300" b="1" i="0">
-                <a:solidFill>
-                  <a:srgbClr val="E8801A"/>
-                </a:solidFill>
-                <a:latin typeface="Montserrat"/>
-              </a:rPr>
-              <a:t>4.5 · ELASTÓMERO CON ARMADURA</a:t>
-            </a:r>
-          </a:p>
-        </p:txBody>
-      </p:sp>
-      <p:sp>
-        <p:nvSpPr>
-          <p:cNvPr id="6" name="TextBox 5"/>
-          <p:cNvSpPr txBox="1"/>
-          <p:nvPr/>
-        </p:nvSpPr>
-        <p:spPr>
-          <a:xfrm>
-            <a:off x="822960" y="868680"/>
-            <a:ext cx="10515600" cy="914400"/>
-          </a:xfrm>
-          <a:prstGeom prst="rect">
-            <a:avLst/>
-          </a:prstGeom>
-          <a:noFill/>
-        </p:spPr>
-        <p:txBody>
-          <a:bodyPr wrap="square">
-            <a:spAutoFit/>
-          </a:bodyPr>
-          <a:lstStyle/>
-          <a:p>
-            <a:r>
-              <a:rPr sz="2800" b="1" i="0">
-                <a:solidFill>
-                  <a:srgbClr val="1E2761"/>
-                </a:solidFill>
-                <a:latin typeface="Montserrat"/>
-              </a:rPr>
-              <a:t>Goma reforzada: móvil y GLP</a:t>
-            </a:r>
-          </a:p>
-        </p:txBody>
-      </p:sp>
-      <p:sp>
-        <p:nvSpPr>
-          <p:cNvPr id="7" name="Rounded Rectangle 6"/>
+          <p:cNvPr id="5" name="Rectangle 4"/>
           <p:cNvSpPr/>
           <p:nvPr/>
         </p:nvSpPr>
         <p:spPr>
           <a:xfrm>
-            <a:off x="868680" y="1627632"/>
-            <a:ext cx="2011680" cy="73152"/>
-          </a:xfrm>
-          <a:prstGeom prst="roundRect">
+            <a:off x="0" y="0"/>
+            <a:ext cx="12191695" cy="1143000"/>
+          </a:xfrm>
+          <a:prstGeom prst="rect">
             <a:avLst/>
           </a:prstGeom>
           <a:solidFill>
@@ -5534,14 +5971,14 @@
       </p:sp>
       <p:sp>
         <p:nvSpPr>
-          <p:cNvPr id="8" name="TextBox 7"/>
+          <p:cNvPr id="6" name="TextBox 5"/>
           <p:cNvSpPr txBox="1"/>
           <p:nvPr/>
         </p:nvSpPr>
         <p:spPr>
           <a:xfrm>
-            <a:off x="822960" y="1965960"/>
-            <a:ext cx="4983480" cy="4206240"/>
+            <a:off x="822960" y="274320"/>
+            <a:ext cx="10515600" cy="640080"/>
           </a:xfrm>
           <a:prstGeom prst="rect">
             <a:avLst/>
@@ -5554,117 +5991,62 @@
           </a:bodyPr>
           <a:lstStyle/>
           <a:p>
-            <a:pPr>
-              <a:spcAft>
-                <a:spcPts val="1100"/>
-              </a:spcAft>
-            </a:pPr>
-            <a:r>
-              <a:rPr sz="1600" b="1" i="0">
-                <a:solidFill>
-                  <a:srgbClr val="E8801A"/>
-                </a:solidFill>
-                <a:latin typeface="Montserrat"/>
-              </a:rPr>
-              <a:t>▸  </a:t>
-            </a:r>
-            <a:r>
-              <a:rPr sz="1600" b="0" i="0">
-                <a:solidFill>
-                  <a:srgbClr val="1B2330"/>
-                </a:solidFill>
-                <a:latin typeface="Montserrat"/>
-              </a:rPr>
-              <a:t>Goma con malla de refuerzo</a:t>
-            </a:r>
-          </a:p>
-          <a:p>
-            <a:pPr>
-              <a:spcAft>
-                <a:spcPts val="1100"/>
-              </a:spcAft>
-            </a:pPr>
-            <a:r>
-              <a:rPr sz="1600" b="1" i="0">
-                <a:solidFill>
-                  <a:srgbClr val="E8801A"/>
-                </a:solidFill>
-                <a:latin typeface="Montserrat"/>
-              </a:rPr>
-              <a:t>▸  </a:t>
-            </a:r>
-            <a:r>
-              <a:rPr sz="1600" b="0" i="0">
-                <a:solidFill>
-                  <a:srgbClr val="1B2330"/>
-                </a:solidFill>
-                <a:latin typeface="Montserrat"/>
-              </a:rPr>
-              <a:t>Móviles no domésticos con GLP</a:t>
-            </a:r>
-          </a:p>
-          <a:p>
-            <a:pPr>
-              <a:spcAft>
-                <a:spcPts val="1100"/>
-              </a:spcAft>
-            </a:pPr>
-            <a:r>
-              <a:rPr sz="1600" b="1" i="0">
-                <a:solidFill>
-                  <a:srgbClr val="E8801A"/>
-                </a:solidFill>
-                <a:latin typeface="Montserrat"/>
-              </a:rPr>
-              <a:t>▸  </a:t>
-            </a:r>
-            <a:r>
-              <a:rPr sz="1600" b="0" i="0">
-                <a:solidFill>
-                  <a:srgbClr val="1B2330"/>
-                </a:solidFill>
-                <a:latin typeface="Montserrat"/>
-              </a:rPr>
-              <a:t>Sopletes: norma de soldeo</a:t>
-            </a:r>
-          </a:p>
-          <a:p>
-            <a:pPr>
-              <a:spcAft>
-                <a:spcPts val="1100"/>
-              </a:spcAft>
-            </a:pPr>
-            <a:r>
-              <a:rPr sz="1600" b="1" i="0">
-                <a:solidFill>
-                  <a:srgbClr val="E8801A"/>
-                </a:solidFill>
-                <a:latin typeface="Montserrat"/>
-              </a:rPr>
-              <a:t>▸  </a:t>
-            </a:r>
-            <a:r>
-              <a:rPr sz="1600" b="0" i="0">
-                <a:solidFill>
-                  <a:srgbClr val="1B2330"/>
-                </a:solidFill>
-                <a:latin typeface="Montserrat"/>
-              </a:rPr>
-              <a:t>Longitud máxima 1,5 m</a:t>
-            </a:r>
-          </a:p>
-        </p:txBody>
-      </p:sp>
-      <p:sp>
-        <p:nvSpPr>
-          <p:cNvPr id="9" name="imgph" descr="IMGQ:reinforced braided rubber gas hose"/>
+            <a:r>
+              <a:rPr sz="2400" b="1" i="0">
+                <a:solidFill>
+                  <a:srgbClr val="FFFFFF"/>
+                </a:solidFill>
+                <a:latin typeface="Montserrat"/>
+              </a:rPr>
+              <a:t>⚡  PREGUNTA RÁPIDA</a:t>
+            </a:r>
+          </a:p>
+        </p:txBody>
+      </p:sp>
+      <p:sp>
+        <p:nvSpPr>
+          <p:cNvPr id="7" name="TextBox 6"/>
+          <p:cNvSpPr txBox="1"/>
+          <p:nvPr/>
+        </p:nvSpPr>
+        <p:spPr>
+          <a:xfrm>
+            <a:off x="822960" y="1508760"/>
+            <a:ext cx="10515600" cy="1371600"/>
+          </a:xfrm>
+          <a:prstGeom prst="rect">
+            <a:avLst/>
+          </a:prstGeom>
+          <a:noFill/>
+        </p:spPr>
+        <p:txBody>
+          <a:bodyPr wrap="square">
+            <a:spAutoFit/>
+          </a:bodyPr>
+          <a:lstStyle/>
+          <a:p>
+            <a:r>
+              <a:rPr sz="2400" b="1" i="0">
+                <a:solidFill>
+                  <a:srgbClr val="1E2761"/>
+                </a:solidFill>
+                <a:latin typeface="Montserrat"/>
+              </a:rPr>
+              <a:t>Acero inox corrugado con enchufe de seguridad en calefacción móvil: ¿longitud máxima?</a:t>
+            </a:r>
+          </a:p>
+        </p:txBody>
+      </p:sp>
+      <p:sp>
+        <p:nvSpPr>
+          <p:cNvPr id="8" name="Rounded Rectangle 7"/>
           <p:cNvSpPr/>
           <p:nvPr/>
         </p:nvSpPr>
         <p:spPr>
           <a:xfrm>
-            <a:off x="5806440" y="1051560"/>
-            <a:ext cx="5298947" cy="4629150"/>
+            <a:off x="822960" y="3291840"/>
+            <a:ext cx="4983480" cy="1143000"/>
           </a:xfrm>
           <a:prstGeom prst="roundRect">
             <a:avLst/>
@@ -5703,14 +6085,58 @@
       </p:sp>
       <p:sp>
         <p:nvSpPr>
+          <p:cNvPr id="9" name="Rectangle 8"/>
+          <p:cNvSpPr/>
+          <p:nvPr/>
+        </p:nvSpPr>
+        <p:spPr>
+          <a:xfrm>
+            <a:off x="822960" y="3291840"/>
+            <a:ext cx="640080" cy="1143000"/>
+          </a:xfrm>
+          <a:prstGeom prst="rect">
+            <a:avLst/>
+          </a:prstGeom>
+          <a:solidFill>
+            <a:srgbClr val="1E2761"/>
+          </a:solidFill>
+          <a:ln>
+            <a:noFill/>
+          </a:ln>
+          <a:effectLst/>
+        </p:spPr>
+        <p:style>
+          <a:lnRef idx="1">
+            <a:schemeClr val="accent1"/>
+          </a:lnRef>
+          <a:fillRef idx="3">
+            <a:schemeClr val="accent1"/>
+          </a:fillRef>
+          <a:effectRef idx="2">
+            <a:schemeClr val="accent1"/>
+          </a:effectRef>
+          <a:fontRef idx="minor">
+            <a:schemeClr val="lt1"/>
+          </a:fontRef>
+        </p:style>
+        <p:txBody>
+          <a:bodyPr rtlCol="0" anchor="ctr"/>
+          <a:lstStyle/>
+          <a:p>
+            <a:pPr algn="ctr"/>
+          </a:p>
+        </p:txBody>
+      </p:sp>
+      <p:sp>
+        <p:nvSpPr>
           <p:cNvPr id="10" name="TextBox 9"/>
           <p:cNvSpPr txBox="1"/>
           <p:nvPr/>
         </p:nvSpPr>
         <p:spPr>
           <a:xfrm>
-            <a:off x="6080760" y="2726055"/>
-            <a:ext cx="4750307" cy="1280160"/>
+            <a:off x="822960" y="3611880"/>
+            <a:ext cx="640080" cy="548640"/>
           </a:xfrm>
           <a:prstGeom prst="rect">
             <a:avLst/>
@@ -5725,25 +6151,524 @@
           <a:p>
             <a:pPr algn="ctr"/>
             <a:r>
-              <a:rPr sz="1400" b="1" i="0">
-                <a:solidFill>
-                  <a:srgbClr val="64748B"/>
-                </a:solidFill>
-                <a:latin typeface="Montserrat"/>
-              </a:rPr>
-              <a:t>IMAGEN REALISTA</a:t>
-            </a:r>
-          </a:p>
+              <a:rPr sz="2200" b="1" i="0">
+                <a:solidFill>
+                  <a:srgbClr val="FFFFFF"/>
+                </a:solidFill>
+                <a:latin typeface="Montserrat"/>
+              </a:rPr>
+              <a:t>A</a:t>
+            </a:r>
+          </a:p>
+        </p:txBody>
+      </p:sp>
+      <p:sp>
+        <p:nvSpPr>
+          <p:cNvPr id="11" name="TextBox 10"/>
+          <p:cNvSpPr txBox="1"/>
+          <p:nvPr/>
+        </p:nvSpPr>
+        <p:spPr>
+          <a:xfrm>
+            <a:off x="1600200" y="3474720"/>
+            <a:ext cx="4114800" cy="868680"/>
+          </a:xfrm>
+          <a:prstGeom prst="rect">
+            <a:avLst/>
+          </a:prstGeom>
+          <a:noFill/>
+        </p:spPr>
+        <p:txBody>
+          <a:bodyPr wrap="square">
+            <a:spAutoFit/>
+          </a:bodyPr>
+          <a:lstStyle/>
+          <a:p>
+            <a:r>
+              <a:rPr sz="1400" b="0" i="0">
+                <a:solidFill>
+                  <a:srgbClr val="1B2330"/>
+                </a:solidFill>
+                <a:latin typeface="Montserrat"/>
+              </a:rPr>
+              <a:t>0,6 m</a:t>
+            </a:r>
+          </a:p>
+        </p:txBody>
+      </p:sp>
+      <p:sp>
+        <p:nvSpPr>
+          <p:cNvPr id="12" name="Rounded Rectangle 11"/>
+          <p:cNvSpPr/>
+          <p:nvPr/>
+        </p:nvSpPr>
+        <p:spPr>
+          <a:xfrm>
+            <a:off x="6355080" y="3291840"/>
+            <a:ext cx="4983480" cy="1143000"/>
+          </a:xfrm>
+          <a:prstGeom prst="roundRect">
+            <a:avLst/>
+          </a:prstGeom>
+          <a:solidFill>
+            <a:srgbClr val="F3F6FB"/>
+          </a:solidFill>
+          <a:ln w="12700">
+            <a:solidFill>
+              <a:srgbClr val="C7D2E6"/>
+            </a:solidFill>
+          </a:ln>
+          <a:effectLst/>
+        </p:spPr>
+        <p:style>
+          <a:lnRef idx="1">
+            <a:schemeClr val="accent1"/>
+          </a:lnRef>
+          <a:fillRef idx="3">
+            <a:schemeClr val="accent1"/>
+          </a:fillRef>
+          <a:effectRef idx="2">
+            <a:schemeClr val="accent1"/>
+          </a:effectRef>
+          <a:fontRef idx="minor">
+            <a:schemeClr val="lt1"/>
+          </a:fontRef>
+        </p:style>
+        <p:txBody>
+          <a:bodyPr rtlCol="0" anchor="ctr"/>
+          <a:lstStyle/>
           <a:p>
             <a:pPr algn="ctr"/>
-            <a:r>
-              <a:rPr sz="1100" b="0" i="1">
-                <a:solidFill>
-                  <a:srgbClr val="64748B"/>
-                </a:solidFill>
-                <a:latin typeface="Montserrat"/>
-              </a:rPr>
-              <a:t>reinforced braided rubber gas hose</a:t>
+          </a:p>
+        </p:txBody>
+      </p:sp>
+      <p:sp>
+        <p:nvSpPr>
+          <p:cNvPr id="13" name="Rectangle 12"/>
+          <p:cNvSpPr/>
+          <p:nvPr/>
+        </p:nvSpPr>
+        <p:spPr>
+          <a:xfrm>
+            <a:off x="6355080" y="3291840"/>
+            <a:ext cx="640080" cy="1143000"/>
+          </a:xfrm>
+          <a:prstGeom prst="rect">
+            <a:avLst/>
+          </a:prstGeom>
+          <a:solidFill>
+            <a:srgbClr val="1E2761"/>
+          </a:solidFill>
+          <a:ln>
+            <a:noFill/>
+          </a:ln>
+          <a:effectLst/>
+        </p:spPr>
+        <p:style>
+          <a:lnRef idx="1">
+            <a:schemeClr val="accent1"/>
+          </a:lnRef>
+          <a:fillRef idx="3">
+            <a:schemeClr val="accent1"/>
+          </a:fillRef>
+          <a:effectRef idx="2">
+            <a:schemeClr val="accent1"/>
+          </a:effectRef>
+          <a:fontRef idx="minor">
+            <a:schemeClr val="lt1"/>
+          </a:fontRef>
+        </p:style>
+        <p:txBody>
+          <a:bodyPr rtlCol="0" anchor="ctr"/>
+          <a:lstStyle/>
+          <a:p>
+            <a:pPr algn="ctr"/>
+          </a:p>
+        </p:txBody>
+      </p:sp>
+      <p:sp>
+        <p:nvSpPr>
+          <p:cNvPr id="14" name="TextBox 13"/>
+          <p:cNvSpPr txBox="1"/>
+          <p:nvPr/>
+        </p:nvSpPr>
+        <p:spPr>
+          <a:xfrm>
+            <a:off x="6355080" y="3611880"/>
+            <a:ext cx="640080" cy="548640"/>
+          </a:xfrm>
+          <a:prstGeom prst="rect">
+            <a:avLst/>
+          </a:prstGeom>
+          <a:noFill/>
+        </p:spPr>
+        <p:txBody>
+          <a:bodyPr wrap="square">
+            <a:spAutoFit/>
+          </a:bodyPr>
+          <a:lstStyle/>
+          <a:p>
+            <a:pPr algn="ctr"/>
+            <a:r>
+              <a:rPr sz="2200" b="1" i="0">
+                <a:solidFill>
+                  <a:srgbClr val="FFFFFF"/>
+                </a:solidFill>
+                <a:latin typeface="Montserrat"/>
+              </a:rPr>
+              <a:t>B</a:t>
+            </a:r>
+          </a:p>
+        </p:txBody>
+      </p:sp>
+      <p:sp>
+        <p:nvSpPr>
+          <p:cNvPr id="15" name="TextBox 14"/>
+          <p:cNvSpPr txBox="1"/>
+          <p:nvPr/>
+        </p:nvSpPr>
+        <p:spPr>
+          <a:xfrm>
+            <a:off x="7132320" y="3474720"/>
+            <a:ext cx="4114800" cy="868680"/>
+          </a:xfrm>
+          <a:prstGeom prst="rect">
+            <a:avLst/>
+          </a:prstGeom>
+          <a:noFill/>
+        </p:spPr>
+        <p:txBody>
+          <a:bodyPr wrap="square">
+            <a:spAutoFit/>
+          </a:bodyPr>
+          <a:lstStyle/>
+          <a:p>
+            <a:r>
+              <a:rPr sz="1400" b="0" i="0">
+                <a:solidFill>
+                  <a:srgbClr val="1B2330"/>
+                </a:solidFill>
+                <a:latin typeface="Montserrat"/>
+              </a:rPr>
+              <a:t>0,75 m</a:t>
+            </a:r>
+          </a:p>
+        </p:txBody>
+      </p:sp>
+      <p:sp>
+        <p:nvSpPr>
+          <p:cNvPr id="16" name="Rounded Rectangle 15"/>
+          <p:cNvSpPr/>
+          <p:nvPr/>
+        </p:nvSpPr>
+        <p:spPr>
+          <a:xfrm>
+            <a:off x="822960" y="4617720"/>
+            <a:ext cx="4983480" cy="1143000"/>
+          </a:xfrm>
+          <a:prstGeom prst="roundRect">
+            <a:avLst/>
+          </a:prstGeom>
+          <a:solidFill>
+            <a:srgbClr val="F3F6FB"/>
+          </a:solidFill>
+          <a:ln w="12700">
+            <a:solidFill>
+              <a:srgbClr val="C7D2E6"/>
+            </a:solidFill>
+          </a:ln>
+          <a:effectLst/>
+        </p:spPr>
+        <p:style>
+          <a:lnRef idx="1">
+            <a:schemeClr val="accent1"/>
+          </a:lnRef>
+          <a:fillRef idx="3">
+            <a:schemeClr val="accent1"/>
+          </a:fillRef>
+          <a:effectRef idx="2">
+            <a:schemeClr val="accent1"/>
+          </a:effectRef>
+          <a:fontRef idx="minor">
+            <a:schemeClr val="lt1"/>
+          </a:fontRef>
+        </p:style>
+        <p:txBody>
+          <a:bodyPr rtlCol="0" anchor="ctr"/>
+          <a:lstStyle/>
+          <a:p>
+            <a:pPr algn="ctr"/>
+          </a:p>
+        </p:txBody>
+      </p:sp>
+      <p:sp>
+        <p:nvSpPr>
+          <p:cNvPr id="17" name="Rectangle 16"/>
+          <p:cNvSpPr/>
+          <p:nvPr/>
+        </p:nvSpPr>
+        <p:spPr>
+          <a:xfrm>
+            <a:off x="822960" y="4617720"/>
+            <a:ext cx="640080" cy="1143000"/>
+          </a:xfrm>
+          <a:prstGeom prst="rect">
+            <a:avLst/>
+          </a:prstGeom>
+          <a:solidFill>
+            <a:srgbClr val="1E2761"/>
+          </a:solidFill>
+          <a:ln>
+            <a:noFill/>
+          </a:ln>
+          <a:effectLst/>
+        </p:spPr>
+        <p:style>
+          <a:lnRef idx="1">
+            <a:schemeClr val="accent1"/>
+          </a:lnRef>
+          <a:fillRef idx="3">
+            <a:schemeClr val="accent1"/>
+          </a:fillRef>
+          <a:effectRef idx="2">
+            <a:schemeClr val="accent1"/>
+          </a:effectRef>
+          <a:fontRef idx="minor">
+            <a:schemeClr val="lt1"/>
+          </a:fontRef>
+        </p:style>
+        <p:txBody>
+          <a:bodyPr rtlCol="0" anchor="ctr"/>
+          <a:lstStyle/>
+          <a:p>
+            <a:pPr algn="ctr"/>
+          </a:p>
+        </p:txBody>
+      </p:sp>
+      <p:sp>
+        <p:nvSpPr>
+          <p:cNvPr id="18" name="TextBox 17"/>
+          <p:cNvSpPr txBox="1"/>
+          <p:nvPr/>
+        </p:nvSpPr>
+        <p:spPr>
+          <a:xfrm>
+            <a:off x="822960" y="4937760"/>
+            <a:ext cx="640080" cy="548640"/>
+          </a:xfrm>
+          <a:prstGeom prst="rect">
+            <a:avLst/>
+          </a:prstGeom>
+          <a:noFill/>
+        </p:spPr>
+        <p:txBody>
+          <a:bodyPr wrap="square">
+            <a:spAutoFit/>
+          </a:bodyPr>
+          <a:lstStyle/>
+          <a:p>
+            <a:pPr algn="ctr"/>
+            <a:r>
+              <a:rPr sz="2200" b="1" i="0">
+                <a:solidFill>
+                  <a:srgbClr val="FFFFFF"/>
+                </a:solidFill>
+                <a:latin typeface="Montserrat"/>
+              </a:rPr>
+              <a:t>C</a:t>
+            </a:r>
+          </a:p>
+        </p:txBody>
+      </p:sp>
+      <p:sp>
+        <p:nvSpPr>
+          <p:cNvPr id="19" name="TextBox 18"/>
+          <p:cNvSpPr txBox="1"/>
+          <p:nvPr/>
+        </p:nvSpPr>
+        <p:spPr>
+          <a:xfrm>
+            <a:off x="1600200" y="4800600"/>
+            <a:ext cx="4114800" cy="868680"/>
+          </a:xfrm>
+          <a:prstGeom prst="rect">
+            <a:avLst/>
+          </a:prstGeom>
+          <a:noFill/>
+        </p:spPr>
+        <p:txBody>
+          <a:bodyPr wrap="square">
+            <a:spAutoFit/>
+          </a:bodyPr>
+          <a:lstStyle/>
+          <a:p>
+            <a:r>
+              <a:rPr sz="1400" b="0" i="0">
+                <a:solidFill>
+                  <a:srgbClr val="1B2330"/>
+                </a:solidFill>
+                <a:latin typeface="Montserrat"/>
+              </a:rPr>
+              <a:t>1,5 m</a:t>
+            </a:r>
+          </a:p>
+        </p:txBody>
+      </p:sp>
+      <p:sp>
+        <p:nvSpPr>
+          <p:cNvPr id="20" name="Rounded Rectangle 19"/>
+          <p:cNvSpPr/>
+          <p:nvPr/>
+        </p:nvSpPr>
+        <p:spPr>
+          <a:xfrm>
+            <a:off x="6355080" y="4617720"/>
+            <a:ext cx="4983480" cy="1143000"/>
+          </a:xfrm>
+          <a:prstGeom prst="roundRect">
+            <a:avLst/>
+          </a:prstGeom>
+          <a:solidFill>
+            <a:srgbClr val="F3F6FB"/>
+          </a:solidFill>
+          <a:ln w="12700">
+            <a:solidFill>
+              <a:srgbClr val="C7D2E6"/>
+            </a:solidFill>
+          </a:ln>
+          <a:effectLst/>
+        </p:spPr>
+        <p:style>
+          <a:lnRef idx="1">
+            <a:schemeClr val="accent1"/>
+          </a:lnRef>
+          <a:fillRef idx="3">
+            <a:schemeClr val="accent1"/>
+          </a:fillRef>
+          <a:effectRef idx="2">
+            <a:schemeClr val="accent1"/>
+          </a:effectRef>
+          <a:fontRef idx="minor">
+            <a:schemeClr val="lt1"/>
+          </a:fontRef>
+        </p:style>
+        <p:txBody>
+          <a:bodyPr rtlCol="0" anchor="ctr"/>
+          <a:lstStyle/>
+          <a:p>
+            <a:pPr algn="ctr"/>
+          </a:p>
+        </p:txBody>
+      </p:sp>
+      <p:sp>
+        <p:nvSpPr>
+          <p:cNvPr id="21" name="Rectangle 20"/>
+          <p:cNvSpPr/>
+          <p:nvPr/>
+        </p:nvSpPr>
+        <p:spPr>
+          <a:xfrm>
+            <a:off x="6355080" y="4617720"/>
+            <a:ext cx="640080" cy="1143000"/>
+          </a:xfrm>
+          <a:prstGeom prst="rect">
+            <a:avLst/>
+          </a:prstGeom>
+          <a:solidFill>
+            <a:srgbClr val="1E2761"/>
+          </a:solidFill>
+          <a:ln>
+            <a:noFill/>
+          </a:ln>
+          <a:effectLst/>
+        </p:spPr>
+        <p:style>
+          <a:lnRef idx="1">
+            <a:schemeClr val="accent1"/>
+          </a:lnRef>
+          <a:fillRef idx="3">
+            <a:schemeClr val="accent1"/>
+          </a:fillRef>
+          <a:effectRef idx="2">
+            <a:schemeClr val="accent1"/>
+          </a:effectRef>
+          <a:fontRef idx="minor">
+            <a:schemeClr val="lt1"/>
+          </a:fontRef>
+        </p:style>
+        <p:txBody>
+          <a:bodyPr rtlCol="0" anchor="ctr"/>
+          <a:lstStyle/>
+          <a:p>
+            <a:pPr algn="ctr"/>
+          </a:p>
+        </p:txBody>
+      </p:sp>
+      <p:sp>
+        <p:nvSpPr>
+          <p:cNvPr id="22" name="TextBox 21"/>
+          <p:cNvSpPr txBox="1"/>
+          <p:nvPr/>
+        </p:nvSpPr>
+        <p:spPr>
+          <a:xfrm>
+            <a:off x="6355080" y="4937760"/>
+            <a:ext cx="640080" cy="548640"/>
+          </a:xfrm>
+          <a:prstGeom prst="rect">
+            <a:avLst/>
+          </a:prstGeom>
+          <a:noFill/>
+        </p:spPr>
+        <p:txBody>
+          <a:bodyPr wrap="square">
+            <a:spAutoFit/>
+          </a:bodyPr>
+          <a:lstStyle/>
+          <a:p>
+            <a:pPr algn="ctr"/>
+            <a:r>
+              <a:rPr sz="2200" b="1" i="0">
+                <a:solidFill>
+                  <a:srgbClr val="FFFFFF"/>
+                </a:solidFill>
+                <a:latin typeface="Montserrat"/>
+              </a:rPr>
+              <a:t>D</a:t>
+            </a:r>
+          </a:p>
+        </p:txBody>
+      </p:sp>
+      <p:sp>
+        <p:nvSpPr>
+          <p:cNvPr id="23" name="TextBox 22"/>
+          <p:cNvSpPr txBox="1"/>
+          <p:nvPr/>
+        </p:nvSpPr>
+        <p:spPr>
+          <a:xfrm>
+            <a:off x="7132320" y="4800600"/>
+            <a:ext cx="4114800" cy="868680"/>
+          </a:xfrm>
+          <a:prstGeom prst="rect">
+            <a:avLst/>
+          </a:prstGeom>
+          <a:noFill/>
+        </p:spPr>
+        <p:txBody>
+          <a:bodyPr wrap="square">
+            <a:spAutoFit/>
+          </a:bodyPr>
+          <a:lstStyle/>
+          <a:p>
+            <a:r>
+              <a:rPr sz="1400" b="0" i="0">
+                <a:solidFill>
+                  <a:srgbClr val="1B2330"/>
+                </a:solidFill>
+                <a:latin typeface="Montserrat"/>
+              </a:rPr>
+              <a:t>2 m</a:t>
             </a:r>
           </a:p>
         </p:txBody>
@@ -5753,6 +6678,18 @@
   <p:clrMapOvr>
     <a:masterClrMapping/>
   </p:clrMapOvr>
+  <mc:AlternateContent xmlns:mc="http://schemas.openxmlformats.org/markup-compatibility/2006">
+    <mc:Choice xmlns:p14="http://schemas.microsoft.com/office/powerpoint/2010/main" Requires="p14">
+      <p:transition spd="med" p14:dur="700">
+        <p14:cube dir="l"/>
+      </p:transition>
+    </mc:Choice>
+    <mc:Fallback>
+      <p:transition spd="med">
+        <p:push dir="l"/>
+      </p:transition>
+    </mc:Fallback>
+  </mc:AlternateContent>
 </p:sld>
 </file>
 
@@ -5840,7 +6777,7 @@
                 </a:solidFill>
                 <a:latin typeface="Montserrat"/>
               </a:rPr>
-              <a:t>012 / 016</a:t>
+              <a:t>012 / 022</a:t>
             </a:r>
           </a:p>
         </p:txBody>
@@ -5881,88 +6818,20 @@
       </p:sp>
       <p:sp>
         <p:nvSpPr>
-          <p:cNvPr id="5" name="TextBox 4"/>
-          <p:cNvSpPr txBox="1"/>
-          <p:nvPr/>
-        </p:nvSpPr>
-        <p:spPr>
-          <a:xfrm>
-            <a:off x="822960" y="457200"/>
-            <a:ext cx="10058400" cy="365760"/>
-          </a:xfrm>
-          <a:prstGeom prst="rect">
-            <a:avLst/>
-          </a:prstGeom>
-          <a:noFill/>
-        </p:spPr>
-        <p:txBody>
-          <a:bodyPr wrap="square">
-            <a:spAutoFit/>
-          </a:bodyPr>
-          <a:lstStyle/>
-          <a:p>
-            <a:r>
-              <a:rPr sz="1300" b="1" i="0">
-                <a:solidFill>
-                  <a:srgbClr val="E8801A"/>
-                </a:solidFill>
-                <a:latin typeface="Montserrat"/>
-              </a:rPr>
-              <a:t>4.6 · ELASTÓMERO</a:t>
-            </a:r>
-          </a:p>
-        </p:txBody>
-      </p:sp>
-      <p:sp>
-        <p:nvSpPr>
-          <p:cNvPr id="6" name="TextBox 5"/>
-          <p:cNvSpPr txBox="1"/>
-          <p:nvPr/>
-        </p:nvSpPr>
-        <p:spPr>
-          <a:xfrm>
-            <a:off x="822960" y="868680"/>
-            <a:ext cx="10515600" cy="914400"/>
-          </a:xfrm>
-          <a:prstGeom prst="rect">
-            <a:avLst/>
-          </a:prstGeom>
-          <a:noFill/>
-        </p:spPr>
-        <p:txBody>
-          <a:bodyPr wrap="square">
-            <a:spAutoFit/>
-          </a:bodyPr>
-          <a:lstStyle/>
-          <a:p>
-            <a:r>
-              <a:rPr sz="2800" b="1" i="0">
-                <a:solidFill>
-                  <a:srgbClr val="1E2761"/>
-                </a:solidFill>
-                <a:latin typeface="Montserrat"/>
-              </a:rPr>
-              <a:t>El tubo naranja de la bombona</a:t>
-            </a:r>
-          </a:p>
-        </p:txBody>
-      </p:sp>
-      <p:sp>
-        <p:nvSpPr>
-          <p:cNvPr id="7" name="Rounded Rectangle 6"/>
+          <p:cNvPr id="5" name="Rectangle 4"/>
           <p:cNvSpPr/>
           <p:nvPr/>
         </p:nvSpPr>
         <p:spPr>
           <a:xfrm>
-            <a:off x="868680" y="1627632"/>
-            <a:ext cx="2011680" cy="73152"/>
-          </a:xfrm>
-          <a:prstGeom prst="roundRect">
+            <a:off x="0" y="0"/>
+            <a:ext cx="12191695" cy="1143000"/>
+          </a:xfrm>
+          <a:prstGeom prst="rect">
             <a:avLst/>
           </a:prstGeom>
           <a:solidFill>
-            <a:srgbClr val="E8801A"/>
+            <a:srgbClr val="1E8E4B"/>
           </a:solidFill>
           <a:ln>
             <a:noFill/>
@@ -5993,14 +6862,14 @@
       </p:sp>
       <p:sp>
         <p:nvSpPr>
-          <p:cNvPr id="8" name="TextBox 7"/>
+          <p:cNvPr id="6" name="TextBox 5"/>
           <p:cNvSpPr txBox="1"/>
           <p:nvPr/>
         </p:nvSpPr>
         <p:spPr>
           <a:xfrm>
-            <a:off x="822960" y="1965960"/>
-            <a:ext cx="4983480" cy="4206240"/>
+            <a:off x="822960" y="274320"/>
+            <a:ext cx="10515600" cy="640080"/>
           </a:xfrm>
           <a:prstGeom prst="rect">
             <a:avLst/>
@@ -6013,127 +6882,72 @@
           </a:bodyPr>
           <a:lstStyle/>
           <a:p>
-            <a:pPr>
-              <a:spcAft>
-                <a:spcPts val="1100"/>
-              </a:spcAft>
-            </a:pPr>
-            <a:r>
-              <a:rPr sz="1600" b="1" i="0">
-                <a:solidFill>
-                  <a:srgbClr val="E8801A"/>
-                </a:solidFill>
-                <a:latin typeface="Montserrat"/>
-              </a:rPr>
-              <a:t>▸  </a:t>
-            </a:r>
-            <a:r>
-              <a:rPr sz="1600" b="0" i="0">
-                <a:solidFill>
-                  <a:srgbClr val="1B2330"/>
-                </a:solidFill>
-                <a:latin typeface="Montserrat"/>
-              </a:rPr>
-              <a:t>El clásico de butano (goma)</a:t>
-            </a:r>
-          </a:p>
-          <a:p>
-            <a:pPr>
-              <a:spcAft>
-                <a:spcPts val="1100"/>
-              </a:spcAft>
-            </a:pPr>
-            <a:r>
-              <a:rPr sz="1600" b="1" i="0">
-                <a:solidFill>
-                  <a:srgbClr val="E8801A"/>
-                </a:solidFill>
-                <a:latin typeface="Montserrat"/>
-              </a:rPr>
-              <a:t>▸  </a:t>
-            </a:r>
-            <a:r>
-              <a:rPr sz="1600" b="0" i="0">
-                <a:solidFill>
-                  <a:srgbClr val="1B2330"/>
-                </a:solidFill>
-                <a:latin typeface="Montserrat"/>
-              </a:rPr>
-              <a:t>Boquillas UNE 60714, mismo DN</a:t>
-            </a:r>
-          </a:p>
-          <a:p>
-            <a:pPr>
-              <a:spcAft>
-                <a:spcPts val="1100"/>
-              </a:spcAft>
-            </a:pPr>
-            <a:r>
-              <a:rPr sz="1600" b="1" i="0">
-                <a:solidFill>
-                  <a:srgbClr val="E8801A"/>
-                </a:solidFill>
-                <a:latin typeface="Montserrat"/>
-              </a:rPr>
-              <a:t>▸  </a:t>
-            </a:r>
-            <a:r>
-              <a:rPr sz="1600" b="0" i="0">
-                <a:solidFill>
-                  <a:srgbClr val="1B2330"/>
-                </a:solidFill>
-                <a:latin typeface="Montserrat"/>
-              </a:rPr>
-              <a:t>Abrazaderas metálicas, nunca de plástico</a:t>
-            </a:r>
-          </a:p>
-          <a:p>
-            <a:pPr>
-              <a:spcAft>
-                <a:spcPts val="1100"/>
-              </a:spcAft>
-            </a:pPr>
-            <a:r>
-              <a:rPr sz="1600" b="1" i="0">
-                <a:solidFill>
-                  <a:srgbClr val="E8801A"/>
-                </a:solidFill>
-                <a:latin typeface="Montserrat"/>
-              </a:rPr>
-              <a:t>▸  </a:t>
-            </a:r>
-            <a:r>
-              <a:rPr sz="1600" b="0" i="0">
-                <a:solidFill>
-                  <a:srgbClr val="1B2330"/>
-                </a:solidFill>
-                <a:latin typeface="Montserrat"/>
-              </a:rPr>
-              <a:t>Solo móviles, mecheros y sopletes</a:t>
-            </a:r>
-          </a:p>
-        </p:txBody>
-      </p:sp>
-      <p:sp>
-        <p:nvSpPr>
-          <p:cNvPr id="9" name="imgph" descr="IMGQ:orange butane rubber hose metal clamp"/>
+            <a:r>
+              <a:rPr sz="2400" b="1" i="0">
+                <a:solidFill>
+                  <a:srgbClr val="FFFFFF"/>
+                </a:solidFill>
+                <a:latin typeface="Montserrat"/>
+              </a:rPr>
+              <a:t>✔  RESPUESTA:  B</a:t>
+            </a:r>
+          </a:p>
+        </p:txBody>
+      </p:sp>
+      <p:sp>
+        <p:nvSpPr>
+          <p:cNvPr id="7" name="TextBox 6"/>
+          <p:cNvSpPr txBox="1"/>
+          <p:nvPr/>
+        </p:nvSpPr>
+        <p:spPr>
+          <a:xfrm>
+            <a:off x="822960" y="1417320"/>
+            <a:ext cx="10515600" cy="914400"/>
+          </a:xfrm>
+          <a:prstGeom prst="rect">
+            <a:avLst/>
+          </a:prstGeom>
+          <a:noFill/>
+        </p:spPr>
+        <p:txBody>
+          <a:bodyPr wrap="square">
+            <a:spAutoFit/>
+          </a:bodyPr>
+          <a:lstStyle/>
+          <a:p>
+            <a:r>
+              <a:rPr sz="1800" b="1" i="0">
+                <a:solidFill>
+                  <a:srgbClr val="64748B"/>
+                </a:solidFill>
+                <a:latin typeface="Montserrat"/>
+              </a:rPr>
+              <a:t>Acero inox corrugado con enchufe de seguridad en calefacción móvil: ¿longitud máxima?</a:t>
+            </a:r>
+          </a:p>
+        </p:txBody>
+      </p:sp>
+      <p:sp>
+        <p:nvSpPr>
+          <p:cNvPr id="8" name="Rounded Rectangle 7"/>
           <p:cNvSpPr/>
           <p:nvPr/>
         </p:nvSpPr>
         <p:spPr>
           <a:xfrm>
-            <a:off x="5806440" y="1051560"/>
-            <a:ext cx="5298947" cy="4629150"/>
+            <a:off x="822960" y="2514600"/>
+            <a:ext cx="10515600" cy="914400"/>
           </a:xfrm>
           <a:prstGeom prst="roundRect">
             <a:avLst/>
           </a:prstGeom>
           <a:solidFill>
-            <a:srgbClr val="F3F6FB"/>
+            <a:srgbClr val="E9F6EE"/>
           </a:solidFill>
           <a:ln w="12700">
             <a:solidFill>
-              <a:srgbClr val="C7D2E6"/>
+              <a:srgbClr val="1E8E4B"/>
             </a:solidFill>
           </a:ln>
           <a:effectLst/>
@@ -6162,14 +6976,14 @@
       </p:sp>
       <p:sp>
         <p:nvSpPr>
-          <p:cNvPr id="10" name="TextBox 9"/>
+          <p:cNvPr id="9" name="TextBox 8"/>
           <p:cNvSpPr txBox="1"/>
           <p:nvPr/>
         </p:nvSpPr>
         <p:spPr>
           <a:xfrm>
-            <a:off x="6080760" y="2726055"/>
-            <a:ext cx="4750307" cy="1280160"/>
+            <a:off x="1097280" y="2697480"/>
+            <a:ext cx="10058400" cy="640080"/>
           </a:xfrm>
           <a:prstGeom prst="rect">
             <a:avLst/>
@@ -6182,27 +6996,66 @@
           </a:bodyPr>
           <a:lstStyle/>
           <a:p>
-            <a:pPr algn="ctr"/>
-            <a:r>
-              <a:rPr sz="1400" b="1" i="0">
-                <a:solidFill>
-                  <a:srgbClr val="64748B"/>
-                </a:solidFill>
-                <a:latin typeface="Montserrat"/>
-              </a:rPr>
-              <a:t>IMAGEN REALISTA</a:t>
-            </a:r>
-          </a:p>
-          <a:p>
-            <a:pPr algn="ctr"/>
-            <a:r>
-              <a:rPr sz="1100" b="0" i="1">
-                <a:solidFill>
-                  <a:srgbClr val="64748B"/>
-                </a:solidFill>
-                <a:latin typeface="Montserrat"/>
-              </a:rPr>
-              <a:t>orange butane rubber hose metal clamp</a:t>
+            <a:r>
+              <a:rPr sz="1800" b="1" i="0">
+                <a:solidFill>
+                  <a:srgbClr val="1E8E4B"/>
+                </a:solidFill>
+                <a:latin typeface="Montserrat"/>
+              </a:rPr>
+              <a:t>B.  </a:t>
+            </a:r>
+            <a:r>
+              <a:rPr sz="1800" b="1" i="0">
+                <a:solidFill>
+                  <a:srgbClr val="1E2761"/>
+                </a:solidFill>
+                <a:latin typeface="Montserrat"/>
+              </a:rPr>
+              <a:t>0,75 m</a:t>
+            </a:r>
+          </a:p>
+        </p:txBody>
+      </p:sp>
+      <p:sp>
+        <p:nvSpPr>
+          <p:cNvPr id="10" name="TextBox 9"/>
+          <p:cNvSpPr txBox="1"/>
+          <p:nvPr/>
+        </p:nvSpPr>
+        <p:spPr>
+          <a:xfrm>
+            <a:off x="822960" y="3749039"/>
+            <a:ext cx="10515600" cy="2194560"/>
+          </a:xfrm>
+          <a:prstGeom prst="rect">
+            <a:avLst/>
+          </a:prstGeom>
+          <a:noFill/>
+        </p:spPr>
+        <p:txBody>
+          <a:bodyPr wrap="square">
+            <a:spAutoFit/>
+          </a:bodyPr>
+          <a:lstStyle/>
+          <a:p>
+            <a:r>
+              <a:rPr sz="1500" b="1" i="0">
+                <a:solidFill>
+                  <a:srgbClr val="E8801A"/>
+                </a:solidFill>
+                <a:latin typeface="Montserrat"/>
+              </a:rPr>
+              <a:t>Por qué:  </a:t>
+            </a:r>
+            <a:r>
+              <a:rPr sz="1500" b="0" i="0">
+                <a:solidFill>
+                  <a:srgbClr val="1B2330"/>
+                </a:solidFill>
+                <a:latin typeface="Montserrat"/>
+              </a:rPr>
+              <a:t>Es la excepción: casi todas las calefacciones móviles se quedan en 0,6 m, pero esta llega a 0,75 m.</a:t>
             </a:r>
           </a:p>
         </p:txBody>
@@ -6212,6 +7065,18 @@
   <p:clrMapOvr>
     <a:masterClrMapping/>
   </p:clrMapOvr>
+  <mc:AlternateContent xmlns:mc="http://schemas.openxmlformats.org/markup-compatibility/2006">
+    <mc:Choice xmlns:p14="http://schemas.microsoft.com/office/powerpoint/2010/main" Requires="p14">
+      <p:transition spd="med" p14:dur="700">
+        <p14:cube dir="r"/>
+      </p:transition>
+    </mc:Choice>
+    <mc:Fallback>
+      <p:transition spd="med">
+        <p:push dir="r"/>
+      </p:transition>
+    </mc:Fallback>
+  </mc:AlternateContent>
 </p:sld>
 </file>
 
@@ -6299,7 +7164,7 @@
                 </a:solidFill>
                 <a:latin typeface="Montserrat"/>
               </a:rPr>
-              <a:t>013 / 016</a:t>
+              <a:t>013 / 022</a:t>
             </a:r>
           </a:p>
         </p:txBody>
@@ -6367,7 +7232,7 @@
                 </a:solidFill>
                 <a:latin typeface="Montserrat"/>
               </a:rPr>
-              <a:t>4.7 · METÁLICA CORRUGADA</a:t>
+              <a:t>MONTAJE · ENCHUFE DE SEGURIDAD</a:t>
             </a:r>
           </a:p>
         </p:txBody>
@@ -6401,14 +7266,14 @@
                 </a:solidFill>
                 <a:latin typeface="Montserrat"/>
               </a:rPr>
-              <a:t>Metálica corrugada, sin enchufe</a:t>
-            </a:r>
-          </a:p>
-        </p:txBody>
-      </p:sp>
-      <p:sp>
-        <p:nvSpPr>
-          <p:cNvPr id="7" name="Rounded Rectangle 6"/>
+              <a:t>Rosca sí, racor de dos piezas no</a:t>
+            </a:r>
+          </a:p>
+        </p:txBody>
+      </p:sp>
+      <p:sp>
+        <p:nvSpPr>
+          <p:cNvPr id="7" name="Rectangle 6"/>
           <p:cNvSpPr/>
           <p:nvPr/>
         </p:nvSpPr>
@@ -6417,7 +7282,7 @@
             <a:off x="868680" y="1627632"/>
             <a:ext cx="2011680" cy="73152"/>
           </a:xfrm>
-          <a:prstGeom prst="roundRect">
+          <a:prstGeom prst="rect">
             <a:avLst/>
           </a:prstGeom>
           <a:solidFill>
@@ -6458,8 +7323,8 @@
         </p:nvSpPr>
         <p:spPr>
           <a:xfrm>
-            <a:off x="822960" y="1965960"/>
-            <a:ext cx="4983480" cy="4206240"/>
+            <a:off x="6355080" y="1965960"/>
+            <a:ext cx="5029200" cy="4206240"/>
           </a:xfrm>
           <a:prstGeom prst="rect">
             <a:avLst/>
@@ -6493,7 +7358,7 @@
                 </a:solidFill>
                 <a:latin typeface="Montserrat"/>
               </a:rPr>
-              <a:t>Misma manguera que la 4.4</a:t>
+              <a:t>Unión roscada UNE-EN 10226-1</a:t>
             </a:r>
           </a:p>
           <a:p>
@@ -6518,7 +7383,7 @@
                 </a:solidFill>
                 <a:latin typeface="Montserrat"/>
               </a:rPr>
-              <a:t>Pero SIN enchufe de seguridad</a:t>
+              <a:t>Racor de dos piezas: prohibido</a:t>
             </a:r>
           </a:p>
           <a:p>
@@ -6543,46 +7408,21 @@
                 </a:solidFill>
                 <a:latin typeface="Montserrat"/>
               </a:rPr>
-              <a:t>Longitud máxima 2 m</a:t>
-            </a:r>
-          </a:p>
-          <a:p>
-            <a:pPr>
-              <a:spcAft>
-                <a:spcPts val="1100"/>
-              </a:spcAft>
-            </a:pPr>
-            <a:r>
-              <a:rPr sz="1600" b="1" i="0">
-                <a:solidFill>
-                  <a:srgbClr val="E8801A"/>
-                </a:solidFill>
-                <a:latin typeface="Montserrat"/>
-              </a:rPr>
-              <a:t>▸  </a:t>
-            </a:r>
-            <a:r>
-              <a:rPr sz="1600" b="0" i="0">
-                <a:solidFill>
-                  <a:srgbClr val="1B2330"/>
-                </a:solidFill>
-                <a:latin typeface="Montserrat"/>
-              </a:rPr>
-              <a:t>Unión: junta plana o a tetina</a:t>
-            </a:r>
-          </a:p>
-        </p:txBody>
-      </p:sp>
-      <p:sp>
-        <p:nvSpPr>
-          <p:cNvPr id="9" name="imgph" descr="IMGQ:flexible metal gas connector fitting"/>
+              <a:t>El racor se afloja y fuga</a:t>
+            </a:r>
+          </a:p>
+        </p:txBody>
+      </p:sp>
+      <p:sp>
+        <p:nvSpPr>
+          <p:cNvPr id="9" name="imgph" descr="IMGQ:threaded gas pipe fitting wrench"/>
           <p:cNvSpPr/>
           <p:nvPr/>
         </p:nvSpPr>
         <p:spPr>
           <a:xfrm>
-            <a:off x="5806440" y="1051560"/>
-            <a:ext cx="5298947" cy="4629150"/>
+            <a:off x="822960" y="1965960"/>
+            <a:ext cx="5303520" cy="4572000"/>
           </a:xfrm>
           <a:prstGeom prst="roundRect">
             <a:avLst/>
@@ -6627,8 +7467,8 @@
         </p:nvSpPr>
         <p:spPr>
           <a:xfrm>
-            <a:off x="6080760" y="2726055"/>
-            <a:ext cx="4750307" cy="1280160"/>
+            <a:off x="1097280" y="3611880"/>
+            <a:ext cx="4754880" cy="1280160"/>
           </a:xfrm>
           <a:prstGeom prst="rect">
             <a:avLst/>
@@ -6649,7 +7489,7 @@
                 </a:solidFill>
                 <a:latin typeface="Montserrat"/>
               </a:rPr>
-              <a:t>IMAGEN REALISTA</a:t>
+              <a:t>IMAGEN</a:t>
             </a:r>
           </a:p>
           <a:p>
@@ -6661,7 +7501,7 @@
                 </a:solidFill>
                 <a:latin typeface="Montserrat"/>
               </a:rPr>
-              <a:t>flexible metal gas connector fitting</a:t>
+              <a:t>threaded gas pipe fitting wrench</a:t>
             </a:r>
           </a:p>
         </p:txBody>
@@ -6671,6 +7511,18 @@
   <p:clrMapOvr>
     <a:masterClrMapping/>
   </p:clrMapOvr>
+  <mc:AlternateContent xmlns:mc="http://schemas.openxmlformats.org/markup-compatibility/2006">
+    <mc:Choice xmlns:p14="http://schemas.microsoft.com/office/powerpoint/2010/main" Requires="p14">
+      <p:transition spd="med" p14:dur="700">
+        <p14:cube dir="l"/>
+      </p:transition>
+    </mc:Choice>
+    <mc:Fallback>
+      <p:transition spd="med">
+        <p:push dir="l"/>
+      </p:transition>
+    </mc:Fallback>
+  </mc:AlternateContent>
 </p:sld>
 </file>
 
@@ -6758,7 +7610,7 @@
                 </a:solidFill>
                 <a:latin typeface="Montserrat"/>
               </a:rPr>
-              <a:t>014 / 016</a:t>
+              <a:t>014 / 022</a:t>
             </a:r>
           </a:p>
         </p:txBody>
@@ -6826,7 +7678,7 @@
                 </a:solidFill>
                 <a:latin typeface="Montserrat"/>
               </a:rPr>
-              <a:t>ANEXO A · INFORMATIVO</a:t>
+              <a:t>PROHIBICIÓN · CALOR</a:t>
             </a:r>
           </a:p>
         </p:txBody>
@@ -6860,14 +7712,14 @@
                 </a:solidFill>
                 <a:latin typeface="Montserrat"/>
               </a:rPr>
-              <a:t>¿Se mueve o no se mueve?</a:t>
-            </a:r>
-          </a:p>
-        </p:txBody>
-      </p:sp>
-      <p:sp>
-        <p:nvSpPr>
-          <p:cNvPr id="7" name="Rounded Rectangle 6"/>
+              <a:t>No cruzar tras el horno</a:t>
+            </a:r>
+          </a:p>
+        </p:txBody>
+      </p:sp>
+      <p:sp>
+        <p:nvSpPr>
+          <p:cNvPr id="7" name="Rectangle 6"/>
           <p:cNvSpPr/>
           <p:nvPr/>
         </p:nvSpPr>
@@ -6876,7 +7728,7 @@
             <a:off x="868680" y="1627632"/>
             <a:ext cx="2011680" cy="73152"/>
           </a:xfrm>
-          <a:prstGeom prst="roundRect">
+          <a:prstGeom prst="rect">
             <a:avLst/>
           </a:prstGeom>
           <a:solidFill>
@@ -6918,7 +7770,7 @@
         <p:spPr>
           <a:xfrm>
             <a:off x="822960" y="1965960"/>
-            <a:ext cx="4983480" cy="4206240"/>
+            <a:ext cx="5029200" cy="4206240"/>
           </a:xfrm>
           <a:prstGeom prst="rect">
             <a:avLst/>
@@ -6952,7 +7804,7 @@
                 </a:solidFill>
                 <a:latin typeface="Montserrat"/>
               </a:rPr>
-              <a:t>Fijo o encastrado → conexión rígida</a:t>
+              <a:t>Nada por detrás de una cocina con horno</a:t>
             </a:r>
           </a:p>
           <a:p>
@@ -6977,7 +7829,7 @@
                 </a:solidFill>
                 <a:latin typeface="Montserrat"/>
               </a:rPr>
-              <a:t>Móvil → conexión flexible</a:t>
+              <a:t>Salvo aislamiento térmico certificado</a:t>
             </a:r>
           </a:p>
           <a:p>
@@ -7002,21 +7854,21 @@
                 </a:solidFill>
                 <a:latin typeface="Montserrat"/>
               </a:rPr>
-              <a:t>Es una guía orientativa</a:t>
-            </a:r>
-          </a:p>
-        </p:txBody>
-      </p:sp>
-      <p:sp>
-        <p:nvSpPr>
-          <p:cNvPr id="9" name="imgph" descr="IMGQ:built in gas hob kitchen counter"/>
+              <a:t>Y ≤ 30 °C de sobrecalentamiento</a:t>
+            </a:r>
+          </a:p>
+        </p:txBody>
+      </p:sp>
+      <p:sp>
+        <p:nvSpPr>
+          <p:cNvPr id="9" name="imgph" descr="IMGQ:kitchen oven back panel installation"/>
           <p:cNvSpPr/>
           <p:nvPr/>
         </p:nvSpPr>
         <p:spPr>
           <a:xfrm>
-            <a:off x="5806440" y="1051560"/>
-            <a:ext cx="5298947" cy="4629150"/>
+            <a:off x="6080760" y="1965960"/>
+            <a:ext cx="5303520" cy="4572000"/>
           </a:xfrm>
           <a:prstGeom prst="roundRect">
             <a:avLst/>
@@ -7061,8 +7913,8 @@
         </p:nvSpPr>
         <p:spPr>
           <a:xfrm>
-            <a:off x="6080760" y="2726055"/>
-            <a:ext cx="4750307" cy="1280160"/>
+            <a:off x="6355080" y="3611880"/>
+            <a:ext cx="4754880" cy="1280160"/>
           </a:xfrm>
           <a:prstGeom prst="rect">
             <a:avLst/>
@@ -7083,7 +7935,7 @@
                 </a:solidFill>
                 <a:latin typeface="Montserrat"/>
               </a:rPr>
-              <a:t>IMAGEN REALISTA</a:t>
+              <a:t>IMAGEN</a:t>
             </a:r>
           </a:p>
           <a:p>
@@ -7095,7 +7947,7 @@
                 </a:solidFill>
                 <a:latin typeface="Montserrat"/>
               </a:rPr>
-              <a:t>built in gas hob kitchen counter</a:t>
+              <a:t>kitchen oven back panel installation</a:t>
             </a:r>
           </a:p>
         </p:txBody>
@@ -7105,6 +7957,18 @@
   <p:clrMapOvr>
     <a:masterClrMapping/>
   </p:clrMapOvr>
+  <mc:AlternateContent xmlns:mc="http://schemas.openxmlformats.org/markup-compatibility/2006">
+    <mc:Choice xmlns:p14="http://schemas.microsoft.com/office/powerpoint/2010/main" Requires="p14">
+      <p:transition spd="med" p14:dur="700">
+        <p14:cube dir="r"/>
+      </p:transition>
+    </mc:Choice>
+    <mc:Fallback>
+      <p:transition spd="med">
+        <p:push dir="r"/>
+      </p:transition>
+    </mc:Fallback>
+  </mc:AlternateContent>
 </p:sld>
 </file>
 
@@ -7192,7 +8056,7 @@
                 </a:solidFill>
                 <a:latin typeface="Montserrat"/>
               </a:rPr>
-              <a:t>015 / 016</a:t>
+              <a:t>015 / 022</a:t>
             </a:r>
           </a:p>
         </p:txBody>
@@ -7260,7 +8124,7 @@
                 </a:solidFill>
                 <a:latin typeface="Montserrat"/>
               </a:rPr>
-              <a:t>EL PAPELEO</a:t>
+              <a:t>4.5 · ELASTÓMERO CON ARMADURA</a:t>
             </a:r>
           </a:p>
         </p:txBody>
@@ -7294,14 +8158,14 @@
                 </a:solidFill>
                 <a:latin typeface="Montserrat"/>
               </a:rPr>
-              <a:t>Un montaje mal hecho, se firma</a:t>
-            </a:r>
-          </a:p>
-        </p:txBody>
-      </p:sp>
-      <p:sp>
-        <p:nvSpPr>
-          <p:cNvPr id="7" name="Rounded Rectangle 6"/>
+              <a:t>Goma reforzada: móvil y GLP</a:t>
+            </a:r>
+          </a:p>
+        </p:txBody>
+      </p:sp>
+      <p:sp>
+        <p:nvSpPr>
+          <p:cNvPr id="7" name="Rectangle 6"/>
           <p:cNvSpPr/>
           <p:nvPr/>
         </p:nvSpPr>
@@ -7310,7 +8174,7 @@
             <a:off x="868680" y="1627632"/>
             <a:ext cx="2011680" cy="73152"/>
           </a:xfrm>
-          <a:prstGeom prst="roundRect">
+          <a:prstGeom prst="rect">
             <a:avLst/>
           </a:prstGeom>
           <a:solidFill>
@@ -7351,8 +8215,8 @@
         </p:nvSpPr>
         <p:spPr>
           <a:xfrm>
-            <a:off x="822960" y="1965960"/>
-            <a:ext cx="4983480" cy="4206240"/>
+            <a:off x="6355080" y="1965960"/>
+            <a:ext cx="5029200" cy="4206240"/>
           </a:xfrm>
           <a:prstGeom prst="rect">
             <a:avLst/>
@@ -7386,7 +8250,7 @@
                 </a:solidFill>
                 <a:latin typeface="Montserrat"/>
               </a:rPr>
-              <a:t>Certificado de instalación y puesta en marcha</a:t>
+              <a:t>Goma con malla de refuerzo</a:t>
             </a:r>
           </a:p>
           <a:p>
@@ -7411,7 +8275,7 @@
                 </a:solidFill>
                 <a:latin typeface="Montserrat"/>
               </a:rPr>
-              <a:t>Se entrega al usuario</a:t>
+              <a:t>Móviles no domésticos con GLP</a:t>
             </a:r>
           </a:p>
           <a:p>
@@ -7436,21 +8300,46 @@
                 </a:solidFill>
                 <a:latin typeface="Montserrat"/>
               </a:rPr>
-              <a:t>Cambiar un flexible caducado se registra</a:t>
-            </a:r>
-          </a:p>
-        </p:txBody>
-      </p:sp>
-      <p:sp>
-        <p:nvSpPr>
-          <p:cNvPr id="9" name="imgph" descr="IMGQ:gas installer signing certificate document"/>
+              <a:t>Sopletes: norma de soldeo</a:t>
+            </a:r>
+          </a:p>
+          <a:p>
+            <a:pPr>
+              <a:spcAft>
+                <a:spcPts val="1100"/>
+              </a:spcAft>
+            </a:pPr>
+            <a:r>
+              <a:rPr sz="1600" b="1" i="0">
+                <a:solidFill>
+                  <a:srgbClr val="E8801A"/>
+                </a:solidFill>
+                <a:latin typeface="Montserrat"/>
+              </a:rPr>
+              <a:t>▸  </a:t>
+            </a:r>
+            <a:r>
+              <a:rPr sz="1600" b="0" i="0">
+                <a:solidFill>
+                  <a:srgbClr val="1B2330"/>
+                </a:solidFill>
+                <a:latin typeface="Montserrat"/>
+              </a:rPr>
+              <a:t>Longitud máxima 1,5 m</a:t>
+            </a:r>
+          </a:p>
+        </p:txBody>
+      </p:sp>
+      <p:sp>
+        <p:nvSpPr>
+          <p:cNvPr id="9" name="imgph" descr="IMGQ:reinforced braided rubber gas hose"/>
           <p:cNvSpPr/>
           <p:nvPr/>
         </p:nvSpPr>
         <p:spPr>
           <a:xfrm>
-            <a:off x="5806440" y="1051560"/>
-            <a:ext cx="5298947" cy="4629150"/>
+            <a:off x="822960" y="1965960"/>
+            <a:ext cx="5303520" cy="4572000"/>
           </a:xfrm>
           <a:prstGeom prst="roundRect">
             <a:avLst/>
@@ -7495,8 +8384,8 @@
         </p:nvSpPr>
         <p:spPr>
           <a:xfrm>
-            <a:off x="6080760" y="2726055"/>
-            <a:ext cx="4750307" cy="1280160"/>
+            <a:off x="1097280" y="3611880"/>
+            <a:ext cx="4754880" cy="1280160"/>
           </a:xfrm>
           <a:prstGeom prst="rect">
             <a:avLst/>
@@ -7517,7 +8406,7 @@
                 </a:solidFill>
                 <a:latin typeface="Montserrat"/>
               </a:rPr>
-              <a:t>IMAGEN REALISTA</a:t>
+              <a:t>IMAGEN</a:t>
             </a:r>
           </a:p>
           <a:p>
@@ -7529,7 +8418,7 @@
                 </a:solidFill>
                 <a:latin typeface="Montserrat"/>
               </a:rPr>
-              <a:t>gas installer signing certificate document</a:t>
+              <a:t>reinforced braided rubber gas hose</a:t>
             </a:r>
           </a:p>
         </p:txBody>
@@ -7539,6 +8428,18 @@
   <p:clrMapOvr>
     <a:masterClrMapping/>
   </p:clrMapOvr>
+  <mc:AlternateContent xmlns:mc="http://schemas.openxmlformats.org/markup-compatibility/2006">
+    <mc:Choice xmlns:p14="http://schemas.microsoft.com/office/powerpoint/2010/main" Requires="p14">
+      <p:transition spd="med" p14:dur="700">
+        <p14:cube dir="l"/>
+      </p:transition>
+    </mc:Choice>
+    <mc:Fallback>
+      <p:transition spd="med">
+        <p:push dir="l"/>
+      </p:transition>
+    </mc:Fallback>
+  </mc:AlternateContent>
 </p:sld>
 </file>
 
@@ -7567,7 +8468,7 @@
             <a:avLst/>
           </a:prstGeom>
           <a:solidFill>
-            <a:srgbClr val="1E2761"/>
+            <a:srgbClr val="FFFFFF"/>
           </a:solidFill>
           <a:ln>
             <a:noFill/>
@@ -7604,8 +8505,8 @@
         </p:nvSpPr>
         <p:spPr>
           <a:xfrm>
-            <a:off x="822960" y="640080"/>
-            <a:ext cx="10515600" cy="457200"/>
+            <a:off x="10607040" y="320040"/>
+            <a:ext cx="1371600" cy="365760"/>
           </a:xfrm>
           <a:prstGeom prst="rect">
             <a:avLst/>
@@ -7618,30 +8519,133 @@
           </a:bodyPr>
           <a:lstStyle/>
           <a:p>
-            <a:r>
-              <a:rPr sz="1400" b="1" i="0">
-                <a:solidFill>
-                  <a:srgbClr val="F4A24C"/>
-                </a:solidFill>
-                <a:latin typeface="Montserrat"/>
-              </a:rPr>
-              <a:t>LO QUE YA DOMINAS</a:t>
-            </a:r>
-          </a:p>
-        </p:txBody>
-      </p:sp>
-      <p:sp>
-        <p:nvSpPr>
-          <p:cNvPr id="4" name="Rounded Rectangle 3"/>
+            <a:pPr algn="r"/>
+            <a:r>
+              <a:rPr sz="1000" b="1" i="0">
+                <a:solidFill>
+                  <a:srgbClr val="64748B"/>
+                </a:solidFill>
+                <a:latin typeface="Montserrat"/>
+              </a:rPr>
+              <a:t>016 / 022</a:t>
+            </a:r>
+          </a:p>
+        </p:txBody>
+      </p:sp>
+      <p:sp>
+        <p:nvSpPr>
+          <p:cNvPr id="4" name="TextBox 3"/>
+          <p:cNvSpPr txBox="1"/>
+          <p:nvPr/>
+        </p:nvSpPr>
+        <p:spPr>
+          <a:xfrm>
+            <a:off x="457200" y="6419088"/>
+            <a:ext cx="8229600" cy="365760"/>
+          </a:xfrm>
+          <a:prstGeom prst="rect">
+            <a:avLst/>
+          </a:prstGeom>
+          <a:noFill/>
+        </p:spPr>
+        <p:txBody>
+          <a:bodyPr wrap="square">
+            <a:spAutoFit/>
+          </a:bodyPr>
+          <a:lstStyle/>
+          <a:p>
+            <a:r>
+              <a:rPr sz="900" b="0" i="0">
+                <a:solidFill>
+                  <a:srgbClr val="64748B"/>
+                </a:solidFill>
+                <a:latin typeface="Montserrat"/>
+              </a:rPr>
+              <a:t>Curso Gas B · Tema 14 · UNE 60670-7</a:t>
+            </a:r>
+          </a:p>
+        </p:txBody>
+      </p:sp>
+      <p:sp>
+        <p:nvSpPr>
+          <p:cNvPr id="5" name="TextBox 4"/>
+          <p:cNvSpPr txBox="1"/>
+          <p:nvPr/>
+        </p:nvSpPr>
+        <p:spPr>
+          <a:xfrm>
+            <a:off x="822960" y="457200"/>
+            <a:ext cx="10058400" cy="365760"/>
+          </a:xfrm>
+          <a:prstGeom prst="rect">
+            <a:avLst/>
+          </a:prstGeom>
+          <a:noFill/>
+        </p:spPr>
+        <p:txBody>
+          <a:bodyPr wrap="square">
+            <a:spAutoFit/>
+          </a:bodyPr>
+          <a:lstStyle/>
+          <a:p>
+            <a:r>
+              <a:rPr sz="1300" b="1" i="0">
+                <a:solidFill>
+                  <a:srgbClr val="E8801A"/>
+                </a:solidFill>
+                <a:latin typeface="Montserrat"/>
+              </a:rPr>
+              <a:t>4.6 · ELASTÓMERO</a:t>
+            </a:r>
+          </a:p>
+        </p:txBody>
+      </p:sp>
+      <p:sp>
+        <p:nvSpPr>
+          <p:cNvPr id="6" name="TextBox 5"/>
+          <p:cNvSpPr txBox="1"/>
+          <p:nvPr/>
+        </p:nvSpPr>
+        <p:spPr>
+          <a:xfrm>
+            <a:off x="822960" y="868680"/>
+            <a:ext cx="10515600" cy="914400"/>
+          </a:xfrm>
+          <a:prstGeom prst="rect">
+            <a:avLst/>
+          </a:prstGeom>
+          <a:noFill/>
+        </p:spPr>
+        <p:txBody>
+          <a:bodyPr wrap="square">
+            <a:spAutoFit/>
+          </a:bodyPr>
+          <a:lstStyle/>
+          <a:p>
+            <a:r>
+              <a:rPr sz="2800" b="1" i="0">
+                <a:solidFill>
+                  <a:srgbClr val="1E2761"/>
+                </a:solidFill>
+                <a:latin typeface="Montserrat"/>
+              </a:rPr>
+              <a:t>El tubo naranja de la bombona</a:t>
+            </a:r>
+          </a:p>
+        </p:txBody>
+      </p:sp>
+      <p:sp>
+        <p:nvSpPr>
+          <p:cNvPr id="7" name="Rectangle 6"/>
           <p:cNvSpPr/>
           <p:nvPr/>
         </p:nvSpPr>
         <p:spPr>
           <a:xfrm>
-            <a:off x="868680" y="1051560"/>
-            <a:ext cx="1463040" cy="82296"/>
-          </a:xfrm>
-          <a:prstGeom prst="roundRect">
+            <a:off x="868680" y="1627632"/>
+            <a:ext cx="2011680" cy="73152"/>
+          </a:xfrm>
+          <a:prstGeom prst="rect">
             <a:avLst/>
           </a:prstGeom>
           <a:solidFill>
@@ -7676,14 +8680,14 @@
       </p:sp>
       <p:sp>
         <p:nvSpPr>
-          <p:cNvPr id="5" name="TextBox 4"/>
+          <p:cNvPr id="8" name="TextBox 7"/>
           <p:cNvSpPr txBox="1"/>
           <p:nvPr/>
         </p:nvSpPr>
         <p:spPr>
           <a:xfrm>
-            <a:off x="822960" y="1234440"/>
-            <a:ext cx="10515600" cy="1097280"/>
+            <a:off x="822960" y="1965960"/>
+            <a:ext cx="5029200" cy="4206240"/>
           </a:xfrm>
           <a:prstGeom prst="rect">
             <a:avLst/>
@@ -7696,28 +8700,163 @@
           </a:bodyPr>
           <a:lstStyle/>
           <a:p>
-            <a:r>
-              <a:rPr sz="3400" b="1" i="0">
-                <a:solidFill>
-                  <a:srgbClr val="FFFFFF"/>
-                </a:solidFill>
-                <a:latin typeface="Montserrat"/>
-              </a:rPr>
-              <a:t>Ya montas las siete conexiones</a:t>
-            </a:r>
-          </a:p>
-        </p:txBody>
-      </p:sp>
-      <p:sp>
-        <p:nvSpPr>
-          <p:cNvPr id="6" name="TextBox 5"/>
+            <a:pPr>
+              <a:spcAft>
+                <a:spcPts val="1100"/>
+              </a:spcAft>
+            </a:pPr>
+            <a:r>
+              <a:rPr sz="1600" b="1" i="0">
+                <a:solidFill>
+                  <a:srgbClr val="E8801A"/>
+                </a:solidFill>
+                <a:latin typeface="Montserrat"/>
+              </a:rPr>
+              <a:t>▸  </a:t>
+            </a:r>
+            <a:r>
+              <a:rPr sz="1600" b="0" i="0">
+                <a:solidFill>
+                  <a:srgbClr val="1B2330"/>
+                </a:solidFill>
+                <a:latin typeface="Montserrat"/>
+              </a:rPr>
+              <a:t>El clásico de butano (goma)</a:t>
+            </a:r>
+          </a:p>
+          <a:p>
+            <a:pPr>
+              <a:spcAft>
+                <a:spcPts val="1100"/>
+              </a:spcAft>
+            </a:pPr>
+            <a:r>
+              <a:rPr sz="1600" b="1" i="0">
+                <a:solidFill>
+                  <a:srgbClr val="E8801A"/>
+                </a:solidFill>
+                <a:latin typeface="Montserrat"/>
+              </a:rPr>
+              <a:t>▸  </a:t>
+            </a:r>
+            <a:r>
+              <a:rPr sz="1600" b="0" i="0">
+                <a:solidFill>
+                  <a:srgbClr val="1B2330"/>
+                </a:solidFill>
+                <a:latin typeface="Montserrat"/>
+              </a:rPr>
+              <a:t>Boquillas UNE 60714, mismo DN</a:t>
+            </a:r>
+          </a:p>
+          <a:p>
+            <a:pPr>
+              <a:spcAft>
+                <a:spcPts val="1100"/>
+              </a:spcAft>
+            </a:pPr>
+            <a:r>
+              <a:rPr sz="1600" b="1" i="0">
+                <a:solidFill>
+                  <a:srgbClr val="E8801A"/>
+                </a:solidFill>
+                <a:latin typeface="Montserrat"/>
+              </a:rPr>
+              <a:t>▸  </a:t>
+            </a:r>
+            <a:r>
+              <a:rPr sz="1600" b="0" i="0">
+                <a:solidFill>
+                  <a:srgbClr val="1B2330"/>
+                </a:solidFill>
+                <a:latin typeface="Montserrat"/>
+              </a:rPr>
+              <a:t>Abrazaderas metálicas, nunca de plástico</a:t>
+            </a:r>
+          </a:p>
+          <a:p>
+            <a:pPr>
+              <a:spcAft>
+                <a:spcPts val="1100"/>
+              </a:spcAft>
+            </a:pPr>
+            <a:r>
+              <a:rPr sz="1600" b="1" i="0">
+                <a:solidFill>
+                  <a:srgbClr val="E8801A"/>
+                </a:solidFill>
+                <a:latin typeface="Montserrat"/>
+              </a:rPr>
+              <a:t>▸  </a:t>
+            </a:r>
+            <a:r>
+              <a:rPr sz="1600" b="0" i="0">
+                <a:solidFill>
+                  <a:srgbClr val="1B2330"/>
+                </a:solidFill>
+                <a:latin typeface="Montserrat"/>
+              </a:rPr>
+              <a:t>Solo móviles, mecheros y sopletes</a:t>
+            </a:r>
+          </a:p>
+        </p:txBody>
+      </p:sp>
+      <p:sp>
+        <p:nvSpPr>
+          <p:cNvPr id="9" name="imgph" descr="IMGQ:orange butane rubber hose metal clamp"/>
+          <p:cNvSpPr/>
+          <p:nvPr/>
+        </p:nvSpPr>
+        <p:spPr>
+          <a:xfrm>
+            <a:off x="6080760" y="1965960"/>
+            <a:ext cx="5303520" cy="4572000"/>
+          </a:xfrm>
+          <a:prstGeom prst="roundRect">
+            <a:avLst/>
+          </a:prstGeom>
+          <a:solidFill>
+            <a:srgbClr val="F3F6FB"/>
+          </a:solidFill>
+          <a:ln w="12700">
+            <a:solidFill>
+              <a:srgbClr val="C7D2E6"/>
+            </a:solidFill>
+          </a:ln>
+          <a:effectLst/>
+        </p:spPr>
+        <p:style>
+          <a:lnRef idx="1">
+            <a:schemeClr val="accent1"/>
+          </a:lnRef>
+          <a:fillRef idx="3">
+            <a:schemeClr val="accent1"/>
+          </a:fillRef>
+          <a:effectRef idx="2">
+            <a:schemeClr val="accent1"/>
+          </a:effectRef>
+          <a:fontRef idx="minor">
+            <a:schemeClr val="lt1"/>
+          </a:fontRef>
+        </p:style>
+        <p:txBody>
+          <a:bodyPr rtlCol="0" anchor="ctr"/>
+          <a:lstStyle/>
+          <a:p>
+            <a:pPr algn="ctr"/>
+          </a:p>
+        </p:txBody>
+      </p:sp>
+      <p:sp>
+        <p:nvSpPr>
+          <p:cNvPr id="10" name="TextBox 9"/>
           <p:cNvSpPr txBox="1"/>
           <p:nvPr/>
         </p:nvSpPr>
         <p:spPr>
           <a:xfrm>
-            <a:off x="822960" y="2606040"/>
-            <a:ext cx="10515600" cy="2743200"/>
+            <a:off x="6355080" y="3611880"/>
+            <a:ext cx="4754880" cy="1280160"/>
           </a:xfrm>
           <a:prstGeom prst="rect">
             <a:avLst/>
@@ -7730,119 +8869,186 @@
           </a:bodyPr>
           <a:lstStyle/>
           <a:p>
-            <a:pPr>
-              <a:spcAft>
-                <a:spcPts val="1200"/>
-              </a:spcAft>
-            </a:pPr>
-            <a:r>
-              <a:rPr sz="2000" b="1" i="0">
-                <a:solidFill>
-                  <a:srgbClr val="F4A24C"/>
-                </a:solidFill>
-                <a:latin typeface="Montserrat"/>
-              </a:rPr>
-              <a:t>✓  </a:t>
-            </a:r>
-            <a:r>
-              <a:rPr sz="1900" b="0" i="0">
-                <a:solidFill>
-                  <a:srgbClr val="FFFFFF"/>
-                </a:solidFill>
-                <a:latin typeface="Montserrat"/>
-              </a:rPr>
-              <a:t>Rígida: solo fijos, el mismo tubo de la instalación</a:t>
-            </a:r>
-          </a:p>
-          <a:p>
-            <a:pPr>
-              <a:spcAft>
-                <a:spcPts val="1200"/>
-              </a:spcAft>
-            </a:pPr>
-            <a:r>
-              <a:rPr sz="2000" b="1" i="0">
-                <a:solidFill>
-                  <a:srgbClr val="F4A24C"/>
-                </a:solidFill>
-                <a:latin typeface="Montserrat"/>
-              </a:rPr>
-              <a:t>✓  </a:t>
-            </a:r>
-            <a:r>
-              <a:rPr sz="1900" b="0" i="0">
-                <a:solidFill>
-                  <a:srgbClr val="FFFFFF"/>
-                </a:solidFill>
-                <a:latin typeface="Montserrat"/>
-              </a:rPr>
-              <a:t>Longitudes de memoria por cada tipo de flexible</a:t>
-            </a:r>
-          </a:p>
-          <a:p>
-            <a:pPr>
-              <a:spcAft>
-                <a:spcPts val="1200"/>
-              </a:spcAft>
-            </a:pPr>
-            <a:r>
-              <a:rPr sz="2000" b="1" i="0">
-                <a:solidFill>
-                  <a:srgbClr val="F4A24C"/>
-                </a:solidFill>
-                <a:latin typeface="Montserrat"/>
-              </a:rPr>
-              <a:t>✓  </a:t>
-            </a:r>
-            <a:r>
-              <a:rPr sz="1900" b="0" i="0">
-                <a:solidFill>
-                  <a:srgbClr val="FFFFFF"/>
-                </a:solidFill>
-                <a:latin typeface="Montserrat"/>
-              </a:rPr>
-              <a:t>Enchufe: rosca sí, racor no; nada tras el horno</a:t>
-            </a:r>
-          </a:p>
-          <a:p>
-            <a:pPr>
-              <a:spcAft>
-                <a:spcPts val="1200"/>
-              </a:spcAft>
-            </a:pPr>
-            <a:r>
-              <a:rPr sz="2000" b="1" i="0">
-                <a:solidFill>
-                  <a:srgbClr val="F4A24C"/>
-                </a:solidFill>
-                <a:latin typeface="Montserrat"/>
-              </a:rPr>
-              <a:t>✓  </a:t>
-            </a:r>
-            <a:r>
-              <a:rPr sz="1900" b="0" i="0">
-                <a:solidFill>
-                  <a:srgbClr val="FFFFFF"/>
-                </a:solidFill>
-                <a:latin typeface="Montserrat"/>
-              </a:rPr>
-              <a:t>Anexo A: fijo → rígida, móvil → flexible</a:t>
-            </a:r>
-          </a:p>
-        </p:txBody>
-      </p:sp>
-      <p:sp>
-        <p:nvSpPr>
-          <p:cNvPr id="7" name="Rounded Rectangle 6"/>
+            <a:pPr algn="ctr"/>
+            <a:r>
+              <a:rPr sz="1400" b="1" i="0">
+                <a:solidFill>
+                  <a:srgbClr val="64748B"/>
+                </a:solidFill>
+                <a:latin typeface="Montserrat"/>
+              </a:rPr>
+              <a:t>IMAGEN</a:t>
+            </a:r>
+          </a:p>
+          <a:p>
+            <a:pPr algn="ctr"/>
+            <a:r>
+              <a:rPr sz="1100" b="0" i="1">
+                <a:solidFill>
+                  <a:srgbClr val="64748B"/>
+                </a:solidFill>
+                <a:latin typeface="Montserrat"/>
+              </a:rPr>
+              <a:t>orange butane rubber hose metal clamp</a:t>
+            </a:r>
+          </a:p>
+        </p:txBody>
+      </p:sp>
+    </p:spTree>
+  </p:cSld>
+  <p:clrMapOvr>
+    <a:masterClrMapping/>
+  </p:clrMapOvr>
+  <mc:AlternateContent xmlns:mc="http://schemas.openxmlformats.org/markup-compatibility/2006">
+    <mc:Choice xmlns:p14="http://schemas.microsoft.com/office/powerpoint/2010/main" Requires="p14">
+      <p:transition spd="med" p14:dur="700">
+        <p14:cube dir="r"/>
+      </p:transition>
+    </mc:Choice>
+    <mc:Fallback>
+      <p:transition spd="med">
+        <p:push dir="r"/>
+      </p:transition>
+    </mc:Fallback>
+  </mc:AlternateContent>
+</p:sld>
+</file>
+
+<file path=ppt/slides/slide17.xml><?xml version="1.0" encoding="utf-8"?>
+<p:sld xmlns:a="http://schemas.openxmlformats.org/drawingml/2006/main" xmlns:p="http://schemas.openxmlformats.org/presentationml/2006/main" xmlns:r="http://schemas.openxmlformats.org/officeDocument/2006/relationships">
+  <p:cSld>
+    <p:spTree>
+      <p:nvGrpSpPr>
+        <p:cNvPr id="1" name=""/>
+        <p:cNvGrpSpPr/>
+        <p:nvPr/>
+      </p:nvGrpSpPr>
+      <p:grpSpPr/>
+      <p:sp>
+        <p:nvSpPr>
+          <p:cNvPr id="2" name="Rectangle 1"/>
           <p:cNvSpPr/>
           <p:nvPr/>
         </p:nvSpPr>
         <p:spPr>
           <a:xfrm>
-            <a:off x="822960" y="5532120"/>
-            <a:ext cx="10515600" cy="822960"/>
-          </a:xfrm>
-          <a:prstGeom prst="roundRect">
+            <a:off x="0" y="0"/>
+            <a:ext cx="12191695" cy="6858000"/>
+          </a:xfrm>
+          <a:prstGeom prst="rect">
+            <a:avLst/>
+          </a:prstGeom>
+          <a:solidFill>
+            <a:srgbClr val="FFFFFF"/>
+          </a:solidFill>
+          <a:ln>
+            <a:noFill/>
+          </a:ln>
+          <a:effectLst/>
+        </p:spPr>
+        <p:style>
+          <a:lnRef idx="1">
+            <a:schemeClr val="accent1"/>
+          </a:lnRef>
+          <a:fillRef idx="3">
+            <a:schemeClr val="accent1"/>
+          </a:fillRef>
+          <a:effectRef idx="2">
+            <a:schemeClr val="accent1"/>
+          </a:effectRef>
+          <a:fontRef idx="minor">
+            <a:schemeClr val="lt1"/>
+          </a:fontRef>
+        </p:style>
+        <p:txBody>
+          <a:bodyPr rtlCol="0" anchor="ctr"/>
+          <a:lstStyle/>
+          <a:p>
+            <a:pPr algn="ctr"/>
+          </a:p>
+        </p:txBody>
+      </p:sp>
+      <p:sp>
+        <p:nvSpPr>
+          <p:cNvPr id="3" name="TextBox 2"/>
+          <p:cNvSpPr txBox="1"/>
+          <p:nvPr/>
+        </p:nvSpPr>
+        <p:spPr>
+          <a:xfrm>
+            <a:off x="10607040" y="320040"/>
+            <a:ext cx="1371600" cy="365760"/>
+          </a:xfrm>
+          <a:prstGeom prst="rect">
+            <a:avLst/>
+          </a:prstGeom>
+          <a:noFill/>
+        </p:spPr>
+        <p:txBody>
+          <a:bodyPr wrap="square">
+            <a:spAutoFit/>
+          </a:bodyPr>
+          <a:lstStyle/>
+          <a:p>
+            <a:pPr algn="r"/>
+            <a:r>
+              <a:rPr sz="1000" b="1" i="0">
+                <a:solidFill>
+                  <a:srgbClr val="64748B"/>
+                </a:solidFill>
+                <a:latin typeface="Montserrat"/>
+              </a:rPr>
+              <a:t>017 / 022</a:t>
+            </a:r>
+          </a:p>
+        </p:txBody>
+      </p:sp>
+      <p:sp>
+        <p:nvSpPr>
+          <p:cNvPr id="4" name="TextBox 3"/>
+          <p:cNvSpPr txBox="1"/>
+          <p:nvPr/>
+        </p:nvSpPr>
+        <p:spPr>
+          <a:xfrm>
+            <a:off x="457200" y="6419088"/>
+            <a:ext cx="8229600" cy="365760"/>
+          </a:xfrm>
+          <a:prstGeom prst="rect">
+            <a:avLst/>
+          </a:prstGeom>
+          <a:noFill/>
+        </p:spPr>
+        <p:txBody>
+          <a:bodyPr wrap="square">
+            <a:spAutoFit/>
+          </a:bodyPr>
+          <a:lstStyle/>
+          <a:p>
+            <a:r>
+              <a:rPr sz="900" b="0" i="0">
+                <a:solidFill>
+                  <a:srgbClr val="64748B"/>
+                </a:solidFill>
+                <a:latin typeface="Montserrat"/>
+              </a:rPr>
+              <a:t>Curso Gas B · Tema 14 · UNE 60670-7</a:t>
+            </a:r>
+          </a:p>
+        </p:txBody>
+      </p:sp>
+      <p:sp>
+        <p:nvSpPr>
+          <p:cNvPr id="5" name="Rectangle 4"/>
+          <p:cNvSpPr/>
+          <p:nvPr/>
+        </p:nvSpPr>
+        <p:spPr>
+          <a:xfrm>
+            <a:off x="0" y="0"/>
+            <a:ext cx="12191695" cy="1143000"/>
+          </a:xfrm>
+          <a:prstGeom prst="rect">
             <a:avLst/>
           </a:prstGeom>
           <a:solidFill>
@@ -7877,14 +9083,14 @@
       </p:sp>
       <p:sp>
         <p:nvSpPr>
-          <p:cNvPr id="8" name="TextBox 7"/>
+          <p:cNvPr id="6" name="TextBox 5"/>
           <p:cNvSpPr txBox="1"/>
           <p:nvPr/>
         </p:nvSpPr>
         <p:spPr>
           <a:xfrm>
-            <a:off x="1051560" y="5623560"/>
-            <a:ext cx="10058400" cy="640080"/>
+            <a:off x="822960" y="274320"/>
+            <a:ext cx="10515600" cy="640080"/>
           </a:xfrm>
           <a:prstGeom prst="rect">
             <a:avLst/>
@@ -7898,13 +9104,683 @@
           <a:lstStyle/>
           <a:p>
             <a:r>
-              <a:rPr sz="1500" b="1" i="1">
+              <a:rPr sz="2400" b="1" i="0">
+                <a:solidFill>
+                  <a:srgbClr val="FFFFFF"/>
+                </a:solidFill>
+                <a:latin typeface="Montserrat"/>
+              </a:rPr>
+              <a:t>⚡  PREGUNTA RÁPIDA</a:t>
+            </a:r>
+          </a:p>
+        </p:txBody>
+      </p:sp>
+      <p:sp>
+        <p:nvSpPr>
+          <p:cNvPr id="7" name="TextBox 6"/>
+          <p:cNvSpPr txBox="1"/>
+          <p:nvPr/>
+        </p:nvSpPr>
+        <p:spPr>
+          <a:xfrm>
+            <a:off x="822960" y="1508760"/>
+            <a:ext cx="10515600" cy="1371600"/>
+          </a:xfrm>
+          <a:prstGeom prst="rect">
+            <a:avLst/>
+          </a:prstGeom>
+          <a:noFill/>
+        </p:spPr>
+        <p:txBody>
+          <a:bodyPr wrap="square">
+            <a:spAutoFit/>
+          </a:bodyPr>
+          <a:lstStyle/>
+          <a:p>
+            <a:r>
+              <a:rPr sz="2400" b="1" i="0">
                 <a:solidFill>
                   <a:srgbClr val="1E2761"/>
                 </a:solidFill>
                 <a:latin typeface="Montserrat"/>
               </a:rPr>
-              <a:t>Ya sabes elegir y montar cualquier conexión de gas. Con esto cierras el Tema 14 completo.</a:t>
+              <a:t>El tubo de goma de la bombona se sujeta a las boquillas con...</a:t>
+            </a:r>
+          </a:p>
+        </p:txBody>
+      </p:sp>
+      <p:sp>
+        <p:nvSpPr>
+          <p:cNvPr id="8" name="Rounded Rectangle 7"/>
+          <p:cNvSpPr/>
+          <p:nvPr/>
+        </p:nvSpPr>
+        <p:spPr>
+          <a:xfrm>
+            <a:off x="822960" y="3291840"/>
+            <a:ext cx="4983480" cy="1143000"/>
+          </a:xfrm>
+          <a:prstGeom prst="roundRect">
+            <a:avLst/>
+          </a:prstGeom>
+          <a:solidFill>
+            <a:srgbClr val="F3F6FB"/>
+          </a:solidFill>
+          <a:ln w="12700">
+            <a:solidFill>
+              <a:srgbClr val="C7D2E6"/>
+            </a:solidFill>
+          </a:ln>
+          <a:effectLst/>
+        </p:spPr>
+        <p:style>
+          <a:lnRef idx="1">
+            <a:schemeClr val="accent1"/>
+          </a:lnRef>
+          <a:fillRef idx="3">
+            <a:schemeClr val="accent1"/>
+          </a:fillRef>
+          <a:effectRef idx="2">
+            <a:schemeClr val="accent1"/>
+          </a:effectRef>
+          <a:fontRef idx="minor">
+            <a:schemeClr val="lt1"/>
+          </a:fontRef>
+        </p:style>
+        <p:txBody>
+          <a:bodyPr rtlCol="0" anchor="ctr"/>
+          <a:lstStyle/>
+          <a:p>
+            <a:pPr algn="ctr"/>
+          </a:p>
+        </p:txBody>
+      </p:sp>
+      <p:sp>
+        <p:nvSpPr>
+          <p:cNvPr id="9" name="Rectangle 8"/>
+          <p:cNvSpPr/>
+          <p:nvPr/>
+        </p:nvSpPr>
+        <p:spPr>
+          <a:xfrm>
+            <a:off x="822960" y="3291840"/>
+            <a:ext cx="640080" cy="1143000"/>
+          </a:xfrm>
+          <a:prstGeom prst="rect">
+            <a:avLst/>
+          </a:prstGeom>
+          <a:solidFill>
+            <a:srgbClr val="1E2761"/>
+          </a:solidFill>
+          <a:ln>
+            <a:noFill/>
+          </a:ln>
+          <a:effectLst/>
+        </p:spPr>
+        <p:style>
+          <a:lnRef idx="1">
+            <a:schemeClr val="accent1"/>
+          </a:lnRef>
+          <a:fillRef idx="3">
+            <a:schemeClr val="accent1"/>
+          </a:fillRef>
+          <a:effectRef idx="2">
+            <a:schemeClr val="accent1"/>
+          </a:effectRef>
+          <a:fontRef idx="minor">
+            <a:schemeClr val="lt1"/>
+          </a:fontRef>
+        </p:style>
+        <p:txBody>
+          <a:bodyPr rtlCol="0" anchor="ctr"/>
+          <a:lstStyle/>
+          <a:p>
+            <a:pPr algn="ctr"/>
+          </a:p>
+        </p:txBody>
+      </p:sp>
+      <p:sp>
+        <p:nvSpPr>
+          <p:cNvPr id="10" name="TextBox 9"/>
+          <p:cNvSpPr txBox="1"/>
+          <p:nvPr/>
+        </p:nvSpPr>
+        <p:spPr>
+          <a:xfrm>
+            <a:off x="822960" y="3611880"/>
+            <a:ext cx="640080" cy="548640"/>
+          </a:xfrm>
+          <a:prstGeom prst="rect">
+            <a:avLst/>
+          </a:prstGeom>
+          <a:noFill/>
+        </p:spPr>
+        <p:txBody>
+          <a:bodyPr wrap="square">
+            <a:spAutoFit/>
+          </a:bodyPr>
+          <a:lstStyle/>
+          <a:p>
+            <a:pPr algn="ctr"/>
+            <a:r>
+              <a:rPr sz="2200" b="1" i="0">
+                <a:solidFill>
+                  <a:srgbClr val="FFFFFF"/>
+                </a:solidFill>
+                <a:latin typeface="Montserrat"/>
+              </a:rPr>
+              <a:t>A</a:t>
+            </a:r>
+          </a:p>
+        </p:txBody>
+      </p:sp>
+      <p:sp>
+        <p:nvSpPr>
+          <p:cNvPr id="11" name="TextBox 10"/>
+          <p:cNvSpPr txBox="1"/>
+          <p:nvPr/>
+        </p:nvSpPr>
+        <p:spPr>
+          <a:xfrm>
+            <a:off x="1600200" y="3474720"/>
+            <a:ext cx="4114800" cy="868680"/>
+          </a:xfrm>
+          <a:prstGeom prst="rect">
+            <a:avLst/>
+          </a:prstGeom>
+          <a:noFill/>
+        </p:spPr>
+        <p:txBody>
+          <a:bodyPr wrap="square">
+            <a:spAutoFit/>
+          </a:bodyPr>
+          <a:lstStyle/>
+          <a:p>
+            <a:r>
+              <a:rPr sz="1400" b="0" i="0">
+                <a:solidFill>
+                  <a:srgbClr val="1B2330"/>
+                </a:solidFill>
+                <a:latin typeface="Montserrat"/>
+              </a:rPr>
+              <a:t>Abrazaderas metálicas</a:t>
+            </a:r>
+          </a:p>
+        </p:txBody>
+      </p:sp>
+      <p:sp>
+        <p:nvSpPr>
+          <p:cNvPr id="12" name="Rounded Rectangle 11"/>
+          <p:cNvSpPr/>
+          <p:nvPr/>
+        </p:nvSpPr>
+        <p:spPr>
+          <a:xfrm>
+            <a:off x="6355080" y="3291840"/>
+            <a:ext cx="4983480" cy="1143000"/>
+          </a:xfrm>
+          <a:prstGeom prst="roundRect">
+            <a:avLst/>
+          </a:prstGeom>
+          <a:solidFill>
+            <a:srgbClr val="F3F6FB"/>
+          </a:solidFill>
+          <a:ln w="12700">
+            <a:solidFill>
+              <a:srgbClr val="C7D2E6"/>
+            </a:solidFill>
+          </a:ln>
+          <a:effectLst/>
+        </p:spPr>
+        <p:style>
+          <a:lnRef idx="1">
+            <a:schemeClr val="accent1"/>
+          </a:lnRef>
+          <a:fillRef idx="3">
+            <a:schemeClr val="accent1"/>
+          </a:fillRef>
+          <a:effectRef idx="2">
+            <a:schemeClr val="accent1"/>
+          </a:effectRef>
+          <a:fontRef idx="minor">
+            <a:schemeClr val="lt1"/>
+          </a:fontRef>
+        </p:style>
+        <p:txBody>
+          <a:bodyPr rtlCol="0" anchor="ctr"/>
+          <a:lstStyle/>
+          <a:p>
+            <a:pPr algn="ctr"/>
+          </a:p>
+        </p:txBody>
+      </p:sp>
+      <p:sp>
+        <p:nvSpPr>
+          <p:cNvPr id="13" name="Rectangle 12"/>
+          <p:cNvSpPr/>
+          <p:nvPr/>
+        </p:nvSpPr>
+        <p:spPr>
+          <a:xfrm>
+            <a:off x="6355080" y="3291840"/>
+            <a:ext cx="640080" cy="1143000"/>
+          </a:xfrm>
+          <a:prstGeom prst="rect">
+            <a:avLst/>
+          </a:prstGeom>
+          <a:solidFill>
+            <a:srgbClr val="1E2761"/>
+          </a:solidFill>
+          <a:ln>
+            <a:noFill/>
+          </a:ln>
+          <a:effectLst/>
+        </p:spPr>
+        <p:style>
+          <a:lnRef idx="1">
+            <a:schemeClr val="accent1"/>
+          </a:lnRef>
+          <a:fillRef idx="3">
+            <a:schemeClr val="accent1"/>
+          </a:fillRef>
+          <a:effectRef idx="2">
+            <a:schemeClr val="accent1"/>
+          </a:effectRef>
+          <a:fontRef idx="minor">
+            <a:schemeClr val="lt1"/>
+          </a:fontRef>
+        </p:style>
+        <p:txBody>
+          <a:bodyPr rtlCol="0" anchor="ctr"/>
+          <a:lstStyle/>
+          <a:p>
+            <a:pPr algn="ctr"/>
+          </a:p>
+        </p:txBody>
+      </p:sp>
+      <p:sp>
+        <p:nvSpPr>
+          <p:cNvPr id="14" name="TextBox 13"/>
+          <p:cNvSpPr txBox="1"/>
+          <p:nvPr/>
+        </p:nvSpPr>
+        <p:spPr>
+          <a:xfrm>
+            <a:off x="6355080" y="3611880"/>
+            <a:ext cx="640080" cy="548640"/>
+          </a:xfrm>
+          <a:prstGeom prst="rect">
+            <a:avLst/>
+          </a:prstGeom>
+          <a:noFill/>
+        </p:spPr>
+        <p:txBody>
+          <a:bodyPr wrap="square">
+            <a:spAutoFit/>
+          </a:bodyPr>
+          <a:lstStyle/>
+          <a:p>
+            <a:pPr algn="ctr"/>
+            <a:r>
+              <a:rPr sz="2200" b="1" i="0">
+                <a:solidFill>
+                  <a:srgbClr val="FFFFFF"/>
+                </a:solidFill>
+                <a:latin typeface="Montserrat"/>
+              </a:rPr>
+              <a:t>B</a:t>
+            </a:r>
+          </a:p>
+        </p:txBody>
+      </p:sp>
+      <p:sp>
+        <p:nvSpPr>
+          <p:cNvPr id="15" name="TextBox 14"/>
+          <p:cNvSpPr txBox="1"/>
+          <p:nvPr/>
+        </p:nvSpPr>
+        <p:spPr>
+          <a:xfrm>
+            <a:off x="7132320" y="3474720"/>
+            <a:ext cx="4114800" cy="868680"/>
+          </a:xfrm>
+          <a:prstGeom prst="rect">
+            <a:avLst/>
+          </a:prstGeom>
+          <a:noFill/>
+        </p:spPr>
+        <p:txBody>
+          <a:bodyPr wrap="square">
+            <a:spAutoFit/>
+          </a:bodyPr>
+          <a:lstStyle/>
+          <a:p>
+            <a:r>
+              <a:rPr sz="1400" b="0" i="0">
+                <a:solidFill>
+                  <a:srgbClr val="1B2330"/>
+                </a:solidFill>
+                <a:latin typeface="Montserrat"/>
+              </a:rPr>
+              <a:t>Bridas de plástico</a:t>
+            </a:r>
+          </a:p>
+        </p:txBody>
+      </p:sp>
+      <p:sp>
+        <p:nvSpPr>
+          <p:cNvPr id="16" name="Rounded Rectangle 15"/>
+          <p:cNvSpPr/>
+          <p:nvPr/>
+        </p:nvSpPr>
+        <p:spPr>
+          <a:xfrm>
+            <a:off x="822960" y="4617720"/>
+            <a:ext cx="4983480" cy="1143000"/>
+          </a:xfrm>
+          <a:prstGeom prst="roundRect">
+            <a:avLst/>
+          </a:prstGeom>
+          <a:solidFill>
+            <a:srgbClr val="F3F6FB"/>
+          </a:solidFill>
+          <a:ln w="12700">
+            <a:solidFill>
+              <a:srgbClr val="C7D2E6"/>
+            </a:solidFill>
+          </a:ln>
+          <a:effectLst/>
+        </p:spPr>
+        <p:style>
+          <a:lnRef idx="1">
+            <a:schemeClr val="accent1"/>
+          </a:lnRef>
+          <a:fillRef idx="3">
+            <a:schemeClr val="accent1"/>
+          </a:fillRef>
+          <a:effectRef idx="2">
+            <a:schemeClr val="accent1"/>
+          </a:effectRef>
+          <a:fontRef idx="minor">
+            <a:schemeClr val="lt1"/>
+          </a:fontRef>
+        </p:style>
+        <p:txBody>
+          <a:bodyPr rtlCol="0" anchor="ctr"/>
+          <a:lstStyle/>
+          <a:p>
+            <a:pPr algn="ctr"/>
+          </a:p>
+        </p:txBody>
+      </p:sp>
+      <p:sp>
+        <p:nvSpPr>
+          <p:cNvPr id="17" name="Rectangle 16"/>
+          <p:cNvSpPr/>
+          <p:nvPr/>
+        </p:nvSpPr>
+        <p:spPr>
+          <a:xfrm>
+            <a:off x="822960" y="4617720"/>
+            <a:ext cx="640080" cy="1143000"/>
+          </a:xfrm>
+          <a:prstGeom prst="rect">
+            <a:avLst/>
+          </a:prstGeom>
+          <a:solidFill>
+            <a:srgbClr val="1E2761"/>
+          </a:solidFill>
+          <a:ln>
+            <a:noFill/>
+          </a:ln>
+          <a:effectLst/>
+        </p:spPr>
+        <p:style>
+          <a:lnRef idx="1">
+            <a:schemeClr val="accent1"/>
+          </a:lnRef>
+          <a:fillRef idx="3">
+            <a:schemeClr val="accent1"/>
+          </a:fillRef>
+          <a:effectRef idx="2">
+            <a:schemeClr val="accent1"/>
+          </a:effectRef>
+          <a:fontRef idx="minor">
+            <a:schemeClr val="lt1"/>
+          </a:fontRef>
+        </p:style>
+        <p:txBody>
+          <a:bodyPr rtlCol="0" anchor="ctr"/>
+          <a:lstStyle/>
+          <a:p>
+            <a:pPr algn="ctr"/>
+          </a:p>
+        </p:txBody>
+      </p:sp>
+      <p:sp>
+        <p:nvSpPr>
+          <p:cNvPr id="18" name="TextBox 17"/>
+          <p:cNvSpPr txBox="1"/>
+          <p:nvPr/>
+        </p:nvSpPr>
+        <p:spPr>
+          <a:xfrm>
+            <a:off x="822960" y="4937760"/>
+            <a:ext cx="640080" cy="548640"/>
+          </a:xfrm>
+          <a:prstGeom prst="rect">
+            <a:avLst/>
+          </a:prstGeom>
+          <a:noFill/>
+        </p:spPr>
+        <p:txBody>
+          <a:bodyPr wrap="square">
+            <a:spAutoFit/>
+          </a:bodyPr>
+          <a:lstStyle/>
+          <a:p>
+            <a:pPr algn="ctr"/>
+            <a:r>
+              <a:rPr sz="2200" b="1" i="0">
+                <a:solidFill>
+                  <a:srgbClr val="FFFFFF"/>
+                </a:solidFill>
+                <a:latin typeface="Montserrat"/>
+              </a:rPr>
+              <a:t>C</a:t>
+            </a:r>
+          </a:p>
+        </p:txBody>
+      </p:sp>
+      <p:sp>
+        <p:nvSpPr>
+          <p:cNvPr id="19" name="TextBox 18"/>
+          <p:cNvSpPr txBox="1"/>
+          <p:nvPr/>
+        </p:nvSpPr>
+        <p:spPr>
+          <a:xfrm>
+            <a:off x="1600200" y="4800600"/>
+            <a:ext cx="4114800" cy="868680"/>
+          </a:xfrm>
+          <a:prstGeom prst="rect">
+            <a:avLst/>
+          </a:prstGeom>
+          <a:noFill/>
+        </p:spPr>
+        <p:txBody>
+          <a:bodyPr wrap="square">
+            <a:spAutoFit/>
+          </a:bodyPr>
+          <a:lstStyle/>
+          <a:p>
+            <a:r>
+              <a:rPr sz="1400" b="0" i="0">
+                <a:solidFill>
+                  <a:srgbClr val="1B2330"/>
+                </a:solidFill>
+                <a:latin typeface="Montserrat"/>
+              </a:rPr>
+              <a:t>Racor de dos piezas</a:t>
+            </a:r>
+          </a:p>
+        </p:txBody>
+      </p:sp>
+      <p:sp>
+        <p:nvSpPr>
+          <p:cNvPr id="20" name="Rounded Rectangle 19"/>
+          <p:cNvSpPr/>
+          <p:nvPr/>
+        </p:nvSpPr>
+        <p:spPr>
+          <a:xfrm>
+            <a:off x="6355080" y="4617720"/>
+            <a:ext cx="4983480" cy="1143000"/>
+          </a:xfrm>
+          <a:prstGeom prst="roundRect">
+            <a:avLst/>
+          </a:prstGeom>
+          <a:solidFill>
+            <a:srgbClr val="F3F6FB"/>
+          </a:solidFill>
+          <a:ln w="12700">
+            <a:solidFill>
+              <a:srgbClr val="C7D2E6"/>
+            </a:solidFill>
+          </a:ln>
+          <a:effectLst/>
+        </p:spPr>
+        <p:style>
+          <a:lnRef idx="1">
+            <a:schemeClr val="accent1"/>
+          </a:lnRef>
+          <a:fillRef idx="3">
+            <a:schemeClr val="accent1"/>
+          </a:fillRef>
+          <a:effectRef idx="2">
+            <a:schemeClr val="accent1"/>
+          </a:effectRef>
+          <a:fontRef idx="minor">
+            <a:schemeClr val="lt1"/>
+          </a:fontRef>
+        </p:style>
+        <p:txBody>
+          <a:bodyPr rtlCol="0" anchor="ctr"/>
+          <a:lstStyle/>
+          <a:p>
+            <a:pPr algn="ctr"/>
+          </a:p>
+        </p:txBody>
+      </p:sp>
+      <p:sp>
+        <p:nvSpPr>
+          <p:cNvPr id="21" name="Rectangle 20"/>
+          <p:cNvSpPr/>
+          <p:nvPr/>
+        </p:nvSpPr>
+        <p:spPr>
+          <a:xfrm>
+            <a:off x="6355080" y="4617720"/>
+            <a:ext cx="640080" cy="1143000"/>
+          </a:xfrm>
+          <a:prstGeom prst="rect">
+            <a:avLst/>
+          </a:prstGeom>
+          <a:solidFill>
+            <a:srgbClr val="1E2761"/>
+          </a:solidFill>
+          <a:ln>
+            <a:noFill/>
+          </a:ln>
+          <a:effectLst/>
+        </p:spPr>
+        <p:style>
+          <a:lnRef idx="1">
+            <a:schemeClr val="accent1"/>
+          </a:lnRef>
+          <a:fillRef idx="3">
+            <a:schemeClr val="accent1"/>
+          </a:fillRef>
+          <a:effectRef idx="2">
+            <a:schemeClr val="accent1"/>
+          </a:effectRef>
+          <a:fontRef idx="minor">
+            <a:schemeClr val="lt1"/>
+          </a:fontRef>
+        </p:style>
+        <p:txBody>
+          <a:bodyPr rtlCol="0" anchor="ctr"/>
+          <a:lstStyle/>
+          <a:p>
+            <a:pPr algn="ctr"/>
+          </a:p>
+        </p:txBody>
+      </p:sp>
+      <p:sp>
+        <p:nvSpPr>
+          <p:cNvPr id="22" name="TextBox 21"/>
+          <p:cNvSpPr txBox="1"/>
+          <p:nvPr/>
+        </p:nvSpPr>
+        <p:spPr>
+          <a:xfrm>
+            <a:off x="6355080" y="4937760"/>
+            <a:ext cx="640080" cy="548640"/>
+          </a:xfrm>
+          <a:prstGeom prst="rect">
+            <a:avLst/>
+          </a:prstGeom>
+          <a:noFill/>
+        </p:spPr>
+        <p:txBody>
+          <a:bodyPr wrap="square">
+            <a:spAutoFit/>
+          </a:bodyPr>
+          <a:lstStyle/>
+          <a:p>
+            <a:pPr algn="ctr"/>
+            <a:r>
+              <a:rPr sz="2200" b="1" i="0">
+                <a:solidFill>
+                  <a:srgbClr val="FFFFFF"/>
+                </a:solidFill>
+                <a:latin typeface="Montserrat"/>
+              </a:rPr>
+              <a:t>D</a:t>
+            </a:r>
+          </a:p>
+        </p:txBody>
+      </p:sp>
+      <p:sp>
+        <p:nvSpPr>
+          <p:cNvPr id="23" name="TextBox 22"/>
+          <p:cNvSpPr txBox="1"/>
+          <p:nvPr/>
+        </p:nvSpPr>
+        <p:spPr>
+          <a:xfrm>
+            <a:off x="7132320" y="4800600"/>
+            <a:ext cx="4114800" cy="868680"/>
+          </a:xfrm>
+          <a:prstGeom prst="rect">
+            <a:avLst/>
+          </a:prstGeom>
+          <a:noFill/>
+        </p:spPr>
+        <p:txBody>
+          <a:bodyPr wrap="square">
+            <a:spAutoFit/>
+          </a:bodyPr>
+          <a:lstStyle/>
+          <a:p>
+            <a:r>
+              <a:rPr sz="1400" b="0" i="0">
+                <a:solidFill>
+                  <a:srgbClr val="1B2330"/>
+                </a:solidFill>
+                <a:latin typeface="Montserrat"/>
+              </a:rPr>
+              <a:t>Soldadura por capilaridad</a:t>
             </a:r>
           </a:p>
         </p:txBody>
@@ -7914,6 +9790,876 @@
   <p:clrMapOvr>
     <a:masterClrMapping/>
   </p:clrMapOvr>
+  <mc:AlternateContent xmlns:mc="http://schemas.openxmlformats.org/markup-compatibility/2006">
+    <mc:Choice xmlns:p14="http://schemas.microsoft.com/office/powerpoint/2010/main" Requires="p14">
+      <p:transition spd="med" p14:dur="700">
+        <p14:cube dir="l"/>
+      </p:transition>
+    </mc:Choice>
+    <mc:Fallback>
+      <p:transition spd="med">
+        <p:push dir="l"/>
+      </p:transition>
+    </mc:Fallback>
+  </mc:AlternateContent>
+</p:sld>
+</file>
+
+<file path=ppt/slides/slide18.xml><?xml version="1.0" encoding="utf-8"?>
+<p:sld xmlns:a="http://schemas.openxmlformats.org/drawingml/2006/main" xmlns:p="http://schemas.openxmlformats.org/presentationml/2006/main" xmlns:r="http://schemas.openxmlformats.org/officeDocument/2006/relationships">
+  <p:cSld>
+    <p:spTree>
+      <p:nvGrpSpPr>
+        <p:cNvPr id="1" name=""/>
+        <p:cNvGrpSpPr/>
+        <p:nvPr/>
+      </p:nvGrpSpPr>
+      <p:grpSpPr/>
+      <p:sp>
+        <p:nvSpPr>
+          <p:cNvPr id="2" name="Rectangle 1"/>
+          <p:cNvSpPr/>
+          <p:nvPr/>
+        </p:nvSpPr>
+        <p:spPr>
+          <a:xfrm>
+            <a:off x="0" y="0"/>
+            <a:ext cx="12191695" cy="6858000"/>
+          </a:xfrm>
+          <a:prstGeom prst="rect">
+            <a:avLst/>
+          </a:prstGeom>
+          <a:solidFill>
+            <a:srgbClr val="FFFFFF"/>
+          </a:solidFill>
+          <a:ln>
+            <a:noFill/>
+          </a:ln>
+          <a:effectLst/>
+        </p:spPr>
+        <p:style>
+          <a:lnRef idx="1">
+            <a:schemeClr val="accent1"/>
+          </a:lnRef>
+          <a:fillRef idx="3">
+            <a:schemeClr val="accent1"/>
+          </a:fillRef>
+          <a:effectRef idx="2">
+            <a:schemeClr val="accent1"/>
+          </a:effectRef>
+          <a:fontRef idx="minor">
+            <a:schemeClr val="lt1"/>
+          </a:fontRef>
+        </p:style>
+        <p:txBody>
+          <a:bodyPr rtlCol="0" anchor="ctr"/>
+          <a:lstStyle/>
+          <a:p>
+            <a:pPr algn="ctr"/>
+          </a:p>
+        </p:txBody>
+      </p:sp>
+      <p:sp>
+        <p:nvSpPr>
+          <p:cNvPr id="3" name="TextBox 2"/>
+          <p:cNvSpPr txBox="1"/>
+          <p:nvPr/>
+        </p:nvSpPr>
+        <p:spPr>
+          <a:xfrm>
+            <a:off x="10607040" y="320040"/>
+            <a:ext cx="1371600" cy="365760"/>
+          </a:xfrm>
+          <a:prstGeom prst="rect">
+            <a:avLst/>
+          </a:prstGeom>
+          <a:noFill/>
+        </p:spPr>
+        <p:txBody>
+          <a:bodyPr wrap="square">
+            <a:spAutoFit/>
+          </a:bodyPr>
+          <a:lstStyle/>
+          <a:p>
+            <a:pPr algn="r"/>
+            <a:r>
+              <a:rPr sz="1000" b="1" i="0">
+                <a:solidFill>
+                  <a:srgbClr val="64748B"/>
+                </a:solidFill>
+                <a:latin typeface="Montserrat"/>
+              </a:rPr>
+              <a:t>018 / 022</a:t>
+            </a:r>
+          </a:p>
+        </p:txBody>
+      </p:sp>
+      <p:sp>
+        <p:nvSpPr>
+          <p:cNvPr id="4" name="TextBox 3"/>
+          <p:cNvSpPr txBox="1"/>
+          <p:nvPr/>
+        </p:nvSpPr>
+        <p:spPr>
+          <a:xfrm>
+            <a:off x="457200" y="6419088"/>
+            <a:ext cx="8229600" cy="365760"/>
+          </a:xfrm>
+          <a:prstGeom prst="rect">
+            <a:avLst/>
+          </a:prstGeom>
+          <a:noFill/>
+        </p:spPr>
+        <p:txBody>
+          <a:bodyPr wrap="square">
+            <a:spAutoFit/>
+          </a:bodyPr>
+          <a:lstStyle/>
+          <a:p>
+            <a:r>
+              <a:rPr sz="900" b="0" i="0">
+                <a:solidFill>
+                  <a:srgbClr val="64748B"/>
+                </a:solidFill>
+                <a:latin typeface="Montserrat"/>
+              </a:rPr>
+              <a:t>Curso Gas B · Tema 14 · UNE 60670-7</a:t>
+            </a:r>
+          </a:p>
+        </p:txBody>
+      </p:sp>
+      <p:sp>
+        <p:nvSpPr>
+          <p:cNvPr id="5" name="Rectangle 4"/>
+          <p:cNvSpPr/>
+          <p:nvPr/>
+        </p:nvSpPr>
+        <p:spPr>
+          <a:xfrm>
+            <a:off x="0" y="0"/>
+            <a:ext cx="12191695" cy="1143000"/>
+          </a:xfrm>
+          <a:prstGeom prst="rect">
+            <a:avLst/>
+          </a:prstGeom>
+          <a:solidFill>
+            <a:srgbClr val="1E8E4B"/>
+          </a:solidFill>
+          <a:ln>
+            <a:noFill/>
+          </a:ln>
+          <a:effectLst/>
+        </p:spPr>
+        <p:style>
+          <a:lnRef idx="1">
+            <a:schemeClr val="accent1"/>
+          </a:lnRef>
+          <a:fillRef idx="3">
+            <a:schemeClr val="accent1"/>
+          </a:fillRef>
+          <a:effectRef idx="2">
+            <a:schemeClr val="accent1"/>
+          </a:effectRef>
+          <a:fontRef idx="minor">
+            <a:schemeClr val="lt1"/>
+          </a:fontRef>
+        </p:style>
+        <p:txBody>
+          <a:bodyPr rtlCol="0" anchor="ctr"/>
+          <a:lstStyle/>
+          <a:p>
+            <a:pPr algn="ctr"/>
+          </a:p>
+        </p:txBody>
+      </p:sp>
+      <p:sp>
+        <p:nvSpPr>
+          <p:cNvPr id="6" name="TextBox 5"/>
+          <p:cNvSpPr txBox="1"/>
+          <p:nvPr/>
+        </p:nvSpPr>
+        <p:spPr>
+          <a:xfrm>
+            <a:off x="822960" y="274320"/>
+            <a:ext cx="10515600" cy="640080"/>
+          </a:xfrm>
+          <a:prstGeom prst="rect">
+            <a:avLst/>
+          </a:prstGeom>
+          <a:noFill/>
+        </p:spPr>
+        <p:txBody>
+          <a:bodyPr wrap="square">
+            <a:spAutoFit/>
+          </a:bodyPr>
+          <a:lstStyle/>
+          <a:p>
+            <a:r>
+              <a:rPr sz="2400" b="1" i="0">
+                <a:solidFill>
+                  <a:srgbClr val="FFFFFF"/>
+                </a:solidFill>
+                <a:latin typeface="Montserrat"/>
+              </a:rPr>
+              <a:t>✔  RESPUESTA:  A</a:t>
+            </a:r>
+          </a:p>
+        </p:txBody>
+      </p:sp>
+      <p:sp>
+        <p:nvSpPr>
+          <p:cNvPr id="7" name="TextBox 6"/>
+          <p:cNvSpPr txBox="1"/>
+          <p:nvPr/>
+        </p:nvSpPr>
+        <p:spPr>
+          <a:xfrm>
+            <a:off x="822960" y="1417320"/>
+            <a:ext cx="10515600" cy="914400"/>
+          </a:xfrm>
+          <a:prstGeom prst="rect">
+            <a:avLst/>
+          </a:prstGeom>
+          <a:noFill/>
+        </p:spPr>
+        <p:txBody>
+          <a:bodyPr wrap="square">
+            <a:spAutoFit/>
+          </a:bodyPr>
+          <a:lstStyle/>
+          <a:p>
+            <a:r>
+              <a:rPr sz="1800" b="1" i="0">
+                <a:solidFill>
+                  <a:srgbClr val="64748B"/>
+                </a:solidFill>
+                <a:latin typeface="Montserrat"/>
+              </a:rPr>
+              <a:t>El tubo de goma de la bombona se sujeta a las boquillas con...</a:t>
+            </a:r>
+          </a:p>
+        </p:txBody>
+      </p:sp>
+      <p:sp>
+        <p:nvSpPr>
+          <p:cNvPr id="8" name="Rounded Rectangle 7"/>
+          <p:cNvSpPr/>
+          <p:nvPr/>
+        </p:nvSpPr>
+        <p:spPr>
+          <a:xfrm>
+            <a:off x="822960" y="2514600"/>
+            <a:ext cx="10515600" cy="914400"/>
+          </a:xfrm>
+          <a:prstGeom prst="roundRect">
+            <a:avLst/>
+          </a:prstGeom>
+          <a:solidFill>
+            <a:srgbClr val="E9F6EE"/>
+          </a:solidFill>
+          <a:ln w="12700">
+            <a:solidFill>
+              <a:srgbClr val="1E8E4B"/>
+            </a:solidFill>
+          </a:ln>
+          <a:effectLst/>
+        </p:spPr>
+        <p:style>
+          <a:lnRef idx="1">
+            <a:schemeClr val="accent1"/>
+          </a:lnRef>
+          <a:fillRef idx="3">
+            <a:schemeClr val="accent1"/>
+          </a:fillRef>
+          <a:effectRef idx="2">
+            <a:schemeClr val="accent1"/>
+          </a:effectRef>
+          <a:fontRef idx="minor">
+            <a:schemeClr val="lt1"/>
+          </a:fontRef>
+        </p:style>
+        <p:txBody>
+          <a:bodyPr rtlCol="0" anchor="ctr"/>
+          <a:lstStyle/>
+          <a:p>
+            <a:pPr algn="ctr"/>
+          </a:p>
+        </p:txBody>
+      </p:sp>
+      <p:sp>
+        <p:nvSpPr>
+          <p:cNvPr id="9" name="TextBox 8"/>
+          <p:cNvSpPr txBox="1"/>
+          <p:nvPr/>
+        </p:nvSpPr>
+        <p:spPr>
+          <a:xfrm>
+            <a:off x="1097280" y="2697480"/>
+            <a:ext cx="10058400" cy="640080"/>
+          </a:xfrm>
+          <a:prstGeom prst="rect">
+            <a:avLst/>
+          </a:prstGeom>
+          <a:noFill/>
+        </p:spPr>
+        <p:txBody>
+          <a:bodyPr wrap="square">
+            <a:spAutoFit/>
+          </a:bodyPr>
+          <a:lstStyle/>
+          <a:p>
+            <a:r>
+              <a:rPr sz="1800" b="1" i="0">
+                <a:solidFill>
+                  <a:srgbClr val="1E8E4B"/>
+                </a:solidFill>
+                <a:latin typeface="Montserrat"/>
+              </a:rPr>
+              <a:t>A.  </a:t>
+            </a:r>
+            <a:r>
+              <a:rPr sz="1800" b="1" i="0">
+                <a:solidFill>
+                  <a:srgbClr val="1E2761"/>
+                </a:solidFill>
+                <a:latin typeface="Montserrat"/>
+              </a:rPr>
+              <a:t>Abrazaderas metálicas</a:t>
+            </a:r>
+          </a:p>
+        </p:txBody>
+      </p:sp>
+      <p:sp>
+        <p:nvSpPr>
+          <p:cNvPr id="10" name="TextBox 9"/>
+          <p:cNvSpPr txBox="1"/>
+          <p:nvPr/>
+        </p:nvSpPr>
+        <p:spPr>
+          <a:xfrm>
+            <a:off x="822960" y="3749039"/>
+            <a:ext cx="10515600" cy="2194560"/>
+          </a:xfrm>
+          <a:prstGeom prst="rect">
+            <a:avLst/>
+          </a:prstGeom>
+          <a:noFill/>
+        </p:spPr>
+        <p:txBody>
+          <a:bodyPr wrap="square">
+            <a:spAutoFit/>
+          </a:bodyPr>
+          <a:lstStyle/>
+          <a:p>
+            <a:r>
+              <a:rPr sz="1500" b="1" i="0">
+                <a:solidFill>
+                  <a:srgbClr val="E8801A"/>
+                </a:solidFill>
+                <a:latin typeface="Montserrat"/>
+              </a:rPr>
+              <a:t>Por qué:  </a:t>
+            </a:r>
+            <a:r>
+              <a:rPr sz="1500" b="0" i="0">
+                <a:solidFill>
+                  <a:srgbClr val="1B2330"/>
+                </a:solidFill>
+                <a:latin typeface="Montserrat"/>
+              </a:rPr>
+              <a:t>La goma se dilata con el calor y una brida de plástico cede; van boquillas UNE 60714 del mismo DN y abrazaderas metálicas.</a:t>
+            </a:r>
+          </a:p>
+        </p:txBody>
+      </p:sp>
+    </p:spTree>
+  </p:cSld>
+  <p:clrMapOvr>
+    <a:masterClrMapping/>
+  </p:clrMapOvr>
+  <mc:AlternateContent xmlns:mc="http://schemas.openxmlformats.org/markup-compatibility/2006">
+    <mc:Choice xmlns:p14="http://schemas.microsoft.com/office/powerpoint/2010/main" Requires="p14">
+      <p:transition spd="med" p14:dur="700">
+        <p14:cube dir="r"/>
+      </p:transition>
+    </mc:Choice>
+    <mc:Fallback>
+      <p:transition spd="med">
+        <p:push dir="r"/>
+      </p:transition>
+    </mc:Fallback>
+  </mc:AlternateContent>
+</p:sld>
+</file>
+
+<file path=ppt/slides/slide19.xml><?xml version="1.0" encoding="utf-8"?>
+<p:sld xmlns:a="http://schemas.openxmlformats.org/drawingml/2006/main" xmlns:p="http://schemas.openxmlformats.org/presentationml/2006/main" xmlns:r="http://schemas.openxmlformats.org/officeDocument/2006/relationships">
+  <p:cSld>
+    <p:spTree>
+      <p:nvGrpSpPr>
+        <p:cNvPr id="1" name=""/>
+        <p:cNvGrpSpPr/>
+        <p:nvPr/>
+      </p:nvGrpSpPr>
+      <p:grpSpPr/>
+      <p:sp>
+        <p:nvSpPr>
+          <p:cNvPr id="2" name="Rectangle 1"/>
+          <p:cNvSpPr/>
+          <p:nvPr/>
+        </p:nvSpPr>
+        <p:spPr>
+          <a:xfrm>
+            <a:off x="0" y="0"/>
+            <a:ext cx="12191695" cy="6858000"/>
+          </a:xfrm>
+          <a:prstGeom prst="rect">
+            <a:avLst/>
+          </a:prstGeom>
+          <a:solidFill>
+            <a:srgbClr val="FFFFFF"/>
+          </a:solidFill>
+          <a:ln>
+            <a:noFill/>
+          </a:ln>
+          <a:effectLst/>
+        </p:spPr>
+        <p:style>
+          <a:lnRef idx="1">
+            <a:schemeClr val="accent1"/>
+          </a:lnRef>
+          <a:fillRef idx="3">
+            <a:schemeClr val="accent1"/>
+          </a:fillRef>
+          <a:effectRef idx="2">
+            <a:schemeClr val="accent1"/>
+          </a:effectRef>
+          <a:fontRef idx="minor">
+            <a:schemeClr val="lt1"/>
+          </a:fontRef>
+        </p:style>
+        <p:txBody>
+          <a:bodyPr rtlCol="0" anchor="ctr"/>
+          <a:lstStyle/>
+          <a:p>
+            <a:pPr algn="ctr"/>
+          </a:p>
+        </p:txBody>
+      </p:sp>
+      <p:sp>
+        <p:nvSpPr>
+          <p:cNvPr id="3" name="TextBox 2"/>
+          <p:cNvSpPr txBox="1"/>
+          <p:nvPr/>
+        </p:nvSpPr>
+        <p:spPr>
+          <a:xfrm>
+            <a:off x="10607040" y="320040"/>
+            <a:ext cx="1371600" cy="365760"/>
+          </a:xfrm>
+          <a:prstGeom prst="rect">
+            <a:avLst/>
+          </a:prstGeom>
+          <a:noFill/>
+        </p:spPr>
+        <p:txBody>
+          <a:bodyPr wrap="square">
+            <a:spAutoFit/>
+          </a:bodyPr>
+          <a:lstStyle/>
+          <a:p>
+            <a:pPr algn="r"/>
+            <a:r>
+              <a:rPr sz="1000" b="1" i="0">
+                <a:solidFill>
+                  <a:srgbClr val="64748B"/>
+                </a:solidFill>
+                <a:latin typeface="Montserrat"/>
+              </a:rPr>
+              <a:t>019 / 022</a:t>
+            </a:r>
+          </a:p>
+        </p:txBody>
+      </p:sp>
+      <p:sp>
+        <p:nvSpPr>
+          <p:cNvPr id="4" name="TextBox 3"/>
+          <p:cNvSpPr txBox="1"/>
+          <p:nvPr/>
+        </p:nvSpPr>
+        <p:spPr>
+          <a:xfrm>
+            <a:off x="457200" y="6419088"/>
+            <a:ext cx="8229600" cy="365760"/>
+          </a:xfrm>
+          <a:prstGeom prst="rect">
+            <a:avLst/>
+          </a:prstGeom>
+          <a:noFill/>
+        </p:spPr>
+        <p:txBody>
+          <a:bodyPr wrap="square">
+            <a:spAutoFit/>
+          </a:bodyPr>
+          <a:lstStyle/>
+          <a:p>
+            <a:r>
+              <a:rPr sz="900" b="0" i="0">
+                <a:solidFill>
+                  <a:srgbClr val="64748B"/>
+                </a:solidFill>
+                <a:latin typeface="Montserrat"/>
+              </a:rPr>
+              <a:t>Curso Gas B · Tema 14 · UNE 60670-7</a:t>
+            </a:r>
+          </a:p>
+        </p:txBody>
+      </p:sp>
+      <p:sp>
+        <p:nvSpPr>
+          <p:cNvPr id="5" name="TextBox 4"/>
+          <p:cNvSpPr txBox="1"/>
+          <p:nvPr/>
+        </p:nvSpPr>
+        <p:spPr>
+          <a:xfrm>
+            <a:off x="822960" y="457200"/>
+            <a:ext cx="10058400" cy="365760"/>
+          </a:xfrm>
+          <a:prstGeom prst="rect">
+            <a:avLst/>
+          </a:prstGeom>
+          <a:noFill/>
+        </p:spPr>
+        <p:txBody>
+          <a:bodyPr wrap="square">
+            <a:spAutoFit/>
+          </a:bodyPr>
+          <a:lstStyle/>
+          <a:p>
+            <a:r>
+              <a:rPr sz="1300" b="1" i="0">
+                <a:solidFill>
+                  <a:srgbClr val="E8801A"/>
+                </a:solidFill>
+                <a:latin typeface="Montserrat"/>
+              </a:rPr>
+              <a:t>4.7 · METÁLICA CORRUGADA</a:t>
+            </a:r>
+          </a:p>
+        </p:txBody>
+      </p:sp>
+      <p:sp>
+        <p:nvSpPr>
+          <p:cNvPr id="6" name="TextBox 5"/>
+          <p:cNvSpPr txBox="1"/>
+          <p:nvPr/>
+        </p:nvSpPr>
+        <p:spPr>
+          <a:xfrm>
+            <a:off x="822960" y="868680"/>
+            <a:ext cx="10515600" cy="914400"/>
+          </a:xfrm>
+          <a:prstGeom prst="rect">
+            <a:avLst/>
+          </a:prstGeom>
+          <a:noFill/>
+        </p:spPr>
+        <p:txBody>
+          <a:bodyPr wrap="square">
+            <a:spAutoFit/>
+          </a:bodyPr>
+          <a:lstStyle/>
+          <a:p>
+            <a:r>
+              <a:rPr sz="2800" b="1" i="0">
+                <a:solidFill>
+                  <a:srgbClr val="1E2761"/>
+                </a:solidFill>
+                <a:latin typeface="Montserrat"/>
+              </a:rPr>
+              <a:t>Metálica corrugada, sin enchufe</a:t>
+            </a:r>
+          </a:p>
+        </p:txBody>
+      </p:sp>
+      <p:sp>
+        <p:nvSpPr>
+          <p:cNvPr id="7" name="Rectangle 6"/>
+          <p:cNvSpPr/>
+          <p:nvPr/>
+        </p:nvSpPr>
+        <p:spPr>
+          <a:xfrm>
+            <a:off x="868680" y="1627632"/>
+            <a:ext cx="2011680" cy="73152"/>
+          </a:xfrm>
+          <a:prstGeom prst="rect">
+            <a:avLst/>
+          </a:prstGeom>
+          <a:solidFill>
+            <a:srgbClr val="E8801A"/>
+          </a:solidFill>
+          <a:ln>
+            <a:noFill/>
+          </a:ln>
+          <a:effectLst/>
+        </p:spPr>
+        <p:style>
+          <a:lnRef idx="1">
+            <a:schemeClr val="accent1"/>
+          </a:lnRef>
+          <a:fillRef idx="3">
+            <a:schemeClr val="accent1"/>
+          </a:fillRef>
+          <a:effectRef idx="2">
+            <a:schemeClr val="accent1"/>
+          </a:effectRef>
+          <a:fontRef idx="minor">
+            <a:schemeClr val="lt1"/>
+          </a:fontRef>
+        </p:style>
+        <p:txBody>
+          <a:bodyPr rtlCol="0" anchor="ctr"/>
+          <a:lstStyle/>
+          <a:p>
+            <a:pPr algn="ctr"/>
+          </a:p>
+        </p:txBody>
+      </p:sp>
+      <p:sp>
+        <p:nvSpPr>
+          <p:cNvPr id="8" name="TextBox 7"/>
+          <p:cNvSpPr txBox="1"/>
+          <p:nvPr/>
+        </p:nvSpPr>
+        <p:spPr>
+          <a:xfrm>
+            <a:off x="6355080" y="1965960"/>
+            <a:ext cx="5029200" cy="4206240"/>
+          </a:xfrm>
+          <a:prstGeom prst="rect">
+            <a:avLst/>
+          </a:prstGeom>
+          <a:noFill/>
+        </p:spPr>
+        <p:txBody>
+          <a:bodyPr wrap="square">
+            <a:spAutoFit/>
+          </a:bodyPr>
+          <a:lstStyle/>
+          <a:p>
+            <a:pPr>
+              <a:spcAft>
+                <a:spcPts val="1100"/>
+              </a:spcAft>
+            </a:pPr>
+            <a:r>
+              <a:rPr sz="1600" b="1" i="0">
+                <a:solidFill>
+                  <a:srgbClr val="E8801A"/>
+                </a:solidFill>
+                <a:latin typeface="Montserrat"/>
+              </a:rPr>
+              <a:t>▸  </a:t>
+            </a:r>
+            <a:r>
+              <a:rPr sz="1600" b="0" i="0">
+                <a:solidFill>
+                  <a:srgbClr val="1B2330"/>
+                </a:solidFill>
+                <a:latin typeface="Montserrat"/>
+              </a:rPr>
+              <a:t>Misma manguera que la 4.4</a:t>
+            </a:r>
+          </a:p>
+          <a:p>
+            <a:pPr>
+              <a:spcAft>
+                <a:spcPts val="1100"/>
+              </a:spcAft>
+            </a:pPr>
+            <a:r>
+              <a:rPr sz="1600" b="1" i="0">
+                <a:solidFill>
+                  <a:srgbClr val="E8801A"/>
+                </a:solidFill>
+                <a:latin typeface="Montserrat"/>
+              </a:rPr>
+              <a:t>▸  </a:t>
+            </a:r>
+            <a:r>
+              <a:rPr sz="1600" b="0" i="0">
+                <a:solidFill>
+                  <a:srgbClr val="1B2330"/>
+                </a:solidFill>
+                <a:latin typeface="Montserrat"/>
+              </a:rPr>
+              <a:t>Pero SIN enchufe de seguridad</a:t>
+            </a:r>
+          </a:p>
+          <a:p>
+            <a:pPr>
+              <a:spcAft>
+                <a:spcPts val="1100"/>
+              </a:spcAft>
+            </a:pPr>
+            <a:r>
+              <a:rPr sz="1600" b="1" i="0">
+                <a:solidFill>
+                  <a:srgbClr val="E8801A"/>
+                </a:solidFill>
+                <a:latin typeface="Montserrat"/>
+              </a:rPr>
+              <a:t>▸  </a:t>
+            </a:r>
+            <a:r>
+              <a:rPr sz="1600" b="0" i="0">
+                <a:solidFill>
+                  <a:srgbClr val="1B2330"/>
+                </a:solidFill>
+                <a:latin typeface="Montserrat"/>
+              </a:rPr>
+              <a:t>Longitud máxima 2 m</a:t>
+            </a:r>
+          </a:p>
+          <a:p>
+            <a:pPr>
+              <a:spcAft>
+                <a:spcPts val="1100"/>
+              </a:spcAft>
+            </a:pPr>
+            <a:r>
+              <a:rPr sz="1600" b="1" i="0">
+                <a:solidFill>
+                  <a:srgbClr val="E8801A"/>
+                </a:solidFill>
+                <a:latin typeface="Montserrat"/>
+              </a:rPr>
+              <a:t>▸  </a:t>
+            </a:r>
+            <a:r>
+              <a:rPr sz="1600" b="0" i="0">
+                <a:solidFill>
+                  <a:srgbClr val="1B2330"/>
+                </a:solidFill>
+                <a:latin typeface="Montserrat"/>
+              </a:rPr>
+              <a:t>Unión: junta plana o a tetina</a:t>
+            </a:r>
+          </a:p>
+        </p:txBody>
+      </p:sp>
+      <p:sp>
+        <p:nvSpPr>
+          <p:cNvPr id="9" name="imgph" descr="IMGQ:flexible metal gas connector fitting"/>
+          <p:cNvSpPr/>
+          <p:nvPr/>
+        </p:nvSpPr>
+        <p:spPr>
+          <a:xfrm>
+            <a:off x="822960" y="1965960"/>
+            <a:ext cx="5303520" cy="4572000"/>
+          </a:xfrm>
+          <a:prstGeom prst="roundRect">
+            <a:avLst/>
+          </a:prstGeom>
+          <a:solidFill>
+            <a:srgbClr val="F3F6FB"/>
+          </a:solidFill>
+          <a:ln w="12700">
+            <a:solidFill>
+              <a:srgbClr val="C7D2E6"/>
+            </a:solidFill>
+          </a:ln>
+          <a:effectLst/>
+        </p:spPr>
+        <p:style>
+          <a:lnRef idx="1">
+            <a:schemeClr val="accent1"/>
+          </a:lnRef>
+          <a:fillRef idx="3">
+            <a:schemeClr val="accent1"/>
+          </a:fillRef>
+          <a:effectRef idx="2">
+            <a:schemeClr val="accent1"/>
+          </a:effectRef>
+          <a:fontRef idx="minor">
+            <a:schemeClr val="lt1"/>
+          </a:fontRef>
+        </p:style>
+        <p:txBody>
+          <a:bodyPr rtlCol="0" anchor="ctr"/>
+          <a:lstStyle/>
+          <a:p>
+            <a:pPr algn="ctr"/>
+          </a:p>
+        </p:txBody>
+      </p:sp>
+      <p:sp>
+        <p:nvSpPr>
+          <p:cNvPr id="10" name="TextBox 9"/>
+          <p:cNvSpPr txBox="1"/>
+          <p:nvPr/>
+        </p:nvSpPr>
+        <p:spPr>
+          <a:xfrm>
+            <a:off x="1097280" y="3611880"/>
+            <a:ext cx="4754880" cy="1280160"/>
+          </a:xfrm>
+          <a:prstGeom prst="rect">
+            <a:avLst/>
+          </a:prstGeom>
+          <a:noFill/>
+        </p:spPr>
+        <p:txBody>
+          <a:bodyPr wrap="square">
+            <a:spAutoFit/>
+          </a:bodyPr>
+          <a:lstStyle/>
+          <a:p>
+            <a:pPr algn="ctr"/>
+            <a:r>
+              <a:rPr sz="1400" b="1" i="0">
+                <a:solidFill>
+                  <a:srgbClr val="64748B"/>
+                </a:solidFill>
+                <a:latin typeface="Montserrat"/>
+              </a:rPr>
+              <a:t>IMAGEN</a:t>
+            </a:r>
+          </a:p>
+          <a:p>
+            <a:pPr algn="ctr"/>
+            <a:r>
+              <a:rPr sz="1100" b="0" i="1">
+                <a:solidFill>
+                  <a:srgbClr val="64748B"/>
+                </a:solidFill>
+                <a:latin typeface="Montserrat"/>
+              </a:rPr>
+              <a:t>flexible metal gas connector fitting</a:t>
+            </a:r>
+          </a:p>
+        </p:txBody>
+      </p:sp>
+    </p:spTree>
+  </p:cSld>
+  <p:clrMapOvr>
+    <a:masterClrMapping/>
+  </p:clrMapOvr>
+  <mc:AlternateContent xmlns:mc="http://schemas.openxmlformats.org/markup-compatibility/2006">
+    <mc:Choice xmlns:p14="http://schemas.microsoft.com/office/powerpoint/2010/main" Requires="p14">
+      <p:transition spd="med" p14:dur="700">
+        <p14:cube dir="l"/>
+      </p:transition>
+    </mc:Choice>
+    <mc:Fallback>
+      <p:transition spd="med">
+        <p:push dir="l"/>
+      </p:transition>
+    </mc:Fallback>
+  </mc:AlternateContent>
 </p:sld>
 </file>
 
@@ -8001,7 +10747,7 @@
                 </a:solidFill>
                 <a:latin typeface="Montserrat"/>
               </a:rPr>
-              <a:t>002 / 016</a:t>
+              <a:t>002 / 022</a:t>
             </a:r>
           </a:p>
         </p:txBody>
@@ -8076,7 +10822,7 @@
       </p:sp>
       <p:sp>
         <p:nvSpPr>
-          <p:cNvPr id="6" name="Rounded Rectangle 5"/>
+          <p:cNvPr id="6" name="Rectangle 5"/>
           <p:cNvSpPr/>
           <p:nvPr/>
         </p:nvSpPr>
@@ -8085,7 +10831,7 @@
             <a:off x="868680" y="1234440"/>
             <a:ext cx="1463040" cy="73152"/>
           </a:xfrm>
-          <a:prstGeom prst="roundRect">
+          <a:prstGeom prst="rect">
             <a:avLst/>
           </a:prstGeom>
           <a:solidFill>
@@ -8166,14 +10912,58 @@
       </p:sp>
       <p:sp>
         <p:nvSpPr>
-          <p:cNvPr id="8" name="TextBox 7"/>
+          <p:cNvPr id="8" name="Rectangle 7"/>
+          <p:cNvSpPr/>
+          <p:nvPr/>
+        </p:nvSpPr>
+        <p:spPr>
+          <a:xfrm>
+            <a:off x="822960" y="2011680"/>
+            <a:ext cx="3017520" cy="128016"/>
+          </a:xfrm>
+          <a:prstGeom prst="rect">
+            <a:avLst/>
+          </a:prstGeom>
+          <a:solidFill>
+            <a:srgbClr val="E8801A"/>
+          </a:solidFill>
+          <a:ln>
+            <a:noFill/>
+          </a:ln>
+          <a:effectLst/>
+        </p:spPr>
+        <p:style>
+          <a:lnRef idx="1">
+            <a:schemeClr val="accent1"/>
+          </a:lnRef>
+          <a:fillRef idx="3">
+            <a:schemeClr val="accent1"/>
+          </a:fillRef>
+          <a:effectRef idx="2">
+            <a:schemeClr val="accent1"/>
+          </a:effectRef>
+          <a:fontRef idx="minor">
+            <a:schemeClr val="lt1"/>
+          </a:fontRef>
+        </p:style>
+        <p:txBody>
+          <a:bodyPr rtlCol="0" anchor="ctr"/>
+          <a:lstStyle/>
+          <a:p>
+            <a:pPr algn="ctr"/>
+          </a:p>
+        </p:txBody>
+      </p:sp>
+      <p:sp>
+        <p:nvSpPr>
+          <p:cNvPr id="9" name="TextBox 8"/>
           <p:cNvSpPr txBox="1"/>
           <p:nvPr/>
         </p:nvSpPr>
         <p:spPr>
           <a:xfrm>
-            <a:off x="822960" y="2331720"/>
-            <a:ext cx="3017520" cy="1463040"/>
+            <a:off x="822960" y="2377440"/>
+            <a:ext cx="3017520" cy="1371600"/>
           </a:xfrm>
           <a:prstGeom prst="rect">
             <a:avLst/>
@@ -8188,7 +10978,7 @@
           <a:p>
             <a:pPr algn="ctr"/>
             <a:r>
-              <a:rPr sz="6000" b="1" i="0">
+              <a:rPr sz="5800" b="1" i="0">
                 <a:solidFill>
                   <a:srgbClr val="1E2761"/>
                 </a:solidFill>
@@ -8201,13 +10991,13 @@
       </p:sp>
       <p:sp>
         <p:nvSpPr>
-          <p:cNvPr id="9" name="TextBox 8"/>
+          <p:cNvPr id="10" name="TextBox 9"/>
           <p:cNvSpPr txBox="1"/>
           <p:nvPr/>
         </p:nvSpPr>
         <p:spPr>
           <a:xfrm>
-            <a:off x="1051560" y="3611880"/>
+            <a:off x="1051560" y="3657600"/>
             <a:ext cx="2560320" cy="1005840"/>
           </a:xfrm>
           <a:prstGeom prst="rect">
@@ -8236,7 +11026,7 @@
       </p:sp>
       <p:sp>
         <p:nvSpPr>
-          <p:cNvPr id="10" name="Rounded Rectangle 9"/>
+          <p:cNvPr id="11" name="Rounded Rectangle 10"/>
           <p:cNvSpPr/>
           <p:nvPr/>
         </p:nvSpPr>
@@ -8282,14 +11072,58 @@
       </p:sp>
       <p:sp>
         <p:nvSpPr>
-          <p:cNvPr id="11" name="TextBox 10"/>
+          <p:cNvPr id="12" name="Rectangle 11"/>
+          <p:cNvSpPr/>
+          <p:nvPr/>
+        </p:nvSpPr>
+        <p:spPr>
+          <a:xfrm>
+            <a:off x="4617720" y="2011680"/>
+            <a:ext cx="3017520" cy="128016"/>
+          </a:xfrm>
+          <a:prstGeom prst="rect">
+            <a:avLst/>
+          </a:prstGeom>
+          <a:solidFill>
+            <a:srgbClr val="E8801A"/>
+          </a:solidFill>
+          <a:ln>
+            <a:noFill/>
+          </a:ln>
+          <a:effectLst/>
+        </p:spPr>
+        <p:style>
+          <a:lnRef idx="1">
+            <a:schemeClr val="accent1"/>
+          </a:lnRef>
+          <a:fillRef idx="3">
+            <a:schemeClr val="accent1"/>
+          </a:fillRef>
+          <a:effectRef idx="2">
+            <a:schemeClr val="accent1"/>
+          </a:effectRef>
+          <a:fontRef idx="minor">
+            <a:schemeClr val="lt1"/>
+          </a:fontRef>
+        </p:style>
+        <p:txBody>
+          <a:bodyPr rtlCol="0" anchor="ctr"/>
+          <a:lstStyle/>
+          <a:p>
+            <a:pPr algn="ctr"/>
+          </a:p>
+        </p:txBody>
+      </p:sp>
+      <p:sp>
+        <p:nvSpPr>
+          <p:cNvPr id="13" name="TextBox 12"/>
           <p:cNvSpPr txBox="1"/>
           <p:nvPr/>
         </p:nvSpPr>
         <p:spPr>
           <a:xfrm>
-            <a:off x="4617720" y="2331720"/>
-            <a:ext cx="3017520" cy="1463040"/>
+            <a:off x="4617720" y="2377440"/>
+            <a:ext cx="3017520" cy="1371600"/>
           </a:xfrm>
           <a:prstGeom prst="rect">
             <a:avLst/>
@@ -8304,7 +11138,7 @@
           <a:p>
             <a:pPr algn="ctr"/>
             <a:r>
-              <a:rPr sz="6000" b="1" i="0">
+              <a:rPr sz="5800" b="1" i="0">
                 <a:solidFill>
                   <a:srgbClr val="1E2761"/>
                 </a:solidFill>
@@ -8317,13 +11151,13 @@
       </p:sp>
       <p:sp>
         <p:nvSpPr>
-          <p:cNvPr id="12" name="TextBox 11"/>
+          <p:cNvPr id="14" name="TextBox 13"/>
           <p:cNvSpPr txBox="1"/>
           <p:nvPr/>
         </p:nvSpPr>
         <p:spPr>
           <a:xfrm>
-            <a:off x="4846320" y="3611880"/>
+            <a:off x="4846320" y="3657600"/>
             <a:ext cx="2560320" cy="1005840"/>
           </a:xfrm>
           <a:prstGeom prst="rect">
@@ -8352,7 +11186,7 @@
       </p:sp>
       <p:sp>
         <p:nvSpPr>
-          <p:cNvPr id="13" name="Rounded Rectangle 12"/>
+          <p:cNvPr id="15" name="Rounded Rectangle 14"/>
           <p:cNvSpPr/>
           <p:nvPr/>
         </p:nvSpPr>
@@ -8398,14 +11232,58 @@
       </p:sp>
       <p:sp>
         <p:nvSpPr>
-          <p:cNvPr id="14" name="TextBox 13"/>
+          <p:cNvPr id="16" name="Rectangle 15"/>
+          <p:cNvSpPr/>
+          <p:nvPr/>
+        </p:nvSpPr>
+        <p:spPr>
+          <a:xfrm>
+            <a:off x="8412480" y="2011680"/>
+            <a:ext cx="3017520" cy="128016"/>
+          </a:xfrm>
+          <a:prstGeom prst="rect">
+            <a:avLst/>
+          </a:prstGeom>
+          <a:solidFill>
+            <a:srgbClr val="E8801A"/>
+          </a:solidFill>
+          <a:ln>
+            <a:noFill/>
+          </a:ln>
+          <a:effectLst/>
+        </p:spPr>
+        <p:style>
+          <a:lnRef idx="1">
+            <a:schemeClr val="accent1"/>
+          </a:lnRef>
+          <a:fillRef idx="3">
+            <a:schemeClr val="accent1"/>
+          </a:fillRef>
+          <a:effectRef idx="2">
+            <a:schemeClr val="accent1"/>
+          </a:effectRef>
+          <a:fontRef idx="minor">
+            <a:schemeClr val="lt1"/>
+          </a:fontRef>
+        </p:style>
+        <p:txBody>
+          <a:bodyPr rtlCol="0" anchor="ctr"/>
+          <a:lstStyle/>
+          <a:p>
+            <a:pPr algn="ctr"/>
+          </a:p>
+        </p:txBody>
+      </p:sp>
+      <p:sp>
+        <p:nvSpPr>
+          <p:cNvPr id="17" name="TextBox 16"/>
           <p:cNvSpPr txBox="1"/>
           <p:nvPr/>
         </p:nvSpPr>
         <p:spPr>
           <a:xfrm>
-            <a:off x="8412480" y="2331720"/>
-            <a:ext cx="3017520" cy="1463040"/>
+            <a:off x="8412480" y="2377440"/>
+            <a:ext cx="3017520" cy="1371600"/>
           </a:xfrm>
           <a:prstGeom prst="rect">
             <a:avLst/>
@@ -8420,7 +11298,7 @@
           <a:p>
             <a:pPr algn="ctr"/>
             <a:r>
-              <a:rPr sz="6000" b="1" i="0">
+              <a:rPr sz="5800" b="1" i="0">
                 <a:solidFill>
                   <a:srgbClr val="1E2761"/>
                 </a:solidFill>
@@ -8433,13 +11311,13 @@
       </p:sp>
       <p:sp>
         <p:nvSpPr>
-          <p:cNvPr id="15" name="TextBox 14"/>
+          <p:cNvPr id="18" name="TextBox 17"/>
           <p:cNvSpPr txBox="1"/>
           <p:nvPr/>
         </p:nvSpPr>
         <p:spPr>
           <a:xfrm>
-            <a:off x="8641080" y="3611880"/>
+            <a:off x="8641080" y="3657600"/>
             <a:ext cx="2560320" cy="1005840"/>
           </a:xfrm>
           <a:prstGeom prst="rect">
@@ -8471,6 +11349,1297 @@
   <p:clrMapOvr>
     <a:masterClrMapping/>
   </p:clrMapOvr>
+  <mc:AlternateContent xmlns:mc="http://schemas.openxmlformats.org/markup-compatibility/2006">
+    <mc:Choice xmlns:p14="http://schemas.microsoft.com/office/powerpoint/2010/main" Requires="p14">
+      <p:transition spd="med" p14:dur="700">
+        <p14:cube dir="r"/>
+      </p:transition>
+    </mc:Choice>
+    <mc:Fallback>
+      <p:transition spd="med">
+        <p:push dir="r"/>
+      </p:transition>
+    </mc:Fallback>
+  </mc:AlternateContent>
+</p:sld>
+</file>
+
+<file path=ppt/slides/slide20.xml><?xml version="1.0" encoding="utf-8"?>
+<p:sld xmlns:a="http://schemas.openxmlformats.org/drawingml/2006/main" xmlns:p="http://schemas.openxmlformats.org/presentationml/2006/main" xmlns:r="http://schemas.openxmlformats.org/officeDocument/2006/relationships">
+  <p:cSld>
+    <p:spTree>
+      <p:nvGrpSpPr>
+        <p:cNvPr id="1" name=""/>
+        <p:cNvGrpSpPr/>
+        <p:nvPr/>
+      </p:nvGrpSpPr>
+      <p:grpSpPr/>
+      <p:sp>
+        <p:nvSpPr>
+          <p:cNvPr id="2" name="Rectangle 1"/>
+          <p:cNvSpPr/>
+          <p:nvPr/>
+        </p:nvSpPr>
+        <p:spPr>
+          <a:xfrm>
+            <a:off x="0" y="0"/>
+            <a:ext cx="12191695" cy="6858000"/>
+          </a:xfrm>
+          <a:prstGeom prst="rect">
+            <a:avLst/>
+          </a:prstGeom>
+          <a:solidFill>
+            <a:srgbClr val="FFFFFF"/>
+          </a:solidFill>
+          <a:ln>
+            <a:noFill/>
+          </a:ln>
+          <a:effectLst/>
+        </p:spPr>
+        <p:style>
+          <a:lnRef idx="1">
+            <a:schemeClr val="accent1"/>
+          </a:lnRef>
+          <a:fillRef idx="3">
+            <a:schemeClr val="accent1"/>
+          </a:fillRef>
+          <a:effectRef idx="2">
+            <a:schemeClr val="accent1"/>
+          </a:effectRef>
+          <a:fontRef idx="minor">
+            <a:schemeClr val="lt1"/>
+          </a:fontRef>
+        </p:style>
+        <p:txBody>
+          <a:bodyPr rtlCol="0" anchor="ctr"/>
+          <a:lstStyle/>
+          <a:p>
+            <a:pPr algn="ctr"/>
+          </a:p>
+        </p:txBody>
+      </p:sp>
+      <p:sp>
+        <p:nvSpPr>
+          <p:cNvPr id="3" name="TextBox 2"/>
+          <p:cNvSpPr txBox="1"/>
+          <p:nvPr/>
+        </p:nvSpPr>
+        <p:spPr>
+          <a:xfrm>
+            <a:off x="10607040" y="320040"/>
+            <a:ext cx="1371600" cy="365760"/>
+          </a:xfrm>
+          <a:prstGeom prst="rect">
+            <a:avLst/>
+          </a:prstGeom>
+          <a:noFill/>
+        </p:spPr>
+        <p:txBody>
+          <a:bodyPr wrap="square">
+            <a:spAutoFit/>
+          </a:bodyPr>
+          <a:lstStyle/>
+          <a:p>
+            <a:pPr algn="r"/>
+            <a:r>
+              <a:rPr sz="1000" b="1" i="0">
+                <a:solidFill>
+                  <a:srgbClr val="64748B"/>
+                </a:solidFill>
+                <a:latin typeface="Montserrat"/>
+              </a:rPr>
+              <a:t>020 / 022</a:t>
+            </a:r>
+          </a:p>
+        </p:txBody>
+      </p:sp>
+      <p:sp>
+        <p:nvSpPr>
+          <p:cNvPr id="4" name="TextBox 3"/>
+          <p:cNvSpPr txBox="1"/>
+          <p:nvPr/>
+        </p:nvSpPr>
+        <p:spPr>
+          <a:xfrm>
+            <a:off x="457200" y="6419088"/>
+            <a:ext cx="8229600" cy="365760"/>
+          </a:xfrm>
+          <a:prstGeom prst="rect">
+            <a:avLst/>
+          </a:prstGeom>
+          <a:noFill/>
+        </p:spPr>
+        <p:txBody>
+          <a:bodyPr wrap="square">
+            <a:spAutoFit/>
+          </a:bodyPr>
+          <a:lstStyle/>
+          <a:p>
+            <a:r>
+              <a:rPr sz="900" b="0" i="0">
+                <a:solidFill>
+                  <a:srgbClr val="64748B"/>
+                </a:solidFill>
+                <a:latin typeface="Montserrat"/>
+              </a:rPr>
+              <a:t>Curso Gas B · Tema 14 · UNE 60670-7</a:t>
+            </a:r>
+          </a:p>
+        </p:txBody>
+      </p:sp>
+      <p:sp>
+        <p:nvSpPr>
+          <p:cNvPr id="5" name="TextBox 4"/>
+          <p:cNvSpPr txBox="1"/>
+          <p:nvPr/>
+        </p:nvSpPr>
+        <p:spPr>
+          <a:xfrm>
+            <a:off x="822960" y="457200"/>
+            <a:ext cx="10058400" cy="365760"/>
+          </a:xfrm>
+          <a:prstGeom prst="rect">
+            <a:avLst/>
+          </a:prstGeom>
+          <a:noFill/>
+        </p:spPr>
+        <p:txBody>
+          <a:bodyPr wrap="square">
+            <a:spAutoFit/>
+          </a:bodyPr>
+          <a:lstStyle/>
+          <a:p>
+            <a:r>
+              <a:rPr sz="1300" b="1" i="0">
+                <a:solidFill>
+                  <a:srgbClr val="E8801A"/>
+                </a:solidFill>
+                <a:latin typeface="Montserrat"/>
+              </a:rPr>
+              <a:t>ANEXO A · INFORMATIVO</a:t>
+            </a:r>
+          </a:p>
+        </p:txBody>
+      </p:sp>
+      <p:sp>
+        <p:nvSpPr>
+          <p:cNvPr id="6" name="TextBox 5"/>
+          <p:cNvSpPr txBox="1"/>
+          <p:nvPr/>
+        </p:nvSpPr>
+        <p:spPr>
+          <a:xfrm>
+            <a:off x="822960" y="868680"/>
+            <a:ext cx="10515600" cy="914400"/>
+          </a:xfrm>
+          <a:prstGeom prst="rect">
+            <a:avLst/>
+          </a:prstGeom>
+          <a:noFill/>
+        </p:spPr>
+        <p:txBody>
+          <a:bodyPr wrap="square">
+            <a:spAutoFit/>
+          </a:bodyPr>
+          <a:lstStyle/>
+          <a:p>
+            <a:r>
+              <a:rPr sz="2800" b="1" i="0">
+                <a:solidFill>
+                  <a:srgbClr val="1E2761"/>
+                </a:solidFill>
+                <a:latin typeface="Montserrat"/>
+              </a:rPr>
+              <a:t>¿Se mueve o no se mueve?</a:t>
+            </a:r>
+          </a:p>
+        </p:txBody>
+      </p:sp>
+      <p:sp>
+        <p:nvSpPr>
+          <p:cNvPr id="7" name="Rectangle 6"/>
+          <p:cNvSpPr/>
+          <p:nvPr/>
+        </p:nvSpPr>
+        <p:spPr>
+          <a:xfrm>
+            <a:off x="868680" y="1627632"/>
+            <a:ext cx="2011680" cy="73152"/>
+          </a:xfrm>
+          <a:prstGeom prst="rect">
+            <a:avLst/>
+          </a:prstGeom>
+          <a:solidFill>
+            <a:srgbClr val="E8801A"/>
+          </a:solidFill>
+          <a:ln>
+            <a:noFill/>
+          </a:ln>
+          <a:effectLst/>
+        </p:spPr>
+        <p:style>
+          <a:lnRef idx="1">
+            <a:schemeClr val="accent1"/>
+          </a:lnRef>
+          <a:fillRef idx="3">
+            <a:schemeClr val="accent1"/>
+          </a:fillRef>
+          <a:effectRef idx="2">
+            <a:schemeClr val="accent1"/>
+          </a:effectRef>
+          <a:fontRef idx="minor">
+            <a:schemeClr val="lt1"/>
+          </a:fontRef>
+        </p:style>
+        <p:txBody>
+          <a:bodyPr rtlCol="0" anchor="ctr"/>
+          <a:lstStyle/>
+          <a:p>
+            <a:pPr algn="ctr"/>
+          </a:p>
+        </p:txBody>
+      </p:sp>
+      <p:sp>
+        <p:nvSpPr>
+          <p:cNvPr id="8" name="TextBox 7"/>
+          <p:cNvSpPr txBox="1"/>
+          <p:nvPr/>
+        </p:nvSpPr>
+        <p:spPr>
+          <a:xfrm>
+            <a:off x="822960" y="1965960"/>
+            <a:ext cx="5029200" cy="4206240"/>
+          </a:xfrm>
+          <a:prstGeom prst="rect">
+            <a:avLst/>
+          </a:prstGeom>
+          <a:noFill/>
+        </p:spPr>
+        <p:txBody>
+          <a:bodyPr wrap="square">
+            <a:spAutoFit/>
+          </a:bodyPr>
+          <a:lstStyle/>
+          <a:p>
+            <a:pPr>
+              <a:spcAft>
+                <a:spcPts val="1100"/>
+              </a:spcAft>
+            </a:pPr>
+            <a:r>
+              <a:rPr sz="1600" b="1" i="0">
+                <a:solidFill>
+                  <a:srgbClr val="E8801A"/>
+                </a:solidFill>
+                <a:latin typeface="Montserrat"/>
+              </a:rPr>
+              <a:t>▸  </a:t>
+            </a:r>
+            <a:r>
+              <a:rPr sz="1600" b="0" i="0">
+                <a:solidFill>
+                  <a:srgbClr val="1B2330"/>
+                </a:solidFill>
+                <a:latin typeface="Montserrat"/>
+              </a:rPr>
+              <a:t>Fijo o encastrado → conexión rígida</a:t>
+            </a:r>
+          </a:p>
+          <a:p>
+            <a:pPr>
+              <a:spcAft>
+                <a:spcPts val="1100"/>
+              </a:spcAft>
+            </a:pPr>
+            <a:r>
+              <a:rPr sz="1600" b="1" i="0">
+                <a:solidFill>
+                  <a:srgbClr val="E8801A"/>
+                </a:solidFill>
+                <a:latin typeface="Montserrat"/>
+              </a:rPr>
+              <a:t>▸  </a:t>
+            </a:r>
+            <a:r>
+              <a:rPr sz="1600" b="0" i="0">
+                <a:solidFill>
+                  <a:srgbClr val="1B2330"/>
+                </a:solidFill>
+                <a:latin typeface="Montserrat"/>
+              </a:rPr>
+              <a:t>Móvil → conexión flexible</a:t>
+            </a:r>
+          </a:p>
+          <a:p>
+            <a:pPr>
+              <a:spcAft>
+                <a:spcPts val="1100"/>
+              </a:spcAft>
+            </a:pPr>
+            <a:r>
+              <a:rPr sz="1600" b="1" i="0">
+                <a:solidFill>
+                  <a:srgbClr val="E8801A"/>
+                </a:solidFill>
+                <a:latin typeface="Montserrat"/>
+              </a:rPr>
+              <a:t>▸  </a:t>
+            </a:r>
+            <a:r>
+              <a:rPr sz="1600" b="0" i="0">
+                <a:solidFill>
+                  <a:srgbClr val="1B2330"/>
+                </a:solidFill>
+                <a:latin typeface="Montserrat"/>
+              </a:rPr>
+              <a:t>Es una guía orientativa</a:t>
+            </a:r>
+          </a:p>
+        </p:txBody>
+      </p:sp>
+      <p:sp>
+        <p:nvSpPr>
+          <p:cNvPr id="9" name="imgph" descr="IMGQ:built in gas hob kitchen counter"/>
+          <p:cNvSpPr/>
+          <p:nvPr/>
+        </p:nvSpPr>
+        <p:spPr>
+          <a:xfrm>
+            <a:off x="6080760" y="1965960"/>
+            <a:ext cx="5303520" cy="4572000"/>
+          </a:xfrm>
+          <a:prstGeom prst="roundRect">
+            <a:avLst/>
+          </a:prstGeom>
+          <a:solidFill>
+            <a:srgbClr val="F3F6FB"/>
+          </a:solidFill>
+          <a:ln w="12700">
+            <a:solidFill>
+              <a:srgbClr val="C7D2E6"/>
+            </a:solidFill>
+          </a:ln>
+          <a:effectLst/>
+        </p:spPr>
+        <p:style>
+          <a:lnRef idx="1">
+            <a:schemeClr val="accent1"/>
+          </a:lnRef>
+          <a:fillRef idx="3">
+            <a:schemeClr val="accent1"/>
+          </a:fillRef>
+          <a:effectRef idx="2">
+            <a:schemeClr val="accent1"/>
+          </a:effectRef>
+          <a:fontRef idx="minor">
+            <a:schemeClr val="lt1"/>
+          </a:fontRef>
+        </p:style>
+        <p:txBody>
+          <a:bodyPr rtlCol="0" anchor="ctr"/>
+          <a:lstStyle/>
+          <a:p>
+            <a:pPr algn="ctr"/>
+          </a:p>
+        </p:txBody>
+      </p:sp>
+      <p:sp>
+        <p:nvSpPr>
+          <p:cNvPr id="10" name="TextBox 9"/>
+          <p:cNvSpPr txBox="1"/>
+          <p:nvPr/>
+        </p:nvSpPr>
+        <p:spPr>
+          <a:xfrm>
+            <a:off x="6355080" y="3611880"/>
+            <a:ext cx="4754880" cy="1280160"/>
+          </a:xfrm>
+          <a:prstGeom prst="rect">
+            <a:avLst/>
+          </a:prstGeom>
+          <a:noFill/>
+        </p:spPr>
+        <p:txBody>
+          <a:bodyPr wrap="square">
+            <a:spAutoFit/>
+          </a:bodyPr>
+          <a:lstStyle/>
+          <a:p>
+            <a:pPr algn="ctr"/>
+            <a:r>
+              <a:rPr sz="1400" b="1" i="0">
+                <a:solidFill>
+                  <a:srgbClr val="64748B"/>
+                </a:solidFill>
+                <a:latin typeface="Montserrat"/>
+              </a:rPr>
+              <a:t>IMAGEN</a:t>
+            </a:r>
+          </a:p>
+          <a:p>
+            <a:pPr algn="ctr"/>
+            <a:r>
+              <a:rPr sz="1100" b="0" i="1">
+                <a:solidFill>
+                  <a:srgbClr val="64748B"/>
+                </a:solidFill>
+                <a:latin typeface="Montserrat"/>
+              </a:rPr>
+              <a:t>built in gas hob kitchen counter</a:t>
+            </a:r>
+          </a:p>
+        </p:txBody>
+      </p:sp>
+    </p:spTree>
+  </p:cSld>
+  <p:clrMapOvr>
+    <a:masterClrMapping/>
+  </p:clrMapOvr>
+  <mc:AlternateContent xmlns:mc="http://schemas.openxmlformats.org/markup-compatibility/2006">
+    <mc:Choice xmlns:p14="http://schemas.microsoft.com/office/powerpoint/2010/main" Requires="p14">
+      <p:transition spd="med" p14:dur="700">
+        <p14:cube dir="r"/>
+      </p:transition>
+    </mc:Choice>
+    <mc:Fallback>
+      <p:transition spd="med">
+        <p:push dir="r"/>
+      </p:transition>
+    </mc:Fallback>
+  </mc:AlternateContent>
+</p:sld>
+</file>
+
+<file path=ppt/slides/slide21.xml><?xml version="1.0" encoding="utf-8"?>
+<p:sld xmlns:a="http://schemas.openxmlformats.org/drawingml/2006/main" xmlns:p="http://schemas.openxmlformats.org/presentationml/2006/main" xmlns:r="http://schemas.openxmlformats.org/officeDocument/2006/relationships">
+  <p:cSld>
+    <p:spTree>
+      <p:nvGrpSpPr>
+        <p:cNvPr id="1" name=""/>
+        <p:cNvGrpSpPr/>
+        <p:nvPr/>
+      </p:nvGrpSpPr>
+      <p:grpSpPr/>
+      <p:sp>
+        <p:nvSpPr>
+          <p:cNvPr id="2" name="Rectangle 1"/>
+          <p:cNvSpPr/>
+          <p:nvPr/>
+        </p:nvSpPr>
+        <p:spPr>
+          <a:xfrm>
+            <a:off x="0" y="0"/>
+            <a:ext cx="12191695" cy="6858000"/>
+          </a:xfrm>
+          <a:prstGeom prst="rect">
+            <a:avLst/>
+          </a:prstGeom>
+          <a:solidFill>
+            <a:srgbClr val="FFFFFF"/>
+          </a:solidFill>
+          <a:ln>
+            <a:noFill/>
+          </a:ln>
+          <a:effectLst/>
+        </p:spPr>
+        <p:style>
+          <a:lnRef idx="1">
+            <a:schemeClr val="accent1"/>
+          </a:lnRef>
+          <a:fillRef idx="3">
+            <a:schemeClr val="accent1"/>
+          </a:fillRef>
+          <a:effectRef idx="2">
+            <a:schemeClr val="accent1"/>
+          </a:effectRef>
+          <a:fontRef idx="minor">
+            <a:schemeClr val="lt1"/>
+          </a:fontRef>
+        </p:style>
+        <p:txBody>
+          <a:bodyPr rtlCol="0" anchor="ctr"/>
+          <a:lstStyle/>
+          <a:p>
+            <a:pPr algn="ctr"/>
+          </a:p>
+        </p:txBody>
+      </p:sp>
+      <p:sp>
+        <p:nvSpPr>
+          <p:cNvPr id="3" name="TextBox 2"/>
+          <p:cNvSpPr txBox="1"/>
+          <p:nvPr/>
+        </p:nvSpPr>
+        <p:spPr>
+          <a:xfrm>
+            <a:off x="10607040" y="320040"/>
+            <a:ext cx="1371600" cy="365760"/>
+          </a:xfrm>
+          <a:prstGeom prst="rect">
+            <a:avLst/>
+          </a:prstGeom>
+          <a:noFill/>
+        </p:spPr>
+        <p:txBody>
+          <a:bodyPr wrap="square">
+            <a:spAutoFit/>
+          </a:bodyPr>
+          <a:lstStyle/>
+          <a:p>
+            <a:pPr algn="r"/>
+            <a:r>
+              <a:rPr sz="1000" b="1" i="0">
+                <a:solidFill>
+                  <a:srgbClr val="64748B"/>
+                </a:solidFill>
+                <a:latin typeface="Montserrat"/>
+              </a:rPr>
+              <a:t>021 / 022</a:t>
+            </a:r>
+          </a:p>
+        </p:txBody>
+      </p:sp>
+      <p:sp>
+        <p:nvSpPr>
+          <p:cNvPr id="4" name="TextBox 3"/>
+          <p:cNvSpPr txBox="1"/>
+          <p:nvPr/>
+        </p:nvSpPr>
+        <p:spPr>
+          <a:xfrm>
+            <a:off x="457200" y="6419088"/>
+            <a:ext cx="8229600" cy="365760"/>
+          </a:xfrm>
+          <a:prstGeom prst="rect">
+            <a:avLst/>
+          </a:prstGeom>
+          <a:noFill/>
+        </p:spPr>
+        <p:txBody>
+          <a:bodyPr wrap="square">
+            <a:spAutoFit/>
+          </a:bodyPr>
+          <a:lstStyle/>
+          <a:p>
+            <a:r>
+              <a:rPr sz="900" b="0" i="0">
+                <a:solidFill>
+                  <a:srgbClr val="64748B"/>
+                </a:solidFill>
+                <a:latin typeface="Montserrat"/>
+              </a:rPr>
+              <a:t>Curso Gas B · Tema 14 · UNE 60670-7</a:t>
+            </a:r>
+          </a:p>
+        </p:txBody>
+      </p:sp>
+      <p:sp>
+        <p:nvSpPr>
+          <p:cNvPr id="5" name="TextBox 4"/>
+          <p:cNvSpPr txBox="1"/>
+          <p:nvPr/>
+        </p:nvSpPr>
+        <p:spPr>
+          <a:xfrm>
+            <a:off x="822960" y="457200"/>
+            <a:ext cx="10058400" cy="365760"/>
+          </a:xfrm>
+          <a:prstGeom prst="rect">
+            <a:avLst/>
+          </a:prstGeom>
+          <a:noFill/>
+        </p:spPr>
+        <p:txBody>
+          <a:bodyPr wrap="square">
+            <a:spAutoFit/>
+          </a:bodyPr>
+          <a:lstStyle/>
+          <a:p>
+            <a:r>
+              <a:rPr sz="1300" b="1" i="0">
+                <a:solidFill>
+                  <a:srgbClr val="E8801A"/>
+                </a:solidFill>
+                <a:latin typeface="Montserrat"/>
+              </a:rPr>
+              <a:t>EL PAPELEO</a:t>
+            </a:r>
+          </a:p>
+        </p:txBody>
+      </p:sp>
+      <p:sp>
+        <p:nvSpPr>
+          <p:cNvPr id="6" name="TextBox 5"/>
+          <p:cNvSpPr txBox="1"/>
+          <p:nvPr/>
+        </p:nvSpPr>
+        <p:spPr>
+          <a:xfrm>
+            <a:off x="822960" y="868680"/>
+            <a:ext cx="10515600" cy="914400"/>
+          </a:xfrm>
+          <a:prstGeom prst="rect">
+            <a:avLst/>
+          </a:prstGeom>
+          <a:noFill/>
+        </p:spPr>
+        <p:txBody>
+          <a:bodyPr wrap="square">
+            <a:spAutoFit/>
+          </a:bodyPr>
+          <a:lstStyle/>
+          <a:p>
+            <a:r>
+              <a:rPr sz="2800" b="1" i="0">
+                <a:solidFill>
+                  <a:srgbClr val="1E2761"/>
+                </a:solidFill>
+                <a:latin typeface="Montserrat"/>
+              </a:rPr>
+              <a:t>Un montaje mal hecho, se firma</a:t>
+            </a:r>
+          </a:p>
+        </p:txBody>
+      </p:sp>
+      <p:sp>
+        <p:nvSpPr>
+          <p:cNvPr id="7" name="Rectangle 6"/>
+          <p:cNvSpPr/>
+          <p:nvPr/>
+        </p:nvSpPr>
+        <p:spPr>
+          <a:xfrm>
+            <a:off x="868680" y="1627632"/>
+            <a:ext cx="2011680" cy="73152"/>
+          </a:xfrm>
+          <a:prstGeom prst="rect">
+            <a:avLst/>
+          </a:prstGeom>
+          <a:solidFill>
+            <a:srgbClr val="E8801A"/>
+          </a:solidFill>
+          <a:ln>
+            <a:noFill/>
+          </a:ln>
+          <a:effectLst/>
+        </p:spPr>
+        <p:style>
+          <a:lnRef idx="1">
+            <a:schemeClr val="accent1"/>
+          </a:lnRef>
+          <a:fillRef idx="3">
+            <a:schemeClr val="accent1"/>
+          </a:fillRef>
+          <a:effectRef idx="2">
+            <a:schemeClr val="accent1"/>
+          </a:effectRef>
+          <a:fontRef idx="minor">
+            <a:schemeClr val="lt1"/>
+          </a:fontRef>
+        </p:style>
+        <p:txBody>
+          <a:bodyPr rtlCol="0" anchor="ctr"/>
+          <a:lstStyle/>
+          <a:p>
+            <a:pPr algn="ctr"/>
+          </a:p>
+        </p:txBody>
+      </p:sp>
+      <p:sp>
+        <p:nvSpPr>
+          <p:cNvPr id="8" name="TextBox 7"/>
+          <p:cNvSpPr txBox="1"/>
+          <p:nvPr/>
+        </p:nvSpPr>
+        <p:spPr>
+          <a:xfrm>
+            <a:off x="6355080" y="1965960"/>
+            <a:ext cx="5029200" cy="4206240"/>
+          </a:xfrm>
+          <a:prstGeom prst="rect">
+            <a:avLst/>
+          </a:prstGeom>
+          <a:noFill/>
+        </p:spPr>
+        <p:txBody>
+          <a:bodyPr wrap="square">
+            <a:spAutoFit/>
+          </a:bodyPr>
+          <a:lstStyle/>
+          <a:p>
+            <a:pPr>
+              <a:spcAft>
+                <a:spcPts val="1100"/>
+              </a:spcAft>
+            </a:pPr>
+            <a:r>
+              <a:rPr sz="1600" b="1" i="0">
+                <a:solidFill>
+                  <a:srgbClr val="E8801A"/>
+                </a:solidFill>
+                <a:latin typeface="Montserrat"/>
+              </a:rPr>
+              <a:t>▸  </a:t>
+            </a:r>
+            <a:r>
+              <a:rPr sz="1600" b="0" i="0">
+                <a:solidFill>
+                  <a:srgbClr val="1B2330"/>
+                </a:solidFill>
+                <a:latin typeface="Montserrat"/>
+              </a:rPr>
+              <a:t>Certificado de instalación y puesta en marcha</a:t>
+            </a:r>
+          </a:p>
+          <a:p>
+            <a:pPr>
+              <a:spcAft>
+                <a:spcPts val="1100"/>
+              </a:spcAft>
+            </a:pPr>
+            <a:r>
+              <a:rPr sz="1600" b="1" i="0">
+                <a:solidFill>
+                  <a:srgbClr val="E8801A"/>
+                </a:solidFill>
+                <a:latin typeface="Montserrat"/>
+              </a:rPr>
+              <a:t>▸  </a:t>
+            </a:r>
+            <a:r>
+              <a:rPr sz="1600" b="0" i="0">
+                <a:solidFill>
+                  <a:srgbClr val="1B2330"/>
+                </a:solidFill>
+                <a:latin typeface="Montserrat"/>
+              </a:rPr>
+              <a:t>Se entrega al usuario</a:t>
+            </a:r>
+          </a:p>
+          <a:p>
+            <a:pPr>
+              <a:spcAft>
+                <a:spcPts val="1100"/>
+              </a:spcAft>
+            </a:pPr>
+            <a:r>
+              <a:rPr sz="1600" b="1" i="0">
+                <a:solidFill>
+                  <a:srgbClr val="E8801A"/>
+                </a:solidFill>
+                <a:latin typeface="Montserrat"/>
+              </a:rPr>
+              <a:t>▸  </a:t>
+            </a:r>
+            <a:r>
+              <a:rPr sz="1600" b="0" i="0">
+                <a:solidFill>
+                  <a:srgbClr val="1B2330"/>
+                </a:solidFill>
+                <a:latin typeface="Montserrat"/>
+              </a:rPr>
+              <a:t>Cambiar un flexible caducado se registra</a:t>
+            </a:r>
+          </a:p>
+        </p:txBody>
+      </p:sp>
+      <p:sp>
+        <p:nvSpPr>
+          <p:cNvPr id="9" name="imgph" descr="IMGQ:gas installer signing certificate document"/>
+          <p:cNvSpPr/>
+          <p:nvPr/>
+        </p:nvSpPr>
+        <p:spPr>
+          <a:xfrm>
+            <a:off x="822960" y="1965960"/>
+            <a:ext cx="5303520" cy="4572000"/>
+          </a:xfrm>
+          <a:prstGeom prst="roundRect">
+            <a:avLst/>
+          </a:prstGeom>
+          <a:solidFill>
+            <a:srgbClr val="F3F6FB"/>
+          </a:solidFill>
+          <a:ln w="12700">
+            <a:solidFill>
+              <a:srgbClr val="C7D2E6"/>
+            </a:solidFill>
+          </a:ln>
+          <a:effectLst/>
+        </p:spPr>
+        <p:style>
+          <a:lnRef idx="1">
+            <a:schemeClr val="accent1"/>
+          </a:lnRef>
+          <a:fillRef idx="3">
+            <a:schemeClr val="accent1"/>
+          </a:fillRef>
+          <a:effectRef idx="2">
+            <a:schemeClr val="accent1"/>
+          </a:effectRef>
+          <a:fontRef idx="minor">
+            <a:schemeClr val="lt1"/>
+          </a:fontRef>
+        </p:style>
+        <p:txBody>
+          <a:bodyPr rtlCol="0" anchor="ctr"/>
+          <a:lstStyle/>
+          <a:p>
+            <a:pPr algn="ctr"/>
+          </a:p>
+        </p:txBody>
+      </p:sp>
+      <p:sp>
+        <p:nvSpPr>
+          <p:cNvPr id="10" name="TextBox 9"/>
+          <p:cNvSpPr txBox="1"/>
+          <p:nvPr/>
+        </p:nvSpPr>
+        <p:spPr>
+          <a:xfrm>
+            <a:off x="1097280" y="3611880"/>
+            <a:ext cx="4754880" cy="1280160"/>
+          </a:xfrm>
+          <a:prstGeom prst="rect">
+            <a:avLst/>
+          </a:prstGeom>
+          <a:noFill/>
+        </p:spPr>
+        <p:txBody>
+          <a:bodyPr wrap="square">
+            <a:spAutoFit/>
+          </a:bodyPr>
+          <a:lstStyle/>
+          <a:p>
+            <a:pPr algn="ctr"/>
+            <a:r>
+              <a:rPr sz="1400" b="1" i="0">
+                <a:solidFill>
+                  <a:srgbClr val="64748B"/>
+                </a:solidFill>
+                <a:latin typeface="Montserrat"/>
+              </a:rPr>
+              <a:t>IMAGEN</a:t>
+            </a:r>
+          </a:p>
+          <a:p>
+            <a:pPr algn="ctr"/>
+            <a:r>
+              <a:rPr sz="1100" b="0" i="1">
+                <a:solidFill>
+                  <a:srgbClr val="64748B"/>
+                </a:solidFill>
+                <a:latin typeface="Montserrat"/>
+              </a:rPr>
+              <a:t>gas installer signing certificate document</a:t>
+            </a:r>
+          </a:p>
+        </p:txBody>
+      </p:sp>
+    </p:spTree>
+  </p:cSld>
+  <p:clrMapOvr>
+    <a:masterClrMapping/>
+  </p:clrMapOvr>
+  <mc:AlternateContent xmlns:mc="http://schemas.openxmlformats.org/markup-compatibility/2006">
+    <mc:Choice xmlns:p14="http://schemas.microsoft.com/office/powerpoint/2010/main" Requires="p14">
+      <p:transition spd="med" p14:dur="700">
+        <p14:cube dir="l"/>
+      </p:transition>
+    </mc:Choice>
+    <mc:Fallback>
+      <p:transition spd="med">
+        <p:push dir="l"/>
+      </p:transition>
+    </mc:Fallback>
+  </mc:AlternateContent>
+</p:sld>
+</file>
+
+<file path=ppt/slides/slide22.xml><?xml version="1.0" encoding="utf-8"?>
+<p:sld xmlns:a="http://schemas.openxmlformats.org/drawingml/2006/main" xmlns:p="http://schemas.openxmlformats.org/presentationml/2006/main" xmlns:r="http://schemas.openxmlformats.org/officeDocument/2006/relationships">
+  <p:cSld>
+    <p:spTree>
+      <p:nvGrpSpPr>
+        <p:cNvPr id="1" name=""/>
+        <p:cNvGrpSpPr/>
+        <p:nvPr/>
+      </p:nvGrpSpPr>
+      <p:grpSpPr/>
+      <p:sp>
+        <p:nvSpPr>
+          <p:cNvPr id="2" name="Rectangle 1"/>
+          <p:cNvSpPr/>
+          <p:nvPr/>
+        </p:nvSpPr>
+        <p:spPr>
+          <a:xfrm>
+            <a:off x="0" y="0"/>
+            <a:ext cx="12191695" cy="6858000"/>
+          </a:xfrm>
+          <a:prstGeom prst="rect">
+            <a:avLst/>
+          </a:prstGeom>
+          <a:solidFill>
+            <a:srgbClr val="1E2761"/>
+          </a:solidFill>
+          <a:ln>
+            <a:noFill/>
+          </a:ln>
+          <a:effectLst/>
+        </p:spPr>
+        <p:style>
+          <a:lnRef idx="1">
+            <a:schemeClr val="accent1"/>
+          </a:lnRef>
+          <a:fillRef idx="3">
+            <a:schemeClr val="accent1"/>
+          </a:fillRef>
+          <a:effectRef idx="2">
+            <a:schemeClr val="accent1"/>
+          </a:effectRef>
+          <a:fontRef idx="minor">
+            <a:schemeClr val="lt1"/>
+          </a:fontRef>
+        </p:style>
+        <p:txBody>
+          <a:bodyPr rtlCol="0" anchor="ctr"/>
+          <a:lstStyle/>
+          <a:p>
+            <a:pPr algn="ctr"/>
+          </a:p>
+        </p:txBody>
+      </p:sp>
+      <p:sp>
+        <p:nvSpPr>
+          <p:cNvPr id="3" name="TextBox 2"/>
+          <p:cNvSpPr txBox="1"/>
+          <p:nvPr/>
+        </p:nvSpPr>
+        <p:spPr>
+          <a:xfrm>
+            <a:off x="822960" y="640080"/>
+            <a:ext cx="10515600" cy="457200"/>
+          </a:xfrm>
+          <a:prstGeom prst="rect">
+            <a:avLst/>
+          </a:prstGeom>
+          <a:noFill/>
+        </p:spPr>
+        <p:txBody>
+          <a:bodyPr wrap="square">
+            <a:spAutoFit/>
+          </a:bodyPr>
+          <a:lstStyle/>
+          <a:p>
+            <a:r>
+              <a:rPr sz="1400" b="1" i="0">
+                <a:solidFill>
+                  <a:srgbClr val="F4A24C"/>
+                </a:solidFill>
+                <a:latin typeface="Montserrat"/>
+              </a:rPr>
+              <a:t>LO QUE YA DOMINAS</a:t>
+            </a:r>
+          </a:p>
+        </p:txBody>
+      </p:sp>
+      <p:sp>
+        <p:nvSpPr>
+          <p:cNvPr id="4" name="Rectangle 3"/>
+          <p:cNvSpPr/>
+          <p:nvPr/>
+        </p:nvSpPr>
+        <p:spPr>
+          <a:xfrm>
+            <a:off x="868680" y="1051560"/>
+            <a:ext cx="1463040" cy="82296"/>
+          </a:xfrm>
+          <a:prstGeom prst="rect">
+            <a:avLst/>
+          </a:prstGeom>
+          <a:solidFill>
+            <a:srgbClr val="E8801A"/>
+          </a:solidFill>
+          <a:ln>
+            <a:noFill/>
+          </a:ln>
+          <a:effectLst/>
+        </p:spPr>
+        <p:style>
+          <a:lnRef idx="1">
+            <a:schemeClr val="accent1"/>
+          </a:lnRef>
+          <a:fillRef idx="3">
+            <a:schemeClr val="accent1"/>
+          </a:fillRef>
+          <a:effectRef idx="2">
+            <a:schemeClr val="accent1"/>
+          </a:effectRef>
+          <a:fontRef idx="minor">
+            <a:schemeClr val="lt1"/>
+          </a:fontRef>
+        </p:style>
+        <p:txBody>
+          <a:bodyPr rtlCol="0" anchor="ctr"/>
+          <a:lstStyle/>
+          <a:p>
+            <a:pPr algn="ctr"/>
+          </a:p>
+        </p:txBody>
+      </p:sp>
+      <p:sp>
+        <p:nvSpPr>
+          <p:cNvPr id="5" name="TextBox 4"/>
+          <p:cNvSpPr txBox="1"/>
+          <p:nvPr/>
+        </p:nvSpPr>
+        <p:spPr>
+          <a:xfrm>
+            <a:off x="822960" y="1234440"/>
+            <a:ext cx="10515600" cy="1097280"/>
+          </a:xfrm>
+          <a:prstGeom prst="rect">
+            <a:avLst/>
+          </a:prstGeom>
+          <a:noFill/>
+        </p:spPr>
+        <p:txBody>
+          <a:bodyPr wrap="square">
+            <a:spAutoFit/>
+          </a:bodyPr>
+          <a:lstStyle/>
+          <a:p>
+            <a:r>
+              <a:rPr sz="3400" b="1" i="0">
+                <a:solidFill>
+                  <a:srgbClr val="FFFFFF"/>
+                </a:solidFill>
+                <a:latin typeface="Montserrat"/>
+              </a:rPr>
+              <a:t>Ya montas las siete conexiones</a:t>
+            </a:r>
+          </a:p>
+        </p:txBody>
+      </p:sp>
+      <p:sp>
+        <p:nvSpPr>
+          <p:cNvPr id="6" name="TextBox 5"/>
+          <p:cNvSpPr txBox="1"/>
+          <p:nvPr/>
+        </p:nvSpPr>
+        <p:spPr>
+          <a:xfrm>
+            <a:off x="822960" y="2606040"/>
+            <a:ext cx="10515600" cy="2743200"/>
+          </a:xfrm>
+          <a:prstGeom prst="rect">
+            <a:avLst/>
+          </a:prstGeom>
+          <a:noFill/>
+        </p:spPr>
+        <p:txBody>
+          <a:bodyPr wrap="square">
+            <a:spAutoFit/>
+          </a:bodyPr>
+          <a:lstStyle/>
+          <a:p>
+            <a:pPr>
+              <a:spcAft>
+                <a:spcPts val="1200"/>
+              </a:spcAft>
+            </a:pPr>
+            <a:r>
+              <a:rPr sz="2000" b="1" i="0">
+                <a:solidFill>
+                  <a:srgbClr val="F4A24C"/>
+                </a:solidFill>
+                <a:latin typeface="Montserrat"/>
+              </a:rPr>
+              <a:t>✓  </a:t>
+            </a:r>
+            <a:r>
+              <a:rPr sz="1900" b="0" i="0">
+                <a:solidFill>
+                  <a:srgbClr val="FFFFFF"/>
+                </a:solidFill>
+                <a:latin typeface="Montserrat"/>
+              </a:rPr>
+              <a:t>Rígida: solo fijos, el mismo tubo de la instalación</a:t>
+            </a:r>
+          </a:p>
+          <a:p>
+            <a:pPr>
+              <a:spcAft>
+                <a:spcPts val="1200"/>
+              </a:spcAft>
+            </a:pPr>
+            <a:r>
+              <a:rPr sz="2000" b="1" i="0">
+                <a:solidFill>
+                  <a:srgbClr val="F4A24C"/>
+                </a:solidFill>
+                <a:latin typeface="Montserrat"/>
+              </a:rPr>
+              <a:t>✓  </a:t>
+            </a:r>
+            <a:r>
+              <a:rPr sz="1900" b="0" i="0">
+                <a:solidFill>
+                  <a:srgbClr val="FFFFFF"/>
+                </a:solidFill>
+                <a:latin typeface="Montserrat"/>
+              </a:rPr>
+              <a:t>Longitudes de memoria por cada tipo de flexible</a:t>
+            </a:r>
+          </a:p>
+          <a:p>
+            <a:pPr>
+              <a:spcAft>
+                <a:spcPts val="1200"/>
+              </a:spcAft>
+            </a:pPr>
+            <a:r>
+              <a:rPr sz="2000" b="1" i="0">
+                <a:solidFill>
+                  <a:srgbClr val="F4A24C"/>
+                </a:solidFill>
+                <a:latin typeface="Montserrat"/>
+              </a:rPr>
+              <a:t>✓  </a:t>
+            </a:r>
+            <a:r>
+              <a:rPr sz="1900" b="0" i="0">
+                <a:solidFill>
+                  <a:srgbClr val="FFFFFF"/>
+                </a:solidFill>
+                <a:latin typeface="Montserrat"/>
+              </a:rPr>
+              <a:t>Enchufe: rosca sí, racor no; nada tras el horno</a:t>
+            </a:r>
+          </a:p>
+          <a:p>
+            <a:pPr>
+              <a:spcAft>
+                <a:spcPts val="1200"/>
+              </a:spcAft>
+            </a:pPr>
+            <a:r>
+              <a:rPr sz="2000" b="1" i="0">
+                <a:solidFill>
+                  <a:srgbClr val="F4A24C"/>
+                </a:solidFill>
+                <a:latin typeface="Montserrat"/>
+              </a:rPr>
+              <a:t>✓  </a:t>
+            </a:r>
+            <a:r>
+              <a:rPr sz="1900" b="0" i="0">
+                <a:solidFill>
+                  <a:srgbClr val="FFFFFF"/>
+                </a:solidFill>
+                <a:latin typeface="Montserrat"/>
+              </a:rPr>
+              <a:t>Anexo A: fijo → rígida, móvil → flexible</a:t>
+            </a:r>
+          </a:p>
+        </p:txBody>
+      </p:sp>
+      <p:sp>
+        <p:nvSpPr>
+          <p:cNvPr id="7" name="Rounded Rectangle 6"/>
+          <p:cNvSpPr/>
+          <p:nvPr/>
+        </p:nvSpPr>
+        <p:spPr>
+          <a:xfrm>
+            <a:off x="822960" y="5532120"/>
+            <a:ext cx="10515600" cy="822960"/>
+          </a:xfrm>
+          <a:prstGeom prst="roundRect">
+            <a:avLst/>
+          </a:prstGeom>
+          <a:solidFill>
+            <a:srgbClr val="E8801A"/>
+          </a:solidFill>
+          <a:ln>
+            <a:noFill/>
+          </a:ln>
+          <a:effectLst/>
+        </p:spPr>
+        <p:style>
+          <a:lnRef idx="1">
+            <a:schemeClr val="accent1"/>
+          </a:lnRef>
+          <a:fillRef idx="3">
+            <a:schemeClr val="accent1"/>
+          </a:fillRef>
+          <a:effectRef idx="2">
+            <a:schemeClr val="accent1"/>
+          </a:effectRef>
+          <a:fontRef idx="minor">
+            <a:schemeClr val="lt1"/>
+          </a:fontRef>
+        </p:style>
+        <p:txBody>
+          <a:bodyPr rtlCol="0" anchor="ctr"/>
+          <a:lstStyle/>
+          <a:p>
+            <a:pPr algn="ctr"/>
+          </a:p>
+        </p:txBody>
+      </p:sp>
+      <p:sp>
+        <p:nvSpPr>
+          <p:cNvPr id="8" name="TextBox 7"/>
+          <p:cNvSpPr txBox="1"/>
+          <p:nvPr/>
+        </p:nvSpPr>
+        <p:spPr>
+          <a:xfrm>
+            <a:off x="1051560" y="5623560"/>
+            <a:ext cx="10058400" cy="640080"/>
+          </a:xfrm>
+          <a:prstGeom prst="rect">
+            <a:avLst/>
+          </a:prstGeom>
+          <a:noFill/>
+        </p:spPr>
+        <p:txBody>
+          <a:bodyPr wrap="square">
+            <a:spAutoFit/>
+          </a:bodyPr>
+          <a:lstStyle/>
+          <a:p>
+            <a:r>
+              <a:rPr sz="1500" b="1" i="1">
+                <a:solidFill>
+                  <a:srgbClr val="1E2761"/>
+                </a:solidFill>
+                <a:latin typeface="Montserrat"/>
+              </a:rPr>
+              <a:t>Ya sabes elegir y montar cualquier conexión de gas. Con esto cierras el Tema 14 completo.</a:t>
+            </a:r>
+          </a:p>
+        </p:txBody>
+      </p:sp>
+    </p:spTree>
+  </p:cSld>
+  <p:clrMapOvr>
+    <a:masterClrMapping/>
+  </p:clrMapOvr>
+  <mc:AlternateContent xmlns:mc="http://schemas.openxmlformats.org/markup-compatibility/2006">
+    <mc:Choice xmlns:p14="http://schemas.microsoft.com/office/powerpoint/2010/main" Requires="p14">
+      <p:transition spd="med" p14:dur="700">
+        <p14:cube dir="r"/>
+      </p:transition>
+    </mc:Choice>
+    <mc:Fallback>
+      <p:transition spd="med">
+        <p:push dir="r"/>
+      </p:transition>
+    </mc:Fallback>
+  </mc:AlternateContent>
 </p:sld>
 </file>
 
@@ -8558,7 +12727,7 @@
                 </a:solidFill>
                 <a:latin typeface="Montserrat"/>
               </a:rPr>
-              <a:t>003 / 016</a:t>
+              <a:t>003 / 022</a:t>
             </a:r>
           </a:p>
         </p:txBody>
@@ -8667,7 +12836,7 @@
       </p:sp>
       <p:sp>
         <p:nvSpPr>
-          <p:cNvPr id="7" name="Rounded Rectangle 6"/>
+          <p:cNvPr id="7" name="Rectangle 6"/>
           <p:cNvSpPr/>
           <p:nvPr/>
         </p:nvSpPr>
@@ -8676,7 +12845,7 @@
             <a:off x="868680" y="1673352"/>
             <a:ext cx="2011680" cy="73152"/>
           </a:xfrm>
-          <a:prstGeom prst="roundRect">
+          <a:prstGeom prst="rect">
             <a:avLst/>
           </a:prstGeom>
           <a:solidFill>
@@ -8962,6 +13131,18 @@
   <p:clrMapOvr>
     <a:masterClrMapping/>
   </p:clrMapOvr>
+  <mc:AlternateContent xmlns:mc="http://schemas.openxmlformats.org/markup-compatibility/2006">
+    <mc:Choice xmlns:p14="http://schemas.microsoft.com/office/powerpoint/2010/main" Requires="p14">
+      <p:transition spd="med" p14:dur="700">
+        <p14:cube dir="l"/>
+      </p:transition>
+    </mc:Choice>
+    <mc:Fallback>
+      <p:transition spd="med">
+        <p:push dir="l"/>
+      </p:transition>
+    </mc:Fallback>
+  </mc:AlternateContent>
 </p:sld>
 </file>
 
@@ -9049,7 +13230,7 @@
                 </a:solidFill>
                 <a:latin typeface="Montserrat"/>
               </a:rPr>
-              <a:t>004 / 016</a:t>
+              <a:t>004 / 022</a:t>
             </a:r>
           </a:p>
         </p:txBody>
@@ -9158,7 +13339,7 @@
       </p:sp>
       <p:sp>
         <p:nvSpPr>
-          <p:cNvPr id="7" name="Rounded Rectangle 6"/>
+          <p:cNvPr id="7" name="Rectangle 6"/>
           <p:cNvSpPr/>
           <p:nvPr/>
         </p:nvSpPr>
@@ -9167,7 +13348,7 @@
             <a:off x="868680" y="1627632"/>
             <a:ext cx="2011680" cy="73152"/>
           </a:xfrm>
-          <a:prstGeom prst="roundRect">
+          <a:prstGeom prst="rect">
             <a:avLst/>
           </a:prstGeom>
           <a:solidFill>
@@ -9209,7 +13390,7 @@
         <p:spPr>
           <a:xfrm>
             <a:off x="822960" y="1965960"/>
-            <a:ext cx="4983480" cy="4206240"/>
+            <a:ext cx="5029200" cy="4206240"/>
           </a:xfrm>
           <a:prstGeom prst="rect">
             <a:avLst/>
@@ -9331,8 +13512,8 @@
         </p:nvSpPr>
         <p:spPr>
           <a:xfrm>
-            <a:off x="5806440" y="1051560"/>
-            <a:ext cx="5298947" cy="4629150"/>
+            <a:off x="6080760" y="1965960"/>
+            <a:ext cx="5303520" cy="4572000"/>
           </a:xfrm>
           <a:prstGeom prst="roundRect">
             <a:avLst/>
@@ -9377,8 +13558,8 @@
         </p:nvSpPr>
         <p:spPr>
           <a:xfrm>
-            <a:off x="6080760" y="2726055"/>
-            <a:ext cx="4750307" cy="1280160"/>
+            <a:off x="6355080" y="3611880"/>
+            <a:ext cx="4754880" cy="1280160"/>
           </a:xfrm>
           <a:prstGeom prst="rect">
             <a:avLst/>
@@ -9399,7 +13580,7 @@
                 </a:solidFill>
                 <a:latin typeface="Montserrat"/>
               </a:rPr>
-              <a:t>IMAGEN REALISTA</a:t>
+              <a:t>IMAGEN</a:t>
             </a:r>
           </a:p>
           <a:p>
@@ -9421,6 +13602,18 @@
   <p:clrMapOvr>
     <a:masterClrMapping/>
   </p:clrMapOvr>
+  <mc:AlternateContent xmlns:mc="http://schemas.openxmlformats.org/markup-compatibility/2006">
+    <mc:Choice xmlns:p14="http://schemas.microsoft.com/office/powerpoint/2010/main" Requires="p14">
+      <p:transition spd="med" p14:dur="700">
+        <p14:cube dir="r"/>
+      </p:transition>
+    </mc:Choice>
+    <mc:Fallback>
+      <p:transition spd="med">
+        <p:push dir="r"/>
+      </p:transition>
+    </mc:Fallback>
+  </mc:AlternateContent>
 </p:sld>
 </file>
 
@@ -9508,7 +13701,7 @@
                 </a:solidFill>
                 <a:latin typeface="Montserrat"/>
               </a:rPr>
-              <a:t>005 / 016</a:t>
+              <a:t>005 / 022</a:t>
             </a:r>
           </a:p>
         </p:txBody>
@@ -9617,7 +13810,7 @@
       </p:sp>
       <p:sp>
         <p:nvSpPr>
-          <p:cNvPr id="7" name="Rounded Rectangle 6"/>
+          <p:cNvPr id="7" name="Rectangle 6"/>
           <p:cNvSpPr/>
           <p:nvPr/>
         </p:nvSpPr>
@@ -9626,7 +13819,7 @@
             <a:off x="868680" y="1627632"/>
             <a:ext cx="2011680" cy="73152"/>
           </a:xfrm>
-          <a:prstGeom prst="roundRect">
+          <a:prstGeom prst="rect">
             <a:avLst/>
           </a:prstGeom>
           <a:solidFill>
@@ -9667,8 +13860,8 @@
         </p:nvSpPr>
         <p:spPr>
           <a:xfrm>
-            <a:off x="822960" y="1965960"/>
-            <a:ext cx="4983480" cy="4206240"/>
+            <a:off x="6355080" y="1965960"/>
+            <a:ext cx="5029200" cy="4206240"/>
           </a:xfrm>
           <a:prstGeom prst="rect">
             <a:avLst/>
@@ -9790,8 +13983,8 @@
         </p:nvSpPr>
         <p:spPr>
           <a:xfrm>
-            <a:off x="5806440" y="1051560"/>
-            <a:ext cx="5298947" cy="4629150"/>
+            <a:off x="822960" y="1965960"/>
+            <a:ext cx="5303520" cy="4572000"/>
           </a:xfrm>
           <a:prstGeom prst="roundRect">
             <a:avLst/>
@@ -9836,8 +14029,8 @@
         </p:nvSpPr>
         <p:spPr>
           <a:xfrm>
-            <a:off x="6080760" y="2726055"/>
-            <a:ext cx="4750307" cy="1280160"/>
+            <a:off x="1097280" y="3611880"/>
+            <a:ext cx="4754880" cy="1280160"/>
           </a:xfrm>
           <a:prstGeom prst="rect">
             <a:avLst/>
@@ -9858,7 +14051,7 @@
                 </a:solidFill>
                 <a:latin typeface="Montserrat"/>
               </a:rPr>
-              <a:t>IMAGEN REALISTA</a:t>
+              <a:t>IMAGEN</a:t>
             </a:r>
           </a:p>
           <a:p>
@@ -9880,6 +14073,18 @@
   <p:clrMapOvr>
     <a:masterClrMapping/>
   </p:clrMapOvr>
+  <mc:AlternateContent xmlns:mc="http://schemas.openxmlformats.org/markup-compatibility/2006">
+    <mc:Choice xmlns:p14="http://schemas.microsoft.com/office/powerpoint/2010/main" Requires="p14">
+      <p:transition spd="med" p14:dur="700">
+        <p14:cube dir="l"/>
+      </p:transition>
+    </mc:Choice>
+    <mc:Fallback>
+      <p:transition spd="med">
+        <p:push dir="l"/>
+      </p:transition>
+    </mc:Fallback>
+  </mc:AlternateContent>
 </p:sld>
 </file>
 
@@ -9967,7 +14172,7 @@
                 </a:solidFill>
                 <a:latin typeface="Montserrat"/>
               </a:rPr>
-              <a:t>006 / 016</a:t>
+              <a:t>006 / 022</a:t>
             </a:r>
           </a:p>
         </p:txBody>
@@ -10008,84 +14213,16 @@
       </p:sp>
       <p:sp>
         <p:nvSpPr>
-          <p:cNvPr id="5" name="TextBox 4"/>
-          <p:cNvSpPr txBox="1"/>
-          <p:nvPr/>
-        </p:nvSpPr>
-        <p:spPr>
-          <a:xfrm>
-            <a:off x="822960" y="457200"/>
-            <a:ext cx="10058400" cy="365760"/>
-          </a:xfrm>
-          <a:prstGeom prst="rect">
-            <a:avLst/>
-          </a:prstGeom>
-          <a:noFill/>
-        </p:spPr>
-        <p:txBody>
-          <a:bodyPr wrap="square">
-            <a:spAutoFit/>
-          </a:bodyPr>
-          <a:lstStyle/>
-          <a:p>
-            <a:r>
-              <a:rPr sz="1300" b="1" i="0">
-                <a:solidFill>
-                  <a:srgbClr val="E8801A"/>
-                </a:solidFill>
-                <a:latin typeface="Montserrat"/>
-              </a:rPr>
-              <a:t>REGLA DE ORO</a:t>
-            </a:r>
-          </a:p>
-        </p:txBody>
-      </p:sp>
-      <p:sp>
-        <p:nvSpPr>
-          <p:cNvPr id="6" name="TextBox 5"/>
-          <p:cNvSpPr txBox="1"/>
-          <p:nvPr/>
-        </p:nvSpPr>
-        <p:spPr>
-          <a:xfrm>
-            <a:off x="822960" y="868680"/>
-            <a:ext cx="10515600" cy="914400"/>
-          </a:xfrm>
-          <a:prstGeom prst="rect">
-            <a:avLst/>
-          </a:prstGeom>
-          <a:noFill/>
-        </p:spPr>
-        <p:txBody>
-          <a:bodyPr wrap="square">
-            <a:spAutoFit/>
-          </a:bodyPr>
-          <a:lstStyle/>
-          <a:p>
-            <a:r>
-              <a:rPr sz="2800" b="1" i="0">
-                <a:solidFill>
-                  <a:srgbClr val="1E2761"/>
-                </a:solidFill>
-                <a:latin typeface="Montserrat"/>
-              </a:rPr>
-              <a:t>El flexible, nunca bajo las llamas</a:t>
-            </a:r>
-          </a:p>
-        </p:txBody>
-      </p:sp>
-      <p:sp>
-        <p:nvSpPr>
-          <p:cNvPr id="7" name="Rounded Rectangle 6"/>
+          <p:cNvPr id="5" name="Rectangle 4"/>
           <p:cNvSpPr/>
           <p:nvPr/>
         </p:nvSpPr>
         <p:spPr>
           <a:xfrm>
-            <a:off x="868680" y="1627632"/>
-            <a:ext cx="2011680" cy="73152"/>
-          </a:xfrm>
-          <a:prstGeom prst="roundRect">
+            <a:off x="0" y="0"/>
+            <a:ext cx="12191695" cy="1143000"/>
+          </a:xfrm>
+          <a:prstGeom prst="rect">
             <a:avLst/>
           </a:prstGeom>
           <a:solidFill>
@@ -10120,14 +14257,14 @@
       </p:sp>
       <p:sp>
         <p:nvSpPr>
-          <p:cNvPr id="8" name="TextBox 7"/>
+          <p:cNvPr id="6" name="TextBox 5"/>
           <p:cNvSpPr txBox="1"/>
           <p:nvPr/>
         </p:nvSpPr>
         <p:spPr>
           <a:xfrm>
-            <a:off x="822960" y="1965960"/>
-            <a:ext cx="4983480" cy="4206240"/>
+            <a:off x="822960" y="274320"/>
+            <a:ext cx="10515600" cy="640080"/>
           </a:xfrm>
           <a:prstGeom prst="rect">
             <a:avLst/>
@@ -10140,92 +14277,62 @@
           </a:bodyPr>
           <a:lstStyle/>
           <a:p>
-            <a:pPr>
-              <a:spcAft>
-                <a:spcPts val="1100"/>
-              </a:spcAft>
-            </a:pPr>
-            <a:r>
-              <a:rPr sz="1600" b="1" i="0">
-                <a:solidFill>
-                  <a:srgbClr val="E8801A"/>
-                </a:solidFill>
-                <a:latin typeface="Montserrat"/>
-              </a:rPr>
-              <a:t>▸  </a:t>
-            </a:r>
-            <a:r>
-              <a:rPr sz="1600" b="0" i="0">
-                <a:solidFill>
-                  <a:srgbClr val="1B2330"/>
-                </a:solidFill>
-                <a:latin typeface="Montserrat"/>
-              </a:rPr>
-              <a:t>Longitud: la mínima necesaria</a:t>
-            </a:r>
-          </a:p>
-          <a:p>
-            <a:pPr>
-              <a:spcAft>
-                <a:spcPts val="1100"/>
-              </a:spcAft>
-            </a:pPr>
-            <a:r>
-              <a:rPr sz="1600" b="1" i="0">
-                <a:solidFill>
-                  <a:srgbClr val="E8801A"/>
-                </a:solidFill>
-                <a:latin typeface="Montserrat"/>
-              </a:rPr>
-              <a:t>▸  </a:t>
-            </a:r>
-            <a:r>
-              <a:rPr sz="1600" b="0" i="0">
-                <a:solidFill>
-                  <a:srgbClr val="1B2330"/>
-                </a:solidFill>
-                <a:latin typeface="Montserrat"/>
-              </a:rPr>
-              <a:t>Sin contacto con partes calientes</a:t>
-            </a:r>
-          </a:p>
-          <a:p>
-            <a:pPr>
-              <a:spcAft>
-                <a:spcPts val="1100"/>
-              </a:spcAft>
-            </a:pPr>
-            <a:r>
-              <a:rPr sz="1600" b="1" i="0">
-                <a:solidFill>
-                  <a:srgbClr val="E8801A"/>
-                </a:solidFill>
-                <a:latin typeface="Montserrat"/>
-              </a:rPr>
-              <a:t>▸  </a:t>
-            </a:r>
-            <a:r>
-              <a:rPr sz="1600" b="0" i="0">
-                <a:solidFill>
-                  <a:srgbClr val="1B2330"/>
-                </a:solidFill>
-                <a:latin typeface="Montserrat"/>
-              </a:rPr>
-              <a:t>Un tubo largo se reseca y fuga</a:t>
-            </a:r>
-          </a:p>
-        </p:txBody>
-      </p:sp>
-      <p:sp>
-        <p:nvSpPr>
-          <p:cNvPr id="9" name="imgph" descr="IMGQ:blue gas flame burner fire"/>
+            <a:r>
+              <a:rPr sz="2400" b="1" i="0">
+                <a:solidFill>
+                  <a:srgbClr val="FFFFFF"/>
+                </a:solidFill>
+                <a:latin typeface="Montserrat"/>
+              </a:rPr>
+              <a:t>⚡  PREGUNTA RÁPIDA</a:t>
+            </a:r>
+          </a:p>
+        </p:txBody>
+      </p:sp>
+      <p:sp>
+        <p:nvSpPr>
+          <p:cNvPr id="7" name="TextBox 6"/>
+          <p:cNvSpPr txBox="1"/>
+          <p:nvPr/>
+        </p:nvSpPr>
+        <p:spPr>
+          <a:xfrm>
+            <a:off x="822960" y="1508760"/>
+            <a:ext cx="10515600" cy="1371600"/>
+          </a:xfrm>
+          <a:prstGeom prst="rect">
+            <a:avLst/>
+          </a:prstGeom>
+          <a:noFill/>
+        </p:spPr>
+        <p:txBody>
+          <a:bodyPr wrap="square">
+            <a:spAutoFit/>
+          </a:bodyPr>
+          <a:lstStyle/>
+          <a:p>
+            <a:r>
+              <a:rPr sz="2400" b="1" i="0">
+                <a:solidFill>
+                  <a:srgbClr val="1E2761"/>
+                </a:solidFill>
+                <a:latin typeface="Montserrat"/>
+              </a:rPr>
+              <a:t>Flexible de acero inox corrugado con DN mayor de 15: ¿longitud máxima?</a:t>
+            </a:r>
+          </a:p>
+        </p:txBody>
+      </p:sp>
+      <p:sp>
+        <p:nvSpPr>
+          <p:cNvPr id="8" name="Rounded Rectangle 7"/>
           <p:cNvSpPr/>
           <p:nvPr/>
         </p:nvSpPr>
         <p:spPr>
           <a:xfrm>
-            <a:off x="5806440" y="1051560"/>
-            <a:ext cx="5298947" cy="4629150"/>
+            <a:off x="822960" y="3291840"/>
+            <a:ext cx="4983480" cy="1143000"/>
           </a:xfrm>
           <a:prstGeom prst="roundRect">
             <a:avLst/>
@@ -10264,14 +14371,58 @@
       </p:sp>
       <p:sp>
         <p:nvSpPr>
+          <p:cNvPr id="9" name="Rectangle 8"/>
+          <p:cNvSpPr/>
+          <p:nvPr/>
+        </p:nvSpPr>
+        <p:spPr>
+          <a:xfrm>
+            <a:off x="822960" y="3291840"/>
+            <a:ext cx="640080" cy="1143000"/>
+          </a:xfrm>
+          <a:prstGeom prst="rect">
+            <a:avLst/>
+          </a:prstGeom>
+          <a:solidFill>
+            <a:srgbClr val="1E2761"/>
+          </a:solidFill>
+          <a:ln>
+            <a:noFill/>
+          </a:ln>
+          <a:effectLst/>
+        </p:spPr>
+        <p:style>
+          <a:lnRef idx="1">
+            <a:schemeClr val="accent1"/>
+          </a:lnRef>
+          <a:fillRef idx="3">
+            <a:schemeClr val="accent1"/>
+          </a:fillRef>
+          <a:effectRef idx="2">
+            <a:schemeClr val="accent1"/>
+          </a:effectRef>
+          <a:fontRef idx="minor">
+            <a:schemeClr val="lt1"/>
+          </a:fontRef>
+        </p:style>
+        <p:txBody>
+          <a:bodyPr rtlCol="0" anchor="ctr"/>
+          <a:lstStyle/>
+          <a:p>
+            <a:pPr algn="ctr"/>
+          </a:p>
+        </p:txBody>
+      </p:sp>
+      <p:sp>
+        <p:nvSpPr>
           <p:cNvPr id="10" name="TextBox 9"/>
           <p:cNvSpPr txBox="1"/>
           <p:nvPr/>
         </p:nvSpPr>
         <p:spPr>
           <a:xfrm>
-            <a:off x="6080760" y="2726055"/>
-            <a:ext cx="4750307" cy="1280160"/>
+            <a:off x="822960" y="3611880"/>
+            <a:ext cx="640080" cy="548640"/>
           </a:xfrm>
           <a:prstGeom prst="rect">
             <a:avLst/>
@@ -10286,25 +14437,524 @@
           <a:p>
             <a:pPr algn="ctr"/>
             <a:r>
-              <a:rPr sz="1400" b="1" i="0">
-                <a:solidFill>
-                  <a:srgbClr val="64748B"/>
-                </a:solidFill>
-                <a:latin typeface="Montserrat"/>
-              </a:rPr>
-              <a:t>IMAGEN REALISTA</a:t>
-            </a:r>
-          </a:p>
+              <a:rPr sz="2200" b="1" i="0">
+                <a:solidFill>
+                  <a:srgbClr val="FFFFFF"/>
+                </a:solidFill>
+                <a:latin typeface="Montserrat"/>
+              </a:rPr>
+              <a:t>A</a:t>
+            </a:r>
+          </a:p>
+        </p:txBody>
+      </p:sp>
+      <p:sp>
+        <p:nvSpPr>
+          <p:cNvPr id="11" name="TextBox 10"/>
+          <p:cNvSpPr txBox="1"/>
+          <p:nvPr/>
+        </p:nvSpPr>
+        <p:spPr>
+          <a:xfrm>
+            <a:off x="1600200" y="3474720"/>
+            <a:ext cx="4114800" cy="868680"/>
+          </a:xfrm>
+          <a:prstGeom prst="rect">
+            <a:avLst/>
+          </a:prstGeom>
+          <a:noFill/>
+        </p:spPr>
+        <p:txBody>
+          <a:bodyPr wrap="square">
+            <a:spAutoFit/>
+          </a:bodyPr>
+          <a:lstStyle/>
+          <a:p>
+            <a:r>
+              <a:rPr sz="1400" b="0" i="0">
+                <a:solidFill>
+                  <a:srgbClr val="1B2330"/>
+                </a:solidFill>
+                <a:latin typeface="Montserrat"/>
+              </a:rPr>
+              <a:t>2 m</a:t>
+            </a:r>
+          </a:p>
+        </p:txBody>
+      </p:sp>
+      <p:sp>
+        <p:nvSpPr>
+          <p:cNvPr id="12" name="Rounded Rectangle 11"/>
+          <p:cNvSpPr/>
+          <p:nvPr/>
+        </p:nvSpPr>
+        <p:spPr>
+          <a:xfrm>
+            <a:off x="6355080" y="3291840"/>
+            <a:ext cx="4983480" cy="1143000"/>
+          </a:xfrm>
+          <a:prstGeom prst="roundRect">
+            <a:avLst/>
+          </a:prstGeom>
+          <a:solidFill>
+            <a:srgbClr val="F3F6FB"/>
+          </a:solidFill>
+          <a:ln w="12700">
+            <a:solidFill>
+              <a:srgbClr val="C7D2E6"/>
+            </a:solidFill>
+          </a:ln>
+          <a:effectLst/>
+        </p:spPr>
+        <p:style>
+          <a:lnRef idx="1">
+            <a:schemeClr val="accent1"/>
+          </a:lnRef>
+          <a:fillRef idx="3">
+            <a:schemeClr val="accent1"/>
+          </a:fillRef>
+          <a:effectRef idx="2">
+            <a:schemeClr val="accent1"/>
+          </a:effectRef>
+          <a:fontRef idx="minor">
+            <a:schemeClr val="lt1"/>
+          </a:fontRef>
+        </p:style>
+        <p:txBody>
+          <a:bodyPr rtlCol="0" anchor="ctr"/>
+          <a:lstStyle/>
           <a:p>
             <a:pPr algn="ctr"/>
-            <a:r>
-              <a:rPr sz="1100" b="0" i="1">
-                <a:solidFill>
-                  <a:srgbClr val="64748B"/>
-                </a:solidFill>
-                <a:latin typeface="Montserrat"/>
-              </a:rPr>
-              <a:t>blue gas flame burner fire</a:t>
+          </a:p>
+        </p:txBody>
+      </p:sp>
+      <p:sp>
+        <p:nvSpPr>
+          <p:cNvPr id="13" name="Rectangle 12"/>
+          <p:cNvSpPr/>
+          <p:nvPr/>
+        </p:nvSpPr>
+        <p:spPr>
+          <a:xfrm>
+            <a:off x="6355080" y="3291840"/>
+            <a:ext cx="640080" cy="1143000"/>
+          </a:xfrm>
+          <a:prstGeom prst="rect">
+            <a:avLst/>
+          </a:prstGeom>
+          <a:solidFill>
+            <a:srgbClr val="1E2761"/>
+          </a:solidFill>
+          <a:ln>
+            <a:noFill/>
+          </a:ln>
+          <a:effectLst/>
+        </p:spPr>
+        <p:style>
+          <a:lnRef idx="1">
+            <a:schemeClr val="accent1"/>
+          </a:lnRef>
+          <a:fillRef idx="3">
+            <a:schemeClr val="accent1"/>
+          </a:fillRef>
+          <a:effectRef idx="2">
+            <a:schemeClr val="accent1"/>
+          </a:effectRef>
+          <a:fontRef idx="minor">
+            <a:schemeClr val="lt1"/>
+          </a:fontRef>
+        </p:style>
+        <p:txBody>
+          <a:bodyPr rtlCol="0" anchor="ctr"/>
+          <a:lstStyle/>
+          <a:p>
+            <a:pPr algn="ctr"/>
+          </a:p>
+        </p:txBody>
+      </p:sp>
+      <p:sp>
+        <p:nvSpPr>
+          <p:cNvPr id="14" name="TextBox 13"/>
+          <p:cNvSpPr txBox="1"/>
+          <p:nvPr/>
+        </p:nvSpPr>
+        <p:spPr>
+          <a:xfrm>
+            <a:off x="6355080" y="3611880"/>
+            <a:ext cx="640080" cy="548640"/>
+          </a:xfrm>
+          <a:prstGeom prst="rect">
+            <a:avLst/>
+          </a:prstGeom>
+          <a:noFill/>
+        </p:spPr>
+        <p:txBody>
+          <a:bodyPr wrap="square">
+            <a:spAutoFit/>
+          </a:bodyPr>
+          <a:lstStyle/>
+          <a:p>
+            <a:pPr algn="ctr"/>
+            <a:r>
+              <a:rPr sz="2200" b="1" i="0">
+                <a:solidFill>
+                  <a:srgbClr val="FFFFFF"/>
+                </a:solidFill>
+                <a:latin typeface="Montserrat"/>
+              </a:rPr>
+              <a:t>B</a:t>
+            </a:r>
+          </a:p>
+        </p:txBody>
+      </p:sp>
+      <p:sp>
+        <p:nvSpPr>
+          <p:cNvPr id="15" name="TextBox 14"/>
+          <p:cNvSpPr txBox="1"/>
+          <p:nvPr/>
+        </p:nvSpPr>
+        <p:spPr>
+          <a:xfrm>
+            <a:off x="7132320" y="3474720"/>
+            <a:ext cx="4114800" cy="868680"/>
+          </a:xfrm>
+          <a:prstGeom prst="rect">
+            <a:avLst/>
+          </a:prstGeom>
+          <a:noFill/>
+        </p:spPr>
+        <p:txBody>
+          <a:bodyPr wrap="square">
+            <a:spAutoFit/>
+          </a:bodyPr>
+          <a:lstStyle/>
+          <a:p>
+            <a:r>
+              <a:rPr sz="1400" b="0" i="0">
+                <a:solidFill>
+                  <a:srgbClr val="1B2330"/>
+                </a:solidFill>
+                <a:latin typeface="Montserrat"/>
+              </a:rPr>
+              <a:t>1,5 m</a:t>
+            </a:r>
+          </a:p>
+        </p:txBody>
+      </p:sp>
+      <p:sp>
+        <p:nvSpPr>
+          <p:cNvPr id="16" name="Rounded Rectangle 15"/>
+          <p:cNvSpPr/>
+          <p:nvPr/>
+        </p:nvSpPr>
+        <p:spPr>
+          <a:xfrm>
+            <a:off x="822960" y="4617720"/>
+            <a:ext cx="4983480" cy="1143000"/>
+          </a:xfrm>
+          <a:prstGeom prst="roundRect">
+            <a:avLst/>
+          </a:prstGeom>
+          <a:solidFill>
+            <a:srgbClr val="F3F6FB"/>
+          </a:solidFill>
+          <a:ln w="12700">
+            <a:solidFill>
+              <a:srgbClr val="C7D2E6"/>
+            </a:solidFill>
+          </a:ln>
+          <a:effectLst/>
+        </p:spPr>
+        <p:style>
+          <a:lnRef idx="1">
+            <a:schemeClr val="accent1"/>
+          </a:lnRef>
+          <a:fillRef idx="3">
+            <a:schemeClr val="accent1"/>
+          </a:fillRef>
+          <a:effectRef idx="2">
+            <a:schemeClr val="accent1"/>
+          </a:effectRef>
+          <a:fontRef idx="minor">
+            <a:schemeClr val="lt1"/>
+          </a:fontRef>
+        </p:style>
+        <p:txBody>
+          <a:bodyPr rtlCol="0" anchor="ctr"/>
+          <a:lstStyle/>
+          <a:p>
+            <a:pPr algn="ctr"/>
+          </a:p>
+        </p:txBody>
+      </p:sp>
+      <p:sp>
+        <p:nvSpPr>
+          <p:cNvPr id="17" name="Rectangle 16"/>
+          <p:cNvSpPr/>
+          <p:nvPr/>
+        </p:nvSpPr>
+        <p:spPr>
+          <a:xfrm>
+            <a:off x="822960" y="4617720"/>
+            <a:ext cx="640080" cy="1143000"/>
+          </a:xfrm>
+          <a:prstGeom prst="rect">
+            <a:avLst/>
+          </a:prstGeom>
+          <a:solidFill>
+            <a:srgbClr val="1E2761"/>
+          </a:solidFill>
+          <a:ln>
+            <a:noFill/>
+          </a:ln>
+          <a:effectLst/>
+        </p:spPr>
+        <p:style>
+          <a:lnRef idx="1">
+            <a:schemeClr val="accent1"/>
+          </a:lnRef>
+          <a:fillRef idx="3">
+            <a:schemeClr val="accent1"/>
+          </a:fillRef>
+          <a:effectRef idx="2">
+            <a:schemeClr val="accent1"/>
+          </a:effectRef>
+          <a:fontRef idx="minor">
+            <a:schemeClr val="lt1"/>
+          </a:fontRef>
+        </p:style>
+        <p:txBody>
+          <a:bodyPr rtlCol="0" anchor="ctr"/>
+          <a:lstStyle/>
+          <a:p>
+            <a:pPr algn="ctr"/>
+          </a:p>
+        </p:txBody>
+      </p:sp>
+      <p:sp>
+        <p:nvSpPr>
+          <p:cNvPr id="18" name="TextBox 17"/>
+          <p:cNvSpPr txBox="1"/>
+          <p:nvPr/>
+        </p:nvSpPr>
+        <p:spPr>
+          <a:xfrm>
+            <a:off x="822960" y="4937760"/>
+            <a:ext cx="640080" cy="548640"/>
+          </a:xfrm>
+          <a:prstGeom prst="rect">
+            <a:avLst/>
+          </a:prstGeom>
+          <a:noFill/>
+        </p:spPr>
+        <p:txBody>
+          <a:bodyPr wrap="square">
+            <a:spAutoFit/>
+          </a:bodyPr>
+          <a:lstStyle/>
+          <a:p>
+            <a:pPr algn="ctr"/>
+            <a:r>
+              <a:rPr sz="2200" b="1" i="0">
+                <a:solidFill>
+                  <a:srgbClr val="FFFFFF"/>
+                </a:solidFill>
+                <a:latin typeface="Montserrat"/>
+              </a:rPr>
+              <a:t>C</a:t>
+            </a:r>
+          </a:p>
+        </p:txBody>
+      </p:sp>
+      <p:sp>
+        <p:nvSpPr>
+          <p:cNvPr id="19" name="TextBox 18"/>
+          <p:cNvSpPr txBox="1"/>
+          <p:nvPr/>
+        </p:nvSpPr>
+        <p:spPr>
+          <a:xfrm>
+            <a:off x="1600200" y="4800600"/>
+            <a:ext cx="4114800" cy="868680"/>
+          </a:xfrm>
+          <a:prstGeom prst="rect">
+            <a:avLst/>
+          </a:prstGeom>
+          <a:noFill/>
+        </p:spPr>
+        <p:txBody>
+          <a:bodyPr wrap="square">
+            <a:spAutoFit/>
+          </a:bodyPr>
+          <a:lstStyle/>
+          <a:p>
+            <a:r>
+              <a:rPr sz="1400" b="0" i="0">
+                <a:solidFill>
+                  <a:srgbClr val="1B2330"/>
+                </a:solidFill>
+                <a:latin typeface="Montserrat"/>
+              </a:rPr>
+              <a:t>0,470 m</a:t>
+            </a:r>
+          </a:p>
+        </p:txBody>
+      </p:sp>
+      <p:sp>
+        <p:nvSpPr>
+          <p:cNvPr id="20" name="Rounded Rectangle 19"/>
+          <p:cNvSpPr/>
+          <p:nvPr/>
+        </p:nvSpPr>
+        <p:spPr>
+          <a:xfrm>
+            <a:off x="6355080" y="4617720"/>
+            <a:ext cx="4983480" cy="1143000"/>
+          </a:xfrm>
+          <a:prstGeom prst="roundRect">
+            <a:avLst/>
+          </a:prstGeom>
+          <a:solidFill>
+            <a:srgbClr val="F3F6FB"/>
+          </a:solidFill>
+          <a:ln w="12700">
+            <a:solidFill>
+              <a:srgbClr val="C7D2E6"/>
+            </a:solidFill>
+          </a:ln>
+          <a:effectLst/>
+        </p:spPr>
+        <p:style>
+          <a:lnRef idx="1">
+            <a:schemeClr val="accent1"/>
+          </a:lnRef>
+          <a:fillRef idx="3">
+            <a:schemeClr val="accent1"/>
+          </a:fillRef>
+          <a:effectRef idx="2">
+            <a:schemeClr val="accent1"/>
+          </a:effectRef>
+          <a:fontRef idx="minor">
+            <a:schemeClr val="lt1"/>
+          </a:fontRef>
+        </p:style>
+        <p:txBody>
+          <a:bodyPr rtlCol="0" anchor="ctr"/>
+          <a:lstStyle/>
+          <a:p>
+            <a:pPr algn="ctr"/>
+          </a:p>
+        </p:txBody>
+      </p:sp>
+      <p:sp>
+        <p:nvSpPr>
+          <p:cNvPr id="21" name="Rectangle 20"/>
+          <p:cNvSpPr/>
+          <p:nvPr/>
+        </p:nvSpPr>
+        <p:spPr>
+          <a:xfrm>
+            <a:off x="6355080" y="4617720"/>
+            <a:ext cx="640080" cy="1143000"/>
+          </a:xfrm>
+          <a:prstGeom prst="rect">
+            <a:avLst/>
+          </a:prstGeom>
+          <a:solidFill>
+            <a:srgbClr val="1E2761"/>
+          </a:solidFill>
+          <a:ln>
+            <a:noFill/>
+          </a:ln>
+          <a:effectLst/>
+        </p:spPr>
+        <p:style>
+          <a:lnRef idx="1">
+            <a:schemeClr val="accent1"/>
+          </a:lnRef>
+          <a:fillRef idx="3">
+            <a:schemeClr val="accent1"/>
+          </a:fillRef>
+          <a:effectRef idx="2">
+            <a:schemeClr val="accent1"/>
+          </a:effectRef>
+          <a:fontRef idx="minor">
+            <a:schemeClr val="lt1"/>
+          </a:fontRef>
+        </p:style>
+        <p:txBody>
+          <a:bodyPr rtlCol="0" anchor="ctr"/>
+          <a:lstStyle/>
+          <a:p>
+            <a:pPr algn="ctr"/>
+          </a:p>
+        </p:txBody>
+      </p:sp>
+      <p:sp>
+        <p:nvSpPr>
+          <p:cNvPr id="22" name="TextBox 21"/>
+          <p:cNvSpPr txBox="1"/>
+          <p:nvPr/>
+        </p:nvSpPr>
+        <p:spPr>
+          <a:xfrm>
+            <a:off x="6355080" y="4937760"/>
+            <a:ext cx="640080" cy="548640"/>
+          </a:xfrm>
+          <a:prstGeom prst="rect">
+            <a:avLst/>
+          </a:prstGeom>
+          <a:noFill/>
+        </p:spPr>
+        <p:txBody>
+          <a:bodyPr wrap="square">
+            <a:spAutoFit/>
+          </a:bodyPr>
+          <a:lstStyle/>
+          <a:p>
+            <a:pPr algn="ctr"/>
+            <a:r>
+              <a:rPr sz="2200" b="1" i="0">
+                <a:solidFill>
+                  <a:srgbClr val="FFFFFF"/>
+                </a:solidFill>
+                <a:latin typeface="Montserrat"/>
+              </a:rPr>
+              <a:t>D</a:t>
+            </a:r>
+          </a:p>
+        </p:txBody>
+      </p:sp>
+      <p:sp>
+        <p:nvSpPr>
+          <p:cNvPr id="23" name="TextBox 22"/>
+          <p:cNvSpPr txBox="1"/>
+          <p:nvPr/>
+        </p:nvSpPr>
+        <p:spPr>
+          <a:xfrm>
+            <a:off x="7132320" y="4800600"/>
+            <a:ext cx="4114800" cy="868680"/>
+          </a:xfrm>
+          <a:prstGeom prst="rect">
+            <a:avLst/>
+          </a:prstGeom>
+          <a:noFill/>
+        </p:spPr>
+        <p:txBody>
+          <a:bodyPr wrap="square">
+            <a:spAutoFit/>
+          </a:bodyPr>
+          <a:lstStyle/>
+          <a:p>
+            <a:r>
+              <a:rPr sz="1400" b="0" i="0">
+                <a:solidFill>
+                  <a:srgbClr val="1B2330"/>
+                </a:solidFill>
+                <a:latin typeface="Montserrat"/>
+              </a:rPr>
+              <a:t>0,75 m</a:t>
             </a:r>
           </a:p>
         </p:txBody>
@@ -10314,6 +14964,18 @@
   <p:clrMapOvr>
     <a:masterClrMapping/>
   </p:clrMapOvr>
+  <mc:AlternateContent xmlns:mc="http://schemas.openxmlformats.org/markup-compatibility/2006">
+    <mc:Choice xmlns:p14="http://schemas.microsoft.com/office/powerpoint/2010/main" Requires="p14">
+      <p:transition spd="med" p14:dur="700">
+        <p14:cube dir="r"/>
+      </p:transition>
+    </mc:Choice>
+    <mc:Fallback>
+      <p:transition spd="med">
+        <p:push dir="r"/>
+      </p:transition>
+    </mc:Fallback>
+  </mc:AlternateContent>
 </p:sld>
 </file>
 
@@ -10401,7 +15063,7 @@
                 </a:solidFill>
                 <a:latin typeface="Montserrat"/>
               </a:rPr>
-              <a:t>007 / 016</a:t>
+              <a:t>007 / 022</a:t>
             </a:r>
           </a:p>
         </p:txBody>
@@ -10442,88 +15104,20 @@
       </p:sp>
       <p:sp>
         <p:nvSpPr>
-          <p:cNvPr id="5" name="TextBox 4"/>
-          <p:cNvSpPr txBox="1"/>
-          <p:nvPr/>
-        </p:nvSpPr>
-        <p:spPr>
-          <a:xfrm>
-            <a:off x="822960" y="457200"/>
-            <a:ext cx="10058400" cy="365760"/>
-          </a:xfrm>
-          <a:prstGeom prst="rect">
-            <a:avLst/>
-          </a:prstGeom>
-          <a:noFill/>
-        </p:spPr>
-        <p:txBody>
-          <a:bodyPr wrap="square">
-            <a:spAutoFit/>
-          </a:bodyPr>
-          <a:lstStyle/>
-          <a:p>
-            <a:r>
-              <a:rPr sz="1300" b="1" i="0">
-                <a:solidFill>
-                  <a:srgbClr val="E8801A"/>
-                </a:solidFill>
-                <a:latin typeface="Montserrat"/>
-              </a:rPr>
-              <a:t>4.3 · ESPIROMETÁLICA CON ENCHUFE</a:t>
-            </a:r>
-          </a:p>
-        </p:txBody>
-      </p:sp>
-      <p:sp>
-        <p:nvSpPr>
-          <p:cNvPr id="6" name="TextBox 5"/>
-          <p:cNvSpPr txBox="1"/>
-          <p:nvPr/>
-        </p:nvSpPr>
-        <p:spPr>
-          <a:xfrm>
-            <a:off x="822960" y="868680"/>
-            <a:ext cx="10515600" cy="914400"/>
-          </a:xfrm>
-          <a:prstGeom prst="rect">
-            <a:avLst/>
-          </a:prstGeom>
-          <a:noFill/>
-        </p:spPr>
-        <p:txBody>
-          <a:bodyPr wrap="square">
-            <a:spAutoFit/>
-          </a:bodyPr>
-          <a:lstStyle/>
-          <a:p>
-            <a:r>
-              <a:rPr sz="2800" b="1" i="0">
-                <a:solidFill>
-                  <a:srgbClr val="1E2761"/>
-                </a:solidFill>
-                <a:latin typeface="Montserrat"/>
-              </a:rPr>
-              <a:t>Espirometálica: 1,5 m</a:t>
-            </a:r>
-          </a:p>
-        </p:txBody>
-      </p:sp>
-      <p:sp>
-        <p:nvSpPr>
-          <p:cNvPr id="7" name="Rounded Rectangle 6"/>
+          <p:cNvPr id="5" name="Rectangle 4"/>
           <p:cNvSpPr/>
           <p:nvPr/>
         </p:nvSpPr>
         <p:spPr>
           <a:xfrm>
-            <a:off x="868680" y="1627632"/>
-            <a:ext cx="2011680" cy="73152"/>
-          </a:xfrm>
-          <a:prstGeom prst="roundRect">
+            <a:off x="0" y="0"/>
+            <a:ext cx="12191695" cy="1143000"/>
+          </a:xfrm>
+          <a:prstGeom prst="rect">
             <a:avLst/>
           </a:prstGeom>
           <a:solidFill>
-            <a:srgbClr val="E8801A"/>
+            <a:srgbClr val="1E8E4B"/>
           </a:solidFill>
           <a:ln>
             <a:noFill/>
@@ -10554,14 +15148,14 @@
       </p:sp>
       <p:sp>
         <p:nvSpPr>
-          <p:cNvPr id="8" name="TextBox 7"/>
+          <p:cNvPr id="6" name="TextBox 5"/>
           <p:cNvSpPr txBox="1"/>
           <p:nvPr/>
         </p:nvSpPr>
         <p:spPr>
           <a:xfrm>
-            <a:off x="822960" y="1965960"/>
-            <a:ext cx="4983480" cy="4206240"/>
+            <a:off x="822960" y="274320"/>
+            <a:ext cx="10515600" cy="640080"/>
           </a:xfrm>
           <a:prstGeom prst="rect">
             <a:avLst/>
@@ -10574,127 +15168,72 @@
           </a:bodyPr>
           <a:lstStyle/>
           <a:p>
-            <a:pPr>
-              <a:spcAft>
-                <a:spcPts val="1100"/>
-              </a:spcAft>
-            </a:pPr>
-            <a:r>
-              <a:rPr sz="1600" b="1" i="0">
-                <a:solidFill>
-                  <a:srgbClr val="E8801A"/>
-                </a:solidFill>
-                <a:latin typeface="Montserrat"/>
-              </a:rPr>
-              <a:t>▸  </a:t>
-            </a:r>
-            <a:r>
-              <a:rPr sz="1600" b="0" i="0">
-                <a:solidFill>
-                  <a:srgbClr val="1B2330"/>
-                </a:solidFill>
-                <a:latin typeface="Montserrat"/>
-              </a:rPr>
-              <a:t>Lleva enchufe de seguridad</a:t>
-            </a:r>
-          </a:p>
-          <a:p>
-            <a:pPr>
-              <a:spcAft>
-                <a:spcPts val="1100"/>
-              </a:spcAft>
-            </a:pPr>
-            <a:r>
-              <a:rPr sz="1600" b="1" i="0">
-                <a:solidFill>
-                  <a:srgbClr val="E8801A"/>
-                </a:solidFill>
-                <a:latin typeface="Montserrat"/>
-              </a:rPr>
-              <a:t>▸  </a:t>
-            </a:r>
-            <a:r>
-              <a:rPr sz="1600" b="0" i="0">
-                <a:solidFill>
-                  <a:srgbClr val="1B2330"/>
-                </a:solidFill>
-                <a:latin typeface="Montserrat"/>
-              </a:rPr>
-              <a:t>Exclusiva de uso doméstico</a:t>
-            </a:r>
-          </a:p>
-          <a:p>
-            <a:pPr>
-              <a:spcAft>
-                <a:spcPts val="1100"/>
-              </a:spcAft>
-            </a:pPr>
-            <a:r>
-              <a:rPr sz="1600" b="1" i="0">
-                <a:solidFill>
-                  <a:srgbClr val="E8801A"/>
-                </a:solidFill>
-                <a:latin typeface="Montserrat"/>
-              </a:rPr>
-              <a:t>▸  </a:t>
-            </a:r>
-            <a:r>
-              <a:rPr sz="1600" b="0" i="0">
-                <a:solidFill>
-                  <a:srgbClr val="1B2330"/>
-                </a:solidFill>
-                <a:latin typeface="Montserrat"/>
-              </a:rPr>
-              <a:t>Longitud máxima 1,5 m</a:t>
-            </a:r>
-          </a:p>
-          <a:p>
-            <a:pPr>
-              <a:spcAft>
-                <a:spcPts val="1100"/>
-              </a:spcAft>
-            </a:pPr>
-            <a:r>
-              <a:rPr sz="1600" b="1" i="0">
-                <a:solidFill>
-                  <a:srgbClr val="E8801A"/>
-                </a:solidFill>
-                <a:latin typeface="Montserrat"/>
-              </a:rPr>
-              <a:t>▸  </a:t>
-            </a:r>
-            <a:r>
-              <a:rPr sz="1600" b="0" i="0">
-                <a:solidFill>
-                  <a:srgbClr val="1B2330"/>
-                </a:solidFill>
-                <a:latin typeface="Montserrat"/>
-              </a:rPr>
-              <a:t>Calefacción móvil: 0,6 m</a:t>
-            </a:r>
-          </a:p>
-        </p:txBody>
-      </p:sp>
-      <p:sp>
-        <p:nvSpPr>
-          <p:cNvPr id="9" name="imgph" descr="IMGQ:spiral metal flexible gas hose"/>
+            <a:r>
+              <a:rPr sz="2400" b="1" i="0">
+                <a:solidFill>
+                  <a:srgbClr val="FFFFFF"/>
+                </a:solidFill>
+                <a:latin typeface="Montserrat"/>
+              </a:rPr>
+              <a:t>✔  RESPUESTA:  C</a:t>
+            </a:r>
+          </a:p>
+        </p:txBody>
+      </p:sp>
+      <p:sp>
+        <p:nvSpPr>
+          <p:cNvPr id="7" name="TextBox 6"/>
+          <p:cNvSpPr txBox="1"/>
+          <p:nvPr/>
+        </p:nvSpPr>
+        <p:spPr>
+          <a:xfrm>
+            <a:off x="822960" y="1417320"/>
+            <a:ext cx="10515600" cy="914400"/>
+          </a:xfrm>
+          <a:prstGeom prst="rect">
+            <a:avLst/>
+          </a:prstGeom>
+          <a:noFill/>
+        </p:spPr>
+        <p:txBody>
+          <a:bodyPr wrap="square">
+            <a:spAutoFit/>
+          </a:bodyPr>
+          <a:lstStyle/>
+          <a:p>
+            <a:r>
+              <a:rPr sz="1800" b="1" i="0">
+                <a:solidFill>
+                  <a:srgbClr val="64748B"/>
+                </a:solidFill>
+                <a:latin typeface="Montserrat"/>
+              </a:rPr>
+              <a:t>Flexible de acero inox corrugado con DN mayor de 15: ¿longitud máxima?</a:t>
+            </a:r>
+          </a:p>
+        </p:txBody>
+      </p:sp>
+      <p:sp>
+        <p:nvSpPr>
+          <p:cNvPr id="8" name="Rounded Rectangle 7"/>
           <p:cNvSpPr/>
           <p:nvPr/>
         </p:nvSpPr>
         <p:spPr>
           <a:xfrm>
-            <a:off x="5806440" y="1051560"/>
-            <a:ext cx="5298947" cy="4629150"/>
+            <a:off x="822960" y="2514600"/>
+            <a:ext cx="10515600" cy="914400"/>
           </a:xfrm>
           <a:prstGeom prst="roundRect">
             <a:avLst/>
           </a:prstGeom>
           <a:solidFill>
-            <a:srgbClr val="F3F6FB"/>
+            <a:srgbClr val="E9F6EE"/>
           </a:solidFill>
           <a:ln w="12700">
             <a:solidFill>
-              <a:srgbClr val="C7D2E6"/>
+              <a:srgbClr val="1E8E4B"/>
             </a:solidFill>
           </a:ln>
           <a:effectLst/>
@@ -10723,14 +15262,14 @@
       </p:sp>
       <p:sp>
         <p:nvSpPr>
-          <p:cNvPr id="10" name="TextBox 9"/>
+          <p:cNvPr id="9" name="TextBox 8"/>
           <p:cNvSpPr txBox="1"/>
           <p:nvPr/>
         </p:nvSpPr>
         <p:spPr>
           <a:xfrm>
-            <a:off x="6080760" y="2726055"/>
-            <a:ext cx="4750307" cy="1280160"/>
+            <a:off x="1097280" y="2697480"/>
+            <a:ext cx="10058400" cy="640080"/>
           </a:xfrm>
           <a:prstGeom prst="rect">
             <a:avLst/>
@@ -10743,27 +15282,66 @@
           </a:bodyPr>
           <a:lstStyle/>
           <a:p>
-            <a:pPr algn="ctr"/>
-            <a:r>
-              <a:rPr sz="1400" b="1" i="0">
-                <a:solidFill>
-                  <a:srgbClr val="64748B"/>
-                </a:solidFill>
-                <a:latin typeface="Montserrat"/>
-              </a:rPr>
-              <a:t>IMAGEN REALISTA</a:t>
-            </a:r>
-          </a:p>
-          <a:p>
-            <a:pPr algn="ctr"/>
-            <a:r>
-              <a:rPr sz="1100" b="0" i="1">
-                <a:solidFill>
-                  <a:srgbClr val="64748B"/>
-                </a:solidFill>
-                <a:latin typeface="Montserrat"/>
-              </a:rPr>
-              <a:t>spiral metal flexible gas hose</a:t>
+            <a:r>
+              <a:rPr sz="1800" b="1" i="0">
+                <a:solidFill>
+                  <a:srgbClr val="1E8E4B"/>
+                </a:solidFill>
+                <a:latin typeface="Montserrat"/>
+              </a:rPr>
+              <a:t>C.  </a:t>
+            </a:r>
+            <a:r>
+              <a:rPr sz="1800" b="1" i="0">
+                <a:solidFill>
+                  <a:srgbClr val="1E2761"/>
+                </a:solidFill>
+                <a:latin typeface="Montserrat"/>
+              </a:rPr>
+              <a:t>0,470 m</a:t>
+            </a:r>
+          </a:p>
+        </p:txBody>
+      </p:sp>
+      <p:sp>
+        <p:nvSpPr>
+          <p:cNvPr id="10" name="TextBox 9"/>
+          <p:cNvSpPr txBox="1"/>
+          <p:nvPr/>
+        </p:nvSpPr>
+        <p:spPr>
+          <a:xfrm>
+            <a:off x="822960" y="3749039"/>
+            <a:ext cx="10515600" cy="2194560"/>
+          </a:xfrm>
+          <a:prstGeom prst="rect">
+            <a:avLst/>
+          </a:prstGeom>
+          <a:noFill/>
+        </p:spPr>
+        <p:txBody>
+          <a:bodyPr wrap="square">
+            <a:spAutoFit/>
+          </a:bodyPr>
+          <a:lstStyle/>
+          <a:p>
+            <a:r>
+              <a:rPr sz="1500" b="1" i="0">
+                <a:solidFill>
+                  <a:srgbClr val="E8801A"/>
+                </a:solidFill>
+                <a:latin typeface="Montserrat"/>
+              </a:rPr>
+              <a:t>Por qué:  </a:t>
+            </a:r>
+            <a:r>
+              <a:rPr sz="1500" b="0" i="0">
+                <a:solidFill>
+                  <a:srgbClr val="1B2330"/>
+                </a:solidFill>
+                <a:latin typeface="Montserrat"/>
+              </a:rPr>
+              <a:t>Cuanto más gordo el tubo (DN &gt; 15), más corto: 0,470 m. El fino (DN ≤ 15) llega a 2 m.</a:t>
             </a:r>
           </a:p>
         </p:txBody>
@@ -10773,6 +15351,18 @@
   <p:clrMapOvr>
     <a:masterClrMapping/>
   </p:clrMapOvr>
+  <mc:AlternateContent xmlns:mc="http://schemas.openxmlformats.org/markup-compatibility/2006">
+    <mc:Choice xmlns:p14="http://schemas.microsoft.com/office/powerpoint/2010/main" Requires="p14">
+      <p:transition spd="med" p14:dur="700">
+        <p14:cube dir="l"/>
+      </p:transition>
+    </mc:Choice>
+    <mc:Fallback>
+      <p:transition spd="med">
+        <p:push dir="l"/>
+      </p:transition>
+    </mc:Fallback>
+  </mc:AlternateContent>
 </p:sld>
 </file>
 
@@ -10860,7 +15450,7 @@
                 </a:solidFill>
                 <a:latin typeface="Montserrat"/>
               </a:rPr>
-              <a:t>008 / 016</a:t>
+              <a:t>008 / 022</a:t>
             </a:r>
           </a:p>
         </p:txBody>
@@ -10928,7 +15518,7 @@
                 </a:solidFill>
                 <a:latin typeface="Montserrat"/>
               </a:rPr>
-              <a:t>4.4 · ACERO CORRUGADO CON ENCHUFE</a:t>
+              <a:t>REGLA DE ORO</a:t>
             </a:r>
           </a:p>
         </p:txBody>
@@ -10962,14 +15552,14 @@
                 </a:solidFill>
                 <a:latin typeface="Montserrat"/>
               </a:rPr>
-              <a:t>Con enchufe: 2 m</a:t>
-            </a:r>
-          </a:p>
-        </p:txBody>
-      </p:sp>
-      <p:sp>
-        <p:nvSpPr>
-          <p:cNvPr id="7" name="Rounded Rectangle 6"/>
+              <a:t>El flexible, nunca bajo las llamas</a:t>
+            </a:r>
+          </a:p>
+        </p:txBody>
+      </p:sp>
+      <p:sp>
+        <p:nvSpPr>
+          <p:cNvPr id="7" name="Rectangle 6"/>
           <p:cNvSpPr/>
           <p:nvPr/>
         </p:nvSpPr>
@@ -10978,7 +15568,7 @@
             <a:off x="868680" y="1627632"/>
             <a:ext cx="2011680" cy="73152"/>
           </a:xfrm>
-          <a:prstGeom prst="roundRect">
+          <a:prstGeom prst="rect">
             <a:avLst/>
           </a:prstGeom>
           <a:solidFill>
@@ -11020,7 +15610,7 @@
         <p:spPr>
           <a:xfrm>
             <a:off x="822960" y="1965960"/>
-            <a:ext cx="4983480" cy="4206240"/>
+            <a:ext cx="5029200" cy="4206240"/>
           </a:xfrm>
           <a:prstGeom prst="rect">
             <a:avLst/>
@@ -11054,7 +15644,7 @@
                 </a:solidFill>
                 <a:latin typeface="Montserrat"/>
               </a:rPr>
-              <a:t>Misma familia, con enchufe de seguridad</a:t>
+              <a:t>Longitud: la mínima necesaria</a:t>
             </a:r>
           </a:p>
           <a:p>
@@ -11079,7 +15669,7 @@
                 </a:solidFill>
                 <a:latin typeface="Montserrat"/>
               </a:rPr>
-              <a:t>Exclusiva de uso doméstico</a:t>
+              <a:t>Sin contacto con partes calientes</a:t>
             </a:r>
           </a:p>
           <a:p>
@@ -11104,46 +15694,21 @@
                 </a:solidFill>
                 <a:latin typeface="Montserrat"/>
               </a:rPr>
-              <a:t>Longitud máxima 2 m</a:t>
-            </a:r>
-          </a:p>
-          <a:p>
-            <a:pPr>
-              <a:spcAft>
-                <a:spcPts val="1100"/>
-              </a:spcAft>
-            </a:pPr>
-            <a:r>
-              <a:rPr sz="1600" b="1" i="0">
-                <a:solidFill>
-                  <a:srgbClr val="E8801A"/>
-                </a:solidFill>
-                <a:latin typeface="Montserrat"/>
-              </a:rPr>
-              <a:t>▸  </a:t>
-            </a:r>
-            <a:r>
-              <a:rPr sz="1600" b="0" i="0">
-                <a:solidFill>
-                  <a:srgbClr val="1B2330"/>
-                </a:solidFill>
-                <a:latin typeface="Montserrat"/>
-              </a:rPr>
-              <a:t>Calefacción móvil: 0,75 m</a:t>
-            </a:r>
-          </a:p>
-        </p:txBody>
-      </p:sp>
-      <p:sp>
-        <p:nvSpPr>
-          <p:cNvPr id="9" name="imgph" descr="IMGQ:stainless steel gas connector kitchen"/>
+              <a:t>Un tubo largo se reseca y fuga</a:t>
+            </a:r>
+          </a:p>
+        </p:txBody>
+      </p:sp>
+      <p:sp>
+        <p:nvSpPr>
+          <p:cNvPr id="9" name="imgph" descr="IMGQ:blue gas flame burner fire"/>
           <p:cNvSpPr/>
           <p:nvPr/>
         </p:nvSpPr>
         <p:spPr>
           <a:xfrm>
-            <a:off x="5806440" y="1051560"/>
-            <a:ext cx="5298947" cy="4629150"/>
+            <a:off x="6080760" y="1965960"/>
+            <a:ext cx="5303520" cy="4572000"/>
           </a:xfrm>
           <a:prstGeom prst="roundRect">
             <a:avLst/>
@@ -11188,8 +15753,8 @@
         </p:nvSpPr>
         <p:spPr>
           <a:xfrm>
-            <a:off x="6080760" y="2726055"/>
-            <a:ext cx="4750307" cy="1280160"/>
+            <a:off x="6355080" y="3611880"/>
+            <a:ext cx="4754880" cy="1280160"/>
           </a:xfrm>
           <a:prstGeom prst="rect">
             <a:avLst/>
@@ -11210,7 +15775,7 @@
                 </a:solidFill>
                 <a:latin typeface="Montserrat"/>
               </a:rPr>
-              <a:t>IMAGEN REALISTA</a:t>
+              <a:t>IMAGEN</a:t>
             </a:r>
           </a:p>
           <a:p>
@@ -11222,7 +15787,7 @@
                 </a:solidFill>
                 <a:latin typeface="Montserrat"/>
               </a:rPr>
-              <a:t>stainless steel gas connector kitchen</a:t>
+              <a:t>blue gas flame burner fire</a:t>
             </a:r>
           </a:p>
         </p:txBody>
@@ -11232,6 +15797,18 @@
   <p:clrMapOvr>
     <a:masterClrMapping/>
   </p:clrMapOvr>
+  <mc:AlternateContent xmlns:mc="http://schemas.openxmlformats.org/markup-compatibility/2006">
+    <mc:Choice xmlns:p14="http://schemas.microsoft.com/office/powerpoint/2010/main" Requires="p14">
+      <p:transition spd="med" p14:dur="700">
+        <p14:cube dir="r"/>
+      </p:transition>
+    </mc:Choice>
+    <mc:Fallback>
+      <p:transition spd="med">
+        <p:push dir="r"/>
+      </p:transition>
+    </mc:Fallback>
+  </mc:AlternateContent>
 </p:sld>
 </file>
 
@@ -11319,7 +15896,7 @@
                 </a:solidFill>
                 <a:latin typeface="Montserrat"/>
               </a:rPr>
-              <a:t>009 / 016</a:t>
+              <a:t>009 / 022</a:t>
             </a:r>
           </a:p>
         </p:txBody>
@@ -11387,7 +15964,7 @@
                 </a:solidFill>
                 <a:latin typeface="Montserrat"/>
               </a:rPr>
-              <a:t>MONTAJE · ENCHUFE DE SEGURIDAD</a:t>
+              <a:t>4.3 · ESPIROMETÁLICA CON ENCHUFE</a:t>
             </a:r>
           </a:p>
         </p:txBody>
@@ -11421,14 +15998,14 @@
                 </a:solidFill>
                 <a:latin typeface="Montserrat"/>
               </a:rPr>
-              <a:t>Rosca sí, racor de dos piezas no</a:t>
-            </a:r>
-          </a:p>
-        </p:txBody>
-      </p:sp>
-      <p:sp>
-        <p:nvSpPr>
-          <p:cNvPr id="7" name="Rounded Rectangle 6"/>
+              <a:t>Espirometálica: 1,5 m</a:t>
+            </a:r>
+          </a:p>
+        </p:txBody>
+      </p:sp>
+      <p:sp>
+        <p:nvSpPr>
+          <p:cNvPr id="7" name="Rectangle 6"/>
           <p:cNvSpPr/>
           <p:nvPr/>
         </p:nvSpPr>
@@ -11437,7 +16014,7 @@
             <a:off x="868680" y="1627632"/>
             <a:ext cx="2011680" cy="73152"/>
           </a:xfrm>
-          <a:prstGeom prst="roundRect">
+          <a:prstGeom prst="rect">
             <a:avLst/>
           </a:prstGeom>
           <a:solidFill>
@@ -11478,8 +16055,8 @@
         </p:nvSpPr>
         <p:spPr>
           <a:xfrm>
-            <a:off x="822960" y="1965960"/>
-            <a:ext cx="4983480" cy="4206240"/>
+            <a:off x="6355080" y="1965960"/>
+            <a:ext cx="5029200" cy="4206240"/>
           </a:xfrm>
           <a:prstGeom prst="rect">
             <a:avLst/>
@@ -11513,7 +16090,7 @@
                 </a:solidFill>
                 <a:latin typeface="Montserrat"/>
               </a:rPr>
-              <a:t>Unión roscada UNE-EN 10226-1</a:t>
+              <a:t>Lleva enchufe de seguridad</a:t>
             </a:r>
           </a:p>
           <a:p>
@@ -11538,7 +16115,7 @@
                 </a:solidFill>
                 <a:latin typeface="Montserrat"/>
               </a:rPr>
-              <a:t>Racor de dos piezas: prohibido</a:t>
+              <a:t>Exclusiva de uso doméstico</a:t>
             </a:r>
           </a:p>
           <a:p>
@@ -11563,21 +16140,46 @@
                 </a:solidFill>
                 <a:latin typeface="Montserrat"/>
               </a:rPr>
-              <a:t>El racor se afloja y fuga</a:t>
-            </a:r>
-          </a:p>
-        </p:txBody>
-      </p:sp>
-      <p:sp>
-        <p:nvSpPr>
-          <p:cNvPr id="9" name="imgph" descr="IMGQ:threaded gas pipe fitting wrench"/>
+              <a:t>Longitud máxima 1,5 m</a:t>
+            </a:r>
+          </a:p>
+          <a:p>
+            <a:pPr>
+              <a:spcAft>
+                <a:spcPts val="1100"/>
+              </a:spcAft>
+            </a:pPr>
+            <a:r>
+              <a:rPr sz="1600" b="1" i="0">
+                <a:solidFill>
+                  <a:srgbClr val="E8801A"/>
+                </a:solidFill>
+                <a:latin typeface="Montserrat"/>
+              </a:rPr>
+              <a:t>▸  </a:t>
+            </a:r>
+            <a:r>
+              <a:rPr sz="1600" b="0" i="0">
+                <a:solidFill>
+                  <a:srgbClr val="1B2330"/>
+                </a:solidFill>
+                <a:latin typeface="Montserrat"/>
+              </a:rPr>
+              <a:t>Calefacción móvil: 0,6 m</a:t>
+            </a:r>
+          </a:p>
+        </p:txBody>
+      </p:sp>
+      <p:sp>
+        <p:nvSpPr>
+          <p:cNvPr id="9" name="imgph" descr="IMGQ:spiral metal flexible gas hose"/>
           <p:cNvSpPr/>
           <p:nvPr/>
         </p:nvSpPr>
         <p:spPr>
           <a:xfrm>
-            <a:off x="5806440" y="1051560"/>
-            <a:ext cx="5298947" cy="4629150"/>
+            <a:off x="822960" y="1965960"/>
+            <a:ext cx="5303520" cy="4572000"/>
           </a:xfrm>
           <a:prstGeom prst="roundRect">
             <a:avLst/>
@@ -11622,8 +16224,8 @@
         </p:nvSpPr>
         <p:spPr>
           <a:xfrm>
-            <a:off x="6080760" y="2726055"/>
-            <a:ext cx="4750307" cy="1280160"/>
+            <a:off x="1097280" y="3611880"/>
+            <a:ext cx="4754880" cy="1280160"/>
           </a:xfrm>
           <a:prstGeom prst="rect">
             <a:avLst/>
@@ -11644,7 +16246,7 @@
                 </a:solidFill>
                 <a:latin typeface="Montserrat"/>
               </a:rPr>
-              <a:t>IMAGEN REALISTA</a:t>
+              <a:t>IMAGEN</a:t>
             </a:r>
           </a:p>
           <a:p>
@@ -11656,7 +16258,7 @@
                 </a:solidFill>
                 <a:latin typeface="Montserrat"/>
               </a:rPr>
-              <a:t>threaded gas pipe fitting wrench</a:t>
+              <a:t>spiral metal flexible gas hose</a:t>
             </a:r>
           </a:p>
         </p:txBody>
@@ -11666,6 +16268,18 @@
   <p:clrMapOvr>
     <a:masterClrMapping/>
   </p:clrMapOvr>
+  <mc:AlternateContent xmlns:mc="http://schemas.openxmlformats.org/markup-compatibility/2006">
+    <mc:Choice xmlns:p14="http://schemas.microsoft.com/office/powerpoint/2010/main" Requires="p14">
+      <p:transition spd="med" p14:dur="700">
+        <p14:cube dir="l"/>
+      </p:transition>
+    </mc:Choice>
+    <mc:Fallback>
+      <p:transition spd="med">
+        <p:push dir="l"/>
+      </p:transition>
+    </mc:Fallback>
+  </mc:AlternateContent>
 </p:sld>
 </file>
 

--- a/Curso Gas B/14 - UNE 60670 - Instalacion y conexion de aparatos/14 - UNE 60670 - Instalacion y conexion de aparatos - Vídeo 2.pptx
+++ b/Curso Gas B/14 - UNE 60670 - Instalacion y conexion de aparatos/14 - UNE 60670 - Instalacion y conexion de aparatos - Vídeo 2.pptx
@@ -673,12 +673,12 @@
           <a:lstStyle/>
           <a:p>
             <a:r>
-              <a:t>N1: Esta es fina, para nota. Acero corrugado con enchufe de seguridad conectando una calefacción móvil, ¿cuánto puede medir como máximo?</a:t>
-            </a:r>
-          </a:p>
-          <a:p>
-            <a:r>
-              <a:t>N2: Ojo, porque casi todas las calefacciones móviles comparten una misma cifra... menos una.</a:t>
+              <a:t>N1: Esta es fina, para nota, y se juega solo escuchando. Un acero inoxidable corrugado con enchufe de seguridad conectando una calefacción móvil, ¿cuánto puede medir como máximo? Opción A, sesenta centímetros; opción B, setenta y cinco centímetros; opción C, un metro y medio; opción D, dos metros.</a:t>
+            </a:r>
+          </a:p>
+          <a:p>
+            <a:r>
+              <a:t>N2: Ojo, porque casi todas las calefacciones móviles comparten una misma cifra... menos una. Piénsalo un segundo.</a:t>
             </a:r>
           </a:p>
         </p:txBody>
@@ -748,12 +748,12 @@
           <a:lstStyle/>
           <a:p>
             <a:r>
-              <a:t>N1: ¿Cuál es el truco?</a:t>
-            </a:r>
-          </a:p>
-          <a:p>
-            <a:r>
-              <a:t>N2: Casi todas las calefacciones móviles se quedan en sesenta centímetros: la espirometálica, el elastómero con armadura y el elastómero normal. La única que se estira a setenta y cinco centímetros es justo esta, el acero corrugado con enchufe. Si te la sabes, cazas la pregunta trampa.</a:t>
+              <a:t>N2: La respuesta correcta es la opción B: setenta y cinco centímetros. Aquí está el truco: casi todas las calefacciones móviles se quedan en sesenta centímetros, la espirometálica, el elastómero con armadura y el elastómero normal. La única que se estira a setenta y cinco centímetros es justo esta, el acero corrugado con enchufe de seguridad. Si te sabes esa excepción, cazas la pregunta trampa.</a:t>
+            </a:r>
+          </a:p>
+          <a:p>
+            <a:r>
+              <a:t>N1: La rara que llega a setenta y cinco es el acero con enchufe.</a:t>
             </a:r>
           </a:p>
         </p:txBody>
@@ -1123,12 +1123,12 @@
           <a:lstStyle/>
           <a:p>
             <a:r>
-              <a:t>N1: El clásico tubo naranja del butano, ¿con qué se sujeta a la boquilla?</a:t>
-            </a:r>
-          </a:p>
-          <a:p>
-            <a:r>
-              <a:t>N2: Piensa en qué le pasa a la goma con el calor y qué sujeción aguanta eso sin ceder.</a:t>
+              <a:t>N1: Última de este vídeo, para jugar de oído. El clásico tubo naranja del butano, el de la bombona, ¿con qué se sujeta a la boquilla? Opción A, abrazaderas metálicas; opción B, bridas de plástico; opción C, racor de dos piezas; opción D, soldadura por capilaridad.</a:t>
+            </a:r>
+          </a:p>
+          <a:p>
+            <a:r>
+              <a:t>N2: Piensa un momento en qué le pasa a la goma con el calor y qué sujeción aguanta eso sin ceder. ¿Ya lo tienes?</a:t>
             </a:r>
           </a:p>
         </p:txBody>
@@ -1198,12 +1198,12 @@
           <a:lstStyle/>
           <a:p>
             <a:r>
-              <a:t>N1: ¿Por qué metálicas?</a:t>
-            </a:r>
-          </a:p>
-          <a:p>
-            <a:r>
-              <a:t>N2: Porque la goma se dilata con el calor y una brida de plástico acabaría cediendo, el tubo se soltaría de la boquilla y tendrías fuga de gas y olor a butano. Van boquillas del mismo diámetro que el tubo y abrazaderas metálicas siempre, nunca de plástico.</a:t>
+              <a:t>N2: La respuesta correcta es la opción A: abrazaderas metálicas. La goma se dilata con el calor, y una brida de plástico, la opción B, acabaría cediendo: el tubo se soltaría de la boquilla y tendrías fuga de gas y olor a butano en la cocina. Por eso van boquillas del mismo diámetro que el tubo y abrazaderas metálicas siempre, nunca de plástico. El racor de dos piezas y la soldadura no pintan nada aquí.</a:t>
+            </a:r>
+          </a:p>
+          <a:p>
+            <a:r>
+              <a:t>N1: Abrazadera metálica, y a dormir tranquilo.</a:t>
             </a:r>
           </a:p>
         </p:txBody>
@@ -1874,12 +1874,12 @@
           <a:lstStyle/>
           <a:p>
             <a:r>
-              <a:t>N1: Cuidado con esta, que es contraintuitiva. Flexible de acero corrugado con el diámetro gordo, mayor de quince, ¿qué longitud máxima le toca?</a:t>
-            </a:r>
-          </a:p>
-          <a:p>
-            <a:r>
-              <a:t>N2: Pista: cuanto más gordo es el tubo, más corta debe ser la conexión.</a:t>
+              <a:t>N1: Cuidado con esta, que es contraintuitiva y se juega de oído. Un flexible de acero inoxidable corrugado con el diámetro gordo, mayor de quince, ¿qué longitud máxima le toca? Opción A, dos metros; opción B, un metro y medio; opción C, cuarenta y siete centímetros, es decir cero coma cuatrocientos setenta metros; opción D, setenta y cinco centímetros.</a:t>
+            </a:r>
+          </a:p>
+          <a:p>
+            <a:r>
+              <a:t>N2: Pista para pensarlo un momento: cuanto más gordo es el tubo, más corta debe ser la conexión. ¿Cuál eliges?</a:t>
             </a:r>
           </a:p>
         </p:txBody>
@@ -1949,12 +1949,12 @@
           <a:lstStyle/>
           <a:p>
             <a:r>
-              <a:t>N1: ¿Por qué la más corta?</a:t>
-            </a:r>
-          </a:p>
-          <a:p>
-            <a:r>
-              <a:t>N2: Justo por eso: con diámetro fino, hasta dos metros; con diámetro gordo, mayor de quince, solo cuarenta y siete centímetros. Es al revés de lo que uno pensaría, y por eso se pregunta tanto. Y por encima de la cifra, la regla de oro: el flexible nunca debe quedar bajo las llamas.</a:t>
+              <a:t>N2: La respuesta correcta es la opción C: cuarenta y siete centímetros, o sea cero coma cuatrocientos setenta metros. Con el diámetro fino, hasta quince, el tubo llega a dos metros; pero en cuanto pasas a diámetro gordo, mayor de quince, se queda en solo cuarenta y siete centímetros. Es justo al revés de lo que uno pensaría, y por eso se pregunta tanto. El truco: más gordo el tubo, más corta la conexión. Y por encima de la cifra, la regla de oro: el flexible nunca debe quedar bajo las llamas.</a:t>
+            </a:r>
+          </a:p>
+          <a:p>
+            <a:r>
+              <a:t>N1: Diámetro gordo, tubo corto.</a:t>
             </a:r>
           </a:p>
         </p:txBody>
